--- a/docs/presentation/presentation.pptx
+++ b/docs/presentation/presentation.pptx
@@ -165,7 +165,7 @@
     </p:spTree>
     <p:extLst>
       <p:ext uri="{BB962C8B-B14F-4D97-AF65-F5344CB8AC3E}">
-        <p14:creationId xmlns:p14="http://schemas.microsoft.com/office/powerpoint/2010/main" val="2310618442"/>
+        <p14:creationId xmlns:p14="http://schemas.microsoft.com/office/powerpoint/2010/main" val="1692480302"/>
       </p:ext>
     </p:extLst>
   </p:cSld>
@@ -1488,7 +1488,7 @@
         </p:nvSpPr>
         <p:spPr>
           <a:xfrm>
-            <a:off x="640080" y="3337560"/>
+            <a:off x="640080" y="3108960"/>
             <a:ext cx="7498080" cy="548640"/>
           </a:xfrm>
           <a:prstGeom prst="rect">
@@ -1527,8 +1527,8 @@
         </p:nvSpPr>
         <p:spPr>
           <a:xfrm>
-            <a:off x="640080" y="4069080"/>
-            <a:ext cx="6949440" cy="1234440"/>
+            <a:off x="640080" y="3794760"/>
+            <a:ext cx="6949440" cy="1508760"/>
           </a:xfrm>
           <a:prstGeom prst="rect">
             <a:avLst/>
@@ -1555,7 +1555,7 @@
                 <a:ea typeface="Atkinson Hyperlegible Next" pitchFamily="34" charset="-122"/>
                 <a:cs typeface="Atkinson Hyperlegible Next" pitchFamily="34" charset="-120"/>
               </a:rPr>
-              <a:t>A working prototype of the digital core that ROPS Kraków plans for the Małopolska Social Innovation Hub: a need described in plain Polish becomes a route to proven solutions, knowledge, people and funding, not a list of links or a chatbot answer.</a:t>
+              <a:t>A working prototype of the digital core that ROPS Kraków plans for the Małopolska Social Innovation Hub: a need that a resident, a social worker, an NGO leader or a municipal official describes in plain Polish becomes a route to proven solutions, knowledge, people and funding, not a list of links or a chatbot answer.</a:t>
             </a:r>
             <a:endParaRPr lang="en-US" sz="1600" dirty="0"/>
           </a:p>
@@ -2383,11 +2383,11 @@
         <p:spPr>
           <a:xfrm>
             <a:off x="640080" y="1965960"/>
-            <a:ext cx="3017520" cy="2331720"/>
+            <a:ext cx="3017520" cy="3474720"/>
           </a:xfrm>
           <a:prstGeom prst="roundRect">
             <a:avLst>
-              <a:gd name="adj" fmla="val 4706"/>
+              <a:gd name="adj" fmla="val 3636"/>
             </a:avLst>
           </a:prstGeom>
           <a:solidFill>
@@ -2410,7 +2410,7 @@
         <p:spPr>
           <a:xfrm>
             <a:off x="841248" y="2103120"/>
-            <a:ext cx="2615184" cy="2103120"/>
+            <a:ext cx="2615184" cy="2514600"/>
           </a:xfrm>
           <a:prstGeom prst="rect">
             <a:avLst/>
@@ -2437,7 +2437,7 @@
                 <a:ea typeface="Atkinson Hyperlegible Next" pitchFamily="34" charset="-122"/>
                 <a:cs typeface="Atkinson Hyperlegible Next" pitchFamily="34" charset="-120"/>
               </a:rPr>
-              <a:t>„Coraz więcej samotnych seniorów w naszej gminie. Nie ma domu dziennego pobytu ani klubu seniora… Gmina ma świetlicę wiejską wolną trzy dni w tygodniu.”</a:t>
+              <a:t>„Coraz więcej samotnych seniorów w naszej gminie. Nie ma domu dziennego pobytu ani klubu seniora, a sąsiedzi zgłaszają, że starsze osoby nie wychodzą z domu i nie mają z kim porozmawiać. Gmina ma świetlicę wiejską wolną trzy dni w tygodniu.”</a:t>
             </a:r>
             <a:endParaRPr lang="en-US" sz="1300" dirty="0"/>
           </a:p>
@@ -2460,7 +2460,7 @@
                 <a:ea typeface="Atkinson Hyperlegible Next" pitchFamily="34" charset="-122"/>
                 <a:cs typeface="Atkinson Hyperlegible Next" pitchFamily="34" charset="-120"/>
               </a:rPr>
-              <a:t>More and more lonely seniors, no day centre or seniors' club, a village hall free three days a week.</a:t>
+              <a:t>Lonely seniors stay at home, no day centre or club; a village hall is free three days a week.</a:t>
             </a:r>
             <a:endParaRPr lang="en-US" sz="1300" dirty="0"/>
           </a:p>
@@ -2474,8 +2474,8 @@
         </p:nvSpPr>
         <p:spPr>
           <a:xfrm>
-            <a:off x="640080" y="4480560"/>
-            <a:ext cx="3017520" cy="594360"/>
+            <a:off x="841248" y="4800600"/>
+            <a:ext cx="2615184" cy="594360"/>
           </a:xfrm>
           <a:prstGeom prst="rect">
             <a:avLst/>
@@ -2513,7 +2513,7 @@
                 <a:ea typeface="Atkinson Hyperlegible Next" pitchFamily="34" charset="-122"/>
                 <a:cs typeface="Atkinson Hyperlegible Next" pitchFamily="34" charset="-120"/>
               </a:rPr>
-              <a:t>gmina Laskowa, rural</a:t>
+              <a:t>gmina Laskowa</a:t>
             </a:r>
             <a:endParaRPr lang="en-US" sz="1300" dirty="0"/>
           </a:p>
@@ -2558,7 +2558,7 @@
         </p:nvSpPr>
         <p:spPr>
           <a:xfrm>
-            <a:off x="2971800" y="5394960"/>
+            <a:off x="2971800" y="5705856"/>
             <a:ext cx="685800" cy="384048"/>
           </a:xfrm>
           <a:prstGeom prst="rightArrow">
@@ -2583,8 +2583,8 @@
         </p:nvSpPr>
         <p:spPr>
           <a:xfrm>
-            <a:off x="640080" y="5239512"/>
-            <a:ext cx="2194560" cy="685800"/>
+            <a:off x="640080" y="5577840"/>
+            <a:ext cx="2194560" cy="640080"/>
           </a:xfrm>
           <a:prstGeom prst="rect">
             <a:avLst/>
@@ -4336,7 +4336,7 @@
                           <a:ea typeface="Atkinson Hyperlegible Next" pitchFamily="34" charset="-122"/>
                           <a:cs typeface="Atkinson Hyperlegible Next" pitchFamily="34" charset="-120"/>
                         </a:rPr>
-                        <a:t>It says so: below a fit of 45 of 100 there is no route, and the need goes to the needs bank and the incubator</a:t>
+                        <a:t>It says so: below a fit of 45 out of 100 there is no route, and the need goes to the needs bank and the incubator</a:t>
                       </a:r>
                       <a:endParaRPr lang="en-US" sz="1200" dirty="0">
                         <a:latin typeface="Atkinson Hyperlegible Next" charset="0"/>
@@ -6091,7 +6091,7 @@
                 <a:ea typeface="Atkinson Hyperlegible Next" pitchFamily="34" charset="-122"/>
                 <a:cs typeface="Atkinson Hyperlegible Next" pitchFamily="34" charset="-120"/>
               </a:rPr>
-              <a:t>The reverse: where is it needed?</a:t>
+              <a:t>Where it is needed most</a:t>
             </a:r>
             <a:endParaRPr lang="en-US" sz="1400" dirty="0"/>
           </a:p>
@@ -6403,7 +6403,7 @@
                 <a:ea typeface="Atkinson Hyperlegible Next" pitchFamily="34" charset="-122"/>
                 <a:cs typeface="Atkinson Hyperlegible Next" pitchFamily="34" charset="-120"/>
               </a:rPr>
-              <a:t>Retrieval is one step of five, and the gate comes first. The model selects and explains; people decide.</a:t>
+              <a:t>The screening gate comes first. The model selects and explains; people decide.</a:t>
             </a:r>
             <a:endParaRPr lang="en-US" sz="3200" dirty="0"/>
           </a:p>

--- a/docs/presentation/presentation.pptx
+++ b/docs/presentation/presentation.pptx
@@ -165,7 +165,7 @@
     </p:spTree>
     <p:extLst>
       <p:ext uri="{BB962C8B-B14F-4D97-AF65-F5344CB8AC3E}">
-        <p14:creationId xmlns:p14="http://schemas.microsoft.com/office/powerpoint/2010/main" val="1692480302"/>
+        <p14:creationId xmlns:p14="http://schemas.microsoft.com/office/powerpoint/2010/main" val="3764232318"/>
       </p:ext>
     </p:extLst>
   </p:cSld>
@@ -9794,7 +9794,7 @@
                 <a:ea typeface="Atkinson Hyperlegible Next" pitchFamily="34" charset="-122"/>
                 <a:cs typeface="Atkinson Hyperlegible Next" pitchFamily="34" charset="-120"/>
               </a:rPr>
-              <a:t>by a gmina, an organisation or a resident</a:t>
+              <a:t>by a resident, an organisation or a gmina</a:t>
             </a:r>
             <a:endParaRPr lang="en-US" sz="1300" dirty="0"/>
           </a:p>

--- a/docs/presentation/presentation.pptx
+++ b/docs/presentation/presentation.pptx
@@ -158,7 +158,7 @@
     </p:spTree>
     <p:extLst>
       <p:ext uri="{BB962C8B-B14F-4D97-AF65-F5344CB8AC3E}">
-        <p14:creationId xmlns:p14="http://schemas.microsoft.com/office/powerpoint/2010/main" val="572268766"/>
+        <p14:creationId xmlns:p14="http://schemas.microsoft.com/office/powerpoint/2010/main" val="935328210"/>
       </p:ext>
     </p:extLst>
   </p:cSld>
@@ -304,7 +304,7 @@
           <a:p>
             <a:r>
               <a:rPr lang="en-US" dirty="0"/>
-              <a:t>HubMI.pl to nazwa, którą ROPS w Krakowie nadał cyfrowemu rdzeniowi planowanego Małopolskiego Hubu Innowacji Społecznych. Zadanie partnera jego własnymi słowami: nie kolejny katalog, tylko narzędzie, które łączy problem z rozwiązaniem, wiedzą i ludźmi i pomaga, gdy rozwiązania jeszcze nie ma. Zbudowaliśmy działający pilot: stronę dla osoby z potrzebą i panel dla ROPS. Kolejne slajdy pokazują moduł po module, jak pilot odpowiada na wyzwanie. Telefon pokazuje prawdziwą drogę z pilota.</a:t>
+              <a:t>HubMI.pl to nazwa, którą ROPS w Krakowie nadał cyfrowemu sercu planowanego Małopolskiego Hubu Innowacji Społecznych. Partner sam opisał zadanie tak: nie kolejny katalog, tylko narzędzie, które łączy problem z rozwiązaniem, wiedzą i ludźmi, a gdy rozwiązania jeszcze nie ma, pomaga znaleźć drogę do jego stworzenia. Zbudowaliśmy działający prototyp: stronę dla osób zgłaszających potrzeby i panel dla ROPS. Kolejne slajdy pokazują moduł po module, jak prototyp realizuje wyzwanie. Na telefonie widać prawdziwą drogę z prototypu.</a:t>
             </a:r>
           </a:p>
         </p:txBody>
@@ -391,7 +391,7 @@
           <a:p>
             <a:r>
               <a:rPr lang="en-US" dirty="0"/>
-              <a:t>Moduł pierwszy, obowiązkowy: matchmaking społeczny. To prawdziwa droga z pilota dla naszego problemu testowego P01: samotni seniorzy w wiejskiej gminie Laskowa. Ma cztery bloki. Rozwiązania: sprawdzone innowacje, każda z uzasadnieniem cytowanym z opisu źródłowego i z tym, czego wymaga. Wiedza: podręczniki i modele ROPS. Ludzie: autorzy, opiekun kategorii w ROPS i osoby, które zgłosiły gotowość do pomocy. Ścieżka wdrożenia: programy, które mogą to sfinansować, z kwotami, terminami i krokami. To nie lista wyników wyszukiwania, tylko odpowiedź na pytanie, co zrobić dalej.</a:t>
+              <a:t>Moduł pierwszy, obowiązkowy: matchmaking społeczny. To prawdziwa droga z prototypu dla przypadku testowego P01: samotni seniorzy w wiejskiej gminie Laskowa. Składa się z czterech części. Rozwiązania: sprawdzone innowacje, każda z uzasadnieniem opartym na cytatach ze źródła i z informacją, czego wymaga. Wiedza: poradniki i modele usług ROPS. Ludzie: autorzy, opiekun kategorii w ROPS i osoby, które zgłosiły gotowość do pomocy. Ścieżka wdrożenia: programy, z których można to sfinansować, z kwotami, terminami i kolejnymi krokami. To nie lista wyników wyszukiwania, tylko odpowiedź na pytanie, co zrobić dalej.</a:t>
             </a:r>
           </a:p>
         </p:txBody>
@@ -478,7 +478,7 @@
           <a:p>
             <a:r>
               <a:rPr lang="en-US" dirty="0"/>
-              <a:t>Drugi element modułu pierwszego: podobne przypadki. Pod rozwiązaniami droga pokazuje potrzeby z banku potrzeb i fiszki pomysłów bliskie tej potrzebie, ale tylko te, na których publikację zgodził się autor i które zatwierdził ROPS. Uczciwe pytanie: czy to tylko wyszukiwarka albo czatbot nad katalogiem? Nie. Wyszukiwarka daje linki, czatbot z RAG daje akapit i oba odpowiadają na każde pytanie. HubMI składa drogę według reguł z opracowanych danych: kwoty i terminy pochodzą z trzydziestu ścieżek, których model nie widzi; model tylko wybiera i wyjaśnia, a kod sprawdza każdy identyfikator i każdy cytat. I potrafi powiedzieć „nie”: tegoroczna susza wysuszyła studnie w gminie Dobra, nic w katalogach nie pasuje, a narzędzie mówi to wprost i proponuje zapisanie potrzeby w banku potrzeb, z którego powstaje fiszka dla inkubatora. Trafność sprawdzamy na problemach testowych: w siedmiu z siedmiu, dla których istnieje sprawdzone rozwiązanie, oczekiwana innowacja jest wśród trzech proponowanych.</a:t>
+              <a:t>Drugi element modułu pierwszego: podobne przypadki. Pod rozwiązaniami widać potrzeby z banku potrzeb i fiszki pomysłów podobne do tej, ale tylko te, na których publikację zgodził się autor i które zaakceptował ROPS. Ktoś zapyta: czy to nie zwykła wyszukiwarka albo czatbot do katalogu? Nie. Wyszukiwarka daje linki, czatbot z RAG pisze zgrabny akapit, a oba narzędzia odpowiadają na każde pytanie. HubMI układa drogę według reguł, na podstawie opracowanych danych: kwoty i terminy pochodzą z trzydziestu ścieżek, do których model nie ma dostępu; model tylko wybiera i wyjaśnia, a program sprawdza każde odwołanie i każdy cytat. I potrafi powiedzieć „nie”: przez tegoroczną suszę w studniach w gminie Dobra zabrakło wody, nic w katalogach nie pasuje, a narzędzie mówi to wprost i proponuje wpis do banku potrzeb; na jego podstawie powstaje fiszka dla inkubatora. Trafność sprawdzamy na przypadkach testowych: we wszystkich siedmiu, dla których istnieje sprawdzone rozwiązanie, właściwa innowacja jest wśród trzech proponowanych.</a:t>
             </a:r>
           </a:p>
         </p:txBody>
@@ -565,7 +565,7 @@
           <a:p>
             <a:r>
               <a:rPr lang="en-US" dirty="0"/>
-              <a:t>Moduł czwarty, tester innowacji. Przy każdej innowacji jest przycisk „Oceń albo zgłoś się do testów”. Można dać ocenę od jednego do pięciu i powiedzieć, skąd zna się rozwiązanie, napisać opinię, zaproponować ulepszenie i zgłosić się do testów, jako użytkownik albo jako organizacja, która poprowadzi próbę w swojej gminie. Opinia może być anonimowa. Każdy tekst przechodzi przez bramkę bezpieczeństwa, a do autorów innowacji trafia przez ROPS, po decyzji człowieka. Na stronie innowacji widać średnią ocen, liczbę zgłoszeń do testów i propozycji ulepszeń, nigdy treści ani kontaktu.</a:t>
+              <a:t>Moduł czwarty, tester innowacji. Przy każdej innowacji jest przycisk „Oceń albo zgłoś się do testów”. Można wystawić ocenę od jednego do pięciu, zaznaczyć, skąd zna się rozwiązanie, napisać opinię, zaproponować ulepszenie i zgłosić się do testów, jako użytkownik albo jako organizacja, która wdroży rozwiązanie na próbę w swojej gminie. Opinię można wysłać anonimowo. Każdy tekst przechodzi przez filtr bezpieczeństwa, a do autorów innowacji trafia za pośrednictwem ROPS, gdy zatwierdzi go pracownik. Na stronie innowacji widać średnią ocen, liczbę zgłoszeń do testów i propozycji ulepszeń, ale nigdy treści ani danych kontaktowych.</a:t>
             </a:r>
           </a:p>
         </p:txBody>
@@ -652,7 +652,7 @@
           <a:p>
             <a:r>
               <a:rPr lang="en-US" dirty="0"/>
-              <a:t>Moduł piąty, platforma aktywnej komunikacji. Rozmowa z ROPS nie wymaga konta ani e-maila: po wysłaniu pytania autor dostaje prywatny link, a przeglądarka pamięta go w „Moich rozmowach”. Pytanie można zadać przy każdej innowacji, fiszce pomysłu i ogłoszeniu, więc rozmowa od razu wie, czego dotyczy. Odpowiada pracownik ROPS, podpisany nazwiskiem. Gdy potrzebny jest ekspert, ROPS zaprasza mentora: mentor dostaje własny link do tej jednej rozmowy i nie ma dostępu do panelu. Partnerstwa międzysektorowe to tablica ogłoszeń „Szukam partnera” i „Oferuję współpracę” z filtrem sektora; ogłoszenie pojawia się po zatwierdzeniu przez ROPS, a odpowiedzi idą przez ROPS, bez publikowania kontaktów.</a:t>
+              <a:t>Moduł piąty, platforma aktywnej komunikacji. Rozmowa z ROPS nie wymaga zakładania konta ani podawania e-maila: po wysłaniu pytania jego autor dostaje prywatny link, a przeglądarka zapisuje go w „Moich rozmowach”. Pytanie można zadać przy każdej innowacji, fiszce pomysłu i ogłoszeniu, więc od razu wiadomo, czego dotyczy. Odpowiada pracownik ROPS, który podpisuje się nazwiskiem. Gdy potrzebny jest ekspert, ROPS zaprasza mentora: mentor dostaje własny link do tej jednej rozmowy i nie ma dostępu do panelu. Partnerstwom międzysektorowym służy tablica ogłoszeń „Szukam partnera” i „Oferuję współpracę” z filtrem według sektora; ogłoszenie pojawia się po zatwierdzeniu przez ROPS, a odpowiedzi przekazuje ROPS, bez publikowania danych kontaktowych.</a:t>
             </a:r>
           </a:p>
         </p:txBody>
@@ -739,7 +739,7 @@
           <a:p>
             <a:r>
               <a:rPr lang="en-US" dirty="0"/>
-              <a:t>Moduł szósty, panel administratora. Pracownik ROPS loguje się nazwiskiem i kodem. Pulpit pokazuje, co czeka w każdej kolejce i co jest nowe od ostatniej wizyty: tak administrator dowiaduje się o nowym pomyśle. Fiszka dostaje status i odpowiedź, którą autor czyta od razu na stronie swojej fiszki, z datą; to ścieżka odpowiedzi, o którą pyta partner. Wiedzę zmienia się w kilka sekund: oznaczenie „Sprawdzone przez ROPS”, poprawiony opis, nowy film albo nowa pozycja wiedzy działają od razu, także na drogach utworzonych wcześniej. Każda decyzja jest zapisana z nazwiskiem osoby, która ją podjęła, a dane można wyeksportować do CSV.</a:t>
+              <a:t>Moduł szósty, panel administratora. Pracownik ROPS loguje się, podając imię i nazwisko oraz kod dostępu. Pulpit pokazuje, co czeka na decyzję i co pojawiło się od ostatniej wizyty: w ten sposób administrator dowiaduje się o nowym pomyśle. Pracownik nadaje fiszce status i pisze odpowiedź, którą autor od razu widzi na stronie swojej fiszki, z datą; to właśnie ścieżka odpowiedzi, o którą pyta partner. Wiedzę można zmienić w kilka sekund: oznaczenie „Sprawdzone przez ROPS”, poprawiony opis, nowy film albo nowy materiał są widoczne od razu, także w drogach utworzonych wcześniej. Każda decyzja jest odnotowana z nazwiskiem osoby, która ją podjęła, a dane można wyeksportować do CSV.</a:t>
             </a:r>
           </a:p>
         </p:txBody>
@@ -826,7 +826,7 @@
           <a:p>
             <a:r>
               <a:rPr lang="en-US" dirty="0"/>
-              <a:t>Zapowiedź partnera nosi tytuł „Od empatii do technologii”. Dlatego każdy tekst najpierw przechodzi przez bramkę bezpieczeństwa: potrzeba społeczności dostaje drogę; osoba w kryzysie dostaje telefony zaufania i adres lokalnego ośrodka pomocy społecznej, a nie listę innowacji; prośbę, która ma kogoś wykluczyć, odrzucamy uprzejmie, z możliwością odwołania. Potem wyszukiwanie polskim modelem PolDense, a Bielik, polski otwarty model, wybiera i wyjaśnia. Nie wybraliśmy ich po nazwie: przed hackathonem porównaliśmy Bielika z czterema innymi modelami językowymi na polskich przypadkach, a PolDense z pięcioma innymi modelami embeddingów na wszystkich 381 rekordach; wyniki są w repozytorium. Model nie może wymyślić rozwiązania ani kwoty: każdy identyfikator i cytat jest sprawdzany, a kwoty pochodzą z opracowanej tabeli. Wszystko, co dotyczy prawdziwej osoby, czeka na decyzję pracownika ROPS w panelu, a narzędzie niczego nikomu nie wysyła.</a:t>
+              <a:t>Wystąpienie partnera zapowiadające zadanie nosiło tytuł „Od empatii do technologii”. Dlatego każdy tekst najpierw przechodzi przez filtr bezpieczeństwa: na potrzebę społeczności narzędzie odpowiada drogą; osoba w kryzysie dostaje numery telefonów zaufania i adres lokalnego ośrodka pomocy społecznej, a nie listę innowacji; prośbę, która ma kogoś wykluczyć, odrzucamy uprzejmie, z możliwością odwołania. Potem polski model PolDense wyszukuje kandydatów, a Bielik, otwarty polski model, wybiera i wyjaśnia. Nie kierowaliśmy się nazwą: przed hackathonem porównaliśmy Bielika z czterema innymi modelami językowymi na polskich przykładach, a PolDense z pięcioma innymi modelami wyszukiwania na wszystkich 381 opisach innowacji; wyniki są w repozytorium. Model nie może wymyślić rozwiązania ani kwoty: każde odwołanie i cytat jest sprawdzane, a kwoty pochodzą z opracowanej tabeli. Wszystko, co dotyczy konkretnej osoby, czeka na decyzję pracownika ROPS w panelu, a narzędzie niczego nikomu nie wysyła.</a:t>
             </a:r>
           </a:p>
         </p:txBody>
@@ -913,7 +913,7 @@
           <a:p>
             <a:r>
               <a:rPr lang="en-US" dirty="0"/>
-              <a:t>Zadanie prosi o koncepcję, nie tylko o oprogramowanie. To, co widzieliście, działa dziś: droga dla osoby z potrzebą, a obok fiszka pomysłu, tester innowacji, rozmowy z ROPS z mentorami i tablica partnerstw. Z siedmiu modułów wyzwania cztery działają w całości, trzy częściowo. Każdy wpis trafia do panelu ROPS: człowiek podejmuje decyzję, zapisaną z jego nazwiskiem, a autor pomysłu widzi odpowiedź na stronie swojej fiszki. Planem rozwoju są ludzie wokół narzędzia: trzy role, które mogą pełnić trzy osoby albo jedna – opiekun kategorii, czyli ludzka twarz każdej drogi, redaktor katalogu i koordynator banku potrzeb. Usługa domknie trzy pętle: potrzeba staje się wdrożeniem; potrzeba bez rozwiązania staje się tematem inkubatora, a potem nową innowacją; sprawdzona innowacja trafia tam, gdzie jest potrzebna. Utrzymanie jest tanie: jeden serwer 4 GB dla aplikacji i polskiego modelu embeddingów to 24 dolary miesięcznie na AWS Lightsail; w produkcji PostgreSQL z pgvector na RDS, około 30 dolarów miesięcznie (pilot trzyma wpisy w jednym pliku). Wywołanie Bielika przez Hugging Face to około pięciu tysięcy tokenów po 40 centów za milion, czyli jedna piąta centa; cała droga to cztery wywołania, poniżej jednego centa.</a:t>
+              <a:t>Zadanie wymaga koncepcji, a nie tylko oprogramowania. To, co widzieliście, działa dziś: droga dla osób zgłaszających potrzeby, a obok fiszka pomysłu, tester innowacji, rozmowy z ROPS i mentorami oraz tablica partnerstw. Z siedmiu modułów wyzwania pięć działa w całości, a dwa – częściowo. Zasobnik wiedzy celowo nie jest kolejnym katalogiem, bo partner wyraźnie tego nie chce: wiedza jest częścią drogi, z linkami do wszystkich materiałów, dokumentów i filmów. Każdy wpis trafia do panelu ROPS: decyzję podejmuje pracownik, a system odnotowuje ją z jego nazwiskiem; autor pomysłu widzi odpowiedź na stronie swojej fiszki. Plan rozwoju dotyczy ludzi wokół narzędzia: trzech ról, które mogą pełnić trzy osoby albo jedna – opiekun kategorii, czyli osoba kontaktowa w każdej drodze, redaktor katalogu i koordynator banku potrzeb. Usługa domknie trzy cykle: potrzeba staje się wdrożeniem; potrzeba bez rozwiązania staje się tematem naboru do inkubatora, a potem nową innowacją; sprawdzona innowacja trafia tam, gdzie jest potrzebna. Utrzymanie jest tanie: jeden serwer 4 GB dla aplikacji i polskiego modelu wyszukiwania to 24 dolary miesięcznie na AWS Lightsail; w wersji docelowej PostgreSQL z pgvector na RDS, około 30 dolarów miesięcznie (prototyp zapisuje wpisy w jednym pliku). Jedno zapytanie do Bielika przez Hugging Face to około pięciu tysięcy tokenów po 40 centów za milion, czyli jedna piąta centa; cała droga to cztery zapytania, łącznie poniżej jednego centa.</a:t>
             </a:r>
           </a:p>
         </p:txBody>
@@ -1000,7 +1000,7 @@
           <a:p>
             <a:r>
               <a:rPr lang="en-US" dirty="0"/>
-              <a:t>Dla wszystkich: ROPS prowadził inkubator dostępności, więc postawiliśmy sobie poprzeczkę wyżej, niż wymaga prawo: krój pisma dla osób słabowidzących, kontrast 7:1, trzy motywy, pełna obsługa klawiaturą i automatyczny test każdego ekranu. Osoba niewidoma może opisać i zapisać potrzebę z czytnikiem ekranu: każde pole ma etykietę, każdy krok oczekiwania jest ogłaszany, a wymagana zgoda mówi o sobie przed pierwszą próbą. Wszystko, co pokazuje narzędzie, pochodzi z otwartych danych, z linkiem do źródła i licencją; katalogi pozostają źródłami prawdy. Przy budowie pomagali agenci AI do programowania; pomysł i decyzje są nasze, a każda decyzja jest zapisana w rejestrze decyzji projektu, otwartym do wglądu. Dziękujemy.</a:t>
+              <a:t>Dla wszystkich: ROPS prowadził inkubator dostępności, więc postawiliśmy sobie poprzeczkę wyżej, niż wymaga prawo: krój pisma dla osób słabowidzących, kontrast 7:1, trzy motywy, pełna obsługa klawiaturą i automatyczny test każdego ekranu. Osoba niewidoma może opisać i zapisać potrzebę za pomocą czytnika ekranu: każde pole ma etykietę, czytnik informuje o każdym etapie oczekiwania, a o wymaganej zgodzie informujemy przed pierwszą próbą wysłania. Wszystko, co pokazuje narzędzie, pochodzi z otwartych danych, z linkiem do źródła i informacją o licencji; katalogi pozostają nadrzędnym źródłem danych. Przy budowie pomagali nam agenci AI piszący kod; pomysł i decyzje są nasze, a każdą z nich zapisujemy w jawnym rejestrze decyzji projektu. Dziękujemy.</a:t>
             </a:r>
           </a:p>
         </p:txBody>
@@ -1879,7 +1879,7 @@
                 <a:ea typeface="Atkinson Hyperlegible Next" pitchFamily="34" charset="-122"/>
                 <a:cs typeface="Atkinson Hyperlegible Next" pitchFamily="34" charset="-120"/>
               </a:rPr>
-              <a:t>Opisz potrzebę, dostań drogę</a:t>
+              <a:t>Opisz potrzebę, poznaj drogę</a:t>
             </a:r>
             <a:endParaRPr lang="en-US" sz="3200" dirty="0"/>
           </a:p>
@@ -1910,7 +1910,7 @@
                 <a:ea typeface="Atkinson Hyperlegible Next" pitchFamily="34" charset="-122"/>
                 <a:cs typeface="Atkinson Hyperlegible Next" pitchFamily="34" charset="-120"/>
               </a:rPr>
-              <a:t>  Prawdziwa droga z pilota</a:t>
+              <a:t>  Prawdziwa droga z prototypu</a:t>
             </a:r>
             <a:endParaRPr lang="en-US" sz="3200" dirty="0"/>
           </a:p>
@@ -1949,7 +1949,7 @@
                 <a:ea typeface="Atkinson Hyperlegible Next" pitchFamily="34" charset="-122"/>
                 <a:cs typeface="Atkinson Hyperlegible Next" pitchFamily="34" charset="-120"/>
               </a:rPr>
-              <a:t>POTRZEBA  ·  PROBLEM TESTOWY P01</a:t>
+              <a:t>POTRZEBA  ·  PRZYPADEK TESTOWY P01</a:t>
             </a:r>
             <a:endParaRPr lang="en-US" sz="1100" dirty="0"/>
           </a:p>
@@ -2091,7 +2091,7 @@
                 <a:ea typeface="Atkinson Hyperlegible Next" pitchFamily="34" charset="-122"/>
                 <a:cs typeface="Atkinson Hyperlegible Next" pitchFamily="34" charset="-120"/>
               </a:rPr>
-              <a:t>Kto  </a:t>
+              <a:t>Zgłasza  </a:t>
             </a:r>
             <a:r>
               <a:rPr lang="en-US" sz="1300" b="1" dirty="0">
@@ -2166,7 +2166,7 @@
                 <a:ea typeface="Atkinson Hyperlegible Next" pitchFamily="34" charset="-122"/>
                 <a:cs typeface="Atkinson Hyperlegible Next" pitchFamily="34" charset="-120"/>
               </a:rPr>
-              <a:t>Każdy cytat sprawdzamy z opisem w katalogu. Tekst wygenerowany jest oznaczony.</a:t>
+              <a:t>Każdy cytat porównujemy z opisem w katalogu. Tekst wygenerowany przez AI jest oznaczony.</a:t>
             </a:r>
             <a:endParaRPr lang="en-US" sz="1200" dirty="0"/>
           </a:p>
@@ -2477,7 +2477,7 @@
                 <a:ea typeface="Atkinson Hyperlegible Next" pitchFamily="34" charset="-122"/>
                 <a:cs typeface="Atkinson Hyperlegible Next" pitchFamily="34" charset="-120"/>
               </a:rPr>
-              <a:t>podręczniki i modele na start</a:t>
+              <a:t>poradniki i modele usług</a:t>
             </a:r>
             <a:endParaRPr lang="en-US" sz="1400" dirty="0"/>
           </a:p>
@@ -2674,7 +2674,7 @@
                 <a:ea typeface="Atkinson Hyperlegible Next" pitchFamily="34" charset="-122"/>
                 <a:cs typeface="Atkinson Hyperlegible Next" pitchFamily="34" charset="-120"/>
               </a:rPr>
-              <a:t>autorzy, opiekun w ROPS, chętni</a:t>
+              <a:t>autorzy, opiekun, chętni do pomocy</a:t>
             </a:r>
             <a:endParaRPr lang="en-US" sz="1400" dirty="0"/>
           </a:p>
@@ -2871,7 +2871,7 @@
                 <a:ea typeface="Atkinson Hyperlegible Next" pitchFamily="34" charset="-122"/>
                 <a:cs typeface="Atkinson Hyperlegible Next" pitchFamily="34" charset="-120"/>
               </a:rPr>
-              <a:t>pieniądze i kroki</a:t>
+              <a:t>finansowanie i kroki</a:t>
             </a:r>
             <a:endParaRPr lang="en-US" sz="1400" dirty="0"/>
           </a:p>
@@ -3170,7 +3170,7 @@
                 <a:ea typeface="Atkinson Hyperlegible Next" pitchFamily="34" charset="-122"/>
                 <a:cs typeface="Atkinson Hyperlegible Next" pitchFamily="34" charset="-120"/>
               </a:rPr>
-              <a:t>Podobne przypadki i uczciwe „nie”</a:t>
+              <a:t>Podobne przypadki i jasne „nie”</a:t>
             </a:r>
             <a:endParaRPr lang="en-US" sz="3200" dirty="0"/>
           </a:p>
@@ -3201,7 +3201,7 @@
                 <a:ea typeface="Atkinson Hyperlegible Next" pitchFamily="34" charset="-122"/>
                 <a:cs typeface="Atkinson Hyperlegible Next" pitchFamily="34" charset="-120"/>
               </a:rPr>
-              <a:t>  Nie wyszukiwarka i nie czatbot nad dokumentami</a:t>
+              <a:t>  Ani wyszukiwarka, ani czatbot do dokumentów</a:t>
             </a:r>
             <a:endParaRPr lang="en-US" sz="3200" dirty="0"/>
           </a:p>
@@ -3675,7 +3675,7 @@
                           <a:ea typeface="Atkinson Hyperlegible Next" pitchFamily="34" charset="-122"/>
                           <a:cs typeface="Atkinson Hyperlegible Next" pitchFamily="34" charset="-120"/>
                         </a:rPr>
-                        <a:t>Płynny akapit</a:t>
+                        <a:t>Zgrabny akapit</a:t>
                       </a:r>
                       <a:endParaRPr lang="en-US" sz="1100" dirty="0">
                         <a:latin typeface="Atkinson Hyperlegible Next" charset="0"/>
@@ -3880,7 +3880,7 @@
                           <a:ea typeface="Atkinson Hyperlegible Next" pitchFamily="34" charset="-122"/>
                           <a:cs typeface="Atkinson Hyperlegible Next" pitchFamily="34" charset="-120"/>
                         </a:rPr>
-                        <a:t>Nadal listę</a:t>
+                        <a:t>Mimo to daje listę</a:t>
                       </a:r>
                       <a:endParaRPr lang="en-US" sz="1100" dirty="0">
                         <a:latin typeface="Atkinson Hyperlegible Next" charset="0"/>
@@ -3945,7 +3945,7 @@
                           <a:ea typeface="Atkinson Hyperlegible Next" pitchFamily="34" charset="-122"/>
                           <a:cs typeface="Atkinson Hyperlegible Next" pitchFamily="34" charset="-120"/>
                         </a:rPr>
-                        <a:t>Nadal odpowiedź</a:t>
+                        <a:t>Mimo to odpowiada</a:t>
                       </a:r>
                       <a:endParaRPr lang="en-US" sz="1100" dirty="0">
                         <a:latin typeface="Atkinson Hyperlegible Next" charset="0"/>
@@ -4010,7 +4010,7 @@
                           <a:ea typeface="Atkinson Hyperlegible Next" pitchFamily="34" charset="-122"/>
                           <a:cs typeface="Atkinson Hyperlegible Next" pitchFamily="34" charset="-120"/>
                         </a:rPr>
-                        <a:t>Mówi to wprost: poniżej 45 na 100 nie ma drogi</a:t>
+                        <a:t>Mówi to wprost: przy wyniku poniżej 45/100 nie proponuje drogi</a:t>
                       </a:r>
                       <a:endParaRPr lang="en-US" sz="1100" dirty="0">
                         <a:latin typeface="Atkinson Hyperlegible Next" charset="0"/>
@@ -4150,7 +4150,7 @@
                           <a:ea typeface="Atkinson Hyperlegible Next" pitchFamily="34" charset="-122"/>
                           <a:cs typeface="Atkinson Hyperlegible Next" pitchFamily="34" charset="-120"/>
                         </a:rPr>
-                        <a:t>To, co piszą strony</a:t>
+                        <a:t>Ze stron internetowych</a:t>
                       </a:r>
                       <a:endParaRPr lang="en-US" sz="1100" dirty="0">
                         <a:latin typeface="Atkinson Hyperlegible Next" charset="0"/>
@@ -4280,7 +4280,7 @@
                           <a:ea typeface="Atkinson Hyperlegible Next" pitchFamily="34" charset="-122"/>
                           <a:cs typeface="Atkinson Hyperlegible Next" pitchFamily="34" charset="-120"/>
                         </a:rPr>
-                        <a:t>Z 30 ścieżek ze źródłami; model nie widzi kwot</a:t>
+                        <a:t>Z 30 udokumentowanych ścieżek; model nie ma do nich dostępu</a:t>
                       </a:r>
                       <a:endParaRPr lang="en-US" sz="1100" dirty="0">
                         <a:latin typeface="Atkinson Hyperlegible Next" charset="0"/>
@@ -4420,7 +4420,7 @@
                           <a:ea typeface="Atkinson Hyperlegible Next" pitchFamily="34" charset="-122"/>
                           <a:cs typeface="Atkinson Hyperlegible Next" pitchFamily="34" charset="-120"/>
                         </a:rPr>
-                        <a:t>Układa strony</a:t>
+                        <a:t>Szereguje strony</a:t>
                       </a:r>
                       <a:endParaRPr lang="en-US" sz="1100" dirty="0">
                         <a:latin typeface="Atkinson Hyperlegible Next" charset="0"/>
@@ -4550,7 +4550,7 @@
                           <a:ea typeface="Atkinson Hyperlegible Next" pitchFamily="34" charset="-122"/>
                           <a:cs typeface="Atkinson Hyperlegible Next" pitchFamily="34" charset="-120"/>
                         </a:rPr>
-                        <a:t>Wybiera i wyjaśnia; kod sprawdza każdy identyfikator i cytat</a:t>
+                        <a:t>Wybiera i wyjaśnia; program sprawdza każde odwołanie i cytat</a:t>
                       </a:r>
                       <a:endParaRPr lang="en-US" sz="1100" dirty="0">
                         <a:latin typeface="Atkinson Hyperlegible Next" charset="0"/>
@@ -4671,7 +4671,7 @@
                 <a:ea typeface="Atkinson Hyperlegible Next" pitchFamily="34" charset="-122"/>
                 <a:cs typeface="Atkinson Hyperlegible Next" pitchFamily="34" charset="-120"/>
               </a:rPr>
-              <a:t>TRAFNOŚĆ DOPASOWANIA  ·  PROBLEMY TESTOWE</a:t>
+              <a:t>TRAFNOŚĆ DOPASOWANIA  ·  PRZYPADKI TESTOWE</a:t>
             </a:r>
             <a:endParaRPr lang="en-US" sz="1000" dirty="0"/>
           </a:p>
@@ -4730,7 +4730,7 @@
                 <a:ea typeface="Atkinson Hyperlegible Next" pitchFamily="34" charset="-122"/>
                 <a:cs typeface="Atkinson Hyperlegible Next" pitchFamily="34" charset="-120"/>
               </a:rPr>
-              <a:t>problemów, dla których istnieje sprawdzone rozwiązanie: oczekiwana innowacja jest wśród trzech proponowanych</a:t>
+              <a:t>przypadków, dla których istnieje sprawdzone rozwiązanie: właściwa innowacja jest wśród trzech proponowanych</a:t>
             </a:r>
             <a:endParaRPr lang="en-US" sz="3000" dirty="0"/>
           </a:p>
@@ -4789,7 +4789,7 @@
                 <a:ea typeface="Atkinson Hyperlegible Next" pitchFamily="34" charset="-122"/>
                 <a:cs typeface="Atkinson Hyperlegible Next" pitchFamily="34" charset="-120"/>
               </a:rPr>
-              <a:t>problemów: narzędzie trafnie rozpoznaje, czy jest droga, droga częściowa, czy nic nie pasuje</a:t>
+              <a:t>przypadków: narzędzie trafnie rozpoznaje, czy jest pełna droga, częściowa, czy żadna</a:t>
             </a:r>
             <a:endParaRPr lang="en-US" sz="3000" dirty="0"/>
           </a:p>
@@ -4911,7 +4911,7 @@
                 <a:ea typeface="Atkinson Hyperlegible Next" pitchFamily="34" charset="-122"/>
                 <a:cs typeface="Atkinson Hyperlegible Next" pitchFamily="34" charset="-120"/>
               </a:rPr>
-              <a:t>Podobne przypadki: potrzeby i pomysły innych, po zgodzie autora i decyzji ROPS</a:t>
+              <a:t>Podobne przypadki: potrzeby i pomysły innych, za zgodą autorów i po akceptacji ROPS</a:t>
             </a:r>
             <a:endParaRPr lang="en-US" sz="1100" dirty="0"/>
           </a:p>
@@ -5033,7 +5033,7 @@
                 <a:ea typeface="Atkinson Hyperlegible Next" pitchFamily="34" charset="-122"/>
                 <a:cs typeface="Atkinson Hyperlegible Next" pitchFamily="34" charset="-120"/>
               </a:rPr>
-              <a:t>Studnie w gminie Dobra: nic nie pasuje, więc droga mówi to wprost i proponuje bank potrzeb</a:t>
+              <a:t>Wyschnięte studnie w gminie Dobra: nic nie pasuje, więc narzędzie mówi to wprost i proponuje wpis do banku potrzeb</a:t>
             </a:r>
             <a:endParaRPr lang="en-US" sz="1100" dirty="0"/>
           </a:p>
@@ -5269,7 +5269,7 @@
                 <a:ea typeface="Atkinson Hyperlegible Next" pitchFamily="34" charset="-122"/>
                 <a:cs typeface="Atkinson Hyperlegible Next" pitchFamily="34" charset="-120"/>
               </a:rPr>
-              <a:t>Przy każdej innowacji; opinie trafiają do jej autorów przez ROPS, po decyzji człowieka</a:t>
+              <a:t>Opinie trafiają do autorów innowacji za pośrednictwem ROPS, gdy zatwierdzi je pracownik</a:t>
             </a:r>
             <a:endParaRPr lang="en-US" sz="3200" dirty="0"/>
           </a:p>
@@ -5308,7 +5308,7 @@
                 <a:ea typeface="Atkinson Hyperlegible Next" pitchFamily="34" charset="-122"/>
                 <a:cs typeface="Atkinson Hyperlegible Next" pitchFamily="34" charset="-120"/>
               </a:rPr>
-              <a:t>WYMAGANIE PARTNERA  ·  JAK JE SPEŁNIAMY</a:t>
+              <a:t>WYMAGANIA ROPS  ·  JAK JE SPEŁNIAMY</a:t>
             </a:r>
             <a:endParaRPr lang="en-US" sz="1000" dirty="0"/>
           </a:p>
@@ -5411,7 +5411,7 @@
                 <a:ea typeface="Atkinson Hyperlegible Next" pitchFamily="34" charset="-122"/>
                 <a:cs typeface="Atkinson Hyperlegible Next" pitchFamily="34" charset="-120"/>
               </a:rPr>
-              <a:t>„zgłoszenie chęci udziału w testach”</a:t>
+              <a:t>Zgłoszenie chęci udziału w testach</a:t>
             </a:r>
             <a:endParaRPr lang="en-US" sz="1350" dirty="0"/>
           </a:p>
@@ -5431,7 +5431,7 @@
                 <a:ea typeface="Atkinson Hyperlegible Next" pitchFamily="34" charset="-122"/>
                 <a:cs typeface="Atkinson Hyperlegible Next" pitchFamily="34" charset="-120"/>
               </a:rPr>
-              <a:t>Jako użytkownik albo jako organizacja, która poprowadzi próbę w swojej gminie</a:t>
+              <a:t>Jako użytkownik albo jako organizacja, która wdroży rozwiązanie na próbę w swojej gminie</a:t>
             </a:r>
             <a:endParaRPr lang="en-US" sz="1350" dirty="0"/>
           </a:p>
@@ -5534,7 +5534,7 @@
                 <a:ea typeface="Atkinson Hyperlegible Next" pitchFamily="34" charset="-122"/>
                 <a:cs typeface="Atkinson Hyperlegible Next" pitchFamily="34" charset="-120"/>
               </a:rPr>
-              <a:t>„ocenę istniejących rozwiązań”</a:t>
+              <a:t>Ocena istniejących rozwiązań</a:t>
             </a:r>
             <a:endParaRPr lang="en-US" sz="1350" dirty="0"/>
           </a:p>
@@ -5554,7 +5554,7 @@
                 <a:ea typeface="Atkinson Hyperlegible Next" pitchFamily="34" charset="-122"/>
                 <a:cs typeface="Atkinson Hyperlegible Next" pitchFamily="34" charset="-120"/>
               </a:rPr>
-              <a:t>Od 1 do 5, z informacją, skąd autor zna rozwiązanie: używa go, wdraża albo zna z opisu</a:t>
+              <a:t>Od 1 do 5, z informacją, skąd oceniający zna rozwiązanie: korzysta z niego, wdraża je albo zna z opisu</a:t>
             </a:r>
             <a:endParaRPr lang="en-US" sz="1350" dirty="0"/>
           </a:p>
@@ -5657,7 +5657,7 @@
                 <a:ea typeface="Atkinson Hyperlegible Next" pitchFamily="34" charset="-122"/>
                 <a:cs typeface="Atkinson Hyperlegible Next" pitchFamily="34" charset="-120"/>
               </a:rPr>
-              <a:t>„przekazywanie informacji zwrotnej”</a:t>
+              <a:t>Przekazywanie informacji zwrotnej</a:t>
             </a:r>
             <a:endParaRPr lang="en-US" sz="1350" dirty="0"/>
           </a:p>
@@ -5677,7 +5677,7 @@
                 <a:ea typeface="Atkinson Hyperlegible Next" pitchFamily="34" charset="-122"/>
                 <a:cs typeface="Atkinson Hyperlegible Next" pitchFamily="34" charset="-120"/>
               </a:rPr>
-              <a:t>Opinia może być anonimowa; przechodzi przez bramkę bezpieczeństwa, a ROPS przekazuje ją autorom</a:t>
+              <a:t>Opinię można wysłać anonimowo; przechodzi przez filtr bezpieczeństwa, a ROPS przekazuje ją autorom</a:t>
             </a:r>
             <a:endParaRPr lang="en-US" sz="1350" dirty="0"/>
           </a:p>
@@ -5780,7 +5780,7 @@
                 <a:ea typeface="Atkinson Hyperlegible Next" pitchFamily="34" charset="-122"/>
                 <a:cs typeface="Atkinson Hyperlegible Next" pitchFamily="34" charset="-120"/>
               </a:rPr>
-              <a:t>„proponowanie usprawnień”</a:t>
+              <a:t>Proponowanie usprawnień</a:t>
             </a:r>
             <a:endParaRPr lang="en-US" sz="1350" dirty="0"/>
           </a:p>
@@ -5800,7 +5800,7 @@
                 <a:ea typeface="Atkinson Hyperlegible Next" pitchFamily="34" charset="-122"/>
                 <a:cs typeface="Atkinson Hyperlegible Next" pitchFamily="34" charset="-120"/>
               </a:rPr>
-              <a:t>Propozycje ulepszeń, oceny i zgłoszenia do testów liczone na stronie innowacji, bez treści i kontaktów</a:t>
+              <a:t>Na stronie innowacji widać liczbę ocen, propozycji ulepszeń i zgłoszeń do testów, bez treści i danych kontaktowych</a:t>
             </a:r>
             <a:endParaRPr lang="en-US" sz="1350" dirty="0"/>
           </a:p>
@@ -5922,7 +5922,7 @@
                 <a:ea typeface="Atkinson Hyperlegible Next" pitchFamily="34" charset="-122"/>
                 <a:cs typeface="Atkinson Hyperlegible Next" pitchFamily="34" charset="-120"/>
               </a:rPr>
-              <a:t>Zgłoszenie do testów w formularzu testera: jako osoba albo jako organizacja</a:t>
+              <a:t>Zgłoszenie do testów w formularzu testera: jako użytkownik albo organizacja</a:t>
             </a:r>
             <a:endParaRPr lang="en-US" sz="1100" dirty="0"/>
           </a:p>
@@ -6260,7 +6260,7 @@
                 <a:ea typeface="Atkinson Hyperlegible Next" pitchFamily="34" charset="-122"/>
                 <a:cs typeface="Atkinson Hyperlegible Next" pitchFamily="34" charset="-120"/>
               </a:rPr>
-              <a:t>Rozmowa z ROPS bez konta, z mentorem i partnerami</a:t>
+              <a:t>Rozmowa z ROPS, mentorem i partnerami – bez konta</a:t>
             </a:r>
             <a:endParaRPr lang="en-US" sz="3200" dirty="0"/>
           </a:p>
@@ -6280,7 +6280,7 @@
                 <a:ea typeface="Atkinson Hyperlegible Next" pitchFamily="34" charset="-122"/>
                 <a:cs typeface="Atkinson Hyperlegible Next" pitchFamily="34" charset="-120"/>
               </a:rPr>
-              <a:t>Prywatny link zamiast logowania: pyta mieszkaniec, organizacja albo gmina, odpowiada człowiek z ROPS</a:t>
+              <a:t>Prywatny link zamiast logowania: pyta mieszkaniec, organizacja albo gmina, odpowiada pracownik ROPS</a:t>
             </a:r>
             <a:endParaRPr lang="en-US" sz="3200" dirty="0"/>
           </a:p>
@@ -6319,7 +6319,7 @@
                 <a:ea typeface="Atkinson Hyperlegible Next" pitchFamily="34" charset="-122"/>
                 <a:cs typeface="Atkinson Hyperlegible Next" pitchFamily="34" charset="-120"/>
               </a:rPr>
-              <a:t>WYMAGANIE PARTNERA  ·  JAK JE SPEŁNIAMY</a:t>
+              <a:t>WYMAGANIA ROPS  ·  JAK JE SPEŁNIAMY</a:t>
             </a:r>
             <a:endParaRPr lang="en-US" sz="1000" dirty="0"/>
           </a:p>
@@ -6422,7 +6422,7 @@
                 <a:ea typeface="Atkinson Hyperlegible Next" pitchFamily="34" charset="-122"/>
                 <a:cs typeface="Atkinson Hyperlegible Next" pitchFamily="34" charset="-120"/>
               </a:rPr>
-              <a:t>„bezpośredni dialog między ROPS Kraków a użytkownikami”</a:t>
+              <a:t>Bezpośredni dialog między ROPS a użytkownikami</a:t>
             </a:r>
             <a:endParaRPr lang="en-US" sz="1350" dirty="0"/>
           </a:p>
@@ -6442,7 +6442,7 @@
                 <a:ea typeface="Atkinson Hyperlegible Next" pitchFamily="34" charset="-122"/>
                 <a:cs typeface="Atkinson Hyperlegible Next" pitchFamily="34" charset="-120"/>
               </a:rPr>
-              <a:t>Rozmowa pod prywatnym linkiem, bez konta i bez e-maila; odpowiedź podpisana nazwiskiem pracownika ROPS</a:t>
+              <a:t>Rozmowa pod prywatnym linkiem, bez zakładania konta i podawania e-maila; odpowiedź podpisana nazwiskiem pracownika ROPS</a:t>
             </a:r>
             <a:endParaRPr lang="en-US" sz="1350" dirty="0"/>
           </a:p>
@@ -6545,7 +6545,7 @@
                 <a:ea typeface="Atkinson Hyperlegible Next" pitchFamily="34" charset="-122"/>
                 <a:cs typeface="Atkinson Hyperlegible Next" pitchFamily="34" charset="-120"/>
               </a:rPr>
-              <a:t>„szybkie zadawanie pytań”</a:t>
+              <a:t>Szybkie zadawanie pytań</a:t>
             </a:r>
             <a:endParaRPr lang="en-US" sz="1350" dirty="0"/>
           </a:p>
@@ -6565,7 +6565,7 @@
                 <a:ea typeface="Atkinson Hyperlegible Next" pitchFamily="34" charset="-122"/>
                 <a:cs typeface="Atkinson Hyperlegible Next" pitchFamily="34" charset="-120"/>
               </a:rPr>
-              <a:t>„Zapytaj eksperta” przy każdej innowacji, fiszce pomysłu i ogłoszeniu; rozmowa wie, czego dotyczy</a:t>
+              <a:t>„Zapytaj eksperta” przy każdej innowacji, fiszce pomysłu i ogłoszeniu; od razu wiadomo, czego dotyczy pytanie</a:t>
             </a:r>
             <a:endParaRPr lang="en-US" sz="1350" dirty="0"/>
           </a:p>
@@ -6668,7 +6668,7 @@
                 <a:ea typeface="Atkinson Hyperlegible Next" pitchFamily="34" charset="-122"/>
                 <a:cs typeface="Atkinson Hyperlegible Next" pitchFamily="34" charset="-120"/>
               </a:rPr>
-              <a:t>„otrzymywanie wsparcia od mentorów”</a:t>
+              <a:t>Wsparcie mentorów</a:t>
             </a:r>
             <a:endParaRPr lang="en-US" sz="1350" dirty="0"/>
           </a:p>
@@ -6688,7 +6688,7 @@
                 <a:ea typeface="Atkinson Hyperlegible Next" pitchFamily="34" charset="-122"/>
                 <a:cs typeface="Atkinson Hyperlegible Next" pitchFamily="34" charset="-120"/>
               </a:rPr>
-              <a:t>ROPS zaprasza mentora do rozmowy; mentor pisze własnym linkiem, bez dostępu do panelu</a:t>
+              <a:t>ROPS zaprasza mentora do rozmowy; mentor dołącza przez własny link, bez dostępu do panelu</a:t>
             </a:r>
             <a:endParaRPr lang="en-US" sz="1350" dirty="0"/>
           </a:p>
@@ -6791,7 +6791,7 @@
                 <a:ea typeface="Atkinson Hyperlegible Next" pitchFamily="34" charset="-122"/>
                 <a:cs typeface="Atkinson Hyperlegible Next" pitchFamily="34" charset="-120"/>
               </a:rPr>
-              <a:t>„budowanie międzysektorowych partnerstw”</a:t>
+              <a:t>Budowanie partnerstw międzysektorowych</a:t>
             </a:r>
             <a:endParaRPr lang="en-US" sz="1350" dirty="0"/>
           </a:p>
@@ -6811,7 +6811,7 @@
                 <a:ea typeface="Atkinson Hyperlegible Next" pitchFamily="34" charset="-122"/>
                 <a:cs typeface="Atkinson Hyperlegible Next" pitchFamily="34" charset="-120"/>
               </a:rPr>
-              <a:t>Tablica „Szukam partnera” i „Oferuję współpracę” z filtrem sektora; ROPS zatwierdza ogłoszenia i przekazuje odpowiedzi</a:t>
+              <a:t>Tablica „Szukam partnera” i „Oferuję współpracę” z filtrem według sektora; ROPS zatwierdza ogłoszenia i przekazuje odpowiedzi</a:t>
             </a:r>
             <a:endParaRPr lang="en-US" sz="1350" dirty="0"/>
           </a:p>
@@ -7271,7 +7271,7 @@
                 <a:ea typeface="Atkinson Hyperlegible Next" pitchFamily="34" charset="-122"/>
                 <a:cs typeface="Atkinson Hyperlegible Next" pitchFamily="34" charset="-120"/>
               </a:rPr>
-              <a:t>Panel ROPS: człowiek decyduje o każdym wpisie</a:t>
+              <a:t>Panel ROPS: o każdym wpisie decyduje człowiek</a:t>
             </a:r>
             <a:endParaRPr lang="en-US" sz="3200" dirty="0"/>
           </a:p>
@@ -7291,7 +7291,7 @@
                 <a:ea typeface="Atkinson Hyperlegible Next" pitchFamily="34" charset="-122"/>
                 <a:cs typeface="Atkinson Hyperlegible Next" pitchFamily="34" charset="-120"/>
               </a:rPr>
-              <a:t>Wiedza zmieniona w panelu działa od razu; autor pomysłu czyta odpowiedź na stronie swojej fiszki</a:t>
+              <a:t>Zmiany w panelu widać od razu; autor pomysłu znajdzie odpowiedź na stronie swojej fiszki</a:t>
             </a:r>
             <a:endParaRPr lang="en-US" sz="3200" dirty="0"/>
           </a:p>
@@ -7330,7 +7330,7 @@
                 <a:ea typeface="Atkinson Hyperlegible Next" pitchFamily="34" charset="-122"/>
                 <a:cs typeface="Atkinson Hyperlegible Next" pitchFamily="34" charset="-120"/>
               </a:rPr>
-              <a:t>WYMAGANIE PARTNERA  ·  JAK JE SPEŁNIAMY</a:t>
+              <a:t>WYMAGANIA ROPS  ·  JAK JE SPEŁNIAMY</a:t>
             </a:r>
             <a:endParaRPr lang="en-US" sz="1000" dirty="0"/>
           </a:p>
@@ -7433,7 +7433,7 @@
                 <a:ea typeface="Atkinson Hyperlegible Next" pitchFamily="34" charset="-122"/>
                 <a:cs typeface="Atkinson Hyperlegible Next" pitchFamily="34" charset="-120"/>
               </a:rPr>
-              <a:t>„w szybki sposób modyfikowanie”</a:t>
+              <a:t>Szybkie modyfikowanie wiedzy</a:t>
             </a:r>
             <a:endParaRPr lang="en-US" sz="1350" dirty="0"/>
           </a:p>
@@ -7453,7 +7453,7 @@
                 <a:ea typeface="Atkinson Hyperlegible Next" pitchFamily="34" charset="-122"/>
                 <a:cs typeface="Atkinson Hyperlegible Next" pitchFamily="34" charset="-120"/>
               </a:rPr>
-              <a:t>Poprawiony opis, nowy film, nowa pozycja wiedzy dla grupy docelowej: widać od razu, także na wcześniejszych drogach</a:t>
+              <a:t>Poprawiony opis, nowy film, nowy materiał dla grupy docelowej: zmiany widać od razu, także w drogach utworzonych wcześniej</a:t>
             </a:r>
             <a:endParaRPr lang="en-US" sz="1350" dirty="0"/>
           </a:p>
@@ -7556,7 +7556,7 @@
                 <a:ea typeface="Atkinson Hyperlegible Next" pitchFamily="34" charset="-122"/>
                 <a:cs typeface="Atkinson Hyperlegible Next" pitchFamily="34" charset="-120"/>
               </a:rPr>
-              <a:t>„weryfikację”</a:t>
+              <a:t>Weryfikacja wiedzy</a:t>
             </a:r>
             <a:endParaRPr lang="en-US" sz="1350" dirty="0"/>
           </a:p>
@@ -7576,7 +7576,7 @@
                 <a:ea typeface="Atkinson Hyperlegible Next" pitchFamily="34" charset="-122"/>
                 <a:cs typeface="Atkinson Hyperlegible Next" pitchFamily="34" charset="-120"/>
               </a:rPr>
-              <a:t>„Sprawdzone przez ROPS” na stronie innowacji i na drogach; każda decyzja w kolejkach zapisana z nazwiskiem</a:t>
+              <a:t>Oznaczenie „Sprawdzone przez ROPS” na stronie innowacji i w drogach; każda decyzja odnotowana z nazwiskiem pracownika</a:t>
             </a:r>
             <a:endParaRPr lang="en-US" sz="1350" dirty="0"/>
           </a:p>
@@ -7679,7 +7679,7 @@
                 <a:ea typeface="Atkinson Hyperlegible Next" pitchFamily="34" charset="-122"/>
                 <a:cs typeface="Atkinson Hyperlegible Next" pitchFamily="34" charset="-120"/>
               </a:rPr>
-              <a:t>„udostępnianie wiedzy”</a:t>
+              <a:t>Udostępnianie wiedzy</a:t>
             </a:r>
             <a:endParaRPr lang="en-US" sz="1350" dirty="0"/>
           </a:p>
@@ -7699,7 +7699,7 @@
                 <a:ea typeface="Atkinson Hyperlegible Next" pitchFamily="34" charset="-122"/>
                 <a:cs typeface="Atkinson Hyperlegible Next" pitchFamily="34" charset="-120"/>
               </a:rPr>
-              <a:t>Potrzeby, fiszki, opinie i ogłoszenia stają się publiczne po zgodzie autora i decyzji ROPS; eksport CSV</a:t>
+              <a:t>Potrzeby, fiszki, opinie i ogłoszenia są publikowane za zgodą autora i po akceptacji ROPS; eksport do CSV</a:t>
             </a:r>
             <a:endParaRPr lang="en-US" sz="1350" dirty="0"/>
           </a:p>
@@ -7802,7 +7802,7 @@
                 <a:ea typeface="Atkinson Hyperlegible Next" pitchFamily="34" charset="-122"/>
                 <a:cs typeface="Atkinson Hyperlegible Next" pitchFamily="34" charset="-120"/>
               </a:rPr>
-              <a:t>„powiadamia administratora o nowym pomyśle”</a:t>
+              <a:t>Powiadamianie administratora o nowym pomyśle</a:t>
             </a:r>
             <a:endParaRPr lang="en-US" sz="1350" dirty="0"/>
           </a:p>
@@ -7822,7 +7822,7 @@
                 <a:ea typeface="Atkinson Hyperlegible Next" pitchFamily="34" charset="-122"/>
                 <a:cs typeface="Atkinson Hyperlegible Next" pitchFamily="34" charset="-120"/>
               </a:rPr>
-              <a:t>Pulpit pokazuje, co czeka i co nowe od ostatniej wizyty</a:t>
+              <a:t>Pulpit pokazuje, co czeka na decyzję i co nowego od ostatniej wizyty</a:t>
             </a:r>
             <a:endParaRPr lang="en-US" sz="1350" dirty="0"/>
           </a:p>
@@ -7925,7 +7925,7 @@
                 <a:ea typeface="Atkinson Hyperlegible Next" pitchFamily="34" charset="-122"/>
                 <a:cs typeface="Atkinson Hyperlegible Next" pitchFamily="34" charset="-120"/>
               </a:rPr>
-              <a:t>„ścieżka odpowiedzi do autora”</a:t>
+              <a:t>Ścieżka odpowiedzi do autora</a:t>
             </a:r>
             <a:endParaRPr lang="en-US" sz="1350" dirty="0"/>
           </a:p>
@@ -7945,7 +7945,7 @@
                 <a:ea typeface="Atkinson Hyperlegible Next" pitchFamily="34" charset="-122"/>
                 <a:cs typeface="Atkinson Hyperlegible Next" pitchFamily="34" charset="-120"/>
               </a:rPr>
-              <a:t>Status i odpowiedź ROPS z datą, od razu na stronie fiszki</a:t>
+              <a:t>Status i odpowiedź ROPS z datą, od razu widoczne na stronie fiszki</a:t>
             </a:r>
             <a:endParaRPr lang="en-US" sz="1350" dirty="0"/>
           </a:p>
@@ -8067,7 +8067,7 @@
                 <a:ea typeface="Atkinson Hyperlegible Next" pitchFamily="34" charset="-122"/>
                 <a:cs typeface="Atkinson Hyperlegible Next" pitchFamily="34" charset="-120"/>
               </a:rPr>
-              <a:t>Pulpit: co czeka i co nowe od ostatniej wizyty</a:t>
+              <a:t>Pulpit: co czeka na decyzję i co nowego od ostatniej wizyty</a:t>
             </a:r>
             <a:endParaRPr lang="en-US" sz="1100" dirty="0"/>
           </a:p>
@@ -8320,7 +8320,7 @@
                 <a:ea typeface="Atkinson Hyperlegible Next" pitchFamily="34" charset="-122"/>
                 <a:cs typeface="Atkinson Hyperlegible Next" pitchFamily="34" charset="-120"/>
               </a:rPr>
-              <a:t>Najpierw bramka bezpieczeństwa. Model wybiera i wyjaśnia; decydują ludzie.</a:t>
+              <a:t>Najpierw filtr bezpieczeństwa. Model wybiera i wyjaśnia, a decydują ludzie.</a:t>
             </a:r>
             <a:endParaRPr lang="en-US" sz="3200" dirty="0"/>
           </a:p>
@@ -8386,7 +8386,7 @@
                 <a:ea typeface="Atkinson Hyperlegible Next" pitchFamily="34" charset="-122"/>
                 <a:cs typeface="Atkinson Hyperlegible Next" pitchFamily="34" charset="-120"/>
               </a:rPr>
-              <a:t>1  Bramka bezpieczeństwa</a:t>
+              <a:t>1  Filtr bezpieczeństwa</a:t>
             </a:r>
             <a:endParaRPr lang="en-US" sz="1300" dirty="0"/>
           </a:p>
@@ -8511,7 +8511,7 @@
                 <a:ea typeface="Atkinson Hyperlegible Next" pitchFamily="34" charset="-122"/>
                 <a:cs typeface="Atkinson Hyperlegible Next" pitchFamily="34" charset="-120"/>
               </a:rPr>
-              <a:t>PolDense-400M: 40 najbliższych z 381</a:t>
+              <a:t>PolDense-400M: 40 najbardziej podobnych z 381</a:t>
             </a:r>
             <a:endParaRPr lang="en-US" sz="1300" dirty="0"/>
           </a:p>
@@ -8619,7 +8619,7 @@
                 <a:ea typeface="Atkinson Hyperlegible Next" pitchFamily="34" charset="-122"/>
                 <a:cs typeface="Atkinson Hyperlegible Next" pitchFamily="34" charset="-120"/>
               </a:rPr>
-              <a:t>Bielik 11B v3.0, polski otwarty model</a:t>
+              <a:t>Bielik 11B v3.0, otwarty polski model</a:t>
             </a:r>
             <a:endParaRPr lang="en-US" sz="1300" dirty="0"/>
           </a:p>
@@ -8710,7 +8710,7 @@
                 <a:ea typeface="Atkinson Hyperlegible Next" pitchFamily="34" charset="-122"/>
                 <a:cs typeface="Atkinson Hyperlegible Next" pitchFamily="34" charset="-120"/>
               </a:rPr>
-              <a:t>4  Kompozytor</a:t>
+              <a:t>4  Układanie drogi</a:t>
             </a:r>
             <a:endParaRPr lang="en-US" sz="1300" dirty="0"/>
           </a:p>
@@ -8835,7 +8835,7 @@
                 <a:ea typeface="Atkinson Hyperlegible Next" pitchFamily="34" charset="-122"/>
                 <a:cs typeface="Atkinson Hyperlegible Next" pitchFamily="34" charset="-120"/>
               </a:rPr>
-              <a:t>człowiek rozpatruje każdy wpis</a:t>
+              <a:t>pracownik rozpatruje każdy wpis</a:t>
             </a:r>
             <a:endParaRPr lang="en-US" sz="1300" dirty="0"/>
           </a:p>
@@ -8874,7 +8874,7 @@
                 <a:ea typeface="Atkinson Hyperlegible Next" pitchFamily="34" charset="-122"/>
                 <a:cs typeface="Atkinson Hyperlegible Next" pitchFamily="34" charset="-120"/>
               </a:rPr>
-              <a:t>Oba modele wybraliśmy na podstawie pomiarów </a:t>
+              <a:t>Oba modele wybraliśmy na podstawie testów </a:t>
             </a:r>
             <a:r>
               <a:rPr lang="en-US" sz="1100" b="1" i="1" dirty="0">
@@ -8896,7 +8896,7 @@
                 <a:ea typeface="Atkinson Hyperlegible Next" pitchFamily="34" charset="-122"/>
                 <a:cs typeface="Atkinson Hyperlegible Next" pitchFamily="34" charset="-120"/>
               </a:rPr>
-              <a:t>: Bielika porównaliśmy z 4 innymi modelami językowymi, PolDense z 5 innymi modelami embeddingów.</a:t>
+              <a:t>: Bielika porównaliśmy z 4 innymi modelami językowymi, PolDense z 5 innymi modelami wyszukiwania.</a:t>
             </a:r>
             <a:endParaRPr lang="en-US" sz="1100" dirty="0"/>
           </a:p>
@@ -9121,7 +9121,7 @@
                 <a:ea typeface="Atkinson Hyperlegible Next" pitchFamily="34" charset="-122"/>
                 <a:cs typeface="Atkinson Hyperlegible Next" pitchFamily="34" charset="-120"/>
               </a:rPr>
-              <a:t>Osoba w kryzysie trafia do człowieka</a:t>
+              <a:t>Osoba w kryzysie dostaje pomoc człowieka</a:t>
             </a:r>
             <a:endParaRPr lang="en-US" sz="1500" dirty="0"/>
           </a:p>
@@ -9141,7 +9141,7 @@
                 <a:ea typeface="Atkinson Hyperlegible Next" pitchFamily="34" charset="-122"/>
                 <a:cs typeface="Atkinson Hyperlegible Next" pitchFamily="34" charset="-120"/>
               </a:rPr>
-              <a:t>Oznaki kryzysu prowadzą do sprawdzonych telefonów zaufania i lokalnego ośrodka pomocy społecznej, nigdy do innowacji, i nic nie jest zapisywane. Prośbę, która ma kogoś wykluczyć lub poniżyć, odrzucamy z uzasadnieniem i możliwością odwołania.</a:t>
+              <a:t>Przy oznakach kryzysu narzędzie wskazuje sprawdzone telefony zaufania i lokalny ośrodek pomocy społecznej, nigdy innowacje, i niczego nie zapisuje. Prośbę, która ma kogoś wykluczyć lub poniżyć, odrzucamy z uzasadnieniem i możliwością odwołania.</a:t>
             </a:r>
             <a:endParaRPr lang="en-US" sz="1500" dirty="0"/>
           </a:p>
@@ -9264,7 +9264,7 @@
                 <a:ea typeface="Atkinson Hyperlegible Next" pitchFamily="34" charset="-122"/>
                 <a:cs typeface="Atkinson Hyperlegible Next" pitchFamily="34" charset="-120"/>
               </a:rPr>
-              <a:t>Rozwiązania, organizacje i ludzie pochodzą tylko z katalogów; kwoty, terminy i podstawy prawne tylko z opracowanych ścieżek. Każdy identyfikator i cytat jest sprawdzany, a tekst wygenerowany jest oznaczony.</a:t>
+              <a:t>Rozwiązania, organizacje i osoby kontaktowe pochodzą tylko z katalogów; kwoty, terminy i podstawy prawne tylko z opracowanych ścieżek. Każde odwołanie i cytat jest sprawdzane, a tekst wygenerowany przez AI jest oznaczony.</a:t>
             </a:r>
             <a:endParaRPr lang="en-US" sz="1500" dirty="0"/>
           </a:p>
@@ -9367,7 +9367,7 @@
                 <a:ea typeface="Atkinson Hyperlegible Next" pitchFamily="34" charset="-122"/>
                 <a:cs typeface="Atkinson Hyperlegible Next" pitchFamily="34" charset="-120"/>
               </a:rPr>
-              <a:t>Człowiek decyduje</a:t>
+              <a:t>Decyduje człowiek</a:t>
             </a:r>
             <a:endParaRPr lang="en-US" sz="1500" dirty="0"/>
           </a:p>
@@ -9387,7 +9387,7 @@
                 <a:ea typeface="Atkinson Hyperlegible Next" pitchFamily="34" charset="-122"/>
                 <a:cs typeface="Atkinson Hyperlegible Next" pitchFamily="34" charset="-120"/>
               </a:rPr>
-              <a:t>Narzędzie niczego nikomu nie wysyła: prośby o kontakt, zgłoszenia, fiszki i opinie czekają na decyzję pracownika ROPS w panelu, zapisaną z jego nazwiskiem. Numery PESEL, telefony i adresy usuwamy przed zapisem i przed każdym zapytaniem do modelu. Narzędzie nie decyduje o żadnej osobie.</a:t>
+              <a:t>Narzędzie niczego nikomu nie wysyła: prośby o kontakt, zgłoszenia, fiszki i opinie czekają na decyzję pracownika ROPS w panelu, odnotowaną z jego nazwiskiem. Numery PESEL, numery telefonów i adresy usuwamy przed zapisem i przed każdym zapytaniem do modelu. Narzędzie nie podejmuje decyzji o konkretnych osobach.</a:t>
             </a:r>
             <a:endParaRPr lang="en-US" sz="1500" dirty="0"/>
           </a:p>
@@ -9498,7 +9498,7 @@
                 <a:ea typeface="Atkinson Hyperlegible Next" pitchFamily="34" charset="-122"/>
                 <a:cs typeface="Atkinson Hyperlegible Next" pitchFamily="34" charset="-120"/>
               </a:rPr>
-              <a:t>Działa dziś. Usługa ROPS – od poniedziałku</a:t>
+              <a:t>Działa dziś. Usługa ROPS może ruszyć od poniedziałku</a:t>
             </a:r>
             <a:endParaRPr lang="en-US" sz="3200" dirty="0"/>
           </a:p>
@@ -9540,7 +9540,7 @@
                 <a:ea typeface="Atkinson Hyperlegible Next" pitchFamily="34" charset="-122"/>
                 <a:cs typeface="Atkinson Hyperlegible Next" pitchFamily="34" charset="-120"/>
               </a:rPr>
-              <a:t>Plan rozwoju, jeszcze niezbudowany</a:t>
+              <a:t>Plan rozwoju, do zbudowania</a:t>
             </a:r>
             <a:r>
               <a:rPr lang="en-US" sz="1600" dirty="0">
@@ -9551,7 +9551,7 @@
                 <a:ea typeface="Atkinson Hyperlegible Next" pitchFamily="34" charset="-122"/>
                 <a:cs typeface="Atkinson Hyperlegible Next" pitchFamily="34" charset="-120"/>
               </a:rPr>
-              <a:t>: role i pętle usługi</a:t>
+              <a:t>: role i cykle usługi</a:t>
             </a:r>
             <a:endParaRPr lang="en-US" sz="3200" dirty="0"/>
           </a:p>
@@ -9605,11 +9605,11 @@
         <p:spPr>
           <a:xfrm>
             <a:off x="640080" y="1901952"/>
-            <a:ext cx="1464738" cy="1188720"/>
+            <a:ext cx="1464738" cy="1298448"/>
           </a:xfrm>
           <a:prstGeom prst="roundRect">
             <a:avLst>
-              <a:gd name="adj" fmla="val 6154"/>
+              <a:gd name="adj" fmla="val 5634"/>
             </a:avLst>
           </a:prstGeom>
           <a:solidFill>
@@ -9737,7 +9737,7 @@
         <p:spPr>
           <a:xfrm>
             <a:off x="749808" y="2286000"/>
-            <a:ext cx="1245282" cy="749808"/>
+            <a:ext cx="1245282" cy="859536"/>
           </a:xfrm>
           <a:prstGeom prst="rect">
             <a:avLst/>
@@ -9796,11 +9796,202 @@
         <p:spPr>
           <a:xfrm>
             <a:off x="2214546" y="1901952"/>
-            <a:ext cx="1464738" cy="1188720"/>
+            <a:ext cx="1464738" cy="1298448"/>
           </a:xfrm>
           <a:prstGeom prst="roundRect">
             <a:avLst>
-              <a:gd name="adj" fmla="val 6154"/>
+              <a:gd name="adj" fmla="val 5634"/>
+            </a:avLst>
+          </a:prstGeom>
+          <a:solidFill>
+            <a:srgbClr val="EEF4FB"/>
+          </a:solidFill>
+          <a:ln w="12700">
+            <a:solidFill>
+              <a:srgbClr val="EEF4FB"/>
+            </a:solidFill>
+            <a:prstDash val="solid"/>
+          </a:ln>
+        </p:spPr>
+      </p:sp>
+      <p:sp>
+        <p:nvSpPr>
+          <p:cNvPr id="10" name="Text 8"/>
+          <p:cNvSpPr txBox="1"/>
+          <p:nvPr/>
+        </p:nvSpPr>
+        <p:spPr>
+          <a:xfrm>
+            <a:off x="2324274" y="1993392"/>
+            <a:ext cx="457200" cy="219456"/>
+          </a:xfrm>
+          <a:prstGeom prst="rect">
+            <a:avLst/>
+          </a:prstGeom>
+          <a:noFill/>
+          <a:ln/>
+        </p:spPr>
+        <p:txBody>
+          <a:bodyPr wrap="square" lIns="0" tIns="0" rIns="0" bIns="0" rtlCol="0" anchor="ctr"/>
+          <a:lstStyle/>
+          <a:p>
+            <a:pPr marL="0" indent="0">
+              <a:buNone/>
+            </a:pPr>
+            <a:r>
+              <a:rPr lang="en-US" sz="1200" b="1" dirty="0">
+                <a:solidFill>
+                  <a:srgbClr val="1A4B8C"/>
+                </a:solidFill>
+                <a:latin typeface="Atkinson Hyperlegible Next" pitchFamily="34" charset="0"/>
+                <a:ea typeface="Atkinson Hyperlegible Next" pitchFamily="34" charset="-122"/>
+                <a:cs typeface="Atkinson Hyperlegible Next" pitchFamily="34" charset="-120"/>
+              </a:rPr>
+              <a:t>II</a:t>
+            </a:r>
+            <a:endParaRPr lang="en-US" sz="1200" dirty="0"/>
+          </a:p>
+        </p:txBody>
+      </p:sp>
+      <p:sp>
+        <p:nvSpPr>
+          <p:cNvPr id="11" name="Shape 9"/>
+          <p:cNvSpPr/>
+          <p:nvPr/>
+        </p:nvSpPr>
+        <p:spPr>
+          <a:xfrm>
+            <a:off x="2838036" y="1993392"/>
+            <a:ext cx="749808" cy="219456"/>
+          </a:xfrm>
+          <a:prstGeom prst="roundRect">
+            <a:avLst>
+              <a:gd name="adj" fmla="val 50000"/>
+            </a:avLst>
+          </a:prstGeom>
+          <a:solidFill>
+            <a:srgbClr val="1A4B8C"/>
+          </a:solidFill>
+          <a:ln w="12700">
+            <a:solidFill>
+              <a:srgbClr val="1A4B8C"/>
+            </a:solidFill>
+            <a:prstDash val="solid"/>
+          </a:ln>
+        </p:spPr>
+      </p:sp>
+      <p:sp>
+        <p:nvSpPr>
+          <p:cNvPr id="12" name="Text 10"/>
+          <p:cNvSpPr txBox="1"/>
+          <p:nvPr/>
+        </p:nvSpPr>
+        <p:spPr>
+          <a:xfrm>
+            <a:off x="2838036" y="1993392"/>
+            <a:ext cx="749808" cy="219456"/>
+          </a:xfrm>
+          <a:prstGeom prst="rect">
+            <a:avLst/>
+          </a:prstGeom>
+          <a:noFill/>
+          <a:ln/>
+        </p:spPr>
+        <p:txBody>
+          <a:bodyPr wrap="square" lIns="0" tIns="0" rIns="0" bIns="0" rtlCol="0" anchor="ctr"/>
+          <a:lstStyle/>
+          <a:p>
+            <a:pPr marL="0" indent="0" algn="ctr">
+              <a:buNone/>
+            </a:pPr>
+            <a:r>
+              <a:rPr lang="en-US" sz="900" b="1" dirty="0">
+                <a:solidFill>
+                  <a:srgbClr val="FFFFFF"/>
+                </a:solidFill>
+                <a:latin typeface="Atkinson Hyperlegible Next" pitchFamily="34" charset="0"/>
+                <a:ea typeface="Atkinson Hyperlegible Next" pitchFamily="34" charset="-122"/>
+                <a:cs typeface="Atkinson Hyperlegible Next" pitchFamily="34" charset="-120"/>
+              </a:rPr>
+              <a:t>działa</a:t>
+            </a:r>
+            <a:endParaRPr lang="en-US" sz="900" dirty="0"/>
+          </a:p>
+        </p:txBody>
+      </p:sp>
+      <p:sp>
+        <p:nvSpPr>
+          <p:cNvPr id="13" name="Text 11"/>
+          <p:cNvSpPr txBox="1"/>
+          <p:nvPr/>
+        </p:nvSpPr>
+        <p:spPr>
+          <a:xfrm>
+            <a:off x="2324274" y="2286000"/>
+            <a:ext cx="1245282" cy="859536"/>
+          </a:xfrm>
+          <a:prstGeom prst="rect">
+            <a:avLst/>
+          </a:prstGeom>
+          <a:noFill/>
+          <a:ln/>
+        </p:spPr>
+        <p:txBody>
+          <a:bodyPr wrap="square" lIns="0" tIns="0" rIns="0" bIns="0" rtlCol="0" anchor="t"/>
+          <a:lstStyle/>
+          <a:p>
+            <a:pPr marL="0" indent="0">
+              <a:buNone/>
+            </a:pPr>
+            <a:r>
+              <a:rPr lang="en-US" sz="1150" b="1" dirty="0">
+                <a:solidFill>
+                  <a:srgbClr val="14171A"/>
+                </a:solidFill>
+                <a:latin typeface="Atkinson Hyperlegible Next" pitchFamily="34" charset="0"/>
+                <a:ea typeface="Atkinson Hyperlegible Next" pitchFamily="34" charset="-122"/>
+                <a:cs typeface="Atkinson Hyperlegible Next" pitchFamily="34" charset="-120"/>
+              </a:rPr>
+              <a:t>Zasobnik wiedzy</a:t>
+            </a:r>
+            <a:endParaRPr lang="en-US" sz="1150" dirty="0"/>
+          </a:p>
+          <a:p>
+            <a:pPr marL="0" indent="0">
+              <a:spcBef>
+                <a:spcPts val="200"/>
+              </a:spcBef>
+              <a:buNone/>
+            </a:pPr>
+            <a:r>
+              <a:rPr lang="en-US" sz="950" dirty="0">
+                <a:solidFill>
+                  <a:srgbClr val="454D57"/>
+                </a:solidFill>
+                <a:latin typeface="Atkinson Hyperlegible Next" pitchFamily="34" charset="0"/>
+                <a:ea typeface="Atkinson Hyperlegible Next" pitchFamily="34" charset="-122"/>
+                <a:cs typeface="Atkinson Hyperlegible Next" pitchFamily="34" charset="-120"/>
+              </a:rPr>
+              <a:t>pliki i filmy w każdej drodze, edycja w panelu, trendy potrzeb</a:t>
+            </a:r>
+            <a:endParaRPr lang="en-US" sz="1150" dirty="0"/>
+          </a:p>
+        </p:txBody>
+      </p:sp>
+      <p:sp>
+        <p:nvSpPr>
+          <p:cNvPr id="14" name="Shape 12"/>
+          <p:cNvSpPr/>
+          <p:nvPr/>
+        </p:nvSpPr>
+        <p:spPr>
+          <a:xfrm>
+            <a:off x="3789012" y="1901952"/>
+            <a:ext cx="1464738" cy="1298448"/>
+          </a:xfrm>
+          <a:prstGeom prst="roundRect">
+            <a:avLst>
+              <a:gd name="adj" fmla="val 5634"/>
             </a:avLst>
           </a:prstGeom>
           <a:solidFill>
@@ -9816,13 +10007,13 @@
       </p:sp>
       <p:sp>
         <p:nvSpPr>
-          <p:cNvPr id="10" name="Text 8"/>
-          <p:cNvSpPr txBox="1"/>
-          <p:nvPr/>
-        </p:nvSpPr>
-        <p:spPr>
-          <a:xfrm>
-            <a:off x="2324274" y="1993392"/>
+          <p:cNvPr id="15" name="Text 13"/>
+          <p:cNvSpPr txBox="1"/>
+          <p:nvPr/>
+        </p:nvSpPr>
+        <p:spPr>
+          <a:xfrm>
+            <a:off x="3898740" y="1993392"/>
             <a:ext cx="457200" cy="219456"/>
           </a:xfrm>
           <a:prstGeom prst="rect">
@@ -9847,7 +10038,7 @@
                 <a:ea typeface="Atkinson Hyperlegible Next" pitchFamily="34" charset="-122"/>
                 <a:cs typeface="Atkinson Hyperlegible Next" pitchFamily="34" charset="-120"/>
               </a:rPr>
-              <a:t>II</a:t>
+              <a:t>III</a:t>
             </a:r>
             <a:endParaRPr lang="en-US" sz="1200" dirty="0"/>
           </a:p>
@@ -9855,13 +10046,13 @@
       </p:sp>
       <p:sp>
         <p:nvSpPr>
-          <p:cNvPr id="11" name="Shape 9"/>
+          <p:cNvPr id="16" name="Shape 14"/>
           <p:cNvSpPr/>
           <p:nvPr/>
         </p:nvSpPr>
         <p:spPr>
           <a:xfrm>
-            <a:off x="2838036" y="1993392"/>
+            <a:off x="4412503" y="1993392"/>
             <a:ext cx="749808" cy="219456"/>
           </a:xfrm>
           <a:prstGeom prst="roundRect">
@@ -9882,13 +10073,13 @@
       </p:sp>
       <p:sp>
         <p:nvSpPr>
-          <p:cNvPr id="12" name="Text 10"/>
-          <p:cNvSpPr txBox="1"/>
-          <p:nvPr/>
-        </p:nvSpPr>
-        <p:spPr>
-          <a:xfrm>
-            <a:off x="2838036" y="1993392"/>
+          <p:cNvPr id="17" name="Text 15"/>
+          <p:cNvSpPr txBox="1"/>
+          <p:nvPr/>
+        </p:nvSpPr>
+        <p:spPr>
+          <a:xfrm>
+            <a:off x="4412503" y="1993392"/>
             <a:ext cx="749808" cy="219456"/>
           </a:xfrm>
           <a:prstGeom prst="rect">
@@ -9921,14 +10112,14 @@
       </p:sp>
       <p:sp>
         <p:nvSpPr>
-          <p:cNvPr id="13" name="Text 11"/>
-          <p:cNvSpPr txBox="1"/>
-          <p:nvPr/>
-        </p:nvSpPr>
-        <p:spPr>
-          <a:xfrm>
-            <a:off x="2324274" y="2286000"/>
-            <a:ext cx="1245282" cy="749808"/>
+          <p:cNvPr id="18" name="Text 16"/>
+          <p:cNvSpPr txBox="1"/>
+          <p:nvPr/>
+        </p:nvSpPr>
+        <p:spPr>
+          <a:xfrm>
+            <a:off x="3898740" y="2286000"/>
+            <a:ext cx="1245282" cy="859536"/>
           </a:xfrm>
           <a:prstGeom prst="rect">
             <a:avLst/>
@@ -9952,7 +10143,7 @@
                 <a:ea typeface="Atkinson Hyperlegible Next" pitchFamily="34" charset="-122"/>
                 <a:cs typeface="Atkinson Hyperlegible Next" pitchFamily="34" charset="-120"/>
               </a:rPr>
-              <a:t>Zasobnik wiedzy</a:t>
+              <a:t>Kreator pomysłów</a:t>
             </a:r>
             <a:endParaRPr lang="en-US" sz="1150" dirty="0"/>
           </a:p>
@@ -9972,7 +10163,7 @@
                 <a:ea typeface="Atkinson Hyperlegible Next" pitchFamily="34" charset="-122"/>
                 <a:cs typeface="Atkinson Hyperlegible Next" pitchFamily="34" charset="-120"/>
               </a:rPr>
-              <a:t>wiedza na drogach, edycja w panelu, trendy</a:t>
+              <a:t>fiszka pomysłu, podobne rozwiązania</a:t>
             </a:r>
             <a:endParaRPr lang="en-US" sz="1150" dirty="0"/>
           </a:p>
@@ -9980,18 +10171,591 @@
       </p:sp>
       <p:sp>
         <p:nvSpPr>
-          <p:cNvPr id="14" name="Shape 12"/>
+          <p:cNvPr id="19" name="Shape 17"/>
           <p:cNvSpPr/>
           <p:nvPr/>
         </p:nvSpPr>
         <p:spPr>
           <a:xfrm>
-            <a:off x="3789012" y="1901952"/>
-            <a:ext cx="1464738" cy="1188720"/>
+            <a:off x="5363479" y="1901952"/>
+            <a:ext cx="1464738" cy="1298448"/>
           </a:xfrm>
           <a:prstGeom prst="roundRect">
             <a:avLst>
-              <a:gd name="adj" fmla="val 6154"/>
+              <a:gd name="adj" fmla="val 5634"/>
+            </a:avLst>
+          </a:prstGeom>
+          <a:solidFill>
+            <a:srgbClr val="EEF4FB"/>
+          </a:solidFill>
+          <a:ln w="12700">
+            <a:solidFill>
+              <a:srgbClr val="EEF4FB"/>
+            </a:solidFill>
+            <a:prstDash val="solid"/>
+          </a:ln>
+        </p:spPr>
+      </p:sp>
+      <p:sp>
+        <p:nvSpPr>
+          <p:cNvPr id="20" name="Text 18"/>
+          <p:cNvSpPr txBox="1"/>
+          <p:nvPr/>
+        </p:nvSpPr>
+        <p:spPr>
+          <a:xfrm>
+            <a:off x="5473207" y="1993392"/>
+            <a:ext cx="457200" cy="219456"/>
+          </a:xfrm>
+          <a:prstGeom prst="rect">
+            <a:avLst/>
+          </a:prstGeom>
+          <a:noFill/>
+          <a:ln/>
+        </p:spPr>
+        <p:txBody>
+          <a:bodyPr wrap="square" lIns="0" tIns="0" rIns="0" bIns="0" rtlCol="0" anchor="ctr"/>
+          <a:lstStyle/>
+          <a:p>
+            <a:pPr marL="0" indent="0">
+              <a:buNone/>
+            </a:pPr>
+            <a:r>
+              <a:rPr lang="en-US" sz="1200" b="1" dirty="0">
+                <a:solidFill>
+                  <a:srgbClr val="1A4B8C"/>
+                </a:solidFill>
+                <a:latin typeface="Atkinson Hyperlegible Next" pitchFamily="34" charset="0"/>
+                <a:ea typeface="Atkinson Hyperlegible Next" pitchFamily="34" charset="-122"/>
+                <a:cs typeface="Atkinson Hyperlegible Next" pitchFamily="34" charset="-120"/>
+              </a:rPr>
+              <a:t>IV</a:t>
+            </a:r>
+            <a:endParaRPr lang="en-US" sz="1200" dirty="0"/>
+          </a:p>
+        </p:txBody>
+      </p:sp>
+      <p:sp>
+        <p:nvSpPr>
+          <p:cNvPr id="21" name="Shape 19"/>
+          <p:cNvSpPr/>
+          <p:nvPr/>
+        </p:nvSpPr>
+        <p:spPr>
+          <a:xfrm>
+            <a:off x="5986969" y="1993392"/>
+            <a:ext cx="749808" cy="219456"/>
+          </a:xfrm>
+          <a:prstGeom prst="roundRect">
+            <a:avLst>
+              <a:gd name="adj" fmla="val 50000"/>
+            </a:avLst>
+          </a:prstGeom>
+          <a:solidFill>
+            <a:srgbClr val="1A4B8C"/>
+          </a:solidFill>
+          <a:ln w="12700">
+            <a:solidFill>
+              <a:srgbClr val="1A4B8C"/>
+            </a:solidFill>
+            <a:prstDash val="solid"/>
+          </a:ln>
+        </p:spPr>
+      </p:sp>
+      <p:sp>
+        <p:nvSpPr>
+          <p:cNvPr id="22" name="Text 20"/>
+          <p:cNvSpPr txBox="1"/>
+          <p:nvPr/>
+        </p:nvSpPr>
+        <p:spPr>
+          <a:xfrm>
+            <a:off x="5986969" y="1993392"/>
+            <a:ext cx="749808" cy="219456"/>
+          </a:xfrm>
+          <a:prstGeom prst="rect">
+            <a:avLst/>
+          </a:prstGeom>
+          <a:noFill/>
+          <a:ln/>
+        </p:spPr>
+        <p:txBody>
+          <a:bodyPr wrap="square" lIns="0" tIns="0" rIns="0" bIns="0" rtlCol="0" anchor="ctr"/>
+          <a:lstStyle/>
+          <a:p>
+            <a:pPr marL="0" indent="0" algn="ctr">
+              <a:buNone/>
+            </a:pPr>
+            <a:r>
+              <a:rPr lang="en-US" sz="900" b="1" dirty="0">
+                <a:solidFill>
+                  <a:srgbClr val="FFFFFF"/>
+                </a:solidFill>
+                <a:latin typeface="Atkinson Hyperlegible Next" pitchFamily="34" charset="0"/>
+                <a:ea typeface="Atkinson Hyperlegible Next" pitchFamily="34" charset="-122"/>
+                <a:cs typeface="Atkinson Hyperlegible Next" pitchFamily="34" charset="-120"/>
+              </a:rPr>
+              <a:t>działa</a:t>
+            </a:r>
+            <a:endParaRPr lang="en-US" sz="900" dirty="0"/>
+          </a:p>
+        </p:txBody>
+      </p:sp>
+      <p:sp>
+        <p:nvSpPr>
+          <p:cNvPr id="23" name="Text 21"/>
+          <p:cNvSpPr txBox="1"/>
+          <p:nvPr/>
+        </p:nvSpPr>
+        <p:spPr>
+          <a:xfrm>
+            <a:off x="5473207" y="2286000"/>
+            <a:ext cx="1245282" cy="859536"/>
+          </a:xfrm>
+          <a:prstGeom prst="rect">
+            <a:avLst/>
+          </a:prstGeom>
+          <a:noFill/>
+          <a:ln/>
+        </p:spPr>
+        <p:txBody>
+          <a:bodyPr wrap="square" lIns="0" tIns="0" rIns="0" bIns="0" rtlCol="0" anchor="t"/>
+          <a:lstStyle/>
+          <a:p>
+            <a:pPr marL="0" indent="0">
+              <a:buNone/>
+            </a:pPr>
+            <a:r>
+              <a:rPr lang="en-US" sz="1150" b="1" dirty="0">
+                <a:solidFill>
+                  <a:srgbClr val="14171A"/>
+                </a:solidFill>
+                <a:latin typeface="Atkinson Hyperlegible Next" pitchFamily="34" charset="0"/>
+                <a:ea typeface="Atkinson Hyperlegible Next" pitchFamily="34" charset="-122"/>
+                <a:cs typeface="Atkinson Hyperlegible Next" pitchFamily="34" charset="-120"/>
+              </a:rPr>
+              <a:t>Tester innowacji</a:t>
+            </a:r>
+            <a:endParaRPr lang="en-US" sz="1150" dirty="0"/>
+          </a:p>
+          <a:p>
+            <a:pPr marL="0" indent="0">
+              <a:spcBef>
+                <a:spcPts val="200"/>
+              </a:spcBef>
+              <a:buNone/>
+            </a:pPr>
+            <a:r>
+              <a:rPr lang="en-US" sz="950" dirty="0">
+                <a:solidFill>
+                  <a:srgbClr val="454D57"/>
+                </a:solidFill>
+                <a:latin typeface="Atkinson Hyperlegible Next" pitchFamily="34" charset="0"/>
+                <a:ea typeface="Atkinson Hyperlegible Next" pitchFamily="34" charset="-122"/>
+                <a:cs typeface="Atkinson Hyperlegible Next" pitchFamily="34" charset="-120"/>
+              </a:rPr>
+              <a:t>oceny, opinie, propozycje ulepszeń, zapisy do testów</a:t>
+            </a:r>
+            <a:endParaRPr lang="en-US" sz="1150" dirty="0"/>
+          </a:p>
+        </p:txBody>
+      </p:sp>
+      <p:sp>
+        <p:nvSpPr>
+          <p:cNvPr id="24" name="Shape 22"/>
+          <p:cNvSpPr/>
+          <p:nvPr/>
+        </p:nvSpPr>
+        <p:spPr>
+          <a:xfrm>
+            <a:off x="6937945" y="1901952"/>
+            <a:ext cx="1464738" cy="1298448"/>
+          </a:xfrm>
+          <a:prstGeom prst="roundRect">
+            <a:avLst>
+              <a:gd name="adj" fmla="val 5634"/>
+            </a:avLst>
+          </a:prstGeom>
+          <a:solidFill>
+            <a:srgbClr val="EEF4FB"/>
+          </a:solidFill>
+          <a:ln w="12700">
+            <a:solidFill>
+              <a:srgbClr val="EEF4FB"/>
+            </a:solidFill>
+            <a:prstDash val="solid"/>
+          </a:ln>
+        </p:spPr>
+      </p:sp>
+      <p:sp>
+        <p:nvSpPr>
+          <p:cNvPr id="25" name="Text 23"/>
+          <p:cNvSpPr txBox="1"/>
+          <p:nvPr/>
+        </p:nvSpPr>
+        <p:spPr>
+          <a:xfrm>
+            <a:off x="7047673" y="1993392"/>
+            <a:ext cx="457200" cy="219456"/>
+          </a:xfrm>
+          <a:prstGeom prst="rect">
+            <a:avLst/>
+          </a:prstGeom>
+          <a:noFill/>
+          <a:ln/>
+        </p:spPr>
+        <p:txBody>
+          <a:bodyPr wrap="square" lIns="0" tIns="0" rIns="0" bIns="0" rtlCol="0" anchor="ctr"/>
+          <a:lstStyle/>
+          <a:p>
+            <a:pPr marL="0" indent="0">
+              <a:buNone/>
+            </a:pPr>
+            <a:r>
+              <a:rPr lang="en-US" sz="1200" b="1" dirty="0">
+                <a:solidFill>
+                  <a:srgbClr val="1A4B8C"/>
+                </a:solidFill>
+                <a:latin typeface="Atkinson Hyperlegible Next" pitchFamily="34" charset="0"/>
+                <a:ea typeface="Atkinson Hyperlegible Next" pitchFamily="34" charset="-122"/>
+                <a:cs typeface="Atkinson Hyperlegible Next" pitchFamily="34" charset="-120"/>
+              </a:rPr>
+              <a:t>V</a:t>
+            </a:r>
+            <a:endParaRPr lang="en-US" sz="1200" dirty="0"/>
+          </a:p>
+        </p:txBody>
+      </p:sp>
+      <p:sp>
+        <p:nvSpPr>
+          <p:cNvPr id="26" name="Shape 24"/>
+          <p:cNvSpPr/>
+          <p:nvPr/>
+        </p:nvSpPr>
+        <p:spPr>
+          <a:xfrm>
+            <a:off x="7561435" y="1993392"/>
+            <a:ext cx="749808" cy="219456"/>
+          </a:xfrm>
+          <a:prstGeom prst="roundRect">
+            <a:avLst>
+              <a:gd name="adj" fmla="val 50000"/>
+            </a:avLst>
+          </a:prstGeom>
+          <a:solidFill>
+            <a:srgbClr val="1A4B8C"/>
+          </a:solidFill>
+          <a:ln w="12700">
+            <a:solidFill>
+              <a:srgbClr val="1A4B8C"/>
+            </a:solidFill>
+            <a:prstDash val="solid"/>
+          </a:ln>
+        </p:spPr>
+      </p:sp>
+      <p:sp>
+        <p:nvSpPr>
+          <p:cNvPr id="27" name="Text 25"/>
+          <p:cNvSpPr txBox="1"/>
+          <p:nvPr/>
+        </p:nvSpPr>
+        <p:spPr>
+          <a:xfrm>
+            <a:off x="7561435" y="1993392"/>
+            <a:ext cx="749808" cy="219456"/>
+          </a:xfrm>
+          <a:prstGeom prst="rect">
+            <a:avLst/>
+          </a:prstGeom>
+          <a:noFill/>
+          <a:ln/>
+        </p:spPr>
+        <p:txBody>
+          <a:bodyPr wrap="square" lIns="0" tIns="0" rIns="0" bIns="0" rtlCol="0" anchor="ctr"/>
+          <a:lstStyle/>
+          <a:p>
+            <a:pPr marL="0" indent="0" algn="ctr">
+              <a:buNone/>
+            </a:pPr>
+            <a:r>
+              <a:rPr lang="en-US" sz="900" b="1" dirty="0">
+                <a:solidFill>
+                  <a:srgbClr val="FFFFFF"/>
+                </a:solidFill>
+                <a:latin typeface="Atkinson Hyperlegible Next" pitchFamily="34" charset="0"/>
+                <a:ea typeface="Atkinson Hyperlegible Next" pitchFamily="34" charset="-122"/>
+                <a:cs typeface="Atkinson Hyperlegible Next" pitchFamily="34" charset="-120"/>
+              </a:rPr>
+              <a:t>działa</a:t>
+            </a:r>
+            <a:endParaRPr lang="en-US" sz="900" dirty="0"/>
+          </a:p>
+        </p:txBody>
+      </p:sp>
+      <p:sp>
+        <p:nvSpPr>
+          <p:cNvPr id="28" name="Text 26"/>
+          <p:cNvSpPr txBox="1"/>
+          <p:nvPr/>
+        </p:nvSpPr>
+        <p:spPr>
+          <a:xfrm>
+            <a:off x="7047673" y="2286000"/>
+            <a:ext cx="1245282" cy="859536"/>
+          </a:xfrm>
+          <a:prstGeom prst="rect">
+            <a:avLst/>
+          </a:prstGeom>
+          <a:noFill/>
+          <a:ln/>
+        </p:spPr>
+        <p:txBody>
+          <a:bodyPr wrap="square" lIns="0" tIns="0" rIns="0" bIns="0" rtlCol="0" anchor="t"/>
+          <a:lstStyle/>
+          <a:p>
+            <a:pPr marL="0" indent="0">
+              <a:buNone/>
+            </a:pPr>
+            <a:r>
+              <a:rPr lang="en-US" sz="1150" b="1" dirty="0">
+                <a:solidFill>
+                  <a:srgbClr val="14171A"/>
+                </a:solidFill>
+                <a:latin typeface="Atkinson Hyperlegible Next" pitchFamily="34" charset="0"/>
+                <a:ea typeface="Atkinson Hyperlegible Next" pitchFamily="34" charset="-122"/>
+                <a:cs typeface="Atkinson Hyperlegible Next" pitchFamily="34" charset="-120"/>
+              </a:rPr>
+              <a:t>Platforma aktywnej komunikacji</a:t>
+            </a:r>
+            <a:endParaRPr lang="en-US" sz="1150" dirty="0"/>
+          </a:p>
+          <a:p>
+            <a:pPr marL="0" indent="0">
+              <a:spcBef>
+                <a:spcPts val="200"/>
+              </a:spcBef>
+              <a:buNone/>
+            </a:pPr>
+            <a:r>
+              <a:rPr lang="en-US" sz="950" dirty="0">
+                <a:solidFill>
+                  <a:srgbClr val="454D57"/>
+                </a:solidFill>
+                <a:latin typeface="Atkinson Hyperlegible Next" pitchFamily="34" charset="0"/>
+                <a:ea typeface="Atkinson Hyperlegible Next" pitchFamily="34" charset="-122"/>
+                <a:cs typeface="Atkinson Hyperlegible Next" pitchFamily="34" charset="-120"/>
+              </a:rPr>
+              <a:t>rozmowy bez konta, mentorzy, partnerstwa</a:t>
+            </a:r>
+            <a:endParaRPr lang="en-US" sz="1150" dirty="0"/>
+          </a:p>
+        </p:txBody>
+      </p:sp>
+      <p:sp>
+        <p:nvSpPr>
+          <p:cNvPr id="29" name="Shape 27"/>
+          <p:cNvSpPr/>
+          <p:nvPr/>
+        </p:nvSpPr>
+        <p:spPr>
+          <a:xfrm>
+            <a:off x="8512411" y="1901952"/>
+            <a:ext cx="1464738" cy="1298448"/>
+          </a:xfrm>
+          <a:prstGeom prst="roundRect">
+            <a:avLst>
+              <a:gd name="adj" fmla="val 5634"/>
+            </a:avLst>
+          </a:prstGeom>
+          <a:solidFill>
+            <a:srgbClr val="EEF4FB"/>
+          </a:solidFill>
+          <a:ln w="12700">
+            <a:solidFill>
+              <a:srgbClr val="EEF4FB"/>
+            </a:solidFill>
+            <a:prstDash val="solid"/>
+          </a:ln>
+        </p:spPr>
+      </p:sp>
+      <p:sp>
+        <p:nvSpPr>
+          <p:cNvPr id="30" name="Text 28"/>
+          <p:cNvSpPr txBox="1"/>
+          <p:nvPr/>
+        </p:nvSpPr>
+        <p:spPr>
+          <a:xfrm>
+            <a:off x="8622139" y="1993392"/>
+            <a:ext cx="457200" cy="219456"/>
+          </a:xfrm>
+          <a:prstGeom prst="rect">
+            <a:avLst/>
+          </a:prstGeom>
+          <a:noFill/>
+          <a:ln/>
+        </p:spPr>
+        <p:txBody>
+          <a:bodyPr wrap="square" lIns="0" tIns="0" rIns="0" bIns="0" rtlCol="0" anchor="ctr"/>
+          <a:lstStyle/>
+          <a:p>
+            <a:pPr marL="0" indent="0">
+              <a:buNone/>
+            </a:pPr>
+            <a:r>
+              <a:rPr lang="en-US" sz="1200" b="1" dirty="0">
+                <a:solidFill>
+                  <a:srgbClr val="1A4B8C"/>
+                </a:solidFill>
+                <a:latin typeface="Atkinson Hyperlegible Next" pitchFamily="34" charset="0"/>
+                <a:ea typeface="Atkinson Hyperlegible Next" pitchFamily="34" charset="-122"/>
+                <a:cs typeface="Atkinson Hyperlegible Next" pitchFamily="34" charset="-120"/>
+              </a:rPr>
+              <a:t>VI</a:t>
+            </a:r>
+            <a:endParaRPr lang="en-US" sz="1200" dirty="0"/>
+          </a:p>
+        </p:txBody>
+      </p:sp>
+      <p:sp>
+        <p:nvSpPr>
+          <p:cNvPr id="31" name="Shape 29"/>
+          <p:cNvSpPr/>
+          <p:nvPr/>
+        </p:nvSpPr>
+        <p:spPr>
+          <a:xfrm>
+            <a:off x="9135901" y="1993392"/>
+            <a:ext cx="749808" cy="219456"/>
+          </a:xfrm>
+          <a:prstGeom prst="roundRect">
+            <a:avLst>
+              <a:gd name="adj" fmla="val 50000"/>
+            </a:avLst>
+          </a:prstGeom>
+          <a:solidFill>
+            <a:srgbClr val="1A4B8C"/>
+          </a:solidFill>
+          <a:ln w="12700">
+            <a:solidFill>
+              <a:srgbClr val="1A4B8C"/>
+            </a:solidFill>
+            <a:prstDash val="solid"/>
+          </a:ln>
+        </p:spPr>
+      </p:sp>
+      <p:sp>
+        <p:nvSpPr>
+          <p:cNvPr id="32" name="Text 30"/>
+          <p:cNvSpPr txBox="1"/>
+          <p:nvPr/>
+        </p:nvSpPr>
+        <p:spPr>
+          <a:xfrm>
+            <a:off x="9135901" y="1993392"/>
+            <a:ext cx="749808" cy="219456"/>
+          </a:xfrm>
+          <a:prstGeom prst="rect">
+            <a:avLst/>
+          </a:prstGeom>
+          <a:noFill/>
+          <a:ln/>
+        </p:spPr>
+        <p:txBody>
+          <a:bodyPr wrap="square" lIns="0" tIns="0" rIns="0" bIns="0" rtlCol="0" anchor="ctr"/>
+          <a:lstStyle/>
+          <a:p>
+            <a:pPr marL="0" indent="0" algn="ctr">
+              <a:buNone/>
+            </a:pPr>
+            <a:r>
+              <a:rPr lang="en-US" sz="900" b="1" dirty="0">
+                <a:solidFill>
+                  <a:srgbClr val="FFFFFF"/>
+                </a:solidFill>
+                <a:latin typeface="Atkinson Hyperlegible Next" pitchFamily="34" charset="0"/>
+                <a:ea typeface="Atkinson Hyperlegible Next" pitchFamily="34" charset="-122"/>
+                <a:cs typeface="Atkinson Hyperlegible Next" pitchFamily="34" charset="-120"/>
+              </a:rPr>
+              <a:t>działa</a:t>
+            </a:r>
+            <a:endParaRPr lang="en-US" sz="900" dirty="0"/>
+          </a:p>
+        </p:txBody>
+      </p:sp>
+      <p:sp>
+        <p:nvSpPr>
+          <p:cNvPr id="33" name="Text 31"/>
+          <p:cNvSpPr txBox="1"/>
+          <p:nvPr/>
+        </p:nvSpPr>
+        <p:spPr>
+          <a:xfrm>
+            <a:off x="8622139" y="2286000"/>
+            <a:ext cx="1245282" cy="859536"/>
+          </a:xfrm>
+          <a:prstGeom prst="rect">
+            <a:avLst/>
+          </a:prstGeom>
+          <a:noFill/>
+          <a:ln/>
+        </p:spPr>
+        <p:txBody>
+          <a:bodyPr wrap="square" lIns="0" tIns="0" rIns="0" bIns="0" rtlCol="0" anchor="t"/>
+          <a:lstStyle/>
+          <a:p>
+            <a:pPr marL="0" indent="0">
+              <a:buNone/>
+            </a:pPr>
+            <a:r>
+              <a:rPr lang="en-US" sz="1150" b="1" dirty="0">
+                <a:solidFill>
+                  <a:srgbClr val="14171A"/>
+                </a:solidFill>
+                <a:latin typeface="Atkinson Hyperlegible Next" pitchFamily="34" charset="0"/>
+                <a:ea typeface="Atkinson Hyperlegible Next" pitchFamily="34" charset="-122"/>
+                <a:cs typeface="Atkinson Hyperlegible Next" pitchFamily="34" charset="-120"/>
+              </a:rPr>
+              <a:t>Panel administratora</a:t>
+            </a:r>
+            <a:endParaRPr lang="en-US" sz="1150" dirty="0"/>
+          </a:p>
+          <a:p>
+            <a:pPr marL="0" indent="0">
+              <a:spcBef>
+                <a:spcPts val="200"/>
+              </a:spcBef>
+              <a:buNone/>
+            </a:pPr>
+            <a:r>
+              <a:rPr lang="en-US" sz="950" dirty="0">
+                <a:solidFill>
+                  <a:srgbClr val="454D57"/>
+                </a:solidFill>
+                <a:latin typeface="Atkinson Hyperlegible Next" pitchFamily="34" charset="0"/>
+                <a:ea typeface="Atkinson Hyperlegible Next" pitchFamily="34" charset="-122"/>
+                <a:cs typeface="Atkinson Hyperlegible Next" pitchFamily="34" charset="-120"/>
+              </a:rPr>
+              <a:t>zgłoszenia, decyzje, odpowiedzi, CSV</a:t>
+            </a:r>
+            <a:endParaRPr lang="en-US" sz="1150" dirty="0"/>
+          </a:p>
+        </p:txBody>
+      </p:sp>
+      <p:sp>
+        <p:nvSpPr>
+          <p:cNvPr id="34" name="Shape 32"/>
+          <p:cNvSpPr/>
+          <p:nvPr/>
+        </p:nvSpPr>
+        <p:spPr>
+          <a:xfrm>
+            <a:off x="10086877" y="1901952"/>
+            <a:ext cx="1464738" cy="1298448"/>
+          </a:xfrm>
+          <a:prstGeom prst="roundRect">
+            <a:avLst>
+              <a:gd name="adj" fmla="val 5634"/>
             </a:avLst>
           </a:prstGeom>
           <a:solidFill>
@@ -10007,13 +10771,13 @@
       </p:sp>
       <p:sp>
         <p:nvSpPr>
-          <p:cNvPr id="15" name="Text 13"/>
-          <p:cNvSpPr txBox="1"/>
-          <p:nvPr/>
-        </p:nvSpPr>
-        <p:spPr>
-          <a:xfrm>
-            <a:off x="3898740" y="1993392"/>
+          <p:cNvPr id="35" name="Text 33"/>
+          <p:cNvSpPr txBox="1"/>
+          <p:nvPr/>
+        </p:nvSpPr>
+        <p:spPr>
+          <a:xfrm>
+            <a:off x="10196605" y="1993392"/>
             <a:ext cx="457200" cy="219456"/>
           </a:xfrm>
           <a:prstGeom prst="rect">
@@ -10038,7 +10802,7 @@
                 <a:ea typeface="Atkinson Hyperlegible Next" pitchFamily="34" charset="-122"/>
                 <a:cs typeface="Atkinson Hyperlegible Next" pitchFamily="34" charset="-120"/>
               </a:rPr>
-              <a:t>III</a:t>
+              <a:t>VII</a:t>
             </a:r>
             <a:endParaRPr lang="en-US" sz="1200" dirty="0"/>
           </a:p>
@@ -10046,13 +10810,13 @@
       </p:sp>
       <p:sp>
         <p:nvSpPr>
-          <p:cNvPr id="16" name="Shape 14"/>
+          <p:cNvPr id="36" name="Shape 34"/>
           <p:cNvSpPr/>
           <p:nvPr/>
         </p:nvSpPr>
         <p:spPr>
           <a:xfrm>
-            <a:off x="4412503" y="1993392"/>
+            <a:off x="10710367" y="1993392"/>
             <a:ext cx="749808" cy="219456"/>
           </a:xfrm>
           <a:prstGeom prst="roundRect">
@@ -10073,13 +10837,13 @@
       </p:sp>
       <p:sp>
         <p:nvSpPr>
-          <p:cNvPr id="17" name="Text 15"/>
-          <p:cNvSpPr txBox="1"/>
-          <p:nvPr/>
-        </p:nvSpPr>
-        <p:spPr>
-          <a:xfrm>
-            <a:off x="4412503" y="1993392"/>
+          <p:cNvPr id="37" name="Text 35"/>
+          <p:cNvSpPr txBox="1"/>
+          <p:nvPr/>
+        </p:nvSpPr>
+        <p:spPr>
+          <a:xfrm>
+            <a:off x="10710367" y="1993392"/>
             <a:ext cx="749808" cy="219456"/>
           </a:xfrm>
           <a:prstGeom prst="rect">
@@ -10112,14 +10876,14 @@
       </p:sp>
       <p:sp>
         <p:nvSpPr>
-          <p:cNvPr id="18" name="Text 16"/>
-          <p:cNvSpPr txBox="1"/>
-          <p:nvPr/>
-        </p:nvSpPr>
-        <p:spPr>
-          <a:xfrm>
-            <a:off x="3898740" y="2286000"/>
-            <a:ext cx="1245282" cy="749808"/>
+          <p:cNvPr id="38" name="Text 36"/>
+          <p:cNvSpPr txBox="1"/>
+          <p:nvPr/>
+        </p:nvSpPr>
+        <p:spPr>
+          <a:xfrm>
+            <a:off x="10196605" y="2286000"/>
+            <a:ext cx="1245282" cy="859536"/>
           </a:xfrm>
           <a:prstGeom prst="rect">
             <a:avLst/>
@@ -10143,7 +10907,7 @@
                 <a:ea typeface="Atkinson Hyperlegible Next" pitchFamily="34" charset="-122"/>
                 <a:cs typeface="Atkinson Hyperlegible Next" pitchFamily="34" charset="-120"/>
               </a:rPr>
-              <a:t>Kreator pomysłów</a:t>
+              <a:t>Middleman Innowacji</a:t>
             </a:r>
             <a:endParaRPr lang="en-US" sz="1150" dirty="0"/>
           </a:p>
@@ -10163,7 +10927,7 @@
                 <a:ea typeface="Atkinson Hyperlegible Next" pitchFamily="34" charset="-122"/>
                 <a:cs typeface="Atkinson Hyperlegible Next" pitchFamily="34" charset="-120"/>
               </a:rPr>
-              <a:t>fiszka pomysłu, podobne rozwiązania</a:t>
+              <a:t>ścieżki dopasowane do roli i gminy</a:t>
             </a:r>
             <a:endParaRPr lang="en-US" sz="1150" dirty="0"/>
           </a:p>
@@ -10171,18 +10935,865 @@
       </p:sp>
       <p:sp>
         <p:nvSpPr>
-          <p:cNvPr id="19" name="Shape 17"/>
+          <p:cNvPr id="39" name="Text 37"/>
+          <p:cNvSpPr txBox="1"/>
+          <p:nvPr/>
+        </p:nvSpPr>
+        <p:spPr>
+          <a:xfrm>
+            <a:off x="640080" y="3355848"/>
+            <a:ext cx="10911535" cy="256032"/>
+          </a:xfrm>
+          <a:prstGeom prst="rect">
+            <a:avLst/>
+          </a:prstGeom>
+          <a:noFill/>
+          <a:ln/>
+        </p:spPr>
+        <p:txBody>
+          <a:bodyPr wrap="square" lIns="0" tIns="0" rIns="0" bIns="0" rtlCol="0" anchor="ctr"/>
+          <a:lstStyle/>
+          <a:p>
+            <a:pPr marL="0" indent="0">
+              <a:buNone/>
+            </a:pPr>
+            <a:r>
+              <a:rPr lang="en-US" sz="1000" b="1" kern="0" spc="100" dirty="0">
+                <a:solidFill>
+                  <a:srgbClr val="1A4B8C"/>
+                </a:solidFill>
+                <a:latin typeface="Atkinson Hyperlegible Next" pitchFamily="34" charset="0"/>
+                <a:ea typeface="Atkinson Hyperlegible Next" pitchFamily="34" charset="-122"/>
+                <a:cs typeface="Atkinson Hyperlegible Next" pitchFamily="34" charset="-120"/>
+              </a:rPr>
+              <a:t>PLAN ROZWOJU  ·  DO ZBUDOWANIA</a:t>
+            </a:r>
+            <a:endParaRPr lang="en-US" sz="1000" dirty="0"/>
+          </a:p>
+        </p:txBody>
+      </p:sp>
+      <p:sp>
+        <p:nvSpPr>
+          <p:cNvPr id="40" name="Text 38"/>
+          <p:cNvSpPr txBox="1"/>
+          <p:nvPr/>
+        </p:nvSpPr>
+        <p:spPr>
+          <a:xfrm>
+            <a:off x="640080" y="3666744"/>
+            <a:ext cx="4846320" cy="274320"/>
+          </a:xfrm>
+          <a:prstGeom prst="rect">
+            <a:avLst/>
+          </a:prstGeom>
+          <a:noFill/>
+          <a:ln/>
+        </p:spPr>
+        <p:txBody>
+          <a:bodyPr wrap="square" lIns="0" tIns="0" rIns="0" bIns="0" rtlCol="0" anchor="ctr"/>
+          <a:lstStyle/>
+          <a:p>
+            <a:pPr marL="0" indent="0">
+              <a:buNone/>
+            </a:pPr>
+            <a:r>
+              <a:rPr lang="en-US" sz="1400" b="1" dirty="0">
+                <a:solidFill>
+                  <a:srgbClr val="1A4B8C"/>
+                </a:solidFill>
+                <a:latin typeface="Atkinson Hyperlegible Next" pitchFamily="34" charset="0"/>
+                <a:ea typeface="Atkinson Hyperlegible Next" pitchFamily="34" charset="-122"/>
+                <a:cs typeface="Atkinson Hyperlegible Next" pitchFamily="34" charset="-120"/>
+              </a:rPr>
+              <a:t>Trzy role w Dziale Innowacji Społecznych ROPS</a:t>
+            </a:r>
+            <a:endParaRPr lang="en-US" sz="1400" dirty="0"/>
+          </a:p>
+        </p:txBody>
+      </p:sp>
+      <p:sp>
+        <p:nvSpPr>
+          <p:cNvPr id="41" name="Text 39"/>
+          <p:cNvSpPr txBox="1"/>
+          <p:nvPr/>
+        </p:nvSpPr>
+        <p:spPr>
+          <a:xfrm>
+            <a:off x="640080" y="3995928"/>
+            <a:ext cx="4846320" cy="402336"/>
+          </a:xfrm>
+          <a:prstGeom prst="rect">
+            <a:avLst/>
+          </a:prstGeom>
+          <a:noFill/>
+          <a:ln/>
+        </p:spPr>
+        <p:txBody>
+          <a:bodyPr wrap="square" lIns="0" tIns="0" rIns="0" bIns="0" rtlCol="0" anchor="t"/>
+          <a:lstStyle/>
+          <a:p>
+            <a:pPr marL="0" indent="0">
+              <a:buNone/>
+            </a:pPr>
+            <a:r>
+              <a:rPr lang="en-US" sz="1250" b="1" dirty="0">
+                <a:solidFill>
+                  <a:srgbClr val="14171A"/>
+                </a:solidFill>
+                <a:latin typeface="Atkinson Hyperlegible Next" pitchFamily="34" charset="0"/>
+                <a:ea typeface="Atkinson Hyperlegible Next" pitchFamily="34" charset="-122"/>
+                <a:cs typeface="Atkinson Hyperlegible Next" pitchFamily="34" charset="-120"/>
+              </a:rPr>
+              <a:t>Opiekun kategorii</a:t>
+            </a:r>
+            <a:endParaRPr lang="en-US" sz="1250" dirty="0"/>
+          </a:p>
+          <a:p>
+            <a:pPr marL="0" indent="0">
+              <a:buNone/>
+            </a:pPr>
+            <a:r>
+              <a:rPr lang="en-US" sz="1100" dirty="0">
+                <a:solidFill>
+                  <a:srgbClr val="454D57"/>
+                </a:solidFill>
+                <a:latin typeface="Atkinson Hyperlegible Next" pitchFamily="34" charset="0"/>
+                <a:ea typeface="Atkinson Hyperlegible Next" pitchFamily="34" charset="-122"/>
+                <a:cs typeface="Atkinson Hyperlegible Next" pitchFamily="34" charset="-120"/>
+              </a:rPr>
+              <a:t>osoba wskazana w każdej drodze; przyjmuje prośby o kontakt</a:t>
+            </a:r>
+            <a:endParaRPr lang="en-US" sz="1250" dirty="0"/>
+          </a:p>
+        </p:txBody>
+      </p:sp>
+      <p:sp>
+        <p:nvSpPr>
+          <p:cNvPr id="42" name="Text 40"/>
+          <p:cNvSpPr txBox="1"/>
+          <p:nvPr/>
+        </p:nvSpPr>
+        <p:spPr>
+          <a:xfrm>
+            <a:off x="640080" y="4398264"/>
+            <a:ext cx="4846320" cy="402336"/>
+          </a:xfrm>
+          <a:prstGeom prst="rect">
+            <a:avLst/>
+          </a:prstGeom>
+          <a:noFill/>
+          <a:ln/>
+        </p:spPr>
+        <p:txBody>
+          <a:bodyPr wrap="square" lIns="0" tIns="0" rIns="0" bIns="0" rtlCol="0" anchor="t"/>
+          <a:lstStyle/>
+          <a:p>
+            <a:pPr marL="0" indent="0">
+              <a:buNone/>
+            </a:pPr>
+            <a:r>
+              <a:rPr lang="en-US" sz="1250" b="1" dirty="0">
+                <a:solidFill>
+                  <a:srgbClr val="14171A"/>
+                </a:solidFill>
+                <a:latin typeface="Atkinson Hyperlegible Next" pitchFamily="34" charset="0"/>
+                <a:ea typeface="Atkinson Hyperlegible Next" pitchFamily="34" charset="-122"/>
+                <a:cs typeface="Atkinson Hyperlegible Next" pitchFamily="34" charset="-120"/>
+              </a:rPr>
+              <a:t>Redaktor katalogu</a:t>
+            </a:r>
+            <a:endParaRPr lang="en-US" sz="1250" dirty="0"/>
+          </a:p>
+          <a:p>
+            <a:pPr marL="0" indent="0">
+              <a:buNone/>
+            </a:pPr>
+            <a:r>
+              <a:rPr lang="en-US" sz="1100" dirty="0">
+                <a:solidFill>
+                  <a:srgbClr val="454D57"/>
+                </a:solidFill>
+                <a:latin typeface="Atkinson Hyperlegible Next" pitchFamily="34" charset="0"/>
+                <a:ea typeface="Atkinson Hyperlegible Next" pitchFamily="34" charset="-122"/>
+                <a:cs typeface="Atkinson Hyperlegible Next" pitchFamily="34" charset="-120"/>
+              </a:rPr>
+              <a:t>aktualizuje opisy, co roku pyta autorów o zmiany, odnotowuje wdrożenia</a:t>
+            </a:r>
+            <a:endParaRPr lang="en-US" sz="1250" dirty="0"/>
+          </a:p>
+        </p:txBody>
+      </p:sp>
+      <p:sp>
+        <p:nvSpPr>
+          <p:cNvPr id="43" name="Text 41"/>
+          <p:cNvSpPr txBox="1"/>
+          <p:nvPr/>
+        </p:nvSpPr>
+        <p:spPr>
+          <a:xfrm>
+            <a:off x="640080" y="4800600"/>
+            <a:ext cx="4846320" cy="402336"/>
+          </a:xfrm>
+          <a:prstGeom prst="rect">
+            <a:avLst/>
+          </a:prstGeom>
+          <a:noFill/>
+          <a:ln/>
+        </p:spPr>
+        <p:txBody>
+          <a:bodyPr wrap="square" lIns="0" tIns="0" rIns="0" bIns="0" rtlCol="0" anchor="t"/>
+          <a:lstStyle/>
+          <a:p>
+            <a:pPr marL="0" indent="0">
+              <a:buNone/>
+            </a:pPr>
+            <a:r>
+              <a:rPr lang="en-US" sz="1250" b="1" dirty="0">
+                <a:solidFill>
+                  <a:srgbClr val="14171A"/>
+                </a:solidFill>
+                <a:latin typeface="Atkinson Hyperlegible Next" pitchFamily="34" charset="0"/>
+                <a:ea typeface="Atkinson Hyperlegible Next" pitchFamily="34" charset="-122"/>
+                <a:cs typeface="Atkinson Hyperlegible Next" pitchFamily="34" charset="-120"/>
+              </a:rPr>
+              <a:t>Koordynator banku potrzeb</a:t>
+            </a:r>
+            <a:endParaRPr lang="en-US" sz="1250" dirty="0"/>
+          </a:p>
+          <a:p>
+            <a:pPr marL="0" indent="0">
+              <a:buNone/>
+            </a:pPr>
+            <a:r>
+              <a:rPr lang="en-US" sz="1100" dirty="0">
+                <a:solidFill>
+                  <a:srgbClr val="454D57"/>
+                </a:solidFill>
+                <a:latin typeface="Atkinson Hyperlegible Next" pitchFamily="34" charset="0"/>
+                <a:ea typeface="Atkinson Hyperlegible Next" pitchFamily="34" charset="-122"/>
+                <a:cs typeface="Atkinson Hyperlegible Next" pitchFamily="34" charset="-120"/>
+              </a:rPr>
+              <a:t>co tydzień przegląda potrzeby, łączy je w tematy naborów</a:t>
+            </a:r>
+            <a:endParaRPr lang="en-US" sz="1250" dirty="0"/>
+          </a:p>
+        </p:txBody>
+      </p:sp>
+      <p:sp>
+        <p:nvSpPr>
+          <p:cNvPr id="44" name="Text 42"/>
+          <p:cNvSpPr txBox="1"/>
+          <p:nvPr/>
+        </p:nvSpPr>
+        <p:spPr>
+          <a:xfrm>
+            <a:off x="5897880" y="3666744"/>
+            <a:ext cx="5653735" cy="274320"/>
+          </a:xfrm>
+          <a:prstGeom prst="rect">
+            <a:avLst/>
+          </a:prstGeom>
+          <a:noFill/>
+          <a:ln/>
+        </p:spPr>
+        <p:txBody>
+          <a:bodyPr wrap="square" lIns="0" tIns="0" rIns="0" bIns="0" rtlCol="0" anchor="ctr"/>
+          <a:lstStyle/>
+          <a:p>
+            <a:pPr marL="0" indent="0">
+              <a:buNone/>
+            </a:pPr>
+            <a:r>
+              <a:rPr lang="en-US" sz="1400" b="1" dirty="0">
+                <a:solidFill>
+                  <a:srgbClr val="1A4B8C"/>
+                </a:solidFill>
+                <a:latin typeface="Atkinson Hyperlegible Next" pitchFamily="34" charset="0"/>
+                <a:ea typeface="Atkinson Hyperlegible Next" pitchFamily="34" charset="-122"/>
+                <a:cs typeface="Atkinson Hyperlegible Next" pitchFamily="34" charset="-120"/>
+              </a:rPr>
+              <a:t>Trzy cykle, które domknie usługa</a:t>
+            </a:r>
+            <a:endParaRPr lang="en-US" sz="1400" dirty="0"/>
+          </a:p>
+        </p:txBody>
+      </p:sp>
+      <p:sp>
+        <p:nvSpPr>
+          <p:cNvPr id="45" name="Shape 43"/>
           <p:cNvSpPr/>
           <p:nvPr/>
         </p:nvSpPr>
         <p:spPr>
           <a:xfrm>
-            <a:off x="5363479" y="1901952"/>
-            <a:ext cx="1464738" cy="1188720"/>
+            <a:off x="5897880" y="4014216"/>
+            <a:ext cx="292608" cy="292608"/>
+          </a:xfrm>
+          <a:prstGeom prst="ellipse">
+            <a:avLst/>
+          </a:prstGeom>
+          <a:solidFill>
+            <a:srgbClr val="FFFFFF"/>
+          </a:solidFill>
+          <a:ln w="19050">
+            <a:solidFill>
+              <a:srgbClr val="1A4B8C"/>
+            </a:solidFill>
+            <a:prstDash val="solid"/>
+          </a:ln>
+        </p:spPr>
+      </p:sp>
+      <p:sp>
+        <p:nvSpPr>
+          <p:cNvPr id="46" name="Text 44"/>
+          <p:cNvSpPr txBox="1"/>
+          <p:nvPr/>
+        </p:nvSpPr>
+        <p:spPr>
+          <a:xfrm>
+            <a:off x="5897880" y="4014216"/>
+            <a:ext cx="292608" cy="292608"/>
+          </a:xfrm>
+          <a:prstGeom prst="rect">
+            <a:avLst/>
+          </a:prstGeom>
+          <a:noFill/>
+          <a:ln/>
+        </p:spPr>
+        <p:txBody>
+          <a:bodyPr wrap="square" lIns="0" tIns="0" rIns="0" bIns="0" rtlCol="0" anchor="ctr"/>
+          <a:lstStyle/>
+          <a:p>
+            <a:pPr marL="0" indent="0" algn="ctr">
+              <a:buNone/>
+            </a:pPr>
+            <a:r>
+              <a:rPr lang="en-US" sz="1200" b="1" dirty="0">
+                <a:solidFill>
+                  <a:srgbClr val="1A4B8C"/>
+                </a:solidFill>
+                <a:latin typeface="Atkinson Hyperlegible Next" pitchFamily="34" charset="0"/>
+                <a:ea typeface="Atkinson Hyperlegible Next" pitchFamily="34" charset="-122"/>
+                <a:cs typeface="Atkinson Hyperlegible Next" pitchFamily="34" charset="-120"/>
+              </a:rPr>
+              <a:t>1</a:t>
+            </a:r>
+            <a:endParaRPr lang="en-US" sz="1200" dirty="0"/>
+          </a:p>
+        </p:txBody>
+      </p:sp>
+      <p:sp>
+        <p:nvSpPr>
+          <p:cNvPr id="47" name="Text 45"/>
+          <p:cNvSpPr txBox="1"/>
+          <p:nvPr/>
+        </p:nvSpPr>
+        <p:spPr>
+          <a:xfrm>
+            <a:off x="6309360" y="3995928"/>
+            <a:ext cx="5242255" cy="329184"/>
+          </a:xfrm>
+          <a:prstGeom prst="rect">
+            <a:avLst/>
+          </a:prstGeom>
+          <a:noFill/>
+          <a:ln/>
+        </p:spPr>
+        <p:txBody>
+          <a:bodyPr wrap="square" lIns="0" tIns="0" rIns="0" bIns="0" rtlCol="0" anchor="ctr"/>
+          <a:lstStyle/>
+          <a:p>
+            <a:pPr marL="0" indent="0">
+              <a:buNone/>
+            </a:pPr>
+            <a:r>
+              <a:rPr lang="en-US" sz="1250" b="1" dirty="0">
+                <a:solidFill>
+                  <a:srgbClr val="14171A"/>
+                </a:solidFill>
+                <a:latin typeface="Atkinson Hyperlegible Next" pitchFamily="34" charset="0"/>
+                <a:ea typeface="Atkinson Hyperlegible Next" pitchFamily="34" charset="-122"/>
+                <a:cs typeface="Atkinson Hyperlegible Next" pitchFamily="34" charset="-120"/>
+              </a:rPr>
+              <a:t>Potrzeba</a:t>
+            </a:r>
+            <a:r>
+              <a:rPr lang="en-US" sz="1250" b="1" dirty="0">
+                <a:solidFill>
+                  <a:srgbClr val="1A4B8C"/>
+                </a:solidFill>
+                <a:latin typeface="Atkinson Hyperlegible Next" pitchFamily="34" charset="0"/>
+                <a:ea typeface="Atkinson Hyperlegible Next" pitchFamily="34" charset="-122"/>
+                <a:cs typeface="Atkinson Hyperlegible Next" pitchFamily="34" charset="-120"/>
+              </a:rPr>
+              <a:t>  →  </a:t>
+            </a:r>
+            <a:r>
+              <a:rPr lang="en-US" sz="1250" dirty="0">
+                <a:solidFill>
+                  <a:srgbClr val="14171A"/>
+                </a:solidFill>
+                <a:latin typeface="Atkinson Hyperlegible Next" pitchFamily="34" charset="0"/>
+                <a:ea typeface="Atkinson Hyperlegible Next" pitchFamily="34" charset="-122"/>
+                <a:cs typeface="Atkinson Hyperlegible Next" pitchFamily="34" charset="-120"/>
+              </a:rPr>
+              <a:t>droga</a:t>
+            </a:r>
+            <a:r>
+              <a:rPr lang="en-US" sz="1250" b="1" dirty="0">
+                <a:solidFill>
+                  <a:srgbClr val="1A4B8C"/>
+                </a:solidFill>
+                <a:latin typeface="Atkinson Hyperlegible Next" pitchFamily="34" charset="0"/>
+                <a:ea typeface="Atkinson Hyperlegible Next" pitchFamily="34" charset="-122"/>
+                <a:cs typeface="Atkinson Hyperlegible Next" pitchFamily="34" charset="-120"/>
+              </a:rPr>
+              <a:t>  →  </a:t>
+            </a:r>
+            <a:r>
+              <a:rPr lang="en-US" sz="1250" dirty="0">
+                <a:solidFill>
+                  <a:srgbClr val="14171A"/>
+                </a:solidFill>
+                <a:latin typeface="Atkinson Hyperlegible Next" pitchFamily="34" charset="0"/>
+                <a:ea typeface="Atkinson Hyperlegible Next" pitchFamily="34" charset="-122"/>
+                <a:cs typeface="Atkinson Hyperlegible Next" pitchFamily="34" charset="-120"/>
+              </a:rPr>
+              <a:t>kontakt</a:t>
+            </a:r>
+            <a:r>
+              <a:rPr lang="en-US" sz="1250" b="1" dirty="0">
+                <a:solidFill>
+                  <a:srgbClr val="1A4B8C"/>
+                </a:solidFill>
+                <a:latin typeface="Atkinson Hyperlegible Next" pitchFamily="34" charset="0"/>
+                <a:ea typeface="Atkinson Hyperlegible Next" pitchFamily="34" charset="-122"/>
+                <a:cs typeface="Atkinson Hyperlegible Next" pitchFamily="34" charset="-120"/>
+              </a:rPr>
+              <a:t>  →  </a:t>
+            </a:r>
+            <a:r>
+              <a:rPr lang="en-US" sz="1250" b="1" dirty="0">
+                <a:solidFill>
+                  <a:srgbClr val="14171A"/>
+                </a:solidFill>
+                <a:latin typeface="Atkinson Hyperlegible Next" pitchFamily="34" charset="0"/>
+                <a:ea typeface="Atkinson Hyperlegible Next" pitchFamily="34" charset="-122"/>
+                <a:cs typeface="Atkinson Hyperlegible Next" pitchFamily="34" charset="-120"/>
+              </a:rPr>
+              <a:t>nowe wdrożenie</a:t>
+            </a:r>
+            <a:endParaRPr lang="en-US" sz="1250" dirty="0"/>
+          </a:p>
+        </p:txBody>
+      </p:sp>
+      <p:sp>
+        <p:nvSpPr>
+          <p:cNvPr id="48" name="Shape 46"/>
+          <p:cNvSpPr/>
+          <p:nvPr/>
+        </p:nvSpPr>
+        <p:spPr>
+          <a:xfrm>
+            <a:off x="5897880" y="4416552"/>
+            <a:ext cx="292608" cy="292608"/>
+          </a:xfrm>
+          <a:prstGeom prst="ellipse">
+            <a:avLst/>
+          </a:prstGeom>
+          <a:solidFill>
+            <a:srgbClr val="FFFFFF"/>
+          </a:solidFill>
+          <a:ln w="19050">
+            <a:solidFill>
+              <a:srgbClr val="1A4B8C"/>
+            </a:solidFill>
+            <a:prstDash val="solid"/>
+          </a:ln>
+        </p:spPr>
+      </p:sp>
+      <p:sp>
+        <p:nvSpPr>
+          <p:cNvPr id="49" name="Text 47"/>
+          <p:cNvSpPr txBox="1"/>
+          <p:nvPr/>
+        </p:nvSpPr>
+        <p:spPr>
+          <a:xfrm>
+            <a:off x="5897880" y="4416552"/>
+            <a:ext cx="292608" cy="292608"/>
+          </a:xfrm>
+          <a:prstGeom prst="rect">
+            <a:avLst/>
+          </a:prstGeom>
+          <a:noFill/>
+          <a:ln/>
+        </p:spPr>
+        <p:txBody>
+          <a:bodyPr wrap="square" lIns="0" tIns="0" rIns="0" bIns="0" rtlCol="0" anchor="ctr"/>
+          <a:lstStyle/>
+          <a:p>
+            <a:pPr marL="0" indent="0" algn="ctr">
+              <a:buNone/>
+            </a:pPr>
+            <a:r>
+              <a:rPr lang="en-US" sz="1200" b="1" dirty="0">
+                <a:solidFill>
+                  <a:srgbClr val="1A4B8C"/>
+                </a:solidFill>
+                <a:latin typeface="Atkinson Hyperlegible Next" pitchFamily="34" charset="0"/>
+                <a:ea typeface="Atkinson Hyperlegible Next" pitchFamily="34" charset="-122"/>
+                <a:cs typeface="Atkinson Hyperlegible Next" pitchFamily="34" charset="-120"/>
+              </a:rPr>
+              <a:t>2</a:t>
+            </a:r>
+            <a:endParaRPr lang="en-US" sz="1200" dirty="0"/>
+          </a:p>
+        </p:txBody>
+      </p:sp>
+      <p:sp>
+        <p:nvSpPr>
+          <p:cNvPr id="50" name="Text 48"/>
+          <p:cNvSpPr txBox="1"/>
+          <p:nvPr/>
+        </p:nvSpPr>
+        <p:spPr>
+          <a:xfrm>
+            <a:off x="6309360" y="4398264"/>
+            <a:ext cx="5242255" cy="329184"/>
+          </a:xfrm>
+          <a:prstGeom prst="rect">
+            <a:avLst/>
+          </a:prstGeom>
+          <a:noFill/>
+          <a:ln/>
+        </p:spPr>
+        <p:txBody>
+          <a:bodyPr wrap="square" lIns="0" tIns="0" rIns="0" bIns="0" rtlCol="0" anchor="ctr"/>
+          <a:lstStyle/>
+          <a:p>
+            <a:pPr marL="0" indent="0">
+              <a:buNone/>
+            </a:pPr>
+            <a:r>
+              <a:rPr lang="en-US" sz="1250" b="1" dirty="0">
+                <a:solidFill>
+                  <a:srgbClr val="14171A"/>
+                </a:solidFill>
+                <a:latin typeface="Atkinson Hyperlegible Next" pitchFamily="34" charset="0"/>
+                <a:ea typeface="Atkinson Hyperlegible Next" pitchFamily="34" charset="-122"/>
+                <a:cs typeface="Atkinson Hyperlegible Next" pitchFamily="34" charset="-120"/>
+              </a:rPr>
+              <a:t>Potrzeba</a:t>
+            </a:r>
+            <a:r>
+              <a:rPr lang="en-US" sz="1250" b="1" dirty="0">
+                <a:solidFill>
+                  <a:srgbClr val="1A4B8C"/>
+                </a:solidFill>
+                <a:latin typeface="Atkinson Hyperlegible Next" pitchFamily="34" charset="0"/>
+                <a:ea typeface="Atkinson Hyperlegible Next" pitchFamily="34" charset="-122"/>
+                <a:cs typeface="Atkinson Hyperlegible Next" pitchFamily="34" charset="-120"/>
+              </a:rPr>
+              <a:t>  →  </a:t>
+            </a:r>
+            <a:r>
+              <a:rPr lang="en-US" sz="1250" dirty="0">
+                <a:solidFill>
+                  <a:srgbClr val="14171A"/>
+                </a:solidFill>
+                <a:latin typeface="Atkinson Hyperlegible Next" pitchFamily="34" charset="0"/>
+                <a:ea typeface="Atkinson Hyperlegible Next" pitchFamily="34" charset="-122"/>
+                <a:cs typeface="Atkinson Hyperlegible Next" pitchFamily="34" charset="-120"/>
+              </a:rPr>
+              <a:t>bank potrzeb</a:t>
+            </a:r>
+            <a:r>
+              <a:rPr lang="en-US" sz="1250" b="1" dirty="0">
+                <a:solidFill>
+                  <a:srgbClr val="1A4B8C"/>
+                </a:solidFill>
+                <a:latin typeface="Atkinson Hyperlegible Next" pitchFamily="34" charset="0"/>
+                <a:ea typeface="Atkinson Hyperlegible Next" pitchFamily="34" charset="-122"/>
+                <a:cs typeface="Atkinson Hyperlegible Next" pitchFamily="34" charset="-120"/>
+              </a:rPr>
+              <a:t>  →  </a:t>
+            </a:r>
+            <a:r>
+              <a:rPr lang="en-US" sz="1250" dirty="0">
+                <a:solidFill>
+                  <a:srgbClr val="14171A"/>
+                </a:solidFill>
+                <a:latin typeface="Atkinson Hyperlegible Next" pitchFamily="34" charset="0"/>
+                <a:ea typeface="Atkinson Hyperlegible Next" pitchFamily="34" charset="-122"/>
+                <a:cs typeface="Atkinson Hyperlegible Next" pitchFamily="34" charset="-120"/>
+              </a:rPr>
+              <a:t>temat naboru</a:t>
+            </a:r>
+            <a:r>
+              <a:rPr lang="en-US" sz="1250" b="1" dirty="0">
+                <a:solidFill>
+                  <a:srgbClr val="1A4B8C"/>
+                </a:solidFill>
+                <a:latin typeface="Atkinson Hyperlegible Next" pitchFamily="34" charset="0"/>
+                <a:ea typeface="Atkinson Hyperlegible Next" pitchFamily="34" charset="-122"/>
+                <a:cs typeface="Atkinson Hyperlegible Next" pitchFamily="34" charset="-120"/>
+              </a:rPr>
+              <a:t>  →  </a:t>
+            </a:r>
+            <a:r>
+              <a:rPr lang="en-US" sz="1250" b="1" dirty="0">
+                <a:solidFill>
+                  <a:srgbClr val="14171A"/>
+                </a:solidFill>
+                <a:latin typeface="Atkinson Hyperlegible Next" pitchFamily="34" charset="0"/>
+                <a:ea typeface="Atkinson Hyperlegible Next" pitchFamily="34" charset="-122"/>
+                <a:cs typeface="Atkinson Hyperlegible Next" pitchFamily="34" charset="-120"/>
+              </a:rPr>
+              <a:t>nowa innowacja</a:t>
+            </a:r>
+            <a:endParaRPr lang="en-US" sz="1250" dirty="0"/>
+          </a:p>
+        </p:txBody>
+      </p:sp>
+      <p:sp>
+        <p:nvSpPr>
+          <p:cNvPr id="51" name="Shape 49"/>
+          <p:cNvSpPr/>
+          <p:nvPr/>
+        </p:nvSpPr>
+        <p:spPr>
+          <a:xfrm>
+            <a:off x="5897880" y="4818888"/>
+            <a:ext cx="292608" cy="292608"/>
+          </a:xfrm>
+          <a:prstGeom prst="ellipse">
+            <a:avLst/>
+          </a:prstGeom>
+          <a:solidFill>
+            <a:srgbClr val="FFFFFF"/>
+          </a:solidFill>
+          <a:ln w="19050">
+            <a:solidFill>
+              <a:srgbClr val="1A4B8C"/>
+            </a:solidFill>
+            <a:prstDash val="solid"/>
+          </a:ln>
+        </p:spPr>
+      </p:sp>
+      <p:sp>
+        <p:nvSpPr>
+          <p:cNvPr id="52" name="Text 50"/>
+          <p:cNvSpPr txBox="1"/>
+          <p:nvPr/>
+        </p:nvSpPr>
+        <p:spPr>
+          <a:xfrm>
+            <a:off x="5897880" y="4818888"/>
+            <a:ext cx="292608" cy="292608"/>
+          </a:xfrm>
+          <a:prstGeom prst="rect">
+            <a:avLst/>
+          </a:prstGeom>
+          <a:noFill/>
+          <a:ln/>
+        </p:spPr>
+        <p:txBody>
+          <a:bodyPr wrap="square" lIns="0" tIns="0" rIns="0" bIns="0" rtlCol="0" anchor="ctr"/>
+          <a:lstStyle/>
+          <a:p>
+            <a:pPr marL="0" indent="0" algn="ctr">
+              <a:buNone/>
+            </a:pPr>
+            <a:r>
+              <a:rPr lang="en-US" sz="1200" b="1" dirty="0">
+                <a:solidFill>
+                  <a:srgbClr val="1A4B8C"/>
+                </a:solidFill>
+                <a:latin typeface="Atkinson Hyperlegible Next" pitchFamily="34" charset="0"/>
+                <a:ea typeface="Atkinson Hyperlegible Next" pitchFamily="34" charset="-122"/>
+                <a:cs typeface="Atkinson Hyperlegible Next" pitchFamily="34" charset="-120"/>
+              </a:rPr>
+              <a:t>3</a:t>
+            </a:r>
+            <a:endParaRPr lang="en-US" sz="1200" dirty="0"/>
+          </a:p>
+        </p:txBody>
+      </p:sp>
+      <p:sp>
+        <p:nvSpPr>
+          <p:cNvPr id="53" name="Text 51"/>
+          <p:cNvSpPr txBox="1"/>
+          <p:nvPr/>
+        </p:nvSpPr>
+        <p:spPr>
+          <a:xfrm>
+            <a:off x="6309360" y="4800600"/>
+            <a:ext cx="5242255" cy="329184"/>
+          </a:xfrm>
+          <a:prstGeom prst="rect">
+            <a:avLst/>
+          </a:prstGeom>
+          <a:noFill/>
+          <a:ln/>
+        </p:spPr>
+        <p:txBody>
+          <a:bodyPr wrap="square" lIns="0" tIns="0" rIns="0" bIns="0" rtlCol="0" anchor="ctr"/>
+          <a:lstStyle/>
+          <a:p>
+            <a:pPr marL="0" indent="0">
+              <a:buNone/>
+            </a:pPr>
+            <a:r>
+              <a:rPr lang="en-US" sz="1250" b="1" dirty="0">
+                <a:solidFill>
+                  <a:srgbClr val="14171A"/>
+                </a:solidFill>
+                <a:latin typeface="Atkinson Hyperlegible Next" pitchFamily="34" charset="0"/>
+                <a:ea typeface="Atkinson Hyperlegible Next" pitchFamily="34" charset="-122"/>
+                <a:cs typeface="Atkinson Hyperlegible Next" pitchFamily="34" charset="-120"/>
+              </a:rPr>
+              <a:t>Innowacja</a:t>
+            </a:r>
+            <a:r>
+              <a:rPr lang="en-US" sz="1250" b="1" dirty="0">
+                <a:solidFill>
+                  <a:srgbClr val="1A4B8C"/>
+                </a:solidFill>
+                <a:latin typeface="Atkinson Hyperlegible Next" pitchFamily="34" charset="0"/>
+                <a:ea typeface="Atkinson Hyperlegible Next" pitchFamily="34" charset="-122"/>
+                <a:cs typeface="Atkinson Hyperlegible Next" pitchFamily="34" charset="-120"/>
+              </a:rPr>
+              <a:t>  →  </a:t>
+            </a:r>
+            <a:r>
+              <a:rPr lang="en-US" sz="1250" dirty="0">
+                <a:solidFill>
+                  <a:srgbClr val="14171A"/>
+                </a:solidFill>
+                <a:latin typeface="Atkinson Hyperlegible Next" pitchFamily="34" charset="0"/>
+                <a:ea typeface="Atkinson Hyperlegible Next" pitchFamily="34" charset="-122"/>
+                <a:cs typeface="Atkinson Hyperlegible Next" pitchFamily="34" charset="-120"/>
+              </a:rPr>
+              <a:t>mapa potrzeb</a:t>
+            </a:r>
+            <a:r>
+              <a:rPr lang="en-US" sz="1250" b="1" dirty="0">
+                <a:solidFill>
+                  <a:srgbClr val="1A4B8C"/>
+                </a:solidFill>
+                <a:latin typeface="Atkinson Hyperlegible Next" pitchFamily="34" charset="0"/>
+                <a:ea typeface="Atkinson Hyperlegible Next" pitchFamily="34" charset="-122"/>
+                <a:cs typeface="Atkinson Hyperlegible Next" pitchFamily="34" charset="-120"/>
+              </a:rPr>
+              <a:t>  →  </a:t>
+            </a:r>
+            <a:r>
+              <a:rPr lang="en-US" sz="1250" b="1" dirty="0">
+                <a:solidFill>
+                  <a:srgbClr val="14171A"/>
+                </a:solidFill>
+                <a:latin typeface="Atkinson Hyperlegible Next" pitchFamily="34" charset="0"/>
+                <a:ea typeface="Atkinson Hyperlegible Next" pitchFamily="34" charset="-122"/>
+                <a:cs typeface="Atkinson Hyperlegible Next" pitchFamily="34" charset="-120"/>
+              </a:rPr>
+              <a:t>granty tam, gdzie jej brakuje</a:t>
+            </a:r>
+            <a:endParaRPr lang="en-US" sz="1250" dirty="0"/>
+          </a:p>
+        </p:txBody>
+      </p:sp>
+      <p:sp>
+        <p:nvSpPr>
+          <p:cNvPr id="54" name="Shape 52"/>
+          <p:cNvSpPr/>
+          <p:nvPr/>
+        </p:nvSpPr>
+        <p:spPr>
+          <a:xfrm>
+            <a:off x="640080" y="5294376"/>
+            <a:ext cx="4846320" cy="1106424"/>
           </a:xfrm>
           <a:prstGeom prst="roundRect">
             <a:avLst>
-              <a:gd name="adj" fmla="val 6154"/>
+              <a:gd name="adj" fmla="val 8264"/>
+            </a:avLst>
+          </a:prstGeom>
+          <a:solidFill>
+            <a:srgbClr val="F3F5F8"/>
+          </a:solidFill>
+          <a:ln w="12700">
+            <a:solidFill>
+              <a:srgbClr val="F3F5F8"/>
+            </a:solidFill>
+            <a:prstDash val="solid"/>
+          </a:ln>
+        </p:spPr>
+      </p:sp>
+      <p:sp>
+        <p:nvSpPr>
+          <p:cNvPr id="55" name="Text 53"/>
+          <p:cNvSpPr txBox="1"/>
+          <p:nvPr/>
+        </p:nvSpPr>
+        <p:spPr>
+          <a:xfrm>
+            <a:off x="822960" y="5294376"/>
+            <a:ext cx="4480560" cy="1106424"/>
+          </a:xfrm>
+          <a:prstGeom prst="rect">
+            <a:avLst/>
+          </a:prstGeom>
+          <a:noFill/>
+          <a:ln/>
+        </p:spPr>
+        <p:txBody>
+          <a:bodyPr wrap="square" lIns="0" tIns="0" rIns="0" bIns="0" rtlCol="0" anchor="ctr"/>
+          <a:lstStyle/>
+          <a:p>
+            <a:pPr marL="0" indent="0">
+              <a:buNone/>
+            </a:pPr>
+            <a:r>
+              <a:rPr lang="en-US" sz="1200" b="1" dirty="0">
+                <a:solidFill>
+                  <a:srgbClr val="1A4B8C"/>
+                </a:solidFill>
+                <a:latin typeface="Atkinson Hyperlegible Next" pitchFamily="34" charset="0"/>
+                <a:ea typeface="Atkinson Hyperlegible Next" pitchFamily="34" charset="-122"/>
+                <a:cs typeface="Atkinson Hyperlegible Next" pitchFamily="34" charset="-120"/>
+              </a:rPr>
+              <a:t>Już w panelu ROPS:  </a:t>
+            </a:r>
+            <a:r>
+              <a:rPr lang="en-US" sz="1200" dirty="0">
+                <a:solidFill>
+                  <a:srgbClr val="14171A"/>
+                </a:solidFill>
+                <a:latin typeface="Atkinson Hyperlegible Next" pitchFamily="34" charset="0"/>
+                <a:ea typeface="Atkinson Hyperlegible Next" pitchFamily="34" charset="-122"/>
+                <a:cs typeface="Atkinson Hyperlegible Next" pitchFamily="34" charset="-120"/>
+              </a:rPr>
+              <a:t>każdy wpis czeka na decyzję pracownika, odnotowaną z jego nazwiskiem; autor pomysłu widzi status i odpowiedź na stronie swojej fiszki; liczba dróg, próśb o kontakt i potrzeb oraz trendy potrzeb.</a:t>
+            </a:r>
+            <a:endParaRPr lang="en-US" sz="1200" dirty="0"/>
+          </a:p>
+        </p:txBody>
+      </p:sp>
+      <p:sp>
+        <p:nvSpPr>
+          <p:cNvPr id="56" name="Shape 54"/>
+          <p:cNvSpPr/>
+          <p:nvPr/>
+        </p:nvSpPr>
+        <p:spPr>
+          <a:xfrm>
+            <a:off x="5897880" y="5294376"/>
+            <a:ext cx="5653735" cy="1106424"/>
+          </a:xfrm>
+          <a:prstGeom prst="roundRect">
+            <a:avLst>
+              <a:gd name="adj" fmla="val 8264"/>
             </a:avLst>
           </a:prstGeom>
           <a:solidFill>
@@ -10198,14 +11809,14 @@
       </p:sp>
       <p:sp>
         <p:nvSpPr>
-          <p:cNvPr id="20" name="Text 18"/>
-          <p:cNvSpPr txBox="1"/>
-          <p:nvPr/>
-        </p:nvSpPr>
-        <p:spPr>
-          <a:xfrm>
-            <a:off x="5473207" y="1993392"/>
-            <a:ext cx="457200" cy="219456"/>
+          <p:cNvPr id="57" name="Text 55"/>
+          <p:cNvSpPr txBox="1"/>
+          <p:nvPr/>
+        </p:nvSpPr>
+        <p:spPr>
+          <a:xfrm>
+            <a:off x="6080760" y="5385816"/>
+            <a:ext cx="5287975" cy="274320"/>
           </a:xfrm>
           <a:prstGeom prst="rect">
             <a:avLst/>
@@ -10221,7 +11832,7 @@
               <a:buNone/>
             </a:pPr>
             <a:r>
-              <a:rPr lang="en-US" sz="1200" b="1" dirty="0">
+              <a:rPr lang="en-US" sz="1300" b="1" dirty="0">
                 <a:solidFill>
                   <a:srgbClr val="1A4B8C"/>
                 </a:solidFill>
@@ -10229,49 +11840,22 @@
                 <a:ea typeface="Atkinson Hyperlegible Next" pitchFamily="34" charset="-122"/>
                 <a:cs typeface="Atkinson Hyperlegible Next" pitchFamily="34" charset="-120"/>
               </a:rPr>
-              <a:t>IV</a:t>
-            </a:r>
-            <a:endParaRPr lang="en-US" sz="1200" dirty="0"/>
-          </a:p>
-        </p:txBody>
-      </p:sp>
-      <p:sp>
-        <p:nvSpPr>
-          <p:cNvPr id="21" name="Shape 19"/>
-          <p:cNvSpPr/>
-          <p:nvPr/>
-        </p:nvSpPr>
-        <p:spPr>
-          <a:xfrm>
-            <a:off x="5986969" y="1993392"/>
-            <a:ext cx="749808" cy="219456"/>
-          </a:xfrm>
-          <a:prstGeom prst="roundRect">
-            <a:avLst>
-              <a:gd name="adj" fmla="val 50000"/>
-            </a:avLst>
-          </a:prstGeom>
-          <a:solidFill>
-            <a:srgbClr val="1A4B8C"/>
-          </a:solidFill>
-          <a:ln w="12700">
-            <a:solidFill>
-              <a:srgbClr val="1A4B8C"/>
-            </a:solidFill>
-            <a:prstDash val="solid"/>
-          </a:ln>
-        </p:spPr>
-      </p:sp>
-      <p:sp>
-        <p:nvSpPr>
-          <p:cNvPr id="22" name="Text 20"/>
-          <p:cNvSpPr txBox="1"/>
-          <p:nvPr/>
-        </p:nvSpPr>
-        <p:spPr>
-          <a:xfrm>
-            <a:off x="5986969" y="1993392"/>
-            <a:ext cx="749808" cy="219456"/>
+              <a:t>Około 55 USD miesięcznie plus 8 USD za 1000 dróg</a:t>
+            </a:r>
+            <a:endParaRPr lang="en-US" sz="1300" dirty="0"/>
+          </a:p>
+        </p:txBody>
+      </p:sp>
+      <p:sp>
+        <p:nvSpPr>
+          <p:cNvPr id="58" name="Text 56"/>
+          <p:cNvSpPr txBox="1"/>
+          <p:nvPr/>
+        </p:nvSpPr>
+        <p:spPr>
+          <a:xfrm>
+            <a:off x="6080760" y="5660136"/>
+            <a:ext cx="4282135" cy="164592"/>
           </a:xfrm>
           <a:prstGeom prst="rect">
             <a:avLst/>
@@ -10283,50 +11867,11 @@
           <a:bodyPr wrap="square" lIns="0" tIns="0" rIns="0" bIns="0" rtlCol="0" anchor="ctr"/>
           <a:lstStyle/>
           <a:p>
-            <a:pPr marL="0" indent="0" algn="ctr">
-              <a:buNone/>
-            </a:pPr>
-            <a:r>
-              <a:rPr lang="en-US" sz="900" b="1" dirty="0">
-                <a:solidFill>
-                  <a:srgbClr val="FFFFFF"/>
-                </a:solidFill>
-                <a:latin typeface="Atkinson Hyperlegible Next" pitchFamily="34" charset="0"/>
-                <a:ea typeface="Atkinson Hyperlegible Next" pitchFamily="34" charset="-122"/>
-                <a:cs typeface="Atkinson Hyperlegible Next" pitchFamily="34" charset="-120"/>
-              </a:rPr>
-              <a:t>działa</a:t>
-            </a:r>
-            <a:endParaRPr lang="en-US" sz="900" dirty="0"/>
-          </a:p>
-        </p:txBody>
-      </p:sp>
-      <p:sp>
-        <p:nvSpPr>
-          <p:cNvPr id="23" name="Text 21"/>
-          <p:cNvSpPr txBox="1"/>
-          <p:nvPr/>
-        </p:nvSpPr>
-        <p:spPr>
-          <a:xfrm>
-            <a:off x="5473207" y="2286000"/>
-            <a:ext cx="1245282" cy="749808"/>
-          </a:xfrm>
-          <a:prstGeom prst="rect">
-            <a:avLst/>
-          </a:prstGeom>
-          <a:noFill/>
-          <a:ln/>
-        </p:spPr>
-        <p:txBody>
-          <a:bodyPr wrap="square" lIns="0" tIns="0" rIns="0" bIns="0" rtlCol="0" anchor="t"/>
-          <a:lstStyle/>
-          <a:p>
             <a:pPr marL="0" indent="0">
               <a:buNone/>
             </a:pPr>
             <a:r>
-              <a:rPr lang="en-US" sz="1150" b="1" dirty="0">
+              <a:rPr lang="en-US" sz="1050" b="1" dirty="0">
                 <a:solidFill>
                   <a:srgbClr val="14171A"/>
                 </a:solidFill>
@@ -10334,19 +11879,99 @@
                 <a:ea typeface="Atkinson Hyperlegible Next" pitchFamily="34" charset="-122"/>
                 <a:cs typeface="Atkinson Hyperlegible Next" pitchFamily="34" charset="-120"/>
               </a:rPr>
-              <a:t>Tester innowacji</a:t>
-            </a:r>
-            <a:endParaRPr lang="en-US" sz="1150" dirty="0"/>
-          </a:p>
+              <a:t>Serwer  </a:t>
+            </a:r>
+            <a:r>
+              <a:rPr lang="en-US" sz="1050" dirty="0">
+                <a:solidFill>
+                  <a:srgbClr val="454D57"/>
+                </a:solidFill>
+                <a:latin typeface="Atkinson Hyperlegible Next" pitchFamily="34" charset="0"/>
+                <a:ea typeface="Atkinson Hyperlegible Next" pitchFamily="34" charset="-122"/>
+                <a:cs typeface="Atkinson Hyperlegible Next" pitchFamily="34" charset="-120"/>
+              </a:rPr>
+              <a:t>aplikacja + polski model wyszukiwania, 4 GB</a:t>
+            </a:r>
+            <a:endParaRPr lang="en-US" sz="1050" dirty="0"/>
+          </a:p>
+        </p:txBody>
+      </p:sp>
+      <p:sp>
+        <p:nvSpPr>
+          <p:cNvPr id="59" name="Text 57"/>
+          <p:cNvSpPr txBox="1"/>
+          <p:nvPr/>
+        </p:nvSpPr>
+        <p:spPr>
+          <a:xfrm>
+            <a:off x="10317175" y="5660136"/>
+            <a:ext cx="1051560" cy="164592"/>
+          </a:xfrm>
+          <a:prstGeom prst="rect">
+            <a:avLst/>
+          </a:prstGeom>
+          <a:noFill/>
+          <a:ln/>
+        </p:spPr>
+        <p:txBody>
+          <a:bodyPr wrap="square" lIns="0" tIns="0" rIns="0" bIns="0" rtlCol="0" anchor="ctr"/>
+          <a:lstStyle/>
+          <a:p>
+            <a:pPr marL="0" indent="0" algn="r">
+              <a:buNone/>
+            </a:pPr>
+            <a:r>
+              <a:rPr lang="en-US" sz="1050" b="1" dirty="0">
+                <a:solidFill>
+                  <a:srgbClr val="14171A"/>
+                </a:solidFill>
+                <a:latin typeface="Atkinson Hyperlegible Next" pitchFamily="34" charset="0"/>
+                <a:ea typeface="Atkinson Hyperlegible Next" pitchFamily="34" charset="-122"/>
+                <a:cs typeface="Atkinson Hyperlegible Next" pitchFamily="34" charset="-120"/>
+              </a:rPr>
+              <a:t>24 USD / mies.</a:t>
+            </a:r>
+            <a:endParaRPr lang="en-US" sz="1050" dirty="0"/>
+          </a:p>
+        </p:txBody>
+      </p:sp>
+      <p:sp>
+        <p:nvSpPr>
+          <p:cNvPr id="60" name="Text 58"/>
+          <p:cNvSpPr txBox="1"/>
+          <p:nvPr/>
+        </p:nvSpPr>
+        <p:spPr>
+          <a:xfrm>
+            <a:off x="6080760" y="5824728"/>
+            <a:ext cx="4282135" cy="164592"/>
+          </a:xfrm>
+          <a:prstGeom prst="rect">
+            <a:avLst/>
+          </a:prstGeom>
+          <a:noFill/>
+          <a:ln/>
+        </p:spPr>
+        <p:txBody>
+          <a:bodyPr wrap="square" lIns="0" tIns="0" rIns="0" bIns="0" rtlCol="0" anchor="ctr"/>
+          <a:lstStyle/>
           <a:p>
             <a:pPr marL="0" indent="0">
-              <a:spcBef>
-                <a:spcPts val="200"/>
-              </a:spcBef>
-              <a:buNone/>
-            </a:pPr>
-            <a:r>
-              <a:rPr lang="en-US" sz="950" dirty="0">
+              <a:buNone/>
+            </a:pPr>
+            <a:r>
+              <a:rPr lang="en-US" sz="1050" b="1" dirty="0">
+                <a:solidFill>
+                  <a:srgbClr val="14171A"/>
+                </a:solidFill>
+                <a:latin typeface="Atkinson Hyperlegible Next" pitchFamily="34" charset="0"/>
+                <a:ea typeface="Atkinson Hyperlegible Next" pitchFamily="34" charset="-122"/>
+                <a:cs typeface="Atkinson Hyperlegible Next" pitchFamily="34" charset="-120"/>
+              </a:rPr>
+              <a:t>Baza danych  </a:t>
+            </a:r>
+            <a:r>
+              <a:rPr lang="en-US" sz="1050" dirty="0">
                 <a:solidFill>
                   <a:srgbClr val="454D57"/>
                 </a:solidFill>
@@ -10354,49 +11979,22 @@
                 <a:ea typeface="Atkinson Hyperlegible Next" pitchFamily="34" charset="-122"/>
                 <a:cs typeface="Atkinson Hyperlegible Next" pitchFamily="34" charset="-120"/>
               </a:rPr>
-              <a:t>oceny, opinie, ulepszenia, zapisy do testów</a:t>
-            </a:r>
-            <a:endParaRPr lang="en-US" sz="1150" dirty="0"/>
-          </a:p>
-        </p:txBody>
-      </p:sp>
-      <p:sp>
-        <p:nvSpPr>
-          <p:cNvPr id="24" name="Shape 22"/>
-          <p:cNvSpPr/>
-          <p:nvPr/>
-        </p:nvSpPr>
-        <p:spPr>
-          <a:xfrm>
-            <a:off x="6937945" y="1901952"/>
-            <a:ext cx="1464738" cy="1188720"/>
-          </a:xfrm>
-          <a:prstGeom prst="roundRect">
-            <a:avLst>
-              <a:gd name="adj" fmla="val 6154"/>
-            </a:avLst>
-          </a:prstGeom>
-          <a:solidFill>
-            <a:srgbClr val="EEF4FB"/>
-          </a:solidFill>
-          <a:ln w="12700">
-            <a:solidFill>
-              <a:srgbClr val="EEF4FB"/>
-            </a:solidFill>
-            <a:prstDash val="solid"/>
-          </a:ln>
-        </p:spPr>
-      </p:sp>
-      <p:sp>
-        <p:nvSpPr>
-          <p:cNvPr id="25" name="Text 23"/>
-          <p:cNvSpPr txBox="1"/>
-          <p:nvPr/>
-        </p:nvSpPr>
-        <p:spPr>
-          <a:xfrm>
-            <a:off x="7047673" y="1993392"/>
-            <a:ext cx="457200" cy="219456"/>
+              <a:t>PostgreSQL + pgvector, RDS 2 GB</a:t>
+            </a:r>
+            <a:endParaRPr lang="en-US" sz="1050" dirty="0"/>
+          </a:p>
+        </p:txBody>
+      </p:sp>
+      <p:sp>
+        <p:nvSpPr>
+          <p:cNvPr id="61" name="Text 59"/>
+          <p:cNvSpPr txBox="1"/>
+          <p:nvPr/>
+        </p:nvSpPr>
+        <p:spPr>
+          <a:xfrm>
+            <a:off x="10317175" y="5824728"/>
+            <a:ext cx="1051560" cy="164592"/>
           </a:xfrm>
           <a:prstGeom prst="rect">
             <a:avLst/>
@@ -10408,61 +12006,84 @@
           <a:bodyPr wrap="square" lIns="0" tIns="0" rIns="0" bIns="0" rtlCol="0" anchor="ctr"/>
           <a:lstStyle/>
           <a:p>
+            <a:pPr marL="0" indent="0" algn="r">
+              <a:buNone/>
+            </a:pPr>
+            <a:r>
+              <a:rPr lang="en-US" sz="1050" b="1" dirty="0">
+                <a:solidFill>
+                  <a:srgbClr val="14171A"/>
+                </a:solidFill>
+                <a:latin typeface="Atkinson Hyperlegible Next" pitchFamily="34" charset="0"/>
+                <a:ea typeface="Atkinson Hyperlegible Next" pitchFamily="34" charset="-122"/>
+                <a:cs typeface="Atkinson Hyperlegible Next" pitchFamily="34" charset="-120"/>
+              </a:rPr>
+              <a:t>30 USD / mies.</a:t>
+            </a:r>
+            <a:endParaRPr lang="en-US" sz="1050" dirty="0"/>
+          </a:p>
+        </p:txBody>
+      </p:sp>
+      <p:sp>
+        <p:nvSpPr>
+          <p:cNvPr id="62" name="Text 60"/>
+          <p:cNvSpPr txBox="1"/>
+          <p:nvPr/>
+        </p:nvSpPr>
+        <p:spPr>
+          <a:xfrm>
+            <a:off x="6080760" y="5989320"/>
+            <a:ext cx="4282135" cy="164592"/>
+          </a:xfrm>
+          <a:prstGeom prst="rect">
+            <a:avLst/>
+          </a:prstGeom>
+          <a:noFill/>
+          <a:ln/>
+        </p:spPr>
+        <p:txBody>
+          <a:bodyPr wrap="square" lIns="0" tIns="0" rIns="0" bIns="0" rtlCol="0" anchor="ctr"/>
+          <a:lstStyle/>
+          <a:p>
             <a:pPr marL="0" indent="0">
               <a:buNone/>
             </a:pPr>
             <a:r>
-              <a:rPr lang="en-US" sz="1200" b="1" dirty="0">
-                <a:solidFill>
-                  <a:srgbClr val="1A4B8C"/>
-                </a:solidFill>
-                <a:latin typeface="Atkinson Hyperlegible Next" pitchFamily="34" charset="0"/>
-                <a:ea typeface="Atkinson Hyperlegible Next" pitchFamily="34" charset="-122"/>
-                <a:cs typeface="Atkinson Hyperlegible Next" pitchFamily="34" charset="-120"/>
-              </a:rPr>
-              <a:t>V</a:t>
-            </a:r>
-            <a:endParaRPr lang="en-US" sz="1200" dirty="0"/>
-          </a:p>
-        </p:txBody>
-      </p:sp>
-      <p:sp>
-        <p:nvSpPr>
-          <p:cNvPr id="26" name="Shape 24"/>
-          <p:cNvSpPr/>
-          <p:nvPr/>
-        </p:nvSpPr>
-        <p:spPr>
-          <a:xfrm>
-            <a:off x="7561435" y="1993392"/>
-            <a:ext cx="749808" cy="219456"/>
-          </a:xfrm>
-          <a:prstGeom prst="roundRect">
-            <a:avLst>
-              <a:gd name="adj" fmla="val 50000"/>
-            </a:avLst>
-          </a:prstGeom>
-          <a:solidFill>
-            <a:srgbClr val="1A4B8C"/>
-          </a:solidFill>
-          <a:ln w="12700">
-            <a:solidFill>
-              <a:srgbClr val="1A4B8C"/>
-            </a:solidFill>
-            <a:prstDash val="solid"/>
-          </a:ln>
-        </p:spPr>
-      </p:sp>
-      <p:sp>
-        <p:nvSpPr>
-          <p:cNvPr id="27" name="Text 25"/>
-          <p:cNvSpPr txBox="1"/>
-          <p:nvPr/>
-        </p:nvSpPr>
-        <p:spPr>
-          <a:xfrm>
-            <a:off x="7561435" y="1993392"/>
-            <a:ext cx="749808" cy="219456"/>
+              <a:rPr lang="en-US" sz="1050" b="1" dirty="0">
+                <a:solidFill>
+                  <a:srgbClr val="14171A"/>
+                </a:solidFill>
+                <a:latin typeface="Atkinson Hyperlegible Next" pitchFamily="34" charset="0"/>
+                <a:ea typeface="Atkinson Hyperlegible Next" pitchFamily="34" charset="-122"/>
+                <a:cs typeface="Atkinson Hyperlegible Next" pitchFamily="34" charset="-120"/>
+              </a:rPr>
+              <a:t>Zapytanie do modelu  </a:t>
+            </a:r>
+            <a:r>
+              <a:rPr lang="en-US" sz="1050" dirty="0">
+                <a:solidFill>
+                  <a:srgbClr val="454D57"/>
+                </a:solidFill>
+                <a:latin typeface="Atkinson Hyperlegible Next" pitchFamily="34" charset="0"/>
+                <a:ea typeface="Atkinson Hyperlegible Next" pitchFamily="34" charset="-122"/>
+                <a:cs typeface="Atkinson Hyperlegible Next" pitchFamily="34" charset="-120"/>
+              </a:rPr>
+              <a:t>Bielik 11B na Hugging Face, ~5 tys. tokenów</a:t>
+            </a:r>
+            <a:endParaRPr lang="en-US" sz="1050" dirty="0"/>
+          </a:p>
+        </p:txBody>
+      </p:sp>
+      <p:sp>
+        <p:nvSpPr>
+          <p:cNvPr id="63" name="Text 61"/>
+          <p:cNvSpPr txBox="1"/>
+          <p:nvPr/>
+        </p:nvSpPr>
+        <p:spPr>
+          <a:xfrm>
+            <a:off x="10317175" y="5989320"/>
+            <a:ext cx="1051560" cy="164592"/>
           </a:xfrm>
           <a:prstGeom prst="rect">
             <a:avLst/>
@@ -10474,50 +12095,50 @@
           <a:bodyPr wrap="square" lIns="0" tIns="0" rIns="0" bIns="0" rtlCol="0" anchor="ctr"/>
           <a:lstStyle/>
           <a:p>
-            <a:pPr marL="0" indent="0" algn="ctr">
-              <a:buNone/>
-            </a:pPr>
-            <a:r>
-              <a:rPr lang="en-US" sz="900" b="1" dirty="0">
-                <a:solidFill>
-                  <a:srgbClr val="FFFFFF"/>
-                </a:solidFill>
-                <a:latin typeface="Atkinson Hyperlegible Next" pitchFamily="34" charset="0"/>
-                <a:ea typeface="Atkinson Hyperlegible Next" pitchFamily="34" charset="-122"/>
-                <a:cs typeface="Atkinson Hyperlegible Next" pitchFamily="34" charset="-120"/>
-              </a:rPr>
-              <a:t>działa</a:t>
-            </a:r>
-            <a:endParaRPr lang="en-US" sz="900" dirty="0"/>
-          </a:p>
-        </p:txBody>
-      </p:sp>
-      <p:sp>
-        <p:nvSpPr>
-          <p:cNvPr id="28" name="Text 26"/>
-          <p:cNvSpPr txBox="1"/>
-          <p:nvPr/>
-        </p:nvSpPr>
-        <p:spPr>
-          <a:xfrm>
-            <a:off x="7047673" y="2286000"/>
-            <a:ext cx="1245282" cy="749808"/>
-          </a:xfrm>
-          <a:prstGeom prst="rect">
-            <a:avLst/>
-          </a:prstGeom>
-          <a:noFill/>
-          <a:ln/>
-        </p:spPr>
-        <p:txBody>
-          <a:bodyPr wrap="square" lIns="0" tIns="0" rIns="0" bIns="0" rtlCol="0" anchor="t"/>
+            <a:pPr marL="0" indent="0" algn="r">
+              <a:buNone/>
+            </a:pPr>
+            <a:r>
+              <a:rPr lang="en-US" sz="1050" b="1" dirty="0">
+                <a:solidFill>
+                  <a:srgbClr val="14171A"/>
+                </a:solidFill>
+                <a:latin typeface="Atkinson Hyperlegible Next" pitchFamily="34" charset="0"/>
+                <a:ea typeface="Atkinson Hyperlegible Next" pitchFamily="34" charset="-122"/>
+                <a:cs typeface="Atkinson Hyperlegible Next" pitchFamily="34" charset="-120"/>
+              </a:rPr>
+              <a:t>0,002 USD</a:t>
+            </a:r>
+            <a:endParaRPr lang="en-US" sz="1050" dirty="0"/>
+          </a:p>
+        </p:txBody>
+      </p:sp>
+      <p:sp>
+        <p:nvSpPr>
+          <p:cNvPr id="64" name="Text 62"/>
+          <p:cNvSpPr txBox="1"/>
+          <p:nvPr/>
+        </p:nvSpPr>
+        <p:spPr>
+          <a:xfrm>
+            <a:off x="6080760" y="6153912"/>
+            <a:ext cx="4282135" cy="164592"/>
+          </a:xfrm>
+          <a:prstGeom prst="rect">
+            <a:avLst/>
+          </a:prstGeom>
+          <a:noFill/>
+          <a:ln/>
+        </p:spPr>
+        <p:txBody>
+          <a:bodyPr wrap="square" lIns="0" tIns="0" rIns="0" bIns="0" rtlCol="0" anchor="ctr"/>
           <a:lstStyle/>
           <a:p>
             <a:pPr marL="0" indent="0">
               <a:buNone/>
             </a:pPr>
             <a:r>
-              <a:rPr lang="en-US" sz="1150" b="1" dirty="0">
+              <a:rPr lang="en-US" sz="1050" b="1" dirty="0">
                 <a:solidFill>
                   <a:srgbClr val="14171A"/>
                 </a:solidFill>
@@ -10525,19 +12146,10 @@
                 <a:ea typeface="Atkinson Hyperlegible Next" pitchFamily="34" charset="-122"/>
                 <a:cs typeface="Atkinson Hyperlegible Next" pitchFamily="34" charset="-120"/>
               </a:rPr>
-              <a:t>Platforma komunikacji</a:t>
-            </a:r>
-            <a:endParaRPr lang="en-US" sz="1150" dirty="0"/>
-          </a:p>
-          <a:p>
-            <a:pPr marL="0" indent="0">
-              <a:spcBef>
-                <a:spcPts val="200"/>
-              </a:spcBef>
-              <a:buNone/>
-            </a:pPr>
-            <a:r>
-              <a:rPr lang="en-US" sz="950" dirty="0">
+              <a:t>Droga  </a:t>
+            </a:r>
+            <a:r>
+              <a:rPr lang="en-US" sz="1050" dirty="0">
                 <a:solidFill>
                   <a:srgbClr val="454D57"/>
                 </a:solidFill>
@@ -10545,1352 +12157,7 @@
                 <a:ea typeface="Atkinson Hyperlegible Next" pitchFamily="34" charset="-122"/>
                 <a:cs typeface="Atkinson Hyperlegible Next" pitchFamily="34" charset="-120"/>
               </a:rPr>
-              <a:t>rozmowy bez konta, mentorzy, partnerstwa</a:t>
-            </a:r>
-            <a:endParaRPr lang="en-US" sz="1150" dirty="0"/>
-          </a:p>
-        </p:txBody>
-      </p:sp>
-      <p:sp>
-        <p:nvSpPr>
-          <p:cNvPr id="29" name="Shape 27"/>
-          <p:cNvSpPr/>
-          <p:nvPr/>
-        </p:nvSpPr>
-        <p:spPr>
-          <a:xfrm>
-            <a:off x="8512411" y="1901952"/>
-            <a:ext cx="1464738" cy="1188720"/>
-          </a:xfrm>
-          <a:prstGeom prst="roundRect">
-            <a:avLst>
-              <a:gd name="adj" fmla="val 6154"/>
-            </a:avLst>
-          </a:prstGeom>
-          <a:solidFill>
-            <a:srgbClr val="EEF4FB"/>
-          </a:solidFill>
-          <a:ln w="12700">
-            <a:solidFill>
-              <a:srgbClr val="EEF4FB"/>
-            </a:solidFill>
-            <a:prstDash val="solid"/>
-          </a:ln>
-        </p:spPr>
-      </p:sp>
-      <p:sp>
-        <p:nvSpPr>
-          <p:cNvPr id="30" name="Text 28"/>
-          <p:cNvSpPr txBox="1"/>
-          <p:nvPr/>
-        </p:nvSpPr>
-        <p:spPr>
-          <a:xfrm>
-            <a:off x="8622139" y="1993392"/>
-            <a:ext cx="457200" cy="219456"/>
-          </a:xfrm>
-          <a:prstGeom prst="rect">
-            <a:avLst/>
-          </a:prstGeom>
-          <a:noFill/>
-          <a:ln/>
-        </p:spPr>
-        <p:txBody>
-          <a:bodyPr wrap="square" lIns="0" tIns="0" rIns="0" bIns="0" rtlCol="0" anchor="ctr"/>
-          <a:lstStyle/>
-          <a:p>
-            <a:pPr marL="0" indent="0">
-              <a:buNone/>
-            </a:pPr>
-            <a:r>
-              <a:rPr lang="en-US" sz="1200" b="1" dirty="0">
-                <a:solidFill>
-                  <a:srgbClr val="1A4B8C"/>
-                </a:solidFill>
-                <a:latin typeface="Atkinson Hyperlegible Next" pitchFamily="34" charset="0"/>
-                <a:ea typeface="Atkinson Hyperlegible Next" pitchFamily="34" charset="-122"/>
-                <a:cs typeface="Atkinson Hyperlegible Next" pitchFamily="34" charset="-120"/>
-              </a:rPr>
-              <a:t>VI</a:t>
-            </a:r>
-            <a:endParaRPr lang="en-US" sz="1200" dirty="0"/>
-          </a:p>
-        </p:txBody>
-      </p:sp>
-      <p:sp>
-        <p:nvSpPr>
-          <p:cNvPr id="31" name="Shape 29"/>
-          <p:cNvSpPr/>
-          <p:nvPr/>
-        </p:nvSpPr>
-        <p:spPr>
-          <a:xfrm>
-            <a:off x="9135901" y="1993392"/>
-            <a:ext cx="749808" cy="219456"/>
-          </a:xfrm>
-          <a:prstGeom prst="roundRect">
-            <a:avLst>
-              <a:gd name="adj" fmla="val 50000"/>
-            </a:avLst>
-          </a:prstGeom>
-          <a:solidFill>
-            <a:srgbClr val="1A4B8C"/>
-          </a:solidFill>
-          <a:ln w="12700">
-            <a:solidFill>
-              <a:srgbClr val="1A4B8C"/>
-            </a:solidFill>
-            <a:prstDash val="solid"/>
-          </a:ln>
-        </p:spPr>
-      </p:sp>
-      <p:sp>
-        <p:nvSpPr>
-          <p:cNvPr id="32" name="Text 30"/>
-          <p:cNvSpPr txBox="1"/>
-          <p:nvPr/>
-        </p:nvSpPr>
-        <p:spPr>
-          <a:xfrm>
-            <a:off x="9135901" y="1993392"/>
-            <a:ext cx="749808" cy="219456"/>
-          </a:xfrm>
-          <a:prstGeom prst="rect">
-            <a:avLst/>
-          </a:prstGeom>
-          <a:noFill/>
-          <a:ln/>
-        </p:spPr>
-        <p:txBody>
-          <a:bodyPr wrap="square" lIns="0" tIns="0" rIns="0" bIns="0" rtlCol="0" anchor="ctr"/>
-          <a:lstStyle/>
-          <a:p>
-            <a:pPr marL="0" indent="0" algn="ctr">
-              <a:buNone/>
-            </a:pPr>
-            <a:r>
-              <a:rPr lang="en-US" sz="900" b="1" dirty="0">
-                <a:solidFill>
-                  <a:srgbClr val="FFFFFF"/>
-                </a:solidFill>
-                <a:latin typeface="Atkinson Hyperlegible Next" pitchFamily="34" charset="0"/>
-                <a:ea typeface="Atkinson Hyperlegible Next" pitchFamily="34" charset="-122"/>
-                <a:cs typeface="Atkinson Hyperlegible Next" pitchFamily="34" charset="-120"/>
-              </a:rPr>
-              <a:t>działa</a:t>
-            </a:r>
-            <a:endParaRPr lang="en-US" sz="900" dirty="0"/>
-          </a:p>
-        </p:txBody>
-      </p:sp>
-      <p:sp>
-        <p:nvSpPr>
-          <p:cNvPr id="33" name="Text 31"/>
-          <p:cNvSpPr txBox="1"/>
-          <p:nvPr/>
-        </p:nvSpPr>
-        <p:spPr>
-          <a:xfrm>
-            <a:off x="8622139" y="2286000"/>
-            <a:ext cx="1245282" cy="749808"/>
-          </a:xfrm>
-          <a:prstGeom prst="rect">
-            <a:avLst/>
-          </a:prstGeom>
-          <a:noFill/>
-          <a:ln/>
-        </p:spPr>
-        <p:txBody>
-          <a:bodyPr wrap="square" lIns="0" tIns="0" rIns="0" bIns="0" rtlCol="0" anchor="t"/>
-          <a:lstStyle/>
-          <a:p>
-            <a:pPr marL="0" indent="0">
-              <a:buNone/>
-            </a:pPr>
-            <a:r>
-              <a:rPr lang="en-US" sz="1150" b="1" dirty="0">
-                <a:solidFill>
-                  <a:srgbClr val="14171A"/>
-                </a:solidFill>
-                <a:latin typeface="Atkinson Hyperlegible Next" pitchFamily="34" charset="0"/>
-                <a:ea typeface="Atkinson Hyperlegible Next" pitchFamily="34" charset="-122"/>
-                <a:cs typeface="Atkinson Hyperlegible Next" pitchFamily="34" charset="-120"/>
-              </a:rPr>
-              <a:t>Panel administratora</a:t>
-            </a:r>
-            <a:endParaRPr lang="en-US" sz="1150" dirty="0"/>
-          </a:p>
-          <a:p>
-            <a:pPr marL="0" indent="0">
-              <a:spcBef>
-                <a:spcPts val="200"/>
-              </a:spcBef>
-              <a:buNone/>
-            </a:pPr>
-            <a:r>
-              <a:rPr lang="en-US" sz="950" dirty="0">
-                <a:solidFill>
-                  <a:srgbClr val="454D57"/>
-                </a:solidFill>
-                <a:latin typeface="Atkinson Hyperlegible Next" pitchFamily="34" charset="0"/>
-                <a:ea typeface="Atkinson Hyperlegible Next" pitchFamily="34" charset="-122"/>
-                <a:cs typeface="Atkinson Hyperlegible Next" pitchFamily="34" charset="-120"/>
-              </a:rPr>
-              <a:t>kolejki, decyzje, odpowiedzi, CSV</a:t>
-            </a:r>
-            <a:endParaRPr lang="en-US" sz="1150" dirty="0"/>
-          </a:p>
-        </p:txBody>
-      </p:sp>
-      <p:sp>
-        <p:nvSpPr>
-          <p:cNvPr id="34" name="Shape 32"/>
-          <p:cNvSpPr/>
-          <p:nvPr/>
-        </p:nvSpPr>
-        <p:spPr>
-          <a:xfrm>
-            <a:off x="10086877" y="1901952"/>
-            <a:ext cx="1464738" cy="1188720"/>
-          </a:xfrm>
-          <a:prstGeom prst="roundRect">
-            <a:avLst>
-              <a:gd name="adj" fmla="val 6154"/>
-            </a:avLst>
-          </a:prstGeom>
-          <a:solidFill>
-            <a:srgbClr val="FFFFFF"/>
-          </a:solidFill>
-          <a:ln w="12700">
-            <a:solidFill>
-              <a:srgbClr val="1A4B8C"/>
-            </a:solidFill>
-            <a:prstDash val="dash"/>
-          </a:ln>
-        </p:spPr>
-      </p:sp>
-      <p:sp>
-        <p:nvSpPr>
-          <p:cNvPr id="35" name="Text 33"/>
-          <p:cNvSpPr txBox="1"/>
-          <p:nvPr/>
-        </p:nvSpPr>
-        <p:spPr>
-          <a:xfrm>
-            <a:off x="10196605" y="1993392"/>
-            <a:ext cx="457200" cy="219456"/>
-          </a:xfrm>
-          <a:prstGeom prst="rect">
-            <a:avLst/>
-          </a:prstGeom>
-          <a:noFill/>
-          <a:ln/>
-        </p:spPr>
-        <p:txBody>
-          <a:bodyPr wrap="square" lIns="0" tIns="0" rIns="0" bIns="0" rtlCol="0" anchor="ctr"/>
-          <a:lstStyle/>
-          <a:p>
-            <a:pPr marL="0" indent="0">
-              <a:buNone/>
-            </a:pPr>
-            <a:r>
-              <a:rPr lang="en-US" sz="1200" b="1" dirty="0">
-                <a:solidFill>
-                  <a:srgbClr val="1A4B8C"/>
-                </a:solidFill>
-                <a:latin typeface="Atkinson Hyperlegible Next" pitchFamily="34" charset="0"/>
-                <a:ea typeface="Atkinson Hyperlegible Next" pitchFamily="34" charset="-122"/>
-                <a:cs typeface="Atkinson Hyperlegible Next" pitchFamily="34" charset="-120"/>
-              </a:rPr>
-              <a:t>VII</a:t>
-            </a:r>
-            <a:endParaRPr lang="en-US" sz="1200" dirty="0"/>
-          </a:p>
-        </p:txBody>
-      </p:sp>
-      <p:sp>
-        <p:nvSpPr>
-          <p:cNvPr id="36" name="Shape 34"/>
-          <p:cNvSpPr/>
-          <p:nvPr/>
-        </p:nvSpPr>
-        <p:spPr>
-          <a:xfrm>
-            <a:off x="10710367" y="1993392"/>
-            <a:ext cx="749808" cy="219456"/>
-          </a:xfrm>
-          <a:prstGeom prst="roundRect">
-            <a:avLst>
-              <a:gd name="adj" fmla="val 50000"/>
-            </a:avLst>
-          </a:prstGeom>
-          <a:solidFill>
-            <a:srgbClr val="DCE6F2"/>
-          </a:solidFill>
-          <a:ln w="12700">
-            <a:solidFill>
-              <a:srgbClr val="DCE6F2"/>
-            </a:solidFill>
-            <a:prstDash val="solid"/>
-          </a:ln>
-        </p:spPr>
-      </p:sp>
-      <p:sp>
-        <p:nvSpPr>
-          <p:cNvPr id="37" name="Text 35"/>
-          <p:cNvSpPr txBox="1"/>
-          <p:nvPr/>
-        </p:nvSpPr>
-        <p:spPr>
-          <a:xfrm>
-            <a:off x="10710367" y="1993392"/>
-            <a:ext cx="749808" cy="219456"/>
-          </a:xfrm>
-          <a:prstGeom prst="rect">
-            <a:avLst/>
-          </a:prstGeom>
-          <a:noFill/>
-          <a:ln/>
-        </p:spPr>
-        <p:txBody>
-          <a:bodyPr wrap="square" lIns="0" tIns="0" rIns="0" bIns="0" rtlCol="0" anchor="ctr"/>
-          <a:lstStyle/>
-          <a:p>
-            <a:pPr marL="0" indent="0" algn="ctr">
-              <a:buNone/>
-            </a:pPr>
-            <a:r>
-              <a:rPr lang="en-US" sz="900" b="1" dirty="0">
-                <a:solidFill>
-                  <a:srgbClr val="1A4B8C"/>
-                </a:solidFill>
-                <a:latin typeface="Atkinson Hyperlegible Next" pitchFamily="34" charset="0"/>
-                <a:ea typeface="Atkinson Hyperlegible Next" pitchFamily="34" charset="-122"/>
-                <a:cs typeface="Atkinson Hyperlegible Next" pitchFamily="34" charset="-120"/>
-              </a:rPr>
-              <a:t>częściowo</a:t>
-            </a:r>
-            <a:endParaRPr lang="en-US" sz="900" dirty="0"/>
-          </a:p>
-        </p:txBody>
-      </p:sp>
-      <p:sp>
-        <p:nvSpPr>
-          <p:cNvPr id="38" name="Text 36"/>
-          <p:cNvSpPr txBox="1"/>
-          <p:nvPr/>
-        </p:nvSpPr>
-        <p:spPr>
-          <a:xfrm>
-            <a:off x="10196605" y="2286000"/>
-            <a:ext cx="1245282" cy="749808"/>
-          </a:xfrm>
-          <a:prstGeom prst="rect">
-            <a:avLst/>
-          </a:prstGeom>
-          <a:noFill/>
-          <a:ln/>
-        </p:spPr>
-        <p:txBody>
-          <a:bodyPr wrap="square" lIns="0" tIns="0" rIns="0" bIns="0" rtlCol="0" anchor="t"/>
-          <a:lstStyle/>
-          <a:p>
-            <a:pPr marL="0" indent="0">
-              <a:buNone/>
-            </a:pPr>
-            <a:r>
-              <a:rPr lang="en-US" sz="1150" b="1" dirty="0">
-                <a:solidFill>
-                  <a:srgbClr val="14171A"/>
-                </a:solidFill>
-                <a:latin typeface="Atkinson Hyperlegible Next" pitchFamily="34" charset="0"/>
-                <a:ea typeface="Atkinson Hyperlegible Next" pitchFamily="34" charset="-122"/>
-                <a:cs typeface="Atkinson Hyperlegible Next" pitchFamily="34" charset="-120"/>
-              </a:rPr>
-              <a:t>Middleman Innowacji</a:t>
-            </a:r>
-            <a:endParaRPr lang="en-US" sz="1150" dirty="0"/>
-          </a:p>
-          <a:p>
-            <a:pPr marL="0" indent="0">
-              <a:spcBef>
-                <a:spcPts val="200"/>
-              </a:spcBef>
-              <a:buNone/>
-            </a:pPr>
-            <a:r>
-              <a:rPr lang="en-US" sz="950" dirty="0">
-                <a:solidFill>
-                  <a:srgbClr val="454D57"/>
-                </a:solidFill>
-                <a:latin typeface="Atkinson Hyperlegible Next" pitchFamily="34" charset="0"/>
-                <a:ea typeface="Atkinson Hyperlegible Next" pitchFamily="34" charset="-122"/>
-                <a:cs typeface="Atkinson Hyperlegible Next" pitchFamily="34" charset="-120"/>
-              </a:rPr>
-              <a:t>ścieżki według roli i gminy</a:t>
-            </a:r>
-            <a:endParaRPr lang="en-US" sz="1150" dirty="0"/>
-          </a:p>
-        </p:txBody>
-      </p:sp>
-      <p:sp>
-        <p:nvSpPr>
-          <p:cNvPr id="39" name="Text 37"/>
-          <p:cNvSpPr txBox="1"/>
-          <p:nvPr/>
-        </p:nvSpPr>
-        <p:spPr>
-          <a:xfrm>
-            <a:off x="640080" y="3246120"/>
-            <a:ext cx="10911535" cy="256032"/>
-          </a:xfrm>
-          <a:prstGeom prst="rect">
-            <a:avLst/>
-          </a:prstGeom>
-          <a:noFill/>
-          <a:ln/>
-        </p:spPr>
-        <p:txBody>
-          <a:bodyPr wrap="square" lIns="0" tIns="0" rIns="0" bIns="0" rtlCol="0" anchor="ctr"/>
-          <a:lstStyle/>
-          <a:p>
-            <a:pPr marL="0" indent="0">
-              <a:buNone/>
-            </a:pPr>
-            <a:r>
-              <a:rPr lang="en-US" sz="1000" b="1" kern="0" spc="100" dirty="0">
-                <a:solidFill>
-                  <a:srgbClr val="1A4B8C"/>
-                </a:solidFill>
-                <a:latin typeface="Atkinson Hyperlegible Next" pitchFamily="34" charset="0"/>
-                <a:ea typeface="Atkinson Hyperlegible Next" pitchFamily="34" charset="-122"/>
-                <a:cs typeface="Atkinson Hyperlegible Next" pitchFamily="34" charset="-120"/>
-              </a:rPr>
-              <a:t>PLAN ROZWOJU  ·  JESZCZE NIEZBUDOWANE</a:t>
-            </a:r>
-            <a:endParaRPr lang="en-US" sz="1000" dirty="0"/>
-          </a:p>
-        </p:txBody>
-      </p:sp>
-      <p:sp>
-        <p:nvSpPr>
-          <p:cNvPr id="40" name="Text 38"/>
-          <p:cNvSpPr txBox="1"/>
-          <p:nvPr/>
-        </p:nvSpPr>
-        <p:spPr>
-          <a:xfrm>
-            <a:off x="640080" y="3557016"/>
-            <a:ext cx="4846320" cy="274320"/>
-          </a:xfrm>
-          <a:prstGeom prst="rect">
-            <a:avLst/>
-          </a:prstGeom>
-          <a:noFill/>
-          <a:ln/>
-        </p:spPr>
-        <p:txBody>
-          <a:bodyPr wrap="square" lIns="0" tIns="0" rIns="0" bIns="0" rtlCol="0" anchor="ctr"/>
-          <a:lstStyle/>
-          <a:p>
-            <a:pPr marL="0" indent="0">
-              <a:buNone/>
-            </a:pPr>
-            <a:r>
-              <a:rPr lang="en-US" sz="1400" b="1" dirty="0">
-                <a:solidFill>
-                  <a:srgbClr val="1A4B8C"/>
-                </a:solidFill>
-                <a:latin typeface="Atkinson Hyperlegible Next" pitchFamily="34" charset="0"/>
-                <a:ea typeface="Atkinson Hyperlegible Next" pitchFamily="34" charset="-122"/>
-                <a:cs typeface="Atkinson Hyperlegible Next" pitchFamily="34" charset="-120"/>
-              </a:rPr>
-              <a:t>Trzy role w Dziale Innowacji Społecznych ROPS</a:t>
-            </a:r>
-            <a:endParaRPr lang="en-US" sz="1400" dirty="0"/>
-          </a:p>
-        </p:txBody>
-      </p:sp>
-      <p:sp>
-        <p:nvSpPr>
-          <p:cNvPr id="41" name="Text 39"/>
-          <p:cNvSpPr txBox="1"/>
-          <p:nvPr/>
-        </p:nvSpPr>
-        <p:spPr>
-          <a:xfrm>
-            <a:off x="640080" y="3886200"/>
-            <a:ext cx="4846320" cy="402336"/>
-          </a:xfrm>
-          <a:prstGeom prst="rect">
-            <a:avLst/>
-          </a:prstGeom>
-          <a:noFill/>
-          <a:ln/>
-        </p:spPr>
-        <p:txBody>
-          <a:bodyPr wrap="square" lIns="0" tIns="0" rIns="0" bIns="0" rtlCol="0" anchor="t"/>
-          <a:lstStyle/>
-          <a:p>
-            <a:pPr marL="0" indent="0">
-              <a:buNone/>
-            </a:pPr>
-            <a:r>
-              <a:rPr lang="en-US" sz="1250" b="1" dirty="0">
-                <a:solidFill>
-                  <a:srgbClr val="14171A"/>
-                </a:solidFill>
-                <a:latin typeface="Atkinson Hyperlegible Next" pitchFamily="34" charset="0"/>
-                <a:ea typeface="Atkinson Hyperlegible Next" pitchFamily="34" charset="-122"/>
-                <a:cs typeface="Atkinson Hyperlegible Next" pitchFamily="34" charset="-120"/>
-              </a:rPr>
-              <a:t>Opiekun kategorii</a:t>
-            </a:r>
-            <a:endParaRPr lang="en-US" sz="1250" dirty="0"/>
-          </a:p>
-          <a:p>
-            <a:pPr marL="0" indent="0">
-              <a:buNone/>
-            </a:pPr>
-            <a:r>
-              <a:rPr lang="en-US" sz="1100" dirty="0">
-                <a:solidFill>
-                  <a:srgbClr val="454D57"/>
-                </a:solidFill>
-                <a:latin typeface="Atkinson Hyperlegible Next" pitchFamily="34" charset="0"/>
-                <a:ea typeface="Atkinson Hyperlegible Next" pitchFamily="34" charset="-122"/>
-                <a:cs typeface="Atkinson Hyperlegible Next" pitchFamily="34" charset="-120"/>
-              </a:rPr>
-              <a:t>osoba wskazana na każdej drodze; przyjmuje prośby o kontakt</a:t>
-            </a:r>
-            <a:endParaRPr lang="en-US" sz="1250" dirty="0"/>
-          </a:p>
-        </p:txBody>
-      </p:sp>
-      <p:sp>
-        <p:nvSpPr>
-          <p:cNvPr id="42" name="Text 40"/>
-          <p:cNvSpPr txBox="1"/>
-          <p:nvPr/>
-        </p:nvSpPr>
-        <p:spPr>
-          <a:xfrm>
-            <a:off x="640080" y="4288536"/>
-            <a:ext cx="4846320" cy="402336"/>
-          </a:xfrm>
-          <a:prstGeom prst="rect">
-            <a:avLst/>
-          </a:prstGeom>
-          <a:noFill/>
-          <a:ln/>
-        </p:spPr>
-        <p:txBody>
-          <a:bodyPr wrap="square" lIns="0" tIns="0" rIns="0" bIns="0" rtlCol="0" anchor="t"/>
-          <a:lstStyle/>
-          <a:p>
-            <a:pPr marL="0" indent="0">
-              <a:buNone/>
-            </a:pPr>
-            <a:r>
-              <a:rPr lang="en-US" sz="1250" b="1" dirty="0">
-                <a:solidFill>
-                  <a:srgbClr val="14171A"/>
-                </a:solidFill>
-                <a:latin typeface="Atkinson Hyperlegible Next" pitchFamily="34" charset="0"/>
-                <a:ea typeface="Atkinson Hyperlegible Next" pitchFamily="34" charset="-122"/>
-                <a:cs typeface="Atkinson Hyperlegible Next" pitchFamily="34" charset="-120"/>
-              </a:rPr>
-              <a:t>Redaktor katalogu</a:t>
-            </a:r>
-            <a:endParaRPr lang="en-US" sz="1250" dirty="0"/>
-          </a:p>
-          <a:p>
-            <a:pPr marL="0" indent="0">
-              <a:buNone/>
-            </a:pPr>
-            <a:r>
-              <a:rPr lang="en-US" sz="1100" dirty="0">
-                <a:solidFill>
-                  <a:srgbClr val="454D57"/>
-                </a:solidFill>
-                <a:latin typeface="Atkinson Hyperlegible Next" pitchFamily="34" charset="0"/>
-                <a:ea typeface="Atkinson Hyperlegible Next" pitchFamily="34" charset="-122"/>
-                <a:cs typeface="Atkinson Hyperlegible Next" pitchFamily="34" charset="-120"/>
-              </a:rPr>
-              <a:t>aktualizuje opisy, co roku pyta autorów, zapisuje wdrożenia</a:t>
-            </a:r>
-            <a:endParaRPr lang="en-US" sz="1250" dirty="0"/>
-          </a:p>
-        </p:txBody>
-      </p:sp>
-      <p:sp>
-        <p:nvSpPr>
-          <p:cNvPr id="43" name="Text 41"/>
-          <p:cNvSpPr txBox="1"/>
-          <p:nvPr/>
-        </p:nvSpPr>
-        <p:spPr>
-          <a:xfrm>
-            <a:off x="640080" y="4690872"/>
-            <a:ext cx="4846320" cy="402336"/>
-          </a:xfrm>
-          <a:prstGeom prst="rect">
-            <a:avLst/>
-          </a:prstGeom>
-          <a:noFill/>
-          <a:ln/>
-        </p:spPr>
-        <p:txBody>
-          <a:bodyPr wrap="square" lIns="0" tIns="0" rIns="0" bIns="0" rtlCol="0" anchor="t"/>
-          <a:lstStyle/>
-          <a:p>
-            <a:pPr marL="0" indent="0">
-              <a:buNone/>
-            </a:pPr>
-            <a:r>
-              <a:rPr lang="en-US" sz="1250" b="1" dirty="0">
-                <a:solidFill>
-                  <a:srgbClr val="14171A"/>
-                </a:solidFill>
-                <a:latin typeface="Atkinson Hyperlegible Next" pitchFamily="34" charset="0"/>
-                <a:ea typeface="Atkinson Hyperlegible Next" pitchFamily="34" charset="-122"/>
-                <a:cs typeface="Atkinson Hyperlegible Next" pitchFamily="34" charset="-120"/>
-              </a:rPr>
-              <a:t>Koordynator banku potrzeb</a:t>
-            </a:r>
-            <a:endParaRPr lang="en-US" sz="1250" dirty="0"/>
-          </a:p>
-          <a:p>
-            <a:pPr marL="0" indent="0">
-              <a:buNone/>
-            </a:pPr>
-            <a:r>
-              <a:rPr lang="en-US" sz="1100" dirty="0">
-                <a:solidFill>
-                  <a:srgbClr val="454D57"/>
-                </a:solidFill>
-                <a:latin typeface="Atkinson Hyperlegible Next" pitchFamily="34" charset="0"/>
-                <a:ea typeface="Atkinson Hyperlegible Next" pitchFamily="34" charset="-122"/>
-                <a:cs typeface="Atkinson Hyperlegible Next" pitchFamily="34" charset="-120"/>
-              </a:rPr>
-              <a:t>co tydzień przegląda potrzeby, łączy je w tematy naborów</a:t>
-            </a:r>
-            <a:endParaRPr lang="en-US" sz="1250" dirty="0"/>
-          </a:p>
-        </p:txBody>
-      </p:sp>
-      <p:sp>
-        <p:nvSpPr>
-          <p:cNvPr id="44" name="Text 42"/>
-          <p:cNvSpPr txBox="1"/>
-          <p:nvPr/>
-        </p:nvSpPr>
-        <p:spPr>
-          <a:xfrm>
-            <a:off x="5897880" y="3557016"/>
-            <a:ext cx="5653735" cy="274320"/>
-          </a:xfrm>
-          <a:prstGeom prst="rect">
-            <a:avLst/>
-          </a:prstGeom>
-          <a:noFill/>
-          <a:ln/>
-        </p:spPr>
-        <p:txBody>
-          <a:bodyPr wrap="square" lIns="0" tIns="0" rIns="0" bIns="0" rtlCol="0" anchor="ctr"/>
-          <a:lstStyle/>
-          <a:p>
-            <a:pPr marL="0" indent="0">
-              <a:buNone/>
-            </a:pPr>
-            <a:r>
-              <a:rPr lang="en-US" sz="1400" b="1" dirty="0">
-                <a:solidFill>
-                  <a:srgbClr val="1A4B8C"/>
-                </a:solidFill>
-                <a:latin typeface="Atkinson Hyperlegible Next" pitchFamily="34" charset="0"/>
-                <a:ea typeface="Atkinson Hyperlegible Next" pitchFamily="34" charset="-122"/>
-                <a:cs typeface="Atkinson Hyperlegible Next" pitchFamily="34" charset="-120"/>
-              </a:rPr>
-              <a:t>Trzy pętle, które domknie usługa</a:t>
-            </a:r>
-            <a:endParaRPr lang="en-US" sz="1400" dirty="0"/>
-          </a:p>
-        </p:txBody>
-      </p:sp>
-      <p:sp>
-        <p:nvSpPr>
-          <p:cNvPr id="45" name="Shape 43"/>
-          <p:cNvSpPr/>
-          <p:nvPr/>
-        </p:nvSpPr>
-        <p:spPr>
-          <a:xfrm>
-            <a:off x="5897880" y="3904488"/>
-            <a:ext cx="292608" cy="292608"/>
-          </a:xfrm>
-          <a:prstGeom prst="ellipse">
-            <a:avLst/>
-          </a:prstGeom>
-          <a:solidFill>
-            <a:srgbClr val="FFFFFF"/>
-          </a:solidFill>
-          <a:ln w="19050">
-            <a:solidFill>
-              <a:srgbClr val="1A4B8C"/>
-            </a:solidFill>
-            <a:prstDash val="solid"/>
-          </a:ln>
-        </p:spPr>
-      </p:sp>
-      <p:sp>
-        <p:nvSpPr>
-          <p:cNvPr id="46" name="Text 44"/>
-          <p:cNvSpPr txBox="1"/>
-          <p:nvPr/>
-        </p:nvSpPr>
-        <p:spPr>
-          <a:xfrm>
-            <a:off x="5897880" y="3904488"/>
-            <a:ext cx="292608" cy="292608"/>
-          </a:xfrm>
-          <a:prstGeom prst="rect">
-            <a:avLst/>
-          </a:prstGeom>
-          <a:noFill/>
-          <a:ln/>
-        </p:spPr>
-        <p:txBody>
-          <a:bodyPr wrap="square" lIns="0" tIns="0" rIns="0" bIns="0" rtlCol="0" anchor="ctr"/>
-          <a:lstStyle/>
-          <a:p>
-            <a:pPr marL="0" indent="0" algn="ctr">
-              <a:buNone/>
-            </a:pPr>
-            <a:r>
-              <a:rPr lang="en-US" sz="1200" b="1" dirty="0">
-                <a:solidFill>
-                  <a:srgbClr val="1A4B8C"/>
-                </a:solidFill>
-                <a:latin typeface="Atkinson Hyperlegible Next" pitchFamily="34" charset="0"/>
-                <a:ea typeface="Atkinson Hyperlegible Next" pitchFamily="34" charset="-122"/>
-                <a:cs typeface="Atkinson Hyperlegible Next" pitchFamily="34" charset="-120"/>
-              </a:rPr>
-              <a:t>1</a:t>
-            </a:r>
-            <a:endParaRPr lang="en-US" sz="1200" dirty="0"/>
-          </a:p>
-        </p:txBody>
-      </p:sp>
-      <p:sp>
-        <p:nvSpPr>
-          <p:cNvPr id="47" name="Text 45"/>
-          <p:cNvSpPr txBox="1"/>
-          <p:nvPr/>
-        </p:nvSpPr>
-        <p:spPr>
-          <a:xfrm>
-            <a:off x="6309360" y="3886200"/>
-            <a:ext cx="5242255" cy="329184"/>
-          </a:xfrm>
-          <a:prstGeom prst="rect">
-            <a:avLst/>
-          </a:prstGeom>
-          <a:noFill/>
-          <a:ln/>
-        </p:spPr>
-        <p:txBody>
-          <a:bodyPr wrap="square" lIns="0" tIns="0" rIns="0" bIns="0" rtlCol="0" anchor="ctr"/>
-          <a:lstStyle/>
-          <a:p>
-            <a:pPr marL="0" indent="0">
-              <a:buNone/>
-            </a:pPr>
-            <a:r>
-              <a:rPr lang="en-US" sz="1250" b="1" dirty="0">
-                <a:solidFill>
-                  <a:srgbClr val="14171A"/>
-                </a:solidFill>
-                <a:latin typeface="Atkinson Hyperlegible Next" pitchFamily="34" charset="0"/>
-                <a:ea typeface="Atkinson Hyperlegible Next" pitchFamily="34" charset="-122"/>
-                <a:cs typeface="Atkinson Hyperlegible Next" pitchFamily="34" charset="-120"/>
-              </a:rPr>
-              <a:t>Potrzeba</a:t>
-            </a:r>
-            <a:r>
-              <a:rPr lang="en-US" sz="1250" b="1" dirty="0">
-                <a:solidFill>
-                  <a:srgbClr val="1A4B8C"/>
-                </a:solidFill>
-                <a:latin typeface="Atkinson Hyperlegible Next" pitchFamily="34" charset="0"/>
-                <a:ea typeface="Atkinson Hyperlegible Next" pitchFamily="34" charset="-122"/>
-                <a:cs typeface="Atkinson Hyperlegible Next" pitchFamily="34" charset="-120"/>
-              </a:rPr>
-              <a:t>  →  </a:t>
-            </a:r>
-            <a:r>
-              <a:rPr lang="en-US" sz="1250" dirty="0">
-                <a:solidFill>
-                  <a:srgbClr val="14171A"/>
-                </a:solidFill>
-                <a:latin typeface="Atkinson Hyperlegible Next" pitchFamily="34" charset="0"/>
-                <a:ea typeface="Atkinson Hyperlegible Next" pitchFamily="34" charset="-122"/>
-                <a:cs typeface="Atkinson Hyperlegible Next" pitchFamily="34" charset="-120"/>
-              </a:rPr>
-              <a:t>droga</a:t>
-            </a:r>
-            <a:r>
-              <a:rPr lang="en-US" sz="1250" b="1" dirty="0">
-                <a:solidFill>
-                  <a:srgbClr val="1A4B8C"/>
-                </a:solidFill>
-                <a:latin typeface="Atkinson Hyperlegible Next" pitchFamily="34" charset="0"/>
-                <a:ea typeface="Atkinson Hyperlegible Next" pitchFamily="34" charset="-122"/>
-                <a:cs typeface="Atkinson Hyperlegible Next" pitchFamily="34" charset="-120"/>
-              </a:rPr>
-              <a:t>  →  </a:t>
-            </a:r>
-            <a:r>
-              <a:rPr lang="en-US" sz="1250" dirty="0">
-                <a:solidFill>
-                  <a:srgbClr val="14171A"/>
-                </a:solidFill>
-                <a:latin typeface="Atkinson Hyperlegible Next" pitchFamily="34" charset="0"/>
-                <a:ea typeface="Atkinson Hyperlegible Next" pitchFamily="34" charset="-122"/>
-                <a:cs typeface="Atkinson Hyperlegible Next" pitchFamily="34" charset="-120"/>
-              </a:rPr>
-              <a:t>kontakt</a:t>
-            </a:r>
-            <a:r>
-              <a:rPr lang="en-US" sz="1250" b="1" dirty="0">
-                <a:solidFill>
-                  <a:srgbClr val="1A4B8C"/>
-                </a:solidFill>
-                <a:latin typeface="Atkinson Hyperlegible Next" pitchFamily="34" charset="0"/>
-                <a:ea typeface="Atkinson Hyperlegible Next" pitchFamily="34" charset="-122"/>
-                <a:cs typeface="Atkinson Hyperlegible Next" pitchFamily="34" charset="-120"/>
-              </a:rPr>
-              <a:t>  →  </a:t>
-            </a:r>
-            <a:r>
-              <a:rPr lang="en-US" sz="1250" b="1" dirty="0">
-                <a:solidFill>
-                  <a:srgbClr val="14171A"/>
-                </a:solidFill>
-                <a:latin typeface="Atkinson Hyperlegible Next" pitchFamily="34" charset="0"/>
-                <a:ea typeface="Atkinson Hyperlegible Next" pitchFamily="34" charset="-122"/>
-                <a:cs typeface="Atkinson Hyperlegible Next" pitchFamily="34" charset="-120"/>
-              </a:rPr>
-              <a:t>nowe wdrożenie</a:t>
-            </a:r>
-            <a:endParaRPr lang="en-US" sz="1250" dirty="0"/>
-          </a:p>
-        </p:txBody>
-      </p:sp>
-      <p:sp>
-        <p:nvSpPr>
-          <p:cNvPr id="48" name="Shape 46"/>
-          <p:cNvSpPr/>
-          <p:nvPr/>
-        </p:nvSpPr>
-        <p:spPr>
-          <a:xfrm>
-            <a:off x="5897880" y="4306824"/>
-            <a:ext cx="292608" cy="292608"/>
-          </a:xfrm>
-          <a:prstGeom prst="ellipse">
-            <a:avLst/>
-          </a:prstGeom>
-          <a:solidFill>
-            <a:srgbClr val="FFFFFF"/>
-          </a:solidFill>
-          <a:ln w="19050">
-            <a:solidFill>
-              <a:srgbClr val="1A4B8C"/>
-            </a:solidFill>
-            <a:prstDash val="solid"/>
-          </a:ln>
-        </p:spPr>
-      </p:sp>
-      <p:sp>
-        <p:nvSpPr>
-          <p:cNvPr id="49" name="Text 47"/>
-          <p:cNvSpPr txBox="1"/>
-          <p:nvPr/>
-        </p:nvSpPr>
-        <p:spPr>
-          <a:xfrm>
-            <a:off x="5897880" y="4306824"/>
-            <a:ext cx="292608" cy="292608"/>
-          </a:xfrm>
-          <a:prstGeom prst="rect">
-            <a:avLst/>
-          </a:prstGeom>
-          <a:noFill/>
-          <a:ln/>
-        </p:spPr>
-        <p:txBody>
-          <a:bodyPr wrap="square" lIns="0" tIns="0" rIns="0" bIns="0" rtlCol="0" anchor="ctr"/>
-          <a:lstStyle/>
-          <a:p>
-            <a:pPr marL="0" indent="0" algn="ctr">
-              <a:buNone/>
-            </a:pPr>
-            <a:r>
-              <a:rPr lang="en-US" sz="1200" b="1" dirty="0">
-                <a:solidFill>
-                  <a:srgbClr val="1A4B8C"/>
-                </a:solidFill>
-                <a:latin typeface="Atkinson Hyperlegible Next" pitchFamily="34" charset="0"/>
-                <a:ea typeface="Atkinson Hyperlegible Next" pitchFamily="34" charset="-122"/>
-                <a:cs typeface="Atkinson Hyperlegible Next" pitchFamily="34" charset="-120"/>
-              </a:rPr>
-              <a:t>2</a:t>
-            </a:r>
-            <a:endParaRPr lang="en-US" sz="1200" dirty="0"/>
-          </a:p>
-        </p:txBody>
-      </p:sp>
-      <p:sp>
-        <p:nvSpPr>
-          <p:cNvPr id="50" name="Text 48"/>
-          <p:cNvSpPr txBox="1"/>
-          <p:nvPr/>
-        </p:nvSpPr>
-        <p:spPr>
-          <a:xfrm>
-            <a:off x="6309360" y="4288536"/>
-            <a:ext cx="5242255" cy="329184"/>
-          </a:xfrm>
-          <a:prstGeom prst="rect">
-            <a:avLst/>
-          </a:prstGeom>
-          <a:noFill/>
-          <a:ln/>
-        </p:spPr>
-        <p:txBody>
-          <a:bodyPr wrap="square" lIns="0" tIns="0" rIns="0" bIns="0" rtlCol="0" anchor="ctr"/>
-          <a:lstStyle/>
-          <a:p>
-            <a:pPr marL="0" indent="0">
-              <a:buNone/>
-            </a:pPr>
-            <a:r>
-              <a:rPr lang="en-US" sz="1250" b="1" dirty="0">
-                <a:solidFill>
-                  <a:srgbClr val="14171A"/>
-                </a:solidFill>
-                <a:latin typeface="Atkinson Hyperlegible Next" pitchFamily="34" charset="0"/>
-                <a:ea typeface="Atkinson Hyperlegible Next" pitchFamily="34" charset="-122"/>
-                <a:cs typeface="Atkinson Hyperlegible Next" pitchFamily="34" charset="-120"/>
-              </a:rPr>
-              <a:t>Potrzeba</a:t>
-            </a:r>
-            <a:r>
-              <a:rPr lang="en-US" sz="1250" b="1" dirty="0">
-                <a:solidFill>
-                  <a:srgbClr val="1A4B8C"/>
-                </a:solidFill>
-                <a:latin typeface="Atkinson Hyperlegible Next" pitchFamily="34" charset="0"/>
-                <a:ea typeface="Atkinson Hyperlegible Next" pitchFamily="34" charset="-122"/>
-                <a:cs typeface="Atkinson Hyperlegible Next" pitchFamily="34" charset="-120"/>
-              </a:rPr>
-              <a:t>  →  </a:t>
-            </a:r>
-            <a:r>
-              <a:rPr lang="en-US" sz="1250" dirty="0">
-                <a:solidFill>
-                  <a:srgbClr val="14171A"/>
-                </a:solidFill>
-                <a:latin typeface="Atkinson Hyperlegible Next" pitchFamily="34" charset="0"/>
-                <a:ea typeface="Atkinson Hyperlegible Next" pitchFamily="34" charset="-122"/>
-                <a:cs typeface="Atkinson Hyperlegible Next" pitchFamily="34" charset="-120"/>
-              </a:rPr>
-              <a:t>bank potrzeb</a:t>
-            </a:r>
-            <a:r>
-              <a:rPr lang="en-US" sz="1250" b="1" dirty="0">
-                <a:solidFill>
-                  <a:srgbClr val="1A4B8C"/>
-                </a:solidFill>
-                <a:latin typeface="Atkinson Hyperlegible Next" pitchFamily="34" charset="0"/>
-                <a:ea typeface="Atkinson Hyperlegible Next" pitchFamily="34" charset="-122"/>
-                <a:cs typeface="Atkinson Hyperlegible Next" pitchFamily="34" charset="-120"/>
-              </a:rPr>
-              <a:t>  →  </a:t>
-            </a:r>
-            <a:r>
-              <a:rPr lang="en-US" sz="1250" dirty="0">
-                <a:solidFill>
-                  <a:srgbClr val="14171A"/>
-                </a:solidFill>
-                <a:latin typeface="Atkinson Hyperlegible Next" pitchFamily="34" charset="0"/>
-                <a:ea typeface="Atkinson Hyperlegible Next" pitchFamily="34" charset="-122"/>
-                <a:cs typeface="Atkinson Hyperlegible Next" pitchFamily="34" charset="-120"/>
-              </a:rPr>
-              <a:t>temat naboru</a:t>
-            </a:r>
-            <a:r>
-              <a:rPr lang="en-US" sz="1250" b="1" dirty="0">
-                <a:solidFill>
-                  <a:srgbClr val="1A4B8C"/>
-                </a:solidFill>
-                <a:latin typeface="Atkinson Hyperlegible Next" pitchFamily="34" charset="0"/>
-                <a:ea typeface="Atkinson Hyperlegible Next" pitchFamily="34" charset="-122"/>
-                <a:cs typeface="Atkinson Hyperlegible Next" pitchFamily="34" charset="-120"/>
-              </a:rPr>
-              <a:t>  →  </a:t>
-            </a:r>
-            <a:r>
-              <a:rPr lang="en-US" sz="1250" b="1" dirty="0">
-                <a:solidFill>
-                  <a:srgbClr val="14171A"/>
-                </a:solidFill>
-                <a:latin typeface="Atkinson Hyperlegible Next" pitchFamily="34" charset="0"/>
-                <a:ea typeface="Atkinson Hyperlegible Next" pitchFamily="34" charset="-122"/>
-                <a:cs typeface="Atkinson Hyperlegible Next" pitchFamily="34" charset="-120"/>
-              </a:rPr>
-              <a:t>nowa innowacja</a:t>
-            </a:r>
-            <a:endParaRPr lang="en-US" sz="1250" dirty="0"/>
-          </a:p>
-        </p:txBody>
-      </p:sp>
-      <p:sp>
-        <p:nvSpPr>
-          <p:cNvPr id="51" name="Shape 49"/>
-          <p:cNvSpPr/>
-          <p:nvPr/>
-        </p:nvSpPr>
-        <p:spPr>
-          <a:xfrm>
-            <a:off x="5897880" y="4709160"/>
-            <a:ext cx="292608" cy="292608"/>
-          </a:xfrm>
-          <a:prstGeom prst="ellipse">
-            <a:avLst/>
-          </a:prstGeom>
-          <a:solidFill>
-            <a:srgbClr val="FFFFFF"/>
-          </a:solidFill>
-          <a:ln w="19050">
-            <a:solidFill>
-              <a:srgbClr val="1A4B8C"/>
-            </a:solidFill>
-            <a:prstDash val="solid"/>
-          </a:ln>
-        </p:spPr>
-      </p:sp>
-      <p:sp>
-        <p:nvSpPr>
-          <p:cNvPr id="52" name="Text 50"/>
-          <p:cNvSpPr txBox="1"/>
-          <p:nvPr/>
-        </p:nvSpPr>
-        <p:spPr>
-          <a:xfrm>
-            <a:off x="5897880" y="4709160"/>
-            <a:ext cx="292608" cy="292608"/>
-          </a:xfrm>
-          <a:prstGeom prst="rect">
-            <a:avLst/>
-          </a:prstGeom>
-          <a:noFill/>
-          <a:ln/>
-        </p:spPr>
-        <p:txBody>
-          <a:bodyPr wrap="square" lIns="0" tIns="0" rIns="0" bIns="0" rtlCol="0" anchor="ctr"/>
-          <a:lstStyle/>
-          <a:p>
-            <a:pPr marL="0" indent="0" algn="ctr">
-              <a:buNone/>
-            </a:pPr>
-            <a:r>
-              <a:rPr lang="en-US" sz="1200" b="1" dirty="0">
-                <a:solidFill>
-                  <a:srgbClr val="1A4B8C"/>
-                </a:solidFill>
-                <a:latin typeface="Atkinson Hyperlegible Next" pitchFamily="34" charset="0"/>
-                <a:ea typeface="Atkinson Hyperlegible Next" pitchFamily="34" charset="-122"/>
-                <a:cs typeface="Atkinson Hyperlegible Next" pitchFamily="34" charset="-120"/>
-              </a:rPr>
-              <a:t>3</a:t>
-            </a:r>
-            <a:endParaRPr lang="en-US" sz="1200" dirty="0"/>
-          </a:p>
-        </p:txBody>
-      </p:sp>
-      <p:sp>
-        <p:nvSpPr>
-          <p:cNvPr id="53" name="Text 51"/>
-          <p:cNvSpPr txBox="1"/>
-          <p:nvPr/>
-        </p:nvSpPr>
-        <p:spPr>
-          <a:xfrm>
-            <a:off x="6309360" y="4690872"/>
-            <a:ext cx="5242255" cy="329184"/>
-          </a:xfrm>
-          <a:prstGeom prst="rect">
-            <a:avLst/>
-          </a:prstGeom>
-          <a:noFill/>
-          <a:ln/>
-        </p:spPr>
-        <p:txBody>
-          <a:bodyPr wrap="square" lIns="0" tIns="0" rIns="0" bIns="0" rtlCol="0" anchor="ctr"/>
-          <a:lstStyle/>
-          <a:p>
-            <a:pPr marL="0" indent="0">
-              <a:buNone/>
-            </a:pPr>
-            <a:r>
-              <a:rPr lang="en-US" sz="1250" b="1" dirty="0">
-                <a:solidFill>
-                  <a:srgbClr val="14171A"/>
-                </a:solidFill>
-                <a:latin typeface="Atkinson Hyperlegible Next" pitchFamily="34" charset="0"/>
-                <a:ea typeface="Atkinson Hyperlegible Next" pitchFamily="34" charset="-122"/>
-                <a:cs typeface="Atkinson Hyperlegible Next" pitchFamily="34" charset="-120"/>
-              </a:rPr>
-              <a:t>Innowacja</a:t>
-            </a:r>
-            <a:r>
-              <a:rPr lang="en-US" sz="1250" b="1" dirty="0">
-                <a:solidFill>
-                  <a:srgbClr val="1A4B8C"/>
-                </a:solidFill>
-                <a:latin typeface="Atkinson Hyperlegible Next" pitchFamily="34" charset="0"/>
-                <a:ea typeface="Atkinson Hyperlegible Next" pitchFamily="34" charset="-122"/>
-                <a:cs typeface="Atkinson Hyperlegible Next" pitchFamily="34" charset="-120"/>
-              </a:rPr>
-              <a:t>  →  </a:t>
-            </a:r>
-            <a:r>
-              <a:rPr lang="en-US" sz="1250" dirty="0">
-                <a:solidFill>
-                  <a:srgbClr val="14171A"/>
-                </a:solidFill>
-                <a:latin typeface="Atkinson Hyperlegible Next" pitchFamily="34" charset="0"/>
-                <a:ea typeface="Atkinson Hyperlegible Next" pitchFamily="34" charset="-122"/>
-                <a:cs typeface="Atkinson Hyperlegible Next" pitchFamily="34" charset="-120"/>
-              </a:rPr>
-              <a:t>mapa potrzeb</a:t>
-            </a:r>
-            <a:r>
-              <a:rPr lang="en-US" sz="1250" b="1" dirty="0">
-                <a:solidFill>
-                  <a:srgbClr val="1A4B8C"/>
-                </a:solidFill>
-                <a:latin typeface="Atkinson Hyperlegible Next" pitchFamily="34" charset="0"/>
-                <a:ea typeface="Atkinson Hyperlegible Next" pitchFamily="34" charset="-122"/>
-                <a:cs typeface="Atkinson Hyperlegible Next" pitchFamily="34" charset="-120"/>
-              </a:rPr>
-              <a:t>  →  </a:t>
-            </a:r>
-            <a:r>
-              <a:rPr lang="en-US" sz="1250" b="1" dirty="0">
-                <a:solidFill>
-                  <a:srgbClr val="14171A"/>
-                </a:solidFill>
-                <a:latin typeface="Atkinson Hyperlegible Next" pitchFamily="34" charset="0"/>
-                <a:ea typeface="Atkinson Hyperlegible Next" pitchFamily="34" charset="-122"/>
-                <a:cs typeface="Atkinson Hyperlegible Next" pitchFamily="34" charset="-120"/>
-              </a:rPr>
-              <a:t>granty tam, gdzie jej brakuje</a:t>
-            </a:r>
-            <a:endParaRPr lang="en-US" sz="1250" dirty="0"/>
-          </a:p>
-        </p:txBody>
-      </p:sp>
-      <p:sp>
-        <p:nvSpPr>
-          <p:cNvPr id="54" name="Shape 52"/>
-          <p:cNvSpPr/>
-          <p:nvPr/>
-        </p:nvSpPr>
-        <p:spPr>
-          <a:xfrm>
-            <a:off x="640080" y="5202936"/>
-            <a:ext cx="4846320" cy="1124712"/>
-          </a:xfrm>
-          <a:prstGeom prst="roundRect">
-            <a:avLst>
-              <a:gd name="adj" fmla="val 8130"/>
-            </a:avLst>
-          </a:prstGeom>
-          <a:solidFill>
-            <a:srgbClr val="F3F5F8"/>
-          </a:solidFill>
-          <a:ln w="12700">
-            <a:solidFill>
-              <a:srgbClr val="F3F5F8"/>
-            </a:solidFill>
-            <a:prstDash val="solid"/>
-          </a:ln>
-        </p:spPr>
-      </p:sp>
-      <p:sp>
-        <p:nvSpPr>
-          <p:cNvPr id="55" name="Text 53"/>
-          <p:cNvSpPr txBox="1"/>
-          <p:nvPr/>
-        </p:nvSpPr>
-        <p:spPr>
-          <a:xfrm>
-            <a:off x="822960" y="5202936"/>
-            <a:ext cx="4480560" cy="1124712"/>
-          </a:xfrm>
-          <a:prstGeom prst="rect">
-            <a:avLst/>
-          </a:prstGeom>
-          <a:noFill/>
-          <a:ln/>
-        </p:spPr>
-        <p:txBody>
-          <a:bodyPr wrap="square" lIns="0" tIns="0" rIns="0" bIns="0" rtlCol="0" anchor="ctr"/>
-          <a:lstStyle/>
-          <a:p>
-            <a:pPr marL="0" indent="0">
-              <a:buNone/>
-            </a:pPr>
-            <a:r>
-              <a:rPr lang="en-US" sz="1200" b="1" dirty="0">
-                <a:solidFill>
-                  <a:srgbClr val="1A4B8C"/>
-                </a:solidFill>
-                <a:latin typeface="Atkinson Hyperlegible Next" pitchFamily="34" charset="0"/>
-                <a:ea typeface="Atkinson Hyperlegible Next" pitchFamily="34" charset="-122"/>
-                <a:cs typeface="Atkinson Hyperlegible Next" pitchFamily="34" charset="-120"/>
-              </a:rPr>
-              <a:t>Już w panelu ROPS:  </a:t>
-            </a:r>
-            <a:r>
-              <a:rPr lang="en-US" sz="1200" dirty="0">
-                <a:solidFill>
-                  <a:srgbClr val="14171A"/>
-                </a:solidFill>
-                <a:latin typeface="Atkinson Hyperlegible Next" pitchFamily="34" charset="0"/>
-                <a:ea typeface="Atkinson Hyperlegible Next" pitchFamily="34" charset="-122"/>
-                <a:cs typeface="Atkinson Hyperlegible Next" pitchFamily="34" charset="-120"/>
-              </a:rPr>
-              <a:t>każdy wpis czeka na decyzję człowieka, zapisaną z jego nazwiskiem; autor pomysłu widzi status i odpowiedź na stronie swojej fiszki; liczniki dróg, próśb i potrzeb oraz trendy potrzeb.</a:t>
-            </a:r>
-            <a:endParaRPr lang="en-US" sz="1200" dirty="0"/>
-          </a:p>
-        </p:txBody>
-      </p:sp>
-      <p:sp>
-        <p:nvSpPr>
-          <p:cNvPr id="56" name="Shape 54"/>
-          <p:cNvSpPr/>
-          <p:nvPr/>
-        </p:nvSpPr>
-        <p:spPr>
-          <a:xfrm>
-            <a:off x="5897880" y="5202936"/>
-            <a:ext cx="5653735" cy="1124712"/>
-          </a:xfrm>
-          <a:prstGeom prst="roundRect">
-            <a:avLst>
-              <a:gd name="adj" fmla="val 8130"/>
-            </a:avLst>
-          </a:prstGeom>
-          <a:solidFill>
-            <a:srgbClr val="EEF4FB"/>
-          </a:solidFill>
-          <a:ln w="12700">
-            <a:solidFill>
-              <a:srgbClr val="EEF4FB"/>
-            </a:solidFill>
-            <a:prstDash val="solid"/>
-          </a:ln>
-        </p:spPr>
-      </p:sp>
-      <p:sp>
-        <p:nvSpPr>
-          <p:cNvPr id="57" name="Text 55"/>
-          <p:cNvSpPr txBox="1"/>
-          <p:nvPr/>
-        </p:nvSpPr>
-        <p:spPr>
-          <a:xfrm>
-            <a:off x="6080760" y="5294376"/>
-            <a:ext cx="5287975" cy="274320"/>
-          </a:xfrm>
-          <a:prstGeom prst="rect">
-            <a:avLst/>
-          </a:prstGeom>
-          <a:noFill/>
-          <a:ln/>
-        </p:spPr>
-        <p:txBody>
-          <a:bodyPr wrap="square" lIns="0" tIns="0" rIns="0" bIns="0" rtlCol="0" anchor="ctr"/>
-          <a:lstStyle/>
-          <a:p>
-            <a:pPr marL="0" indent="0">
-              <a:buNone/>
-            </a:pPr>
-            <a:r>
-              <a:rPr lang="en-US" sz="1300" b="1" dirty="0">
-                <a:solidFill>
-                  <a:srgbClr val="1A4B8C"/>
-                </a:solidFill>
-                <a:latin typeface="Atkinson Hyperlegible Next" pitchFamily="34" charset="0"/>
-                <a:ea typeface="Atkinson Hyperlegible Next" pitchFamily="34" charset="-122"/>
-                <a:cs typeface="Atkinson Hyperlegible Next" pitchFamily="34" charset="-120"/>
-              </a:rPr>
-              <a:t>Około 55 USD miesięcznie plus 8 USD za 1000 dróg</a:t>
-            </a:r>
-            <a:endParaRPr lang="en-US" sz="1300" dirty="0"/>
-          </a:p>
-        </p:txBody>
-      </p:sp>
-      <p:sp>
-        <p:nvSpPr>
-          <p:cNvPr id="58" name="Text 56"/>
-          <p:cNvSpPr txBox="1"/>
-          <p:nvPr/>
-        </p:nvSpPr>
-        <p:spPr>
-          <a:xfrm>
-            <a:off x="6080760" y="5568696"/>
-            <a:ext cx="4282135" cy="164592"/>
-          </a:xfrm>
-          <a:prstGeom prst="rect">
-            <a:avLst/>
-          </a:prstGeom>
-          <a:noFill/>
-          <a:ln/>
-        </p:spPr>
-        <p:txBody>
-          <a:bodyPr wrap="square" lIns="0" tIns="0" rIns="0" bIns="0" rtlCol="0" anchor="ctr"/>
-          <a:lstStyle/>
-          <a:p>
-            <a:pPr marL="0" indent="0">
-              <a:buNone/>
-            </a:pPr>
-            <a:r>
-              <a:rPr lang="en-US" sz="1050" b="1" dirty="0">
-                <a:solidFill>
-                  <a:srgbClr val="14171A"/>
-                </a:solidFill>
-                <a:latin typeface="Atkinson Hyperlegible Next" pitchFamily="34" charset="0"/>
-                <a:ea typeface="Atkinson Hyperlegible Next" pitchFamily="34" charset="-122"/>
-                <a:cs typeface="Atkinson Hyperlegible Next" pitchFamily="34" charset="-120"/>
-              </a:rPr>
-              <a:t>Serwer  </a:t>
-            </a:r>
-            <a:r>
-              <a:rPr lang="en-US" sz="1050" dirty="0">
-                <a:solidFill>
-                  <a:srgbClr val="454D57"/>
-                </a:solidFill>
-                <a:latin typeface="Atkinson Hyperlegible Next" pitchFamily="34" charset="0"/>
-                <a:ea typeface="Atkinson Hyperlegible Next" pitchFamily="34" charset="-122"/>
-                <a:cs typeface="Atkinson Hyperlegible Next" pitchFamily="34" charset="-120"/>
-              </a:rPr>
-              <a:t>aplikacja + polski model embeddingów, 4 GB</a:t>
+              <a:t>4 zapytania, ~21 tys. tokenów</a:t>
             </a:r>
             <a:endParaRPr lang="en-US" sz="1050" dirty="0"/>
           </a:p>
@@ -11898,280 +12165,13 @@
       </p:sp>
       <p:sp>
         <p:nvSpPr>
-          <p:cNvPr id="59" name="Text 57"/>
-          <p:cNvSpPr txBox="1"/>
-          <p:nvPr/>
-        </p:nvSpPr>
-        <p:spPr>
-          <a:xfrm>
-            <a:off x="10317175" y="5568696"/>
-            <a:ext cx="1051560" cy="164592"/>
-          </a:xfrm>
-          <a:prstGeom prst="rect">
-            <a:avLst/>
-          </a:prstGeom>
-          <a:noFill/>
-          <a:ln/>
-        </p:spPr>
-        <p:txBody>
-          <a:bodyPr wrap="square" lIns="0" tIns="0" rIns="0" bIns="0" rtlCol="0" anchor="ctr"/>
-          <a:lstStyle/>
-          <a:p>
-            <a:pPr marL="0" indent="0" algn="r">
-              <a:buNone/>
-            </a:pPr>
-            <a:r>
-              <a:rPr lang="en-US" sz="1050" b="1" dirty="0">
-                <a:solidFill>
-                  <a:srgbClr val="14171A"/>
-                </a:solidFill>
-                <a:latin typeface="Atkinson Hyperlegible Next" pitchFamily="34" charset="0"/>
-                <a:ea typeface="Atkinson Hyperlegible Next" pitchFamily="34" charset="-122"/>
-                <a:cs typeface="Atkinson Hyperlegible Next" pitchFamily="34" charset="-120"/>
-              </a:rPr>
-              <a:t>24 USD / mies.</a:t>
-            </a:r>
-            <a:endParaRPr lang="en-US" sz="1050" dirty="0"/>
-          </a:p>
-        </p:txBody>
-      </p:sp>
-      <p:sp>
-        <p:nvSpPr>
-          <p:cNvPr id="60" name="Text 58"/>
-          <p:cNvSpPr txBox="1"/>
-          <p:nvPr/>
-        </p:nvSpPr>
-        <p:spPr>
-          <a:xfrm>
-            <a:off x="6080760" y="5733288"/>
-            <a:ext cx="4282135" cy="164592"/>
-          </a:xfrm>
-          <a:prstGeom prst="rect">
-            <a:avLst/>
-          </a:prstGeom>
-          <a:noFill/>
-          <a:ln/>
-        </p:spPr>
-        <p:txBody>
-          <a:bodyPr wrap="square" lIns="0" tIns="0" rIns="0" bIns="0" rtlCol="0" anchor="ctr"/>
-          <a:lstStyle/>
-          <a:p>
-            <a:pPr marL="0" indent="0">
-              <a:buNone/>
-            </a:pPr>
-            <a:r>
-              <a:rPr lang="en-US" sz="1050" b="1" dirty="0">
-                <a:solidFill>
-                  <a:srgbClr val="14171A"/>
-                </a:solidFill>
-                <a:latin typeface="Atkinson Hyperlegible Next" pitchFamily="34" charset="0"/>
-                <a:ea typeface="Atkinson Hyperlegible Next" pitchFamily="34" charset="-122"/>
-                <a:cs typeface="Atkinson Hyperlegible Next" pitchFamily="34" charset="-120"/>
-              </a:rPr>
-              <a:t>Baza danych  </a:t>
-            </a:r>
-            <a:r>
-              <a:rPr lang="en-US" sz="1050" dirty="0">
-                <a:solidFill>
-                  <a:srgbClr val="454D57"/>
-                </a:solidFill>
-                <a:latin typeface="Atkinson Hyperlegible Next" pitchFamily="34" charset="0"/>
-                <a:ea typeface="Atkinson Hyperlegible Next" pitchFamily="34" charset="-122"/>
-                <a:cs typeface="Atkinson Hyperlegible Next" pitchFamily="34" charset="-120"/>
-              </a:rPr>
-              <a:t>PostgreSQL + pgvector, RDS 2 GB</a:t>
-            </a:r>
-            <a:endParaRPr lang="en-US" sz="1050" dirty="0"/>
-          </a:p>
-        </p:txBody>
-      </p:sp>
-      <p:sp>
-        <p:nvSpPr>
-          <p:cNvPr id="61" name="Text 59"/>
-          <p:cNvSpPr txBox="1"/>
-          <p:nvPr/>
-        </p:nvSpPr>
-        <p:spPr>
-          <a:xfrm>
-            <a:off x="10317175" y="5733288"/>
-            <a:ext cx="1051560" cy="164592"/>
-          </a:xfrm>
-          <a:prstGeom prst="rect">
-            <a:avLst/>
-          </a:prstGeom>
-          <a:noFill/>
-          <a:ln/>
-        </p:spPr>
-        <p:txBody>
-          <a:bodyPr wrap="square" lIns="0" tIns="0" rIns="0" bIns="0" rtlCol="0" anchor="ctr"/>
-          <a:lstStyle/>
-          <a:p>
-            <a:pPr marL="0" indent="0" algn="r">
-              <a:buNone/>
-            </a:pPr>
-            <a:r>
-              <a:rPr lang="en-US" sz="1050" b="1" dirty="0">
-                <a:solidFill>
-                  <a:srgbClr val="14171A"/>
-                </a:solidFill>
-                <a:latin typeface="Atkinson Hyperlegible Next" pitchFamily="34" charset="0"/>
-                <a:ea typeface="Atkinson Hyperlegible Next" pitchFamily="34" charset="-122"/>
-                <a:cs typeface="Atkinson Hyperlegible Next" pitchFamily="34" charset="-120"/>
-              </a:rPr>
-              <a:t>30 USD / mies.</a:t>
-            </a:r>
-            <a:endParaRPr lang="en-US" sz="1050" dirty="0"/>
-          </a:p>
-        </p:txBody>
-      </p:sp>
-      <p:sp>
-        <p:nvSpPr>
-          <p:cNvPr id="62" name="Text 60"/>
-          <p:cNvSpPr txBox="1"/>
-          <p:nvPr/>
-        </p:nvSpPr>
-        <p:spPr>
-          <a:xfrm>
-            <a:off x="6080760" y="5897880"/>
-            <a:ext cx="4282135" cy="164592"/>
-          </a:xfrm>
-          <a:prstGeom prst="rect">
-            <a:avLst/>
-          </a:prstGeom>
-          <a:noFill/>
-          <a:ln/>
-        </p:spPr>
-        <p:txBody>
-          <a:bodyPr wrap="square" lIns="0" tIns="0" rIns="0" bIns="0" rtlCol="0" anchor="ctr"/>
-          <a:lstStyle/>
-          <a:p>
-            <a:pPr marL="0" indent="0">
-              <a:buNone/>
-            </a:pPr>
-            <a:r>
-              <a:rPr lang="en-US" sz="1050" b="1" dirty="0">
-                <a:solidFill>
-                  <a:srgbClr val="14171A"/>
-                </a:solidFill>
-                <a:latin typeface="Atkinson Hyperlegible Next" pitchFamily="34" charset="0"/>
-                <a:ea typeface="Atkinson Hyperlegible Next" pitchFamily="34" charset="-122"/>
-                <a:cs typeface="Atkinson Hyperlegible Next" pitchFamily="34" charset="-120"/>
-              </a:rPr>
-              <a:t>Wywołanie modelu  </a:t>
-            </a:r>
-            <a:r>
-              <a:rPr lang="en-US" sz="1050" dirty="0">
-                <a:solidFill>
-                  <a:srgbClr val="454D57"/>
-                </a:solidFill>
-                <a:latin typeface="Atkinson Hyperlegible Next" pitchFamily="34" charset="0"/>
-                <a:ea typeface="Atkinson Hyperlegible Next" pitchFamily="34" charset="-122"/>
-                <a:cs typeface="Atkinson Hyperlegible Next" pitchFamily="34" charset="-120"/>
-              </a:rPr>
-              <a:t>Bielik 11B na Hugging Face, ~5 tys. tokenów</a:t>
-            </a:r>
-            <a:endParaRPr lang="en-US" sz="1050" dirty="0"/>
-          </a:p>
-        </p:txBody>
-      </p:sp>
-      <p:sp>
-        <p:nvSpPr>
-          <p:cNvPr id="63" name="Text 61"/>
-          <p:cNvSpPr txBox="1"/>
-          <p:nvPr/>
-        </p:nvSpPr>
-        <p:spPr>
-          <a:xfrm>
-            <a:off x="10317175" y="5897880"/>
-            <a:ext cx="1051560" cy="164592"/>
-          </a:xfrm>
-          <a:prstGeom prst="rect">
-            <a:avLst/>
-          </a:prstGeom>
-          <a:noFill/>
-          <a:ln/>
-        </p:spPr>
-        <p:txBody>
-          <a:bodyPr wrap="square" lIns="0" tIns="0" rIns="0" bIns="0" rtlCol="0" anchor="ctr"/>
-          <a:lstStyle/>
-          <a:p>
-            <a:pPr marL="0" indent="0" algn="r">
-              <a:buNone/>
-            </a:pPr>
-            <a:r>
-              <a:rPr lang="en-US" sz="1050" b="1" dirty="0">
-                <a:solidFill>
-                  <a:srgbClr val="14171A"/>
-                </a:solidFill>
-                <a:latin typeface="Atkinson Hyperlegible Next" pitchFamily="34" charset="0"/>
-                <a:ea typeface="Atkinson Hyperlegible Next" pitchFamily="34" charset="-122"/>
-                <a:cs typeface="Atkinson Hyperlegible Next" pitchFamily="34" charset="-120"/>
-              </a:rPr>
-              <a:t>0,002 USD</a:t>
-            </a:r>
-            <a:endParaRPr lang="en-US" sz="1050" dirty="0"/>
-          </a:p>
-        </p:txBody>
-      </p:sp>
-      <p:sp>
-        <p:nvSpPr>
-          <p:cNvPr id="64" name="Text 62"/>
-          <p:cNvSpPr txBox="1"/>
-          <p:nvPr/>
-        </p:nvSpPr>
-        <p:spPr>
-          <a:xfrm>
-            <a:off x="6080760" y="6062472"/>
-            <a:ext cx="4282135" cy="164592"/>
-          </a:xfrm>
-          <a:prstGeom prst="rect">
-            <a:avLst/>
-          </a:prstGeom>
-          <a:noFill/>
-          <a:ln/>
-        </p:spPr>
-        <p:txBody>
-          <a:bodyPr wrap="square" lIns="0" tIns="0" rIns="0" bIns="0" rtlCol="0" anchor="ctr"/>
-          <a:lstStyle/>
-          <a:p>
-            <a:pPr marL="0" indent="0">
-              <a:buNone/>
-            </a:pPr>
-            <a:r>
-              <a:rPr lang="en-US" sz="1050" b="1" dirty="0">
-                <a:solidFill>
-                  <a:srgbClr val="14171A"/>
-                </a:solidFill>
-                <a:latin typeface="Atkinson Hyperlegible Next" pitchFamily="34" charset="0"/>
-                <a:ea typeface="Atkinson Hyperlegible Next" pitchFamily="34" charset="-122"/>
-                <a:cs typeface="Atkinson Hyperlegible Next" pitchFamily="34" charset="-120"/>
-              </a:rPr>
-              <a:t>Droga  </a:t>
-            </a:r>
-            <a:r>
-              <a:rPr lang="en-US" sz="1050" dirty="0">
-                <a:solidFill>
-                  <a:srgbClr val="454D57"/>
-                </a:solidFill>
-                <a:latin typeface="Atkinson Hyperlegible Next" pitchFamily="34" charset="0"/>
-                <a:ea typeface="Atkinson Hyperlegible Next" pitchFamily="34" charset="-122"/>
-                <a:cs typeface="Atkinson Hyperlegible Next" pitchFamily="34" charset="-120"/>
-              </a:rPr>
-              <a:t>4 wywołania, ~21 tys. tokenów</a:t>
-            </a:r>
-            <a:endParaRPr lang="en-US" sz="1050" dirty="0"/>
-          </a:p>
-        </p:txBody>
-      </p:sp>
-      <p:sp>
-        <p:nvSpPr>
           <p:cNvPr id="65" name="Text 63"/>
           <p:cNvSpPr txBox="1"/>
           <p:nvPr/>
         </p:nvSpPr>
         <p:spPr>
           <a:xfrm>
-            <a:off x="10317175" y="6062472"/>
+            <a:off x="10317175" y="6153912"/>
             <a:ext cx="1051560" cy="164592"/>
           </a:xfrm>
           <a:prstGeom prst="rect">
@@ -12307,7 +12307,7 @@
                 <a:ea typeface="Atkinson Hyperlegible Next" pitchFamily="34" charset="-122"/>
                 <a:cs typeface="Atkinson Hyperlegible Next" pitchFamily="34" charset="-120"/>
               </a:rPr>
-              <a:t>Dla wszystkich, na otwartych danych</a:t>
+              <a:t>Dostępne dla wszystkich, oparte na otwartych danych</a:t>
             </a:r>
             <a:endParaRPr lang="en-US" sz="3200" dirty="0"/>
           </a:p>
@@ -12327,7 +12327,7 @@
                 <a:ea typeface="Atkinson Hyperlegible Next" pitchFamily="34" charset="-122"/>
                 <a:cs typeface="Atkinson Hyperlegible Next" pitchFamily="34" charset="-120"/>
               </a:rPr>
-              <a:t>Dostępność powyżej wymogów prawa; każdy fakt prowadzi do swojego otwartego źródła</a:t>
+              <a:t>Dostępność ponad wymogi prawa; każdy fakt ma link do otwartego źródła</a:t>
             </a:r>
             <a:endParaRPr lang="en-US" sz="3200" dirty="0"/>
           </a:p>
@@ -12449,7 +12449,7 @@
                 <a:ea typeface="Atkinson Hyperlegible Next" pitchFamily="34" charset="-122"/>
                 <a:cs typeface="Atkinson Hyperlegible Next" pitchFamily="34" charset="-120"/>
               </a:rPr>
-              <a:t>Motyw kontrastowy, jeden z trzech motywów wyświetlania</a:t>
+              <a:t>Wersja kontrastowa, jeden z trzech trybów wyświetlania</a:t>
             </a:r>
             <a:endParaRPr lang="en-US" sz="1100" dirty="0"/>
           </a:p>
@@ -12577,7 +12577,7 @@
                 <a:ea typeface="Atkinson Hyperlegible Next" pitchFamily="34" charset="-122"/>
                 <a:cs typeface="Atkinson Hyperlegible Next" pitchFamily="34" charset="-120"/>
               </a:rPr>
-              <a:t>Rozmiar tekstu, trzy motywy, telefon</a:t>
+              <a:t>Większy tekst, trzy tryby, telefon</a:t>
             </a:r>
             <a:endParaRPr lang="en-US" sz="1200" dirty="0"/>
           </a:p>
@@ -12598,7 +12598,7 @@
                 <a:ea typeface="Atkinson Hyperlegible Next" pitchFamily="34" charset="-122"/>
                 <a:cs typeface="Atkinson Hyperlegible Next" pitchFamily="34" charset="-120"/>
               </a:rPr>
-              <a:t>Klawiatura i czytnik ekranu</a:t>
+              <a:t>Obsługa klawiaturą i czytnikiem ekranu</a:t>
             </a:r>
             <a:endParaRPr lang="en-US" sz="1200" dirty="0"/>
           </a:p>
@@ -12619,7 +12619,7 @@
                 <a:ea typeface="Atkinson Hyperlegible Next" pitchFamily="34" charset="-122"/>
                 <a:cs typeface="Atkinson Hyperlegible Next" pitchFamily="34" charset="-120"/>
               </a:rPr>
-              <a:t>Automatyczny test axe każdego ekranu</a:t>
+              <a:t>Automatyczne testy axe każdego ekranu</a:t>
             </a:r>
             <a:endParaRPr lang="en-US" sz="1200" dirty="0"/>
           </a:p>
@@ -12785,7 +12785,7 @@
                           <a:ea typeface="Atkinson Hyperlegible Next" pitchFamily="34" charset="-122"/>
                           <a:cs typeface="Atkinson Hyperlegible Next" pitchFamily="34" charset="-120"/>
                         </a:rPr>
-                        <a:t>300 z ogólnopolskiej bazy innowacjespoleczne.pl (Fundacja Stocznia) i 115 z biblioteki ROPS; 34 duplikaty połączone w 381 rekordów. CC BY 4.0 lub warunki MIIS, z atrybucją przy każdym opisie</a:t>
+                        <a:t>300 z ogólnopolskiej bazy innowacjespoleczne.pl (Fundacja Stocznia) i 115 z biblioteki ROPS; po scaleniu 34 duplikatów: 381 rekordów. CC BY 4.0 lub warunki MIIS, z uznaniem autorstwa przy każdym opisie</a:t>
                       </a:r>
                       <a:endParaRPr lang="en-US" sz="1100" dirty="0">
                         <a:latin typeface="Atkinson Hyperlegible Next" charset="0"/>
@@ -13196,7 +13196,7 @@
                           <a:ea typeface="Atkinson Hyperlegible Next" pitchFamily="34" charset="-122"/>
                           <a:cs typeface="Atkinson Hyperlegible Next" pitchFamily="34" charset="-120"/>
                         </a:rPr>
-                        <a:t>Next.js, TypeScript, Tailwind CSS, MapLibre GL JS, wzorce formularzy GOV.UK Design System; potok danych w Pythonie</a:t>
+                        <a:t>Next.js, TypeScript, Tailwind CSS, MapLibre GL JS, wzorce formularzy z GOV.UK Design System; przetwarzanie danych w Pythonie</a:t>
                       </a:r>
                       <a:endParaRPr lang="en-US" sz="1100" dirty="0">
                         <a:latin typeface="Atkinson Hyperlegible Next" charset="0"/>
@@ -13333,7 +13333,7 @@
                           <a:ea typeface="Atkinson Hyperlegible Next" pitchFamily="34" charset="-122"/>
                           <a:cs typeface="Atkinson Hyperlegible Next" pitchFamily="34" charset="-120"/>
                         </a:rPr>
-                        <a:t>Claude Code (Anthropic) pisał kod, teksty i testy pod kierunkiem zespołu; każda decyzja ludzi jest zapisana w rejestrze decyzji projektu, otwartym do wglądu; zespół przejrzał każdy polski tekst</a:t>
+                        <a:t>Claude Code (Anthropic) pisał kod, teksty i testy pod kierunkiem zespołu; każda decyzja zespołu jest zapisana w jawnym rejestrze decyzji projektu; zespół sprawdził wszystkie teksty po polsku</a:t>
                       </a:r>
                       <a:endParaRPr lang="en-US" sz="1100" dirty="0">
                         <a:latin typeface="Atkinson Hyperlegible Next" charset="0"/>

--- a/docs/presentation/presentation.pptx
+++ b/docs/presentation/presentation.pptx
@@ -158,7 +158,7 @@
     </p:spTree>
     <p:extLst>
       <p:ext uri="{BB962C8B-B14F-4D97-AF65-F5344CB8AC3E}">
-        <p14:creationId xmlns:p14="http://schemas.microsoft.com/office/powerpoint/2010/main" val="935328210"/>
+        <p14:creationId xmlns:p14="http://schemas.microsoft.com/office/powerpoint/2010/main" val="1245963314"/>
       </p:ext>
     </p:extLst>
   </p:cSld>
@@ -1506,7 +1506,7 @@
                 <a:ea typeface="Atkinson Hyperlegible Next" pitchFamily="34" charset="-122"/>
                 <a:cs typeface="Atkinson Hyperlegible Next" pitchFamily="34" charset="-120"/>
               </a:rPr>
-              <a:t>Droga, nie katalog.</a:t>
+              <a:t>Więcej niż katalog – wsparcie w działaniu</a:t>
             </a:r>
             <a:endParaRPr lang="en-US" sz="2800" dirty="0"/>
           </a:p>

--- a/docs/presentation/presentation.pptx
+++ b/docs/presentation/presentation.pptx
@@ -158,7 +158,7 @@
     </p:spTree>
     <p:extLst>
       <p:ext uri="{BB962C8B-B14F-4D97-AF65-F5344CB8AC3E}">
-        <p14:creationId xmlns:p14="http://schemas.microsoft.com/office/powerpoint/2010/main" val="1245963314"/>
+        <p14:creationId xmlns:p14="http://schemas.microsoft.com/office/powerpoint/2010/main" val="486834089"/>
       </p:ext>
     </p:extLst>
   </p:cSld>
@@ -913,7 +913,7 @@
           <a:p>
             <a:r>
               <a:rPr lang="en-US" dirty="0"/>
-              <a:t>Zadanie wymaga koncepcji, a nie tylko oprogramowania. To, co widzieliście, działa dziś: droga dla osób zgłaszających potrzeby, a obok fiszka pomysłu, tester innowacji, rozmowy z ROPS i mentorami oraz tablica partnerstw. Z siedmiu modułów wyzwania pięć działa w całości, a dwa – częściowo. Zasobnik wiedzy celowo nie jest kolejnym katalogiem, bo partner wyraźnie tego nie chce: wiedza jest częścią drogi, z linkami do wszystkich materiałów, dokumentów i filmów. Każdy wpis trafia do panelu ROPS: decyzję podejmuje pracownik, a system odnotowuje ją z jego nazwiskiem; autor pomysłu widzi odpowiedź na stronie swojej fiszki. Plan rozwoju dotyczy ludzi wokół narzędzia: trzech ról, które mogą pełnić trzy osoby albo jedna – opiekun kategorii, czyli osoba kontaktowa w każdej drodze, redaktor katalogu i koordynator banku potrzeb. Usługa domknie trzy cykle: potrzeba staje się wdrożeniem; potrzeba bez rozwiązania staje się tematem naboru do inkubatora, a potem nową innowacją; sprawdzona innowacja trafia tam, gdzie jest potrzebna. Utrzymanie jest tanie: jeden serwer 4 GB dla aplikacji i polskiego modelu wyszukiwania to 24 dolary miesięcznie na AWS Lightsail; w wersji docelowej PostgreSQL z pgvector na RDS, około 30 dolarów miesięcznie (prototyp zapisuje wpisy w jednym pliku). Jedno zapytanie do Bielika przez Hugging Face to około pięciu tysięcy tokenów po 40 centów za milion, czyli jedna piąta centa; cała droga to cztery zapytania, łącznie poniżej jednego centa.</a:t>
+              <a:t>Zadanie wymaga koncepcji, a nie tylko oprogramowania. To, co widzieliście, jest już zaimplementowane: droga dla osób zgłaszających potrzeby, a obok fiszka pomysłu, tester innowacji, rozmowy z ROPS i mentorami oraz tablica partnerstw. Z siedmiu modułów wyzwania pięć jest zaimplementowanych w całości, a dwa – częściowo. Zasobnik wiedzy celowo nie jest kolejnym katalogiem, bo partner wyraźnie tego nie chce: wiedza jest częścią drogi, z linkami do wszystkich materiałów, dokumentów i filmów. Każdy wpis trafia do panelu ROPS: decyzję podejmuje pracownik, a system odnotowuje ją z jego nazwiskiem; autor pomysłu widzi odpowiedź na stronie swojej fiszki. Plan rozwoju dotyczy ludzi wokół narzędzia: trzech ról, które mogą pełnić trzy osoby albo jedna – opiekun kategorii, czyli osoba kontaktowa w każdej drodze, redaktor katalogu i koordynator banku potrzeb. Usługa domknie trzy cykle: potrzeba staje się wdrożeniem; potrzeba bez rozwiązania staje się tematem naboru do inkubatora, a potem nową innowacją; sprawdzona innowacja trafia tam, gdzie jest potrzebna. Utrzymanie jest tanie: jeden serwer 4 GB dla aplikacji i polskiego modelu wyszukiwania to 24 dolary miesięcznie na AWS Lightsail; w wersji docelowej PostgreSQL z pgvector na RDS, około 30 dolarów miesięcznie (prototyp zapisuje wpisy w jednym pliku). Jedno zapytanie do Bielika przez Hugging Face to około pięciu tysięcy tokenów po 40 centów za milion, czyli jedna piąta centa; cała droga to cztery zapytania, łącznie poniżej jednego centa.</a:t>
             </a:r>
           </a:p>
         </p:txBody>
@@ -1750,7 +1750,7 @@
         <p:spPr>
           <a:xfrm>
             <a:off x="640080" y="329184"/>
-            <a:ext cx="786384" cy="237744"/>
+            <a:ext cx="1298448" cy="237744"/>
           </a:xfrm>
           <a:prstGeom prst="roundRect">
             <a:avLst>
@@ -1777,7 +1777,7 @@
         <p:spPr>
           <a:xfrm>
             <a:off x="640080" y="329184"/>
-            <a:ext cx="786384" cy="237744"/>
+            <a:ext cx="1298448" cy="237744"/>
           </a:xfrm>
           <a:prstGeom prst="rect">
             <a:avLst/>
@@ -1801,7 +1801,7 @@
                 <a:ea typeface="Atkinson Hyperlegible Next" pitchFamily="34" charset="-122"/>
                 <a:cs typeface="Atkinson Hyperlegible Next" pitchFamily="34" charset="-120"/>
               </a:rPr>
-              <a:t>działa</a:t>
+              <a:t>zaimplementowane</a:t>
             </a:r>
             <a:endParaRPr lang="en-US" sz="1000" dirty="0"/>
           </a:p>
@@ -1815,8 +1815,8 @@
         </p:nvSpPr>
         <p:spPr>
           <a:xfrm>
-            <a:off x="1563624" y="329184"/>
-            <a:ext cx="9987991" cy="237744"/>
+            <a:off x="2075688" y="329184"/>
+            <a:ext cx="9475927" cy="237744"/>
           </a:xfrm>
           <a:prstGeom prst="rect">
             <a:avLst/>
@@ -1879,7 +1879,7 @@
                 <a:ea typeface="Atkinson Hyperlegible Next" pitchFamily="34" charset="-122"/>
                 <a:cs typeface="Atkinson Hyperlegible Next" pitchFamily="34" charset="-120"/>
               </a:rPr>
-              <a:t>Opisz potrzebę, poznaj drogę</a:t>
+              <a:t>Opisz potrzebę, wybierz rozwiązanie</a:t>
             </a:r>
             <a:endParaRPr lang="en-US" sz="3200" dirty="0"/>
           </a:p>
@@ -3041,7 +3041,7 @@
         <p:spPr>
           <a:xfrm>
             <a:off x="640080" y="329184"/>
-            <a:ext cx="786384" cy="237744"/>
+            <a:ext cx="1298448" cy="237744"/>
           </a:xfrm>
           <a:prstGeom prst="roundRect">
             <a:avLst>
@@ -3068,7 +3068,7 @@
         <p:spPr>
           <a:xfrm>
             <a:off x="640080" y="329184"/>
-            <a:ext cx="786384" cy="237744"/>
+            <a:ext cx="1298448" cy="237744"/>
           </a:xfrm>
           <a:prstGeom prst="rect">
             <a:avLst/>
@@ -3092,7 +3092,7 @@
                 <a:ea typeface="Atkinson Hyperlegible Next" pitchFamily="34" charset="-122"/>
                 <a:cs typeface="Atkinson Hyperlegible Next" pitchFamily="34" charset="-120"/>
               </a:rPr>
-              <a:t>działa</a:t>
+              <a:t>zaimplementowane</a:t>
             </a:r>
             <a:endParaRPr lang="en-US" sz="1000" dirty="0"/>
           </a:p>
@@ -3106,8 +3106,8 @@
         </p:nvSpPr>
         <p:spPr>
           <a:xfrm>
-            <a:off x="1563624" y="329184"/>
-            <a:ext cx="9987991" cy="237744"/>
+            <a:off x="2075688" y="329184"/>
+            <a:ext cx="9475927" cy="237744"/>
           </a:xfrm>
           <a:prstGeom prst="rect">
             <a:avLst/>
@@ -5120,7 +5120,7 @@
         <p:spPr>
           <a:xfrm>
             <a:off x="640080" y="329184"/>
-            <a:ext cx="786384" cy="237744"/>
+            <a:ext cx="1298448" cy="237744"/>
           </a:xfrm>
           <a:prstGeom prst="roundRect">
             <a:avLst>
@@ -5147,7 +5147,7 @@
         <p:spPr>
           <a:xfrm>
             <a:off x="640080" y="329184"/>
-            <a:ext cx="786384" cy="237744"/>
+            <a:ext cx="1298448" cy="237744"/>
           </a:xfrm>
           <a:prstGeom prst="rect">
             <a:avLst/>
@@ -5171,7 +5171,7 @@
                 <a:ea typeface="Atkinson Hyperlegible Next" pitchFamily="34" charset="-122"/>
                 <a:cs typeface="Atkinson Hyperlegible Next" pitchFamily="34" charset="-120"/>
               </a:rPr>
-              <a:t>działa</a:t>
+              <a:t>zaimplementowane</a:t>
             </a:r>
             <a:endParaRPr lang="en-US" sz="1000" dirty="0"/>
           </a:p>
@@ -5185,8 +5185,8 @@
         </p:nvSpPr>
         <p:spPr>
           <a:xfrm>
-            <a:off x="1563624" y="329184"/>
-            <a:ext cx="9987991" cy="237744"/>
+            <a:off x="2075688" y="329184"/>
+            <a:ext cx="9475927" cy="237744"/>
           </a:xfrm>
           <a:prstGeom prst="rect">
             <a:avLst/>
@@ -6131,7 +6131,7 @@
         <p:spPr>
           <a:xfrm>
             <a:off x="640080" y="329184"/>
-            <a:ext cx="786384" cy="237744"/>
+            <a:ext cx="1298448" cy="237744"/>
           </a:xfrm>
           <a:prstGeom prst="roundRect">
             <a:avLst>
@@ -6158,7 +6158,7 @@
         <p:spPr>
           <a:xfrm>
             <a:off x="640080" y="329184"/>
-            <a:ext cx="786384" cy="237744"/>
+            <a:ext cx="1298448" cy="237744"/>
           </a:xfrm>
           <a:prstGeom prst="rect">
             <a:avLst/>
@@ -6182,7 +6182,7 @@
                 <a:ea typeface="Atkinson Hyperlegible Next" pitchFamily="34" charset="-122"/>
                 <a:cs typeface="Atkinson Hyperlegible Next" pitchFamily="34" charset="-120"/>
               </a:rPr>
-              <a:t>działa</a:t>
+              <a:t>zaimplementowane</a:t>
             </a:r>
             <a:endParaRPr lang="en-US" sz="1000" dirty="0"/>
           </a:p>
@@ -6196,8 +6196,8 @@
         </p:nvSpPr>
         <p:spPr>
           <a:xfrm>
-            <a:off x="1563624" y="329184"/>
-            <a:ext cx="9987991" cy="237744"/>
+            <a:off x="2075688" y="329184"/>
+            <a:ext cx="9475927" cy="237744"/>
           </a:xfrm>
           <a:prstGeom prst="rect">
             <a:avLst/>
@@ -7142,7 +7142,7 @@
         <p:spPr>
           <a:xfrm>
             <a:off x="640080" y="329184"/>
-            <a:ext cx="786384" cy="237744"/>
+            <a:ext cx="1298448" cy="237744"/>
           </a:xfrm>
           <a:prstGeom prst="roundRect">
             <a:avLst>
@@ -7169,7 +7169,7 @@
         <p:spPr>
           <a:xfrm>
             <a:off x="640080" y="329184"/>
-            <a:ext cx="786384" cy="237744"/>
+            <a:ext cx="1298448" cy="237744"/>
           </a:xfrm>
           <a:prstGeom prst="rect">
             <a:avLst/>
@@ -7193,7 +7193,7 @@
                 <a:ea typeface="Atkinson Hyperlegible Next" pitchFamily="34" charset="-122"/>
                 <a:cs typeface="Atkinson Hyperlegible Next" pitchFamily="34" charset="-120"/>
               </a:rPr>
-              <a:t>działa</a:t>
+              <a:t>zaimplementowane</a:t>
             </a:r>
             <a:endParaRPr lang="en-US" sz="1000" dirty="0"/>
           </a:p>
@@ -7207,8 +7207,8 @@
         </p:nvSpPr>
         <p:spPr>
           <a:xfrm>
-            <a:off x="1563624" y="329184"/>
-            <a:ext cx="9987991" cy="237744"/>
+            <a:off x="2075688" y="329184"/>
+            <a:ext cx="9475927" cy="237744"/>
           </a:xfrm>
           <a:prstGeom prst="rect">
             <a:avLst/>
@@ -9498,7 +9498,7 @@
                 <a:ea typeface="Atkinson Hyperlegible Next" pitchFamily="34" charset="-122"/>
                 <a:cs typeface="Atkinson Hyperlegible Next" pitchFamily="34" charset="-120"/>
               </a:rPr>
-              <a:t>Działa dziś. Usługa ROPS może ruszyć od poniedziałku</a:t>
+              <a:t>Zaimplementowane. Usługa ROPS – od poniedziałku</a:t>
             </a:r>
             <a:endParaRPr lang="en-US" sz="3200" dirty="0"/>
           </a:p>
@@ -9625,53 +9625,14 @@
       </p:sp>
       <p:sp>
         <p:nvSpPr>
-          <p:cNvPr id="5" name="Text 3"/>
-          <p:cNvSpPr txBox="1"/>
-          <p:nvPr/>
-        </p:nvSpPr>
-        <p:spPr>
-          <a:xfrm>
-            <a:off x="749808" y="1993392"/>
-            <a:ext cx="457200" cy="219456"/>
-          </a:xfrm>
-          <a:prstGeom prst="rect">
-            <a:avLst/>
-          </a:prstGeom>
-          <a:noFill/>
-          <a:ln/>
-        </p:spPr>
-        <p:txBody>
-          <a:bodyPr wrap="square" lIns="0" tIns="0" rIns="0" bIns="0" rtlCol="0" anchor="ctr"/>
-          <a:lstStyle/>
-          <a:p>
-            <a:pPr marL="0" indent="0">
-              <a:buNone/>
-            </a:pPr>
-            <a:r>
-              <a:rPr lang="en-US" sz="1200" b="1" dirty="0">
-                <a:solidFill>
-                  <a:srgbClr val="1A4B8C"/>
-                </a:solidFill>
-                <a:latin typeface="Atkinson Hyperlegible Next" pitchFamily="34" charset="0"/>
-                <a:ea typeface="Atkinson Hyperlegible Next" pitchFamily="34" charset="-122"/>
-                <a:cs typeface="Atkinson Hyperlegible Next" pitchFamily="34" charset="-120"/>
-              </a:rPr>
-              <a:t>I</a:t>
-            </a:r>
-            <a:endParaRPr lang="en-US" sz="1200" dirty="0"/>
-          </a:p>
-        </p:txBody>
-      </p:sp>
-      <p:sp>
-        <p:nvSpPr>
-          <p:cNvPr id="6" name="Shape 4"/>
+          <p:cNvPr id="5" name="Shape 3"/>
           <p:cNvSpPr/>
           <p:nvPr/>
         </p:nvSpPr>
         <p:spPr>
           <a:xfrm>
-            <a:off x="1263570" y="1993392"/>
-            <a:ext cx="749808" cy="219456"/>
+            <a:off x="731520" y="1993392"/>
+            <a:ext cx="1281858" cy="219456"/>
           </a:xfrm>
           <a:prstGeom prst="roundRect">
             <a:avLst>
@@ -9691,14 +9652,53 @@
       </p:sp>
       <p:sp>
         <p:nvSpPr>
+          <p:cNvPr id="6" name="Text 4"/>
+          <p:cNvSpPr txBox="1"/>
+          <p:nvPr/>
+        </p:nvSpPr>
+        <p:spPr>
+          <a:xfrm>
+            <a:off x="731520" y="1993392"/>
+            <a:ext cx="1281858" cy="219456"/>
+          </a:xfrm>
+          <a:prstGeom prst="rect">
+            <a:avLst/>
+          </a:prstGeom>
+          <a:noFill/>
+          <a:ln/>
+        </p:spPr>
+        <p:txBody>
+          <a:bodyPr wrap="square" lIns="0" tIns="0" rIns="0" bIns="0" rtlCol="0" anchor="ctr"/>
+          <a:lstStyle/>
+          <a:p>
+            <a:pPr marL="0" indent="0" algn="ctr">
+              <a:buNone/>
+            </a:pPr>
+            <a:r>
+              <a:rPr lang="en-US" sz="900" b="1" dirty="0">
+                <a:solidFill>
+                  <a:srgbClr val="FFFFFF"/>
+                </a:solidFill>
+                <a:latin typeface="Atkinson Hyperlegible Next" pitchFamily="34" charset="0"/>
+                <a:ea typeface="Atkinson Hyperlegible Next" pitchFamily="34" charset="-122"/>
+                <a:cs typeface="Atkinson Hyperlegible Next" pitchFamily="34" charset="-120"/>
+              </a:rPr>
+              <a:t>zaimplementowane</a:t>
+            </a:r>
+            <a:endParaRPr lang="en-US" sz="900" dirty="0"/>
+          </a:p>
+        </p:txBody>
+      </p:sp>
+      <p:sp>
+        <p:nvSpPr>
           <p:cNvPr id="7" name="Text 5"/>
           <p:cNvSpPr txBox="1"/>
           <p:nvPr/>
         </p:nvSpPr>
         <p:spPr>
           <a:xfrm>
-            <a:off x="1263570" y="1993392"/>
-            <a:ext cx="749808" cy="219456"/>
+            <a:off x="749808" y="2286000"/>
+            <a:ext cx="1245282" cy="859536"/>
           </a:xfrm>
           <a:prstGeom prst="rect">
             <a:avLst/>
@@ -9707,51 +9707,23 @@
           <a:ln/>
         </p:spPr>
         <p:txBody>
-          <a:bodyPr wrap="square" lIns="0" tIns="0" rIns="0" bIns="0" rtlCol="0" anchor="ctr"/>
-          <a:lstStyle/>
-          <a:p>
-            <a:pPr marL="0" indent="0" algn="ctr">
-              <a:buNone/>
-            </a:pPr>
-            <a:r>
-              <a:rPr lang="en-US" sz="900" b="1" dirty="0">
-                <a:solidFill>
-                  <a:srgbClr val="FFFFFF"/>
-                </a:solidFill>
-                <a:latin typeface="Atkinson Hyperlegible Next" pitchFamily="34" charset="0"/>
-                <a:ea typeface="Atkinson Hyperlegible Next" pitchFamily="34" charset="-122"/>
-                <a:cs typeface="Atkinson Hyperlegible Next" pitchFamily="34" charset="-120"/>
-              </a:rPr>
-              <a:t>działa</a:t>
-            </a:r>
-            <a:endParaRPr lang="en-US" sz="900" dirty="0"/>
-          </a:p>
-        </p:txBody>
-      </p:sp>
-      <p:sp>
-        <p:nvSpPr>
-          <p:cNvPr id="8" name="Text 6"/>
-          <p:cNvSpPr txBox="1"/>
-          <p:nvPr/>
-        </p:nvSpPr>
-        <p:spPr>
-          <a:xfrm>
-            <a:off x="749808" y="2286000"/>
-            <a:ext cx="1245282" cy="859536"/>
-          </a:xfrm>
-          <a:prstGeom prst="rect">
-            <a:avLst/>
-          </a:prstGeom>
-          <a:noFill/>
-          <a:ln/>
-        </p:spPr>
-        <p:txBody>
           <a:bodyPr wrap="square" lIns="0" tIns="0" rIns="0" bIns="0" rtlCol="0" anchor="t"/>
           <a:lstStyle/>
           <a:p>
             <a:pPr marL="0" indent="0">
               <a:buNone/>
             </a:pPr>
+            <a:r>
+              <a:rPr lang="en-US" sz="1150" b="1" dirty="0">
+                <a:solidFill>
+                  <a:srgbClr val="1A4B8C"/>
+                </a:solidFill>
+                <a:latin typeface="Atkinson Hyperlegible Next" pitchFamily="34" charset="0"/>
+                <a:ea typeface="Atkinson Hyperlegible Next" pitchFamily="34" charset="-122"/>
+                <a:cs typeface="Atkinson Hyperlegible Next" pitchFamily="34" charset="-120"/>
+              </a:rPr>
+              <a:t>I  </a:t>
+            </a:r>
             <a:r>
               <a:rPr lang="en-US" sz="1150" b="1" dirty="0">
                 <a:solidFill>
@@ -9789,7 +9761,7 @@
       </p:sp>
       <p:sp>
         <p:nvSpPr>
-          <p:cNvPr id="9" name="Shape 7"/>
+          <p:cNvPr id="8" name="Shape 6"/>
           <p:cNvSpPr/>
           <p:nvPr/>
         </p:nvSpPr>
@@ -9816,53 +9788,14 @@
       </p:sp>
       <p:sp>
         <p:nvSpPr>
-          <p:cNvPr id="10" name="Text 8"/>
-          <p:cNvSpPr txBox="1"/>
-          <p:nvPr/>
-        </p:nvSpPr>
-        <p:spPr>
-          <a:xfrm>
-            <a:off x="2324274" y="1993392"/>
-            <a:ext cx="457200" cy="219456"/>
-          </a:xfrm>
-          <a:prstGeom prst="rect">
-            <a:avLst/>
-          </a:prstGeom>
-          <a:noFill/>
-          <a:ln/>
-        </p:spPr>
-        <p:txBody>
-          <a:bodyPr wrap="square" lIns="0" tIns="0" rIns="0" bIns="0" rtlCol="0" anchor="ctr"/>
-          <a:lstStyle/>
-          <a:p>
-            <a:pPr marL="0" indent="0">
-              <a:buNone/>
-            </a:pPr>
-            <a:r>
-              <a:rPr lang="en-US" sz="1200" b="1" dirty="0">
-                <a:solidFill>
-                  <a:srgbClr val="1A4B8C"/>
-                </a:solidFill>
-                <a:latin typeface="Atkinson Hyperlegible Next" pitchFamily="34" charset="0"/>
-                <a:ea typeface="Atkinson Hyperlegible Next" pitchFamily="34" charset="-122"/>
-                <a:cs typeface="Atkinson Hyperlegible Next" pitchFamily="34" charset="-120"/>
-              </a:rPr>
-              <a:t>II</a:t>
-            </a:r>
-            <a:endParaRPr lang="en-US" sz="1200" dirty="0"/>
-          </a:p>
-        </p:txBody>
-      </p:sp>
-      <p:sp>
-        <p:nvSpPr>
-          <p:cNvPr id="11" name="Shape 9"/>
+          <p:cNvPr id="9" name="Shape 7"/>
           <p:cNvSpPr/>
           <p:nvPr/>
         </p:nvSpPr>
         <p:spPr>
           <a:xfrm>
-            <a:off x="2838036" y="1993392"/>
-            <a:ext cx="749808" cy="219456"/>
+            <a:off x="2305986" y="1993392"/>
+            <a:ext cx="1281858" cy="219456"/>
           </a:xfrm>
           <a:prstGeom prst="roundRect">
             <a:avLst>
@@ -9882,14 +9815,14 @@
       </p:sp>
       <p:sp>
         <p:nvSpPr>
-          <p:cNvPr id="12" name="Text 10"/>
+          <p:cNvPr id="10" name="Text 8"/>
           <p:cNvSpPr txBox="1"/>
           <p:nvPr/>
         </p:nvSpPr>
         <p:spPr>
           <a:xfrm>
-            <a:off x="2838036" y="1993392"/>
-            <a:ext cx="749808" cy="219456"/>
+            <a:off x="2305986" y="1993392"/>
+            <a:ext cx="1281858" cy="219456"/>
           </a:xfrm>
           <a:prstGeom prst="rect">
             <a:avLst/>
@@ -9913,7 +9846,7 @@
                 <a:ea typeface="Atkinson Hyperlegible Next" pitchFamily="34" charset="-122"/>
                 <a:cs typeface="Atkinson Hyperlegible Next" pitchFamily="34" charset="-120"/>
               </a:rPr>
-              <a:t>działa</a:t>
+              <a:t>zaimplementowane</a:t>
             </a:r>
             <a:endParaRPr lang="en-US" sz="900" dirty="0"/>
           </a:p>
@@ -9921,7 +9854,7 @@
       </p:sp>
       <p:sp>
         <p:nvSpPr>
-          <p:cNvPr id="13" name="Text 11"/>
+          <p:cNvPr id="11" name="Text 9"/>
           <p:cNvSpPr txBox="1"/>
           <p:nvPr/>
         </p:nvSpPr>
@@ -9943,6 +9876,17 @@
             <a:pPr marL="0" indent="0">
               <a:buNone/>
             </a:pPr>
+            <a:r>
+              <a:rPr lang="en-US" sz="1150" b="1" dirty="0">
+                <a:solidFill>
+                  <a:srgbClr val="1A4B8C"/>
+                </a:solidFill>
+                <a:latin typeface="Atkinson Hyperlegible Next" pitchFamily="34" charset="0"/>
+                <a:ea typeface="Atkinson Hyperlegible Next" pitchFamily="34" charset="-122"/>
+                <a:cs typeface="Atkinson Hyperlegible Next" pitchFamily="34" charset="-120"/>
+              </a:rPr>
+              <a:t>II  </a:t>
+            </a:r>
             <a:r>
               <a:rPr lang="en-US" sz="1150" b="1" dirty="0">
                 <a:solidFill>
@@ -9980,7 +9924,7 @@
       </p:sp>
       <p:sp>
         <p:nvSpPr>
-          <p:cNvPr id="14" name="Shape 12"/>
+          <p:cNvPr id="12" name="Shape 10"/>
           <p:cNvSpPr/>
           <p:nvPr/>
         </p:nvSpPr>
@@ -10007,53 +9951,14 @@
       </p:sp>
       <p:sp>
         <p:nvSpPr>
-          <p:cNvPr id="15" name="Text 13"/>
-          <p:cNvSpPr txBox="1"/>
-          <p:nvPr/>
-        </p:nvSpPr>
-        <p:spPr>
-          <a:xfrm>
-            <a:off x="3898740" y="1993392"/>
-            <a:ext cx="457200" cy="219456"/>
-          </a:xfrm>
-          <a:prstGeom prst="rect">
-            <a:avLst/>
-          </a:prstGeom>
-          <a:noFill/>
-          <a:ln/>
-        </p:spPr>
-        <p:txBody>
-          <a:bodyPr wrap="square" lIns="0" tIns="0" rIns="0" bIns="0" rtlCol="0" anchor="ctr"/>
-          <a:lstStyle/>
-          <a:p>
-            <a:pPr marL="0" indent="0">
-              <a:buNone/>
-            </a:pPr>
-            <a:r>
-              <a:rPr lang="en-US" sz="1200" b="1" dirty="0">
-                <a:solidFill>
-                  <a:srgbClr val="1A4B8C"/>
-                </a:solidFill>
-                <a:latin typeface="Atkinson Hyperlegible Next" pitchFamily="34" charset="0"/>
-                <a:ea typeface="Atkinson Hyperlegible Next" pitchFamily="34" charset="-122"/>
-                <a:cs typeface="Atkinson Hyperlegible Next" pitchFamily="34" charset="-120"/>
-              </a:rPr>
-              <a:t>III</a:t>
-            </a:r>
-            <a:endParaRPr lang="en-US" sz="1200" dirty="0"/>
-          </a:p>
-        </p:txBody>
-      </p:sp>
-      <p:sp>
-        <p:nvSpPr>
-          <p:cNvPr id="16" name="Shape 14"/>
+          <p:cNvPr id="13" name="Shape 11"/>
           <p:cNvSpPr/>
           <p:nvPr/>
         </p:nvSpPr>
         <p:spPr>
           <a:xfrm>
-            <a:off x="4412503" y="1993392"/>
-            <a:ext cx="749808" cy="219456"/>
+            <a:off x="3880452" y="1993392"/>
+            <a:ext cx="1281858" cy="219456"/>
           </a:xfrm>
           <a:prstGeom prst="roundRect">
             <a:avLst>
@@ -10073,14 +9978,14 @@
       </p:sp>
       <p:sp>
         <p:nvSpPr>
-          <p:cNvPr id="17" name="Text 15"/>
+          <p:cNvPr id="14" name="Text 12"/>
           <p:cNvSpPr txBox="1"/>
           <p:nvPr/>
         </p:nvSpPr>
         <p:spPr>
           <a:xfrm>
-            <a:off x="4412503" y="1993392"/>
-            <a:ext cx="749808" cy="219456"/>
+            <a:off x="3880452" y="1993392"/>
+            <a:ext cx="1281858" cy="219456"/>
           </a:xfrm>
           <a:prstGeom prst="rect">
             <a:avLst/>
@@ -10112,7 +10017,7 @@
       </p:sp>
       <p:sp>
         <p:nvSpPr>
-          <p:cNvPr id="18" name="Text 16"/>
+          <p:cNvPr id="15" name="Text 13"/>
           <p:cNvSpPr txBox="1"/>
           <p:nvPr/>
         </p:nvSpPr>
@@ -10134,6 +10039,17 @@
             <a:pPr marL="0" indent="0">
               <a:buNone/>
             </a:pPr>
+            <a:r>
+              <a:rPr lang="en-US" sz="1150" b="1" dirty="0">
+                <a:solidFill>
+                  <a:srgbClr val="1A4B8C"/>
+                </a:solidFill>
+                <a:latin typeface="Atkinson Hyperlegible Next" pitchFamily="34" charset="0"/>
+                <a:ea typeface="Atkinson Hyperlegible Next" pitchFamily="34" charset="-122"/>
+                <a:cs typeface="Atkinson Hyperlegible Next" pitchFamily="34" charset="-120"/>
+              </a:rPr>
+              <a:t>III  </a:t>
+            </a:r>
             <a:r>
               <a:rPr lang="en-US" sz="1150" b="1" dirty="0">
                 <a:solidFill>
@@ -10171,7 +10087,7 @@
       </p:sp>
       <p:sp>
         <p:nvSpPr>
-          <p:cNvPr id="19" name="Shape 17"/>
+          <p:cNvPr id="16" name="Shape 14"/>
           <p:cNvSpPr/>
           <p:nvPr/>
         </p:nvSpPr>
@@ -10198,53 +10114,14 @@
       </p:sp>
       <p:sp>
         <p:nvSpPr>
-          <p:cNvPr id="20" name="Text 18"/>
-          <p:cNvSpPr txBox="1"/>
-          <p:nvPr/>
-        </p:nvSpPr>
-        <p:spPr>
-          <a:xfrm>
-            <a:off x="5473207" y="1993392"/>
-            <a:ext cx="457200" cy="219456"/>
-          </a:xfrm>
-          <a:prstGeom prst="rect">
-            <a:avLst/>
-          </a:prstGeom>
-          <a:noFill/>
-          <a:ln/>
-        </p:spPr>
-        <p:txBody>
-          <a:bodyPr wrap="square" lIns="0" tIns="0" rIns="0" bIns="0" rtlCol="0" anchor="ctr"/>
-          <a:lstStyle/>
-          <a:p>
-            <a:pPr marL="0" indent="0">
-              <a:buNone/>
-            </a:pPr>
-            <a:r>
-              <a:rPr lang="en-US" sz="1200" b="1" dirty="0">
-                <a:solidFill>
-                  <a:srgbClr val="1A4B8C"/>
-                </a:solidFill>
-                <a:latin typeface="Atkinson Hyperlegible Next" pitchFamily="34" charset="0"/>
-                <a:ea typeface="Atkinson Hyperlegible Next" pitchFamily="34" charset="-122"/>
-                <a:cs typeface="Atkinson Hyperlegible Next" pitchFamily="34" charset="-120"/>
-              </a:rPr>
-              <a:t>IV</a:t>
-            </a:r>
-            <a:endParaRPr lang="en-US" sz="1200" dirty="0"/>
-          </a:p>
-        </p:txBody>
-      </p:sp>
-      <p:sp>
-        <p:nvSpPr>
-          <p:cNvPr id="21" name="Shape 19"/>
+          <p:cNvPr id="17" name="Shape 15"/>
           <p:cNvSpPr/>
           <p:nvPr/>
         </p:nvSpPr>
         <p:spPr>
           <a:xfrm>
-            <a:off x="5986969" y="1993392"/>
-            <a:ext cx="749808" cy="219456"/>
+            <a:off x="5454919" y="1993392"/>
+            <a:ext cx="1281858" cy="219456"/>
           </a:xfrm>
           <a:prstGeom prst="roundRect">
             <a:avLst>
@@ -10264,14 +10141,14 @@
       </p:sp>
       <p:sp>
         <p:nvSpPr>
-          <p:cNvPr id="22" name="Text 20"/>
+          <p:cNvPr id="18" name="Text 16"/>
           <p:cNvSpPr txBox="1"/>
           <p:nvPr/>
         </p:nvSpPr>
         <p:spPr>
           <a:xfrm>
-            <a:off x="5986969" y="1993392"/>
-            <a:ext cx="749808" cy="219456"/>
+            <a:off x="5454919" y="1993392"/>
+            <a:ext cx="1281858" cy="219456"/>
           </a:xfrm>
           <a:prstGeom prst="rect">
             <a:avLst/>
@@ -10295,7 +10172,7 @@
                 <a:ea typeface="Atkinson Hyperlegible Next" pitchFamily="34" charset="-122"/>
                 <a:cs typeface="Atkinson Hyperlegible Next" pitchFamily="34" charset="-120"/>
               </a:rPr>
-              <a:t>działa</a:t>
+              <a:t>zaimplementowane</a:t>
             </a:r>
             <a:endParaRPr lang="en-US" sz="900" dirty="0"/>
           </a:p>
@@ -10303,7 +10180,7 @@
       </p:sp>
       <p:sp>
         <p:nvSpPr>
-          <p:cNvPr id="23" name="Text 21"/>
+          <p:cNvPr id="19" name="Text 17"/>
           <p:cNvSpPr txBox="1"/>
           <p:nvPr/>
         </p:nvSpPr>
@@ -10325,6 +10202,17 @@
             <a:pPr marL="0" indent="0">
               <a:buNone/>
             </a:pPr>
+            <a:r>
+              <a:rPr lang="en-US" sz="1150" b="1" dirty="0">
+                <a:solidFill>
+                  <a:srgbClr val="1A4B8C"/>
+                </a:solidFill>
+                <a:latin typeface="Atkinson Hyperlegible Next" pitchFamily="34" charset="0"/>
+                <a:ea typeface="Atkinson Hyperlegible Next" pitchFamily="34" charset="-122"/>
+                <a:cs typeface="Atkinson Hyperlegible Next" pitchFamily="34" charset="-120"/>
+              </a:rPr>
+              <a:t>IV  </a:t>
+            </a:r>
             <a:r>
               <a:rPr lang="en-US" sz="1150" b="1" dirty="0">
                 <a:solidFill>
@@ -10362,7 +10250,7 @@
       </p:sp>
       <p:sp>
         <p:nvSpPr>
-          <p:cNvPr id="24" name="Shape 22"/>
+          <p:cNvPr id="20" name="Shape 18"/>
           <p:cNvSpPr/>
           <p:nvPr/>
         </p:nvSpPr>
@@ -10389,53 +10277,14 @@
       </p:sp>
       <p:sp>
         <p:nvSpPr>
-          <p:cNvPr id="25" name="Text 23"/>
-          <p:cNvSpPr txBox="1"/>
-          <p:nvPr/>
-        </p:nvSpPr>
-        <p:spPr>
-          <a:xfrm>
-            <a:off x="7047673" y="1993392"/>
-            <a:ext cx="457200" cy="219456"/>
-          </a:xfrm>
-          <a:prstGeom prst="rect">
-            <a:avLst/>
-          </a:prstGeom>
-          <a:noFill/>
-          <a:ln/>
-        </p:spPr>
-        <p:txBody>
-          <a:bodyPr wrap="square" lIns="0" tIns="0" rIns="0" bIns="0" rtlCol="0" anchor="ctr"/>
-          <a:lstStyle/>
-          <a:p>
-            <a:pPr marL="0" indent="0">
-              <a:buNone/>
-            </a:pPr>
-            <a:r>
-              <a:rPr lang="en-US" sz="1200" b="1" dirty="0">
-                <a:solidFill>
-                  <a:srgbClr val="1A4B8C"/>
-                </a:solidFill>
-                <a:latin typeface="Atkinson Hyperlegible Next" pitchFamily="34" charset="0"/>
-                <a:ea typeface="Atkinson Hyperlegible Next" pitchFamily="34" charset="-122"/>
-                <a:cs typeface="Atkinson Hyperlegible Next" pitchFamily="34" charset="-120"/>
-              </a:rPr>
-              <a:t>V</a:t>
-            </a:r>
-            <a:endParaRPr lang="en-US" sz="1200" dirty="0"/>
-          </a:p>
-        </p:txBody>
-      </p:sp>
-      <p:sp>
-        <p:nvSpPr>
-          <p:cNvPr id="26" name="Shape 24"/>
+          <p:cNvPr id="21" name="Shape 19"/>
           <p:cNvSpPr/>
           <p:nvPr/>
         </p:nvSpPr>
         <p:spPr>
           <a:xfrm>
-            <a:off x="7561435" y="1993392"/>
-            <a:ext cx="749808" cy="219456"/>
+            <a:off x="7029385" y="1993392"/>
+            <a:ext cx="1281858" cy="219456"/>
           </a:xfrm>
           <a:prstGeom prst="roundRect">
             <a:avLst>
@@ -10455,14 +10304,14 @@
       </p:sp>
       <p:sp>
         <p:nvSpPr>
-          <p:cNvPr id="27" name="Text 25"/>
+          <p:cNvPr id="22" name="Text 20"/>
           <p:cNvSpPr txBox="1"/>
           <p:nvPr/>
         </p:nvSpPr>
         <p:spPr>
           <a:xfrm>
-            <a:off x="7561435" y="1993392"/>
-            <a:ext cx="749808" cy="219456"/>
+            <a:off x="7029385" y="1993392"/>
+            <a:ext cx="1281858" cy="219456"/>
           </a:xfrm>
           <a:prstGeom prst="rect">
             <a:avLst/>
@@ -10486,7 +10335,7 @@
                 <a:ea typeface="Atkinson Hyperlegible Next" pitchFamily="34" charset="-122"/>
                 <a:cs typeface="Atkinson Hyperlegible Next" pitchFamily="34" charset="-120"/>
               </a:rPr>
-              <a:t>działa</a:t>
+              <a:t>zaimplementowane</a:t>
             </a:r>
             <a:endParaRPr lang="en-US" sz="900" dirty="0"/>
           </a:p>
@@ -10494,7 +10343,7 @@
       </p:sp>
       <p:sp>
         <p:nvSpPr>
-          <p:cNvPr id="28" name="Text 26"/>
+          <p:cNvPr id="23" name="Text 21"/>
           <p:cNvSpPr txBox="1"/>
           <p:nvPr/>
         </p:nvSpPr>
@@ -10516,6 +10365,17 @@
             <a:pPr marL="0" indent="0">
               <a:buNone/>
             </a:pPr>
+            <a:r>
+              <a:rPr lang="en-US" sz="1150" b="1" dirty="0">
+                <a:solidFill>
+                  <a:srgbClr val="1A4B8C"/>
+                </a:solidFill>
+                <a:latin typeface="Atkinson Hyperlegible Next" pitchFamily="34" charset="0"/>
+                <a:ea typeface="Atkinson Hyperlegible Next" pitchFamily="34" charset="-122"/>
+                <a:cs typeface="Atkinson Hyperlegible Next" pitchFamily="34" charset="-120"/>
+              </a:rPr>
+              <a:t>V  </a:t>
+            </a:r>
             <a:r>
               <a:rPr lang="en-US" sz="1150" b="1" dirty="0">
                 <a:solidFill>
@@ -10553,7 +10413,7 @@
       </p:sp>
       <p:sp>
         <p:nvSpPr>
-          <p:cNvPr id="29" name="Shape 27"/>
+          <p:cNvPr id="24" name="Shape 22"/>
           <p:cNvSpPr/>
           <p:nvPr/>
         </p:nvSpPr>
@@ -10580,53 +10440,14 @@
       </p:sp>
       <p:sp>
         <p:nvSpPr>
-          <p:cNvPr id="30" name="Text 28"/>
-          <p:cNvSpPr txBox="1"/>
-          <p:nvPr/>
-        </p:nvSpPr>
-        <p:spPr>
-          <a:xfrm>
-            <a:off x="8622139" y="1993392"/>
-            <a:ext cx="457200" cy="219456"/>
-          </a:xfrm>
-          <a:prstGeom prst="rect">
-            <a:avLst/>
-          </a:prstGeom>
-          <a:noFill/>
-          <a:ln/>
-        </p:spPr>
-        <p:txBody>
-          <a:bodyPr wrap="square" lIns="0" tIns="0" rIns="0" bIns="0" rtlCol="0" anchor="ctr"/>
-          <a:lstStyle/>
-          <a:p>
-            <a:pPr marL="0" indent="0">
-              <a:buNone/>
-            </a:pPr>
-            <a:r>
-              <a:rPr lang="en-US" sz="1200" b="1" dirty="0">
-                <a:solidFill>
-                  <a:srgbClr val="1A4B8C"/>
-                </a:solidFill>
-                <a:latin typeface="Atkinson Hyperlegible Next" pitchFamily="34" charset="0"/>
-                <a:ea typeface="Atkinson Hyperlegible Next" pitchFamily="34" charset="-122"/>
-                <a:cs typeface="Atkinson Hyperlegible Next" pitchFamily="34" charset="-120"/>
-              </a:rPr>
-              <a:t>VI</a:t>
-            </a:r>
-            <a:endParaRPr lang="en-US" sz="1200" dirty="0"/>
-          </a:p>
-        </p:txBody>
-      </p:sp>
-      <p:sp>
-        <p:nvSpPr>
-          <p:cNvPr id="31" name="Shape 29"/>
+          <p:cNvPr id="25" name="Shape 23"/>
           <p:cNvSpPr/>
           <p:nvPr/>
         </p:nvSpPr>
         <p:spPr>
           <a:xfrm>
-            <a:off x="9135901" y="1993392"/>
-            <a:ext cx="749808" cy="219456"/>
+            <a:off x="8603851" y="1993392"/>
+            <a:ext cx="1281858" cy="219456"/>
           </a:xfrm>
           <a:prstGeom prst="roundRect">
             <a:avLst>
@@ -10646,14 +10467,14 @@
       </p:sp>
       <p:sp>
         <p:nvSpPr>
-          <p:cNvPr id="32" name="Text 30"/>
+          <p:cNvPr id="26" name="Text 24"/>
           <p:cNvSpPr txBox="1"/>
           <p:nvPr/>
         </p:nvSpPr>
         <p:spPr>
           <a:xfrm>
-            <a:off x="9135901" y="1993392"/>
-            <a:ext cx="749808" cy="219456"/>
+            <a:off x="8603851" y="1993392"/>
+            <a:ext cx="1281858" cy="219456"/>
           </a:xfrm>
           <a:prstGeom prst="rect">
             <a:avLst/>
@@ -10677,7 +10498,7 @@
                 <a:ea typeface="Atkinson Hyperlegible Next" pitchFamily="34" charset="-122"/>
                 <a:cs typeface="Atkinson Hyperlegible Next" pitchFamily="34" charset="-120"/>
               </a:rPr>
-              <a:t>działa</a:t>
+              <a:t>zaimplementowane</a:t>
             </a:r>
             <a:endParaRPr lang="en-US" sz="900" dirty="0"/>
           </a:p>
@@ -10685,7 +10506,7 @@
       </p:sp>
       <p:sp>
         <p:nvSpPr>
-          <p:cNvPr id="33" name="Text 31"/>
+          <p:cNvPr id="27" name="Text 25"/>
           <p:cNvSpPr txBox="1"/>
           <p:nvPr/>
         </p:nvSpPr>
@@ -10707,6 +10528,17 @@
             <a:pPr marL="0" indent="0">
               <a:buNone/>
             </a:pPr>
+            <a:r>
+              <a:rPr lang="en-US" sz="1150" b="1" dirty="0">
+                <a:solidFill>
+                  <a:srgbClr val="1A4B8C"/>
+                </a:solidFill>
+                <a:latin typeface="Atkinson Hyperlegible Next" pitchFamily="34" charset="0"/>
+                <a:ea typeface="Atkinson Hyperlegible Next" pitchFamily="34" charset="-122"/>
+                <a:cs typeface="Atkinson Hyperlegible Next" pitchFamily="34" charset="-120"/>
+              </a:rPr>
+              <a:t>VI  </a:t>
+            </a:r>
             <a:r>
               <a:rPr lang="en-US" sz="1150" b="1" dirty="0">
                 <a:solidFill>
@@ -10744,7 +10576,7 @@
       </p:sp>
       <p:sp>
         <p:nvSpPr>
-          <p:cNvPr id="34" name="Shape 32"/>
+          <p:cNvPr id="28" name="Shape 26"/>
           <p:cNvSpPr/>
           <p:nvPr/>
         </p:nvSpPr>
@@ -10771,53 +10603,14 @@
       </p:sp>
       <p:sp>
         <p:nvSpPr>
-          <p:cNvPr id="35" name="Text 33"/>
-          <p:cNvSpPr txBox="1"/>
-          <p:nvPr/>
-        </p:nvSpPr>
-        <p:spPr>
-          <a:xfrm>
-            <a:off x="10196605" y="1993392"/>
-            <a:ext cx="457200" cy="219456"/>
-          </a:xfrm>
-          <a:prstGeom prst="rect">
-            <a:avLst/>
-          </a:prstGeom>
-          <a:noFill/>
-          <a:ln/>
-        </p:spPr>
-        <p:txBody>
-          <a:bodyPr wrap="square" lIns="0" tIns="0" rIns="0" bIns="0" rtlCol="0" anchor="ctr"/>
-          <a:lstStyle/>
-          <a:p>
-            <a:pPr marL="0" indent="0">
-              <a:buNone/>
-            </a:pPr>
-            <a:r>
-              <a:rPr lang="en-US" sz="1200" b="1" dirty="0">
-                <a:solidFill>
-                  <a:srgbClr val="1A4B8C"/>
-                </a:solidFill>
-                <a:latin typeface="Atkinson Hyperlegible Next" pitchFamily="34" charset="0"/>
-                <a:ea typeface="Atkinson Hyperlegible Next" pitchFamily="34" charset="-122"/>
-                <a:cs typeface="Atkinson Hyperlegible Next" pitchFamily="34" charset="-120"/>
-              </a:rPr>
-              <a:t>VII</a:t>
-            </a:r>
-            <a:endParaRPr lang="en-US" sz="1200" dirty="0"/>
-          </a:p>
-        </p:txBody>
-      </p:sp>
-      <p:sp>
-        <p:nvSpPr>
-          <p:cNvPr id="36" name="Shape 34"/>
+          <p:cNvPr id="29" name="Shape 27"/>
           <p:cNvSpPr/>
           <p:nvPr/>
         </p:nvSpPr>
         <p:spPr>
           <a:xfrm>
-            <a:off x="10710367" y="1993392"/>
-            <a:ext cx="749808" cy="219456"/>
+            <a:off x="10178317" y="1993392"/>
+            <a:ext cx="1281858" cy="219456"/>
           </a:xfrm>
           <a:prstGeom prst="roundRect">
             <a:avLst>
@@ -10837,14 +10630,14 @@
       </p:sp>
       <p:sp>
         <p:nvSpPr>
-          <p:cNvPr id="37" name="Text 35"/>
+          <p:cNvPr id="30" name="Text 28"/>
           <p:cNvSpPr txBox="1"/>
           <p:nvPr/>
         </p:nvSpPr>
         <p:spPr>
           <a:xfrm>
-            <a:off x="10710367" y="1993392"/>
-            <a:ext cx="749808" cy="219456"/>
+            <a:off x="10178317" y="1993392"/>
+            <a:ext cx="1281858" cy="219456"/>
           </a:xfrm>
           <a:prstGeom prst="rect">
             <a:avLst/>
@@ -10876,7 +10669,7 @@
       </p:sp>
       <p:sp>
         <p:nvSpPr>
-          <p:cNvPr id="38" name="Text 36"/>
+          <p:cNvPr id="31" name="Text 29"/>
           <p:cNvSpPr txBox="1"/>
           <p:nvPr/>
         </p:nvSpPr>
@@ -10898,6 +10691,17 @@
             <a:pPr marL="0" indent="0">
               <a:buNone/>
             </a:pPr>
+            <a:r>
+              <a:rPr lang="en-US" sz="1150" b="1" dirty="0">
+                <a:solidFill>
+                  <a:srgbClr val="1A4B8C"/>
+                </a:solidFill>
+                <a:latin typeface="Atkinson Hyperlegible Next" pitchFamily="34" charset="0"/>
+                <a:ea typeface="Atkinson Hyperlegible Next" pitchFamily="34" charset="-122"/>
+                <a:cs typeface="Atkinson Hyperlegible Next" pitchFamily="34" charset="-120"/>
+              </a:rPr>
+              <a:t>VII  </a:t>
+            </a:r>
             <a:r>
               <a:rPr lang="en-US" sz="1150" b="1" dirty="0">
                 <a:solidFill>
@@ -10935,7 +10739,7 @@
       </p:sp>
       <p:sp>
         <p:nvSpPr>
-          <p:cNvPr id="39" name="Text 37"/>
+          <p:cNvPr id="32" name="Text 30"/>
           <p:cNvSpPr txBox="1"/>
           <p:nvPr/>
         </p:nvSpPr>
@@ -10974,7 +10778,7 @@
       </p:sp>
       <p:sp>
         <p:nvSpPr>
-          <p:cNvPr id="40" name="Text 38"/>
+          <p:cNvPr id="33" name="Text 31"/>
           <p:cNvSpPr txBox="1"/>
           <p:nvPr/>
         </p:nvSpPr>
@@ -11013,7 +10817,7 @@
       </p:sp>
       <p:sp>
         <p:nvSpPr>
-          <p:cNvPr id="41" name="Text 39"/>
+          <p:cNvPr id="34" name="Text 32"/>
           <p:cNvSpPr txBox="1"/>
           <p:nvPr/>
         </p:nvSpPr>
@@ -11069,7 +10873,7 @@
       </p:sp>
       <p:sp>
         <p:nvSpPr>
-          <p:cNvPr id="42" name="Text 40"/>
+          <p:cNvPr id="35" name="Text 33"/>
           <p:cNvSpPr txBox="1"/>
           <p:nvPr/>
         </p:nvSpPr>
@@ -11125,7 +10929,7 @@
       </p:sp>
       <p:sp>
         <p:nvSpPr>
-          <p:cNvPr id="43" name="Text 41"/>
+          <p:cNvPr id="36" name="Text 34"/>
           <p:cNvSpPr txBox="1"/>
           <p:nvPr/>
         </p:nvSpPr>
@@ -11181,7 +10985,7 @@
       </p:sp>
       <p:sp>
         <p:nvSpPr>
-          <p:cNvPr id="44" name="Text 42"/>
+          <p:cNvPr id="37" name="Text 35"/>
           <p:cNvSpPr txBox="1"/>
           <p:nvPr/>
         </p:nvSpPr>
@@ -11220,7 +11024,7 @@
       </p:sp>
       <p:sp>
         <p:nvSpPr>
-          <p:cNvPr id="45" name="Shape 43"/>
+          <p:cNvPr id="38" name="Shape 36"/>
           <p:cNvSpPr/>
           <p:nvPr/>
         </p:nvSpPr>
@@ -11245,7 +11049,7 @@
       </p:sp>
       <p:sp>
         <p:nvSpPr>
-          <p:cNvPr id="46" name="Text 44"/>
+          <p:cNvPr id="39" name="Text 37"/>
           <p:cNvSpPr txBox="1"/>
           <p:nvPr/>
         </p:nvSpPr>
@@ -11284,7 +11088,7 @@
       </p:sp>
       <p:sp>
         <p:nvSpPr>
-          <p:cNvPr id="47" name="Text 45"/>
+          <p:cNvPr id="40" name="Text 38"/>
           <p:cNvSpPr txBox="1"/>
           <p:nvPr/>
         </p:nvSpPr>
@@ -11389,7 +11193,7 @@
       </p:sp>
       <p:sp>
         <p:nvSpPr>
-          <p:cNvPr id="48" name="Shape 46"/>
+          <p:cNvPr id="41" name="Shape 39"/>
           <p:cNvSpPr/>
           <p:nvPr/>
         </p:nvSpPr>
@@ -11414,7 +11218,7 @@
       </p:sp>
       <p:sp>
         <p:nvSpPr>
-          <p:cNvPr id="49" name="Text 47"/>
+          <p:cNvPr id="42" name="Text 40"/>
           <p:cNvSpPr txBox="1"/>
           <p:nvPr/>
         </p:nvSpPr>
@@ -11453,7 +11257,7 @@
       </p:sp>
       <p:sp>
         <p:nvSpPr>
-          <p:cNvPr id="50" name="Text 48"/>
+          <p:cNvPr id="43" name="Text 41"/>
           <p:cNvSpPr txBox="1"/>
           <p:nvPr/>
         </p:nvSpPr>
@@ -11558,7 +11362,7 @@
       </p:sp>
       <p:sp>
         <p:nvSpPr>
-          <p:cNvPr id="51" name="Shape 49"/>
+          <p:cNvPr id="44" name="Shape 42"/>
           <p:cNvSpPr/>
           <p:nvPr/>
         </p:nvSpPr>
@@ -11583,7 +11387,7 @@
       </p:sp>
       <p:sp>
         <p:nvSpPr>
-          <p:cNvPr id="52" name="Text 50"/>
+          <p:cNvPr id="45" name="Text 43"/>
           <p:cNvSpPr txBox="1"/>
           <p:nvPr/>
         </p:nvSpPr>
@@ -11622,7 +11426,7 @@
       </p:sp>
       <p:sp>
         <p:nvSpPr>
-          <p:cNvPr id="53" name="Text 51"/>
+          <p:cNvPr id="46" name="Text 44"/>
           <p:cNvSpPr txBox="1"/>
           <p:nvPr/>
         </p:nvSpPr>
@@ -11705,7 +11509,7 @@
       </p:sp>
       <p:sp>
         <p:nvSpPr>
-          <p:cNvPr id="54" name="Shape 52"/>
+          <p:cNvPr id="47" name="Shape 45"/>
           <p:cNvSpPr/>
           <p:nvPr/>
         </p:nvSpPr>
@@ -11732,7 +11536,7 @@
       </p:sp>
       <p:sp>
         <p:nvSpPr>
-          <p:cNvPr id="55" name="Text 53"/>
+          <p:cNvPr id="48" name="Text 46"/>
           <p:cNvSpPr txBox="1"/>
           <p:nvPr/>
         </p:nvSpPr>
@@ -11782,7 +11586,7 @@
       </p:sp>
       <p:sp>
         <p:nvSpPr>
-          <p:cNvPr id="56" name="Shape 54"/>
+          <p:cNvPr id="49" name="Shape 47"/>
           <p:cNvSpPr/>
           <p:nvPr/>
         </p:nvSpPr>
@@ -11809,14 +11613,320 @@
       </p:sp>
       <p:sp>
         <p:nvSpPr>
+          <p:cNvPr id="50" name="Text 48"/>
+          <p:cNvSpPr txBox="1"/>
+          <p:nvPr/>
+        </p:nvSpPr>
+        <p:spPr>
+          <a:xfrm>
+            <a:off x="6080760" y="5385816"/>
+            <a:ext cx="5287975" cy="274320"/>
+          </a:xfrm>
+          <a:prstGeom prst="rect">
+            <a:avLst/>
+          </a:prstGeom>
+          <a:noFill/>
+          <a:ln/>
+        </p:spPr>
+        <p:txBody>
+          <a:bodyPr wrap="square" lIns="0" tIns="0" rIns="0" bIns="0" rtlCol="0" anchor="ctr"/>
+          <a:lstStyle/>
+          <a:p>
+            <a:pPr marL="0" indent="0">
+              <a:buNone/>
+            </a:pPr>
+            <a:r>
+              <a:rPr lang="en-US" sz="1300" b="1" dirty="0">
+                <a:solidFill>
+                  <a:srgbClr val="1A4B8C"/>
+                </a:solidFill>
+                <a:latin typeface="Atkinson Hyperlegible Next" pitchFamily="34" charset="0"/>
+                <a:ea typeface="Atkinson Hyperlegible Next" pitchFamily="34" charset="-122"/>
+                <a:cs typeface="Atkinson Hyperlegible Next" pitchFamily="34" charset="-120"/>
+              </a:rPr>
+              <a:t>Około 55 USD miesięcznie plus 8 USD za 1000 dróg</a:t>
+            </a:r>
+            <a:endParaRPr lang="en-US" sz="1300" dirty="0"/>
+          </a:p>
+        </p:txBody>
+      </p:sp>
+      <p:sp>
+        <p:nvSpPr>
+          <p:cNvPr id="51" name="Text 49"/>
+          <p:cNvSpPr txBox="1"/>
+          <p:nvPr/>
+        </p:nvSpPr>
+        <p:spPr>
+          <a:xfrm>
+            <a:off x="6080760" y="5660136"/>
+            <a:ext cx="4282135" cy="164592"/>
+          </a:xfrm>
+          <a:prstGeom prst="rect">
+            <a:avLst/>
+          </a:prstGeom>
+          <a:noFill/>
+          <a:ln/>
+        </p:spPr>
+        <p:txBody>
+          <a:bodyPr wrap="square" lIns="0" tIns="0" rIns="0" bIns="0" rtlCol="0" anchor="ctr"/>
+          <a:lstStyle/>
+          <a:p>
+            <a:pPr marL="0" indent="0">
+              <a:buNone/>
+            </a:pPr>
+            <a:r>
+              <a:rPr lang="en-US" sz="1050" b="1" dirty="0">
+                <a:solidFill>
+                  <a:srgbClr val="14171A"/>
+                </a:solidFill>
+                <a:latin typeface="Atkinson Hyperlegible Next" pitchFamily="34" charset="0"/>
+                <a:ea typeface="Atkinson Hyperlegible Next" pitchFamily="34" charset="-122"/>
+                <a:cs typeface="Atkinson Hyperlegible Next" pitchFamily="34" charset="-120"/>
+              </a:rPr>
+              <a:t>Serwer  </a:t>
+            </a:r>
+            <a:r>
+              <a:rPr lang="en-US" sz="1050" dirty="0">
+                <a:solidFill>
+                  <a:srgbClr val="454D57"/>
+                </a:solidFill>
+                <a:latin typeface="Atkinson Hyperlegible Next" pitchFamily="34" charset="0"/>
+                <a:ea typeface="Atkinson Hyperlegible Next" pitchFamily="34" charset="-122"/>
+                <a:cs typeface="Atkinson Hyperlegible Next" pitchFamily="34" charset="-120"/>
+              </a:rPr>
+              <a:t>aplikacja + polski model wyszukiwania, 4 GB</a:t>
+            </a:r>
+            <a:endParaRPr lang="en-US" sz="1050" dirty="0"/>
+          </a:p>
+        </p:txBody>
+      </p:sp>
+      <p:sp>
+        <p:nvSpPr>
+          <p:cNvPr id="52" name="Text 50"/>
+          <p:cNvSpPr txBox="1"/>
+          <p:nvPr/>
+        </p:nvSpPr>
+        <p:spPr>
+          <a:xfrm>
+            <a:off x="10317175" y="5660136"/>
+            <a:ext cx="1051560" cy="164592"/>
+          </a:xfrm>
+          <a:prstGeom prst="rect">
+            <a:avLst/>
+          </a:prstGeom>
+          <a:noFill/>
+          <a:ln/>
+        </p:spPr>
+        <p:txBody>
+          <a:bodyPr wrap="square" lIns="0" tIns="0" rIns="0" bIns="0" rtlCol="0" anchor="ctr"/>
+          <a:lstStyle/>
+          <a:p>
+            <a:pPr marL="0" indent="0" algn="r">
+              <a:buNone/>
+            </a:pPr>
+            <a:r>
+              <a:rPr lang="en-US" sz="1050" b="1" dirty="0">
+                <a:solidFill>
+                  <a:srgbClr val="14171A"/>
+                </a:solidFill>
+                <a:latin typeface="Atkinson Hyperlegible Next" pitchFamily="34" charset="0"/>
+                <a:ea typeface="Atkinson Hyperlegible Next" pitchFamily="34" charset="-122"/>
+                <a:cs typeface="Atkinson Hyperlegible Next" pitchFamily="34" charset="-120"/>
+              </a:rPr>
+              <a:t>24 USD / mies.</a:t>
+            </a:r>
+            <a:endParaRPr lang="en-US" sz="1050" dirty="0"/>
+          </a:p>
+        </p:txBody>
+      </p:sp>
+      <p:sp>
+        <p:nvSpPr>
+          <p:cNvPr id="53" name="Text 51"/>
+          <p:cNvSpPr txBox="1"/>
+          <p:nvPr/>
+        </p:nvSpPr>
+        <p:spPr>
+          <a:xfrm>
+            <a:off x="6080760" y="5824728"/>
+            <a:ext cx="4282135" cy="164592"/>
+          </a:xfrm>
+          <a:prstGeom prst="rect">
+            <a:avLst/>
+          </a:prstGeom>
+          <a:noFill/>
+          <a:ln/>
+        </p:spPr>
+        <p:txBody>
+          <a:bodyPr wrap="square" lIns="0" tIns="0" rIns="0" bIns="0" rtlCol="0" anchor="ctr"/>
+          <a:lstStyle/>
+          <a:p>
+            <a:pPr marL="0" indent="0">
+              <a:buNone/>
+            </a:pPr>
+            <a:r>
+              <a:rPr lang="en-US" sz="1050" b="1" dirty="0">
+                <a:solidFill>
+                  <a:srgbClr val="14171A"/>
+                </a:solidFill>
+                <a:latin typeface="Atkinson Hyperlegible Next" pitchFamily="34" charset="0"/>
+                <a:ea typeface="Atkinson Hyperlegible Next" pitchFamily="34" charset="-122"/>
+                <a:cs typeface="Atkinson Hyperlegible Next" pitchFamily="34" charset="-120"/>
+              </a:rPr>
+              <a:t>Baza danych  </a:t>
+            </a:r>
+            <a:r>
+              <a:rPr lang="en-US" sz="1050" dirty="0">
+                <a:solidFill>
+                  <a:srgbClr val="454D57"/>
+                </a:solidFill>
+                <a:latin typeface="Atkinson Hyperlegible Next" pitchFamily="34" charset="0"/>
+                <a:ea typeface="Atkinson Hyperlegible Next" pitchFamily="34" charset="-122"/>
+                <a:cs typeface="Atkinson Hyperlegible Next" pitchFamily="34" charset="-120"/>
+              </a:rPr>
+              <a:t>PostgreSQL + pgvector, RDS 2 GB</a:t>
+            </a:r>
+            <a:endParaRPr lang="en-US" sz="1050" dirty="0"/>
+          </a:p>
+        </p:txBody>
+      </p:sp>
+      <p:sp>
+        <p:nvSpPr>
+          <p:cNvPr id="54" name="Text 52"/>
+          <p:cNvSpPr txBox="1"/>
+          <p:nvPr/>
+        </p:nvSpPr>
+        <p:spPr>
+          <a:xfrm>
+            <a:off x="10317175" y="5824728"/>
+            <a:ext cx="1051560" cy="164592"/>
+          </a:xfrm>
+          <a:prstGeom prst="rect">
+            <a:avLst/>
+          </a:prstGeom>
+          <a:noFill/>
+          <a:ln/>
+        </p:spPr>
+        <p:txBody>
+          <a:bodyPr wrap="square" lIns="0" tIns="0" rIns="0" bIns="0" rtlCol="0" anchor="ctr"/>
+          <a:lstStyle/>
+          <a:p>
+            <a:pPr marL="0" indent="0" algn="r">
+              <a:buNone/>
+            </a:pPr>
+            <a:r>
+              <a:rPr lang="en-US" sz="1050" b="1" dirty="0">
+                <a:solidFill>
+                  <a:srgbClr val="14171A"/>
+                </a:solidFill>
+                <a:latin typeface="Atkinson Hyperlegible Next" pitchFamily="34" charset="0"/>
+                <a:ea typeface="Atkinson Hyperlegible Next" pitchFamily="34" charset="-122"/>
+                <a:cs typeface="Atkinson Hyperlegible Next" pitchFamily="34" charset="-120"/>
+              </a:rPr>
+              <a:t>30 USD / mies.</a:t>
+            </a:r>
+            <a:endParaRPr lang="en-US" sz="1050" dirty="0"/>
+          </a:p>
+        </p:txBody>
+      </p:sp>
+      <p:sp>
+        <p:nvSpPr>
+          <p:cNvPr id="55" name="Text 53"/>
+          <p:cNvSpPr txBox="1"/>
+          <p:nvPr/>
+        </p:nvSpPr>
+        <p:spPr>
+          <a:xfrm>
+            <a:off x="6080760" y="5989320"/>
+            <a:ext cx="4282135" cy="164592"/>
+          </a:xfrm>
+          <a:prstGeom prst="rect">
+            <a:avLst/>
+          </a:prstGeom>
+          <a:noFill/>
+          <a:ln/>
+        </p:spPr>
+        <p:txBody>
+          <a:bodyPr wrap="square" lIns="0" tIns="0" rIns="0" bIns="0" rtlCol="0" anchor="ctr"/>
+          <a:lstStyle/>
+          <a:p>
+            <a:pPr marL="0" indent="0">
+              <a:buNone/>
+            </a:pPr>
+            <a:r>
+              <a:rPr lang="en-US" sz="1050" b="1" dirty="0">
+                <a:solidFill>
+                  <a:srgbClr val="14171A"/>
+                </a:solidFill>
+                <a:latin typeface="Atkinson Hyperlegible Next" pitchFamily="34" charset="0"/>
+                <a:ea typeface="Atkinson Hyperlegible Next" pitchFamily="34" charset="-122"/>
+                <a:cs typeface="Atkinson Hyperlegible Next" pitchFamily="34" charset="-120"/>
+              </a:rPr>
+              <a:t>Zapytanie do modelu  </a:t>
+            </a:r>
+            <a:r>
+              <a:rPr lang="en-US" sz="1050" dirty="0">
+                <a:solidFill>
+                  <a:srgbClr val="454D57"/>
+                </a:solidFill>
+                <a:latin typeface="Atkinson Hyperlegible Next" pitchFamily="34" charset="0"/>
+                <a:ea typeface="Atkinson Hyperlegible Next" pitchFamily="34" charset="-122"/>
+                <a:cs typeface="Atkinson Hyperlegible Next" pitchFamily="34" charset="-120"/>
+              </a:rPr>
+              <a:t>Bielik 11B na Hugging Face, ~5 tys. tokenów</a:t>
+            </a:r>
+            <a:endParaRPr lang="en-US" sz="1050" dirty="0"/>
+          </a:p>
+        </p:txBody>
+      </p:sp>
+      <p:sp>
+        <p:nvSpPr>
+          <p:cNvPr id="56" name="Text 54"/>
+          <p:cNvSpPr txBox="1"/>
+          <p:nvPr/>
+        </p:nvSpPr>
+        <p:spPr>
+          <a:xfrm>
+            <a:off x="10317175" y="5989320"/>
+            <a:ext cx="1051560" cy="164592"/>
+          </a:xfrm>
+          <a:prstGeom prst="rect">
+            <a:avLst/>
+          </a:prstGeom>
+          <a:noFill/>
+          <a:ln/>
+        </p:spPr>
+        <p:txBody>
+          <a:bodyPr wrap="square" lIns="0" tIns="0" rIns="0" bIns="0" rtlCol="0" anchor="ctr"/>
+          <a:lstStyle/>
+          <a:p>
+            <a:pPr marL="0" indent="0" algn="r">
+              <a:buNone/>
+            </a:pPr>
+            <a:r>
+              <a:rPr lang="en-US" sz="1050" b="1" dirty="0">
+                <a:solidFill>
+                  <a:srgbClr val="14171A"/>
+                </a:solidFill>
+                <a:latin typeface="Atkinson Hyperlegible Next" pitchFamily="34" charset="0"/>
+                <a:ea typeface="Atkinson Hyperlegible Next" pitchFamily="34" charset="-122"/>
+                <a:cs typeface="Atkinson Hyperlegible Next" pitchFamily="34" charset="-120"/>
+              </a:rPr>
+              <a:t>0,002 USD</a:t>
+            </a:r>
+            <a:endParaRPr lang="en-US" sz="1050" dirty="0"/>
+          </a:p>
+        </p:txBody>
+      </p:sp>
+      <p:sp>
+        <p:nvSpPr>
           <p:cNvPr id="57" name="Text 55"/>
           <p:cNvSpPr txBox="1"/>
           <p:nvPr/>
         </p:nvSpPr>
         <p:spPr>
           <a:xfrm>
-            <a:off x="6080760" y="5385816"/>
-            <a:ext cx="5287975" cy="274320"/>
+            <a:off x="6080760" y="6153912"/>
+            <a:ext cx="4282135" cy="164592"/>
           </a:xfrm>
           <a:prstGeom prst="rect">
             <a:avLst/>
@@ -11832,17 +11942,28 @@
               <a:buNone/>
             </a:pPr>
             <a:r>
-              <a:rPr lang="en-US" sz="1300" b="1" dirty="0">
-                <a:solidFill>
-                  <a:srgbClr val="1A4B8C"/>
-                </a:solidFill>
-                <a:latin typeface="Atkinson Hyperlegible Next" pitchFamily="34" charset="0"/>
-                <a:ea typeface="Atkinson Hyperlegible Next" pitchFamily="34" charset="-122"/>
-                <a:cs typeface="Atkinson Hyperlegible Next" pitchFamily="34" charset="-120"/>
-              </a:rPr>
-              <a:t>Około 55 USD miesięcznie plus 8 USD za 1000 dróg</a:t>
-            </a:r>
-            <a:endParaRPr lang="en-US" sz="1300" dirty="0"/>
+              <a:rPr lang="en-US" sz="1050" b="1" dirty="0">
+                <a:solidFill>
+                  <a:srgbClr val="14171A"/>
+                </a:solidFill>
+                <a:latin typeface="Atkinson Hyperlegible Next" pitchFamily="34" charset="0"/>
+                <a:ea typeface="Atkinson Hyperlegible Next" pitchFamily="34" charset="-122"/>
+                <a:cs typeface="Atkinson Hyperlegible Next" pitchFamily="34" charset="-120"/>
+              </a:rPr>
+              <a:t>Droga  </a:t>
+            </a:r>
+            <a:r>
+              <a:rPr lang="en-US" sz="1050" dirty="0">
+                <a:solidFill>
+                  <a:srgbClr val="454D57"/>
+                </a:solidFill>
+                <a:latin typeface="Atkinson Hyperlegible Next" pitchFamily="34" charset="0"/>
+                <a:ea typeface="Atkinson Hyperlegible Next" pitchFamily="34" charset="-122"/>
+                <a:cs typeface="Atkinson Hyperlegible Next" pitchFamily="34" charset="-120"/>
+              </a:rPr>
+              <a:t>4 zapytania, ~21 tys. tokenów</a:t>
+            </a:r>
+            <a:endParaRPr lang="en-US" sz="1050" dirty="0"/>
           </a:p>
         </p:txBody>
       </p:sp>
@@ -11854,8 +11975,8 @@
         </p:nvSpPr>
         <p:spPr>
           <a:xfrm>
-            <a:off x="6080760" y="5660136"/>
-            <a:ext cx="4282135" cy="164592"/>
+            <a:off x="10317175" y="6153912"/>
+            <a:ext cx="1051560" cy="164592"/>
           </a:xfrm>
           <a:prstGeom prst="rect">
             <a:avLst/>
@@ -11867,7 +11988,7 @@
           <a:bodyPr wrap="square" lIns="0" tIns="0" rIns="0" bIns="0" rtlCol="0" anchor="ctr"/>
           <a:lstStyle/>
           <a:p>
-            <a:pPr marL="0" indent="0">
+            <a:pPr marL="0" indent="0" algn="r">
               <a:buNone/>
             </a:pPr>
             <a:r>
@@ -11879,18 +12000,7 @@
                 <a:ea typeface="Atkinson Hyperlegible Next" pitchFamily="34" charset="-122"/>
                 <a:cs typeface="Atkinson Hyperlegible Next" pitchFamily="34" charset="-120"/>
               </a:rPr>
-              <a:t>Serwer  </a:t>
-            </a:r>
-            <a:r>
-              <a:rPr lang="en-US" sz="1050" dirty="0">
-                <a:solidFill>
-                  <a:srgbClr val="454D57"/>
-                </a:solidFill>
-                <a:latin typeface="Atkinson Hyperlegible Next" pitchFamily="34" charset="0"/>
-                <a:ea typeface="Atkinson Hyperlegible Next" pitchFamily="34" charset="-122"/>
-                <a:cs typeface="Atkinson Hyperlegible Next" pitchFamily="34" charset="-120"/>
-              </a:rPr>
-              <a:t>aplikacja + polski model wyszukiwania, 4 GB</a:t>
+              <a:t>0,008 USD</a:t>
             </a:r>
             <a:endParaRPr lang="en-US" sz="1050" dirty="0"/>
           </a:p>
@@ -11899,312 +12009,6 @@
       <p:sp>
         <p:nvSpPr>
           <p:cNvPr id="59" name="Text 57"/>
-          <p:cNvSpPr txBox="1"/>
-          <p:nvPr/>
-        </p:nvSpPr>
-        <p:spPr>
-          <a:xfrm>
-            <a:off x="10317175" y="5660136"/>
-            <a:ext cx="1051560" cy="164592"/>
-          </a:xfrm>
-          <a:prstGeom prst="rect">
-            <a:avLst/>
-          </a:prstGeom>
-          <a:noFill/>
-          <a:ln/>
-        </p:spPr>
-        <p:txBody>
-          <a:bodyPr wrap="square" lIns="0" tIns="0" rIns="0" bIns="0" rtlCol="0" anchor="ctr"/>
-          <a:lstStyle/>
-          <a:p>
-            <a:pPr marL="0" indent="0" algn="r">
-              <a:buNone/>
-            </a:pPr>
-            <a:r>
-              <a:rPr lang="en-US" sz="1050" b="1" dirty="0">
-                <a:solidFill>
-                  <a:srgbClr val="14171A"/>
-                </a:solidFill>
-                <a:latin typeface="Atkinson Hyperlegible Next" pitchFamily="34" charset="0"/>
-                <a:ea typeface="Atkinson Hyperlegible Next" pitchFamily="34" charset="-122"/>
-                <a:cs typeface="Atkinson Hyperlegible Next" pitchFamily="34" charset="-120"/>
-              </a:rPr>
-              <a:t>24 USD / mies.</a:t>
-            </a:r>
-            <a:endParaRPr lang="en-US" sz="1050" dirty="0"/>
-          </a:p>
-        </p:txBody>
-      </p:sp>
-      <p:sp>
-        <p:nvSpPr>
-          <p:cNvPr id="60" name="Text 58"/>
-          <p:cNvSpPr txBox="1"/>
-          <p:nvPr/>
-        </p:nvSpPr>
-        <p:spPr>
-          <a:xfrm>
-            <a:off x="6080760" y="5824728"/>
-            <a:ext cx="4282135" cy="164592"/>
-          </a:xfrm>
-          <a:prstGeom prst="rect">
-            <a:avLst/>
-          </a:prstGeom>
-          <a:noFill/>
-          <a:ln/>
-        </p:spPr>
-        <p:txBody>
-          <a:bodyPr wrap="square" lIns="0" tIns="0" rIns="0" bIns="0" rtlCol="0" anchor="ctr"/>
-          <a:lstStyle/>
-          <a:p>
-            <a:pPr marL="0" indent="0">
-              <a:buNone/>
-            </a:pPr>
-            <a:r>
-              <a:rPr lang="en-US" sz="1050" b="1" dirty="0">
-                <a:solidFill>
-                  <a:srgbClr val="14171A"/>
-                </a:solidFill>
-                <a:latin typeface="Atkinson Hyperlegible Next" pitchFamily="34" charset="0"/>
-                <a:ea typeface="Atkinson Hyperlegible Next" pitchFamily="34" charset="-122"/>
-                <a:cs typeface="Atkinson Hyperlegible Next" pitchFamily="34" charset="-120"/>
-              </a:rPr>
-              <a:t>Baza danych  </a:t>
-            </a:r>
-            <a:r>
-              <a:rPr lang="en-US" sz="1050" dirty="0">
-                <a:solidFill>
-                  <a:srgbClr val="454D57"/>
-                </a:solidFill>
-                <a:latin typeface="Atkinson Hyperlegible Next" pitchFamily="34" charset="0"/>
-                <a:ea typeface="Atkinson Hyperlegible Next" pitchFamily="34" charset="-122"/>
-                <a:cs typeface="Atkinson Hyperlegible Next" pitchFamily="34" charset="-120"/>
-              </a:rPr>
-              <a:t>PostgreSQL + pgvector, RDS 2 GB</a:t>
-            </a:r>
-            <a:endParaRPr lang="en-US" sz="1050" dirty="0"/>
-          </a:p>
-        </p:txBody>
-      </p:sp>
-      <p:sp>
-        <p:nvSpPr>
-          <p:cNvPr id="61" name="Text 59"/>
-          <p:cNvSpPr txBox="1"/>
-          <p:nvPr/>
-        </p:nvSpPr>
-        <p:spPr>
-          <a:xfrm>
-            <a:off x="10317175" y="5824728"/>
-            <a:ext cx="1051560" cy="164592"/>
-          </a:xfrm>
-          <a:prstGeom prst="rect">
-            <a:avLst/>
-          </a:prstGeom>
-          <a:noFill/>
-          <a:ln/>
-        </p:spPr>
-        <p:txBody>
-          <a:bodyPr wrap="square" lIns="0" tIns="0" rIns="0" bIns="0" rtlCol="0" anchor="ctr"/>
-          <a:lstStyle/>
-          <a:p>
-            <a:pPr marL="0" indent="0" algn="r">
-              <a:buNone/>
-            </a:pPr>
-            <a:r>
-              <a:rPr lang="en-US" sz="1050" b="1" dirty="0">
-                <a:solidFill>
-                  <a:srgbClr val="14171A"/>
-                </a:solidFill>
-                <a:latin typeface="Atkinson Hyperlegible Next" pitchFamily="34" charset="0"/>
-                <a:ea typeface="Atkinson Hyperlegible Next" pitchFamily="34" charset="-122"/>
-                <a:cs typeface="Atkinson Hyperlegible Next" pitchFamily="34" charset="-120"/>
-              </a:rPr>
-              <a:t>30 USD / mies.</a:t>
-            </a:r>
-            <a:endParaRPr lang="en-US" sz="1050" dirty="0"/>
-          </a:p>
-        </p:txBody>
-      </p:sp>
-      <p:sp>
-        <p:nvSpPr>
-          <p:cNvPr id="62" name="Text 60"/>
-          <p:cNvSpPr txBox="1"/>
-          <p:nvPr/>
-        </p:nvSpPr>
-        <p:spPr>
-          <a:xfrm>
-            <a:off x="6080760" y="5989320"/>
-            <a:ext cx="4282135" cy="164592"/>
-          </a:xfrm>
-          <a:prstGeom prst="rect">
-            <a:avLst/>
-          </a:prstGeom>
-          <a:noFill/>
-          <a:ln/>
-        </p:spPr>
-        <p:txBody>
-          <a:bodyPr wrap="square" lIns="0" tIns="0" rIns="0" bIns="0" rtlCol="0" anchor="ctr"/>
-          <a:lstStyle/>
-          <a:p>
-            <a:pPr marL="0" indent="0">
-              <a:buNone/>
-            </a:pPr>
-            <a:r>
-              <a:rPr lang="en-US" sz="1050" b="1" dirty="0">
-                <a:solidFill>
-                  <a:srgbClr val="14171A"/>
-                </a:solidFill>
-                <a:latin typeface="Atkinson Hyperlegible Next" pitchFamily="34" charset="0"/>
-                <a:ea typeface="Atkinson Hyperlegible Next" pitchFamily="34" charset="-122"/>
-                <a:cs typeface="Atkinson Hyperlegible Next" pitchFamily="34" charset="-120"/>
-              </a:rPr>
-              <a:t>Zapytanie do modelu  </a:t>
-            </a:r>
-            <a:r>
-              <a:rPr lang="en-US" sz="1050" dirty="0">
-                <a:solidFill>
-                  <a:srgbClr val="454D57"/>
-                </a:solidFill>
-                <a:latin typeface="Atkinson Hyperlegible Next" pitchFamily="34" charset="0"/>
-                <a:ea typeface="Atkinson Hyperlegible Next" pitchFamily="34" charset="-122"/>
-                <a:cs typeface="Atkinson Hyperlegible Next" pitchFamily="34" charset="-120"/>
-              </a:rPr>
-              <a:t>Bielik 11B na Hugging Face, ~5 tys. tokenów</a:t>
-            </a:r>
-            <a:endParaRPr lang="en-US" sz="1050" dirty="0"/>
-          </a:p>
-        </p:txBody>
-      </p:sp>
-      <p:sp>
-        <p:nvSpPr>
-          <p:cNvPr id="63" name="Text 61"/>
-          <p:cNvSpPr txBox="1"/>
-          <p:nvPr/>
-        </p:nvSpPr>
-        <p:spPr>
-          <a:xfrm>
-            <a:off x="10317175" y="5989320"/>
-            <a:ext cx="1051560" cy="164592"/>
-          </a:xfrm>
-          <a:prstGeom prst="rect">
-            <a:avLst/>
-          </a:prstGeom>
-          <a:noFill/>
-          <a:ln/>
-        </p:spPr>
-        <p:txBody>
-          <a:bodyPr wrap="square" lIns="0" tIns="0" rIns="0" bIns="0" rtlCol="0" anchor="ctr"/>
-          <a:lstStyle/>
-          <a:p>
-            <a:pPr marL="0" indent="0" algn="r">
-              <a:buNone/>
-            </a:pPr>
-            <a:r>
-              <a:rPr lang="en-US" sz="1050" b="1" dirty="0">
-                <a:solidFill>
-                  <a:srgbClr val="14171A"/>
-                </a:solidFill>
-                <a:latin typeface="Atkinson Hyperlegible Next" pitchFamily="34" charset="0"/>
-                <a:ea typeface="Atkinson Hyperlegible Next" pitchFamily="34" charset="-122"/>
-                <a:cs typeface="Atkinson Hyperlegible Next" pitchFamily="34" charset="-120"/>
-              </a:rPr>
-              <a:t>0,002 USD</a:t>
-            </a:r>
-            <a:endParaRPr lang="en-US" sz="1050" dirty="0"/>
-          </a:p>
-        </p:txBody>
-      </p:sp>
-      <p:sp>
-        <p:nvSpPr>
-          <p:cNvPr id="64" name="Text 62"/>
-          <p:cNvSpPr txBox="1"/>
-          <p:nvPr/>
-        </p:nvSpPr>
-        <p:spPr>
-          <a:xfrm>
-            <a:off x="6080760" y="6153912"/>
-            <a:ext cx="4282135" cy="164592"/>
-          </a:xfrm>
-          <a:prstGeom prst="rect">
-            <a:avLst/>
-          </a:prstGeom>
-          <a:noFill/>
-          <a:ln/>
-        </p:spPr>
-        <p:txBody>
-          <a:bodyPr wrap="square" lIns="0" tIns="0" rIns="0" bIns="0" rtlCol="0" anchor="ctr"/>
-          <a:lstStyle/>
-          <a:p>
-            <a:pPr marL="0" indent="0">
-              <a:buNone/>
-            </a:pPr>
-            <a:r>
-              <a:rPr lang="en-US" sz="1050" b="1" dirty="0">
-                <a:solidFill>
-                  <a:srgbClr val="14171A"/>
-                </a:solidFill>
-                <a:latin typeface="Atkinson Hyperlegible Next" pitchFamily="34" charset="0"/>
-                <a:ea typeface="Atkinson Hyperlegible Next" pitchFamily="34" charset="-122"/>
-                <a:cs typeface="Atkinson Hyperlegible Next" pitchFamily="34" charset="-120"/>
-              </a:rPr>
-              <a:t>Droga  </a:t>
-            </a:r>
-            <a:r>
-              <a:rPr lang="en-US" sz="1050" dirty="0">
-                <a:solidFill>
-                  <a:srgbClr val="454D57"/>
-                </a:solidFill>
-                <a:latin typeface="Atkinson Hyperlegible Next" pitchFamily="34" charset="0"/>
-                <a:ea typeface="Atkinson Hyperlegible Next" pitchFamily="34" charset="-122"/>
-                <a:cs typeface="Atkinson Hyperlegible Next" pitchFamily="34" charset="-120"/>
-              </a:rPr>
-              <a:t>4 zapytania, ~21 tys. tokenów</a:t>
-            </a:r>
-            <a:endParaRPr lang="en-US" sz="1050" dirty="0"/>
-          </a:p>
-        </p:txBody>
-      </p:sp>
-      <p:sp>
-        <p:nvSpPr>
-          <p:cNvPr id="65" name="Text 63"/>
-          <p:cNvSpPr txBox="1"/>
-          <p:nvPr/>
-        </p:nvSpPr>
-        <p:spPr>
-          <a:xfrm>
-            <a:off x="10317175" y="6153912"/>
-            <a:ext cx="1051560" cy="164592"/>
-          </a:xfrm>
-          <a:prstGeom prst="rect">
-            <a:avLst/>
-          </a:prstGeom>
-          <a:noFill/>
-          <a:ln/>
-        </p:spPr>
-        <p:txBody>
-          <a:bodyPr wrap="square" lIns="0" tIns="0" rIns="0" bIns="0" rtlCol="0" anchor="ctr"/>
-          <a:lstStyle/>
-          <a:p>
-            <a:pPr marL="0" indent="0" algn="r">
-              <a:buNone/>
-            </a:pPr>
-            <a:r>
-              <a:rPr lang="en-US" sz="1050" b="1" dirty="0">
-                <a:solidFill>
-                  <a:srgbClr val="14171A"/>
-                </a:solidFill>
-                <a:latin typeface="Atkinson Hyperlegible Next" pitchFamily="34" charset="0"/>
-                <a:ea typeface="Atkinson Hyperlegible Next" pitchFamily="34" charset="-122"/>
-                <a:cs typeface="Atkinson Hyperlegible Next" pitchFamily="34" charset="-120"/>
-              </a:rPr>
-              <a:t>0,008 USD</a:t>
-            </a:r>
-            <a:endParaRPr lang="en-US" sz="1050" dirty="0"/>
-          </a:p>
-        </p:txBody>
-      </p:sp>
-      <p:sp>
-        <p:nvSpPr>
-          <p:cNvPr id="66" name="Text 64"/>
           <p:cNvSpPr txBox="1"/>
           <p:nvPr/>
         </p:nvSpPr>

--- a/docs/presentation/presentation.pptx
+++ b/docs/presentation/presentation.pptx
@@ -158,7 +158,7 @@
     </p:spTree>
     <p:extLst>
       <p:ext uri="{BB962C8B-B14F-4D97-AF65-F5344CB8AC3E}">
-        <p14:creationId xmlns:p14="http://schemas.microsoft.com/office/powerpoint/2010/main" val="486834089"/>
+        <p14:creationId xmlns:p14="http://schemas.microsoft.com/office/powerpoint/2010/main" val="2029574140"/>
       </p:ext>
     </p:extLst>
   </p:cSld>
@@ -304,7 +304,7 @@
           <a:p>
             <a:r>
               <a:rPr lang="en-US" dirty="0"/>
-              <a:t>HubMI.pl to nazwa, którą ROPS w Krakowie nadał cyfrowemu sercu planowanego Małopolskiego Hubu Innowacji Społecznych. Partner sam opisał zadanie tak: nie kolejny katalog, tylko narzędzie, które łączy problem z rozwiązaniem, wiedzą i ludźmi, a gdy rozwiązania jeszcze nie ma, pomaga znaleźć drogę do jego stworzenia. Zbudowaliśmy działający prototyp: stronę dla osób zgłaszających potrzeby i panel dla ROPS. Kolejne slajdy pokazują moduł po module, jak prototyp realizuje wyzwanie. Na telefonie widać prawdziwą drogę z prototypu.</a:t>
+              <a:t>HubMI.pl to nazwa, którą ROPS w Krakowie nadał cyfrowemu sercu planowanego Małopolskiego Hubu Innowacji Społecznych. Partner sam opisał zadanie tak: nie kolejny katalog, tylko narzędzie, które łączy problem z rozwiązaniem, wiedzą i ludźmi, a gdy rozwiązania jeszcze nie ma, pomaga znaleźć drogę do jego stworzenia. Zbudowaliśmy aplikację HubMI.pl: stronę dla osób zgłaszających potrzeby i panel dla ROPS. Kolejne slajdy pokazują moduł po module, jak HubMI realizuje wyzwanie. Na telefonie widać prawdziwą drogę z aplikacji.</a:t>
             </a:r>
           </a:p>
         </p:txBody>
@@ -391,7 +391,7 @@
           <a:p>
             <a:r>
               <a:rPr lang="en-US" dirty="0"/>
-              <a:t>Moduł pierwszy, obowiązkowy: matchmaking społeczny. To prawdziwa droga z prototypu dla przypadku testowego P01: samotni seniorzy w wiejskiej gminie Laskowa. Składa się z czterech części. Rozwiązania: sprawdzone innowacje, każda z uzasadnieniem opartym na cytatach ze źródła i z informacją, czego wymaga. Wiedza: poradniki i modele usług ROPS. Ludzie: autorzy, opiekun kategorii w ROPS i osoby, które zgłosiły gotowość do pomocy. Ścieżka wdrożenia: programy, z których można to sfinansować, z kwotami, terminami i kolejnymi krokami. To nie lista wyników wyszukiwania, tylko odpowiedź na pytanie, co zrobić dalej.</a:t>
+              <a:t>Moduł pierwszy, obowiązkowy: matchmaking społeczny. To prawdziwa droga z aplikacji dla przypadku testowego P01: samotni seniorzy w wiejskiej gminie Laskowa. Składa się z czterech części. Rozwiązania: sprawdzone innowacje, każda z uzasadnieniem opartym na cytatach ze źródła i z informacją, czego wymaga. Wiedza: instrukcje wdrożenia i modele usług ROPS. Ludzie: eksperci, czyli autorzy innowacji i realizatorzy w pobliżu, opiekun kategorii w ROPS i wolontariusze, którzy zgłosili gotowość do pomocy. Ścieżka wdrożenia: programy, z których można to sfinansować, z kwotami, terminami i kolejnymi krokami. To nie lista wyników wyszukiwania, tylko odpowiedź na pytanie, co zrobić dalej.</a:t>
             </a:r>
           </a:p>
         </p:txBody>
@@ -478,7 +478,7 @@
           <a:p>
             <a:r>
               <a:rPr lang="en-US" dirty="0"/>
-              <a:t>Drugi element modułu pierwszego: podobne przypadki. Pod rozwiązaniami widać potrzeby z banku potrzeb i fiszki pomysłów podobne do tej, ale tylko te, na których publikację zgodził się autor i które zaakceptował ROPS. Ktoś zapyta: czy to nie zwykła wyszukiwarka albo czatbot do katalogu? Nie. Wyszukiwarka daje linki, czatbot z RAG pisze zgrabny akapit, a oba narzędzia odpowiadają na każde pytanie. HubMI układa drogę według reguł, na podstawie opracowanych danych: kwoty i terminy pochodzą z trzydziestu ścieżek, do których model nie ma dostępu; model tylko wybiera i wyjaśnia, a program sprawdza każde odwołanie i każdy cytat. I potrafi powiedzieć „nie”: przez tegoroczną suszę w studniach w gminie Dobra zabrakło wody, nic w katalogach nie pasuje, a narzędzie mówi to wprost i proponuje wpis do banku potrzeb; na jego podstawie powstaje fiszka dla inkubatora. Trafność sprawdzamy na przypadkach testowych: we wszystkich siedmiu, dla których istnieje sprawdzone rozwiązanie, właściwa innowacja jest wśród trzech proponowanych.</a:t>
+              <a:t>Drugi element modułu pierwszego: podobne przypadki. Pod rozwiązaniami widać potrzeby z banku potrzeb i fiszki pomysłów podobne do tej, ale tylko te, na których publikację zgodził się autor i które zaakceptował ROPS. HubMI to więcej niż wyszukiwarka i czatbot: prowadzi od odpowiedzi do działania. Wyszukiwarka daje listę linków, a gdy nic nie pasuje, zwraca luźno powiązane wyniki. Czatbot z RAG odpowiada na podstawie źródeł, ale odpowiada zawsze, nawet gdy nic nie pasuje. HubMI daje dopasowane rozwiązania, wiedzę, kontakty i kroki wdrożenia. Model dobiera rozwiązania i uzasadnia dopasowanie, a system dodatkowo sprawdza każde odwołanie i każdy cytat. Kwoty i terminy pobieramy bezpośrednio z trzydziestu opracowanych ścieżek finansowania, a nie z tekstu modelu. Wyniki są przejrzyste także wtedy, gdy rozwiązania brak: przez tegoroczną suszę w studniach w gminie Dobra zabrakło wody, nic w katalogach nie pasuje, więc narzędzie informuje o braku dopasowania i nie rekomenduje rozwiązań. Proponuje za to wpis do banku potrzeb, a na jego podstawie powstaje fiszka dla inkubatora. Trafność sprawdzamy na przypadkach testowych: we wszystkich siedmiu przypadkach z dostępnym rozwiązaniem właściwa innowacja jest wśród trzech rekomendacji, a w dziewięciu z dziesięciu narzędzie poprawnie rozpoznaje, czy można zaproponować pełne, częściowe lub żadne dopasowanie.</a:t>
             </a:r>
           </a:p>
         </p:txBody>
@@ -913,7 +913,7 @@
           <a:p>
             <a:r>
               <a:rPr lang="en-US" dirty="0"/>
-              <a:t>Zadanie wymaga koncepcji, a nie tylko oprogramowania. To, co widzieliście, jest już zaimplementowane: droga dla osób zgłaszających potrzeby, a obok fiszka pomysłu, tester innowacji, rozmowy z ROPS i mentorami oraz tablica partnerstw. Z siedmiu modułów wyzwania pięć jest zaimplementowanych w całości, a dwa – częściowo. Zasobnik wiedzy celowo nie jest kolejnym katalogiem, bo partner wyraźnie tego nie chce: wiedza jest częścią drogi, z linkami do wszystkich materiałów, dokumentów i filmów. Każdy wpis trafia do panelu ROPS: decyzję podejmuje pracownik, a system odnotowuje ją z jego nazwiskiem; autor pomysłu widzi odpowiedź na stronie swojej fiszki. Plan rozwoju dotyczy ludzi wokół narzędzia: trzech ról, które mogą pełnić trzy osoby albo jedna – opiekun kategorii, czyli osoba kontaktowa w każdej drodze, redaktor katalogu i koordynator banku potrzeb. Usługa domknie trzy cykle: potrzeba staje się wdrożeniem; potrzeba bez rozwiązania staje się tematem naboru do inkubatora, a potem nową innowacją; sprawdzona innowacja trafia tam, gdzie jest potrzebna. Utrzymanie jest tanie: jeden serwer 4 GB dla aplikacji i polskiego modelu wyszukiwania to 24 dolary miesięcznie na AWS Lightsail; w wersji docelowej PostgreSQL z pgvector na RDS, około 30 dolarów miesięcznie (prototyp zapisuje wpisy w jednym pliku). Jedno zapytanie do Bielika przez Hugging Face to około pięciu tysięcy tokenów po 40 centów za milion, czyli jedna piąta centa; cała droga to cztery zapytania, łącznie poniżej jednego centa.</a:t>
+              <a:t>Zadanie wymaga koncepcji, a nie tylko oprogramowania. To, co widzieliście, jest już zaimplementowane: droga dla osób zgłaszających potrzeby, a obok fiszka pomysłu, tester innowacji, rozmowy z ROPS i mentorami oraz tablica partnerstw. Z siedmiu modułów wyzwania pięć jest zaimplementowanych w całości, a dwa – częściowo. Zasobnik wiedzy celowo nie jest kolejnym katalogiem, bo partner wyraźnie tego nie chce: wiedza jest częścią drogi, z linkami do wszystkich materiałów, dokumentów i filmów. Każdy wpis trafia do panelu ROPS: decyzję podejmuje pracownik, a system odnotowuje ją z jego nazwiskiem; autor pomysłu widzi odpowiedź na stronie swojej fiszki. Plan rozwoju dotyczy ludzi wokół narzędzia: trzech ról, które mogą pełnić trzy osoby albo jedna – opiekun kategorii, czyli osoba kontaktowa w każdej drodze, redaktor katalogu i koordynator banku potrzeb. Usługa domknie trzy cykle: potrzeba staje się wdrożeniem; potrzeba bez rozwiązania staje się tematem naboru do inkubatora, a potem nową innowacją; sprawdzona innowacja trafia tam, gdzie jest potrzebna. Utrzymanie jest tanie: jeden serwer 4 GB dla aplikacji i polskiego modelu wyszukiwania to 24 dolary miesięcznie na AWS Lightsail; w wersji docelowej PostgreSQL z pgvector na RDS, około 30 dolarów miesięcznie (obecna wersja zapisuje wpisy w jednym pliku). Jedno zapytanie do Bielika przez Hugging Face to około pięciu tysięcy tokenów po 40 centów za milion, czyli jedna piąta centa; cała droga to cztery zapytania, łącznie poniżej jednego centa.</a:t>
             </a:r>
           </a:p>
         </p:txBody>
@@ -1899,7 +1899,7 @@
                 <a:ea typeface="Atkinson Hyperlegible Next" pitchFamily="34" charset="-122"/>
                 <a:cs typeface="Atkinson Hyperlegible Next" pitchFamily="34" charset="-120"/>
               </a:rPr>
-              <a:t>Wymaganie: system „proponuje gotowe rozwiązania/innowacje społeczne”.</a:t>
+              <a:t>Wymaganie: system „proponuje gotowe rozwiązania”.</a:t>
             </a:r>
             <a:r>
               <a:rPr lang="en-US" sz="1600" dirty="0">
@@ -1910,7 +1910,7 @@
                 <a:ea typeface="Atkinson Hyperlegible Next" pitchFamily="34" charset="-122"/>
                 <a:cs typeface="Atkinson Hyperlegible Next" pitchFamily="34" charset="-120"/>
               </a:rPr>
-              <a:t>  Prawdziwa droga z prototypu</a:t>
+              <a:t>  Proponujemy rozwiązania sprawdzone w praktyce</a:t>
             </a:r>
             <a:endParaRPr lang="en-US" sz="3200" dirty="0"/>
           </a:p>
@@ -2166,7 +2166,7 @@
                 <a:ea typeface="Atkinson Hyperlegible Next" pitchFamily="34" charset="-122"/>
                 <a:cs typeface="Atkinson Hyperlegible Next" pitchFamily="34" charset="-120"/>
               </a:rPr>
-              <a:t>Każdy cytat porównujemy z opisem w katalogu. Tekst wygenerowany przez AI jest oznaczony.</a:t>
+              <a:t>Opis potrzeby dopasowujemy do rozwiązań z katalogu. Odpowiedzi AI oparte są na materiałach źródłowych.</a:t>
             </a:r>
             <a:endParaRPr lang="en-US" sz="1200" dirty="0"/>
           </a:p>
@@ -2477,7 +2477,7 @@
                 <a:ea typeface="Atkinson Hyperlegible Next" pitchFamily="34" charset="-122"/>
                 <a:cs typeface="Atkinson Hyperlegible Next" pitchFamily="34" charset="-120"/>
               </a:rPr>
-              <a:t>poradniki i modele usług</a:t>
+              <a:t>instrukcje wdrożenia i modele usług</a:t>
             </a:r>
             <a:endParaRPr lang="en-US" sz="1400" dirty="0"/>
           </a:p>
@@ -2674,7 +2674,7 @@
                 <a:ea typeface="Atkinson Hyperlegible Next" pitchFamily="34" charset="-122"/>
                 <a:cs typeface="Atkinson Hyperlegible Next" pitchFamily="34" charset="-120"/>
               </a:rPr>
-              <a:t>autorzy, opiekun, chętni do pomocy</a:t>
+              <a:t>eksperci, opiekunowie, wolontariusze</a:t>
             </a:r>
             <a:endParaRPr lang="en-US" sz="1400" dirty="0"/>
           </a:p>
@@ -3170,7 +3170,7 @@
                 <a:ea typeface="Atkinson Hyperlegible Next" pitchFamily="34" charset="-122"/>
                 <a:cs typeface="Atkinson Hyperlegible Next" pitchFamily="34" charset="-120"/>
               </a:rPr>
-              <a:t>Podobne przypadki i jasne „nie”</a:t>
+              <a:t>Podobne przypadki – przejrzyste wyniki</a:t>
             </a:r>
             <a:endParaRPr lang="en-US" sz="3200" dirty="0"/>
           </a:p>
@@ -3201,7 +3201,7 @@
                 <a:ea typeface="Atkinson Hyperlegible Next" pitchFamily="34" charset="-122"/>
                 <a:cs typeface="Atkinson Hyperlegible Next" pitchFamily="34" charset="-120"/>
               </a:rPr>
-              <a:t>  Ani wyszukiwarka, ani czatbot do dokumentów</a:t>
+              <a:t>  Więcej niż wyszukiwarka i czatbot – od odpowiedzi do działania</a:t>
             </a:r>
             <a:endParaRPr lang="en-US" sz="3200" dirty="0"/>
           </a:p>
@@ -3223,7 +3223,7 @@
         </p:nvGraphicFramePr>
         <p:xfrm>
           <a:off x="640080" y="1691640"/>
-          <a:ext cx="5989320" cy="914400"/>
+          <a:ext cx="6400800" cy="914400"/>
         </p:xfrm>
         <a:graphic>
           <a:graphicData uri="http://schemas.openxmlformats.org/drawingml/2006/table">
@@ -3237,7 +3237,7 @@
                     </a:ext>
                   </a:extLst>
                 </a:gridCol>
-                <a:gridCol w="1188720">
+                <a:gridCol w="1280160">
                   <a:extLst>
                     <a:ext uri="{9D8B030D-6E8A-4147-A177-3AD203B41FA5}">
                       <a16:colId xmlns:a16="http://schemas.microsoft.com/office/drawing/2014/main" val="20001"/>
@@ -3251,7 +3251,7 @@
                     </a:ext>
                   </a:extLst>
                 </a:gridCol>
-                <a:gridCol w="2194560">
+                <a:gridCol w="2514600">
                   <a:extLst>
                     <a:ext uri="{9D8B030D-6E8A-4147-A177-3AD203B41FA5}">
                       <a16:colId xmlns:a16="http://schemas.microsoft.com/office/drawing/2014/main" val="20003"/>
@@ -3675,7 +3675,7 @@
                           <a:ea typeface="Atkinson Hyperlegible Next" pitchFamily="34" charset="-122"/>
                           <a:cs typeface="Atkinson Hyperlegible Next" pitchFamily="34" charset="-120"/>
                         </a:rPr>
-                        <a:t>Zgrabny akapit</a:t>
+                        <a:t>Odpowiedź na podstawie źródeł</a:t>
                       </a:r>
                       <a:endParaRPr lang="en-US" sz="1100" dirty="0">
                         <a:latin typeface="Atkinson Hyperlegible Next" charset="0"/>
@@ -3740,7 +3740,7 @@
                           <a:ea typeface="Atkinson Hyperlegible Next" pitchFamily="34" charset="-122"/>
                           <a:cs typeface="Atkinson Hyperlegible Next" pitchFamily="34" charset="-120"/>
                         </a:rPr>
-                        <a:t>Drogę: rozwiązania, wiedzę, ludzi, finansowanie i kolejne kroki</a:t>
+                        <a:t>Dopasowane rozwiązania, wiedzę, kontakty i kroki wdrożenia</a:t>
                       </a:r>
                       <a:endParaRPr lang="en-US" sz="1100" dirty="0">
                         <a:latin typeface="Atkinson Hyperlegible Next" charset="0"/>
@@ -3880,7 +3880,7 @@
                           <a:ea typeface="Atkinson Hyperlegible Next" pitchFamily="34" charset="-122"/>
                           <a:cs typeface="Atkinson Hyperlegible Next" pitchFamily="34" charset="-120"/>
                         </a:rPr>
-                        <a:t>Mimo to daje listę</a:t>
+                        <a:t>Zwraca luźno powiązane wyniki</a:t>
                       </a:r>
                       <a:endParaRPr lang="en-US" sz="1100" dirty="0">
                         <a:latin typeface="Atkinson Hyperlegible Next" charset="0"/>
@@ -4010,7 +4010,7 @@
                           <a:ea typeface="Atkinson Hyperlegible Next" pitchFamily="34" charset="-122"/>
                           <a:cs typeface="Atkinson Hyperlegible Next" pitchFamily="34" charset="-120"/>
                         </a:rPr>
-                        <a:t>Mówi to wprost: przy wyniku poniżej 45/100 nie proponuje drogi</a:t>
+                        <a:t>Informuje o braku dopasowania – przy wyniku poniżej 45/100 nie rekomenduje rozwiązań</a:t>
                       </a:r>
                       <a:endParaRPr lang="en-US" sz="1100" dirty="0">
                         <a:latin typeface="Atkinson Hyperlegible Next" charset="0"/>
@@ -4150,7 +4150,7 @@
                           <a:ea typeface="Atkinson Hyperlegible Next" pitchFamily="34" charset="-122"/>
                           <a:cs typeface="Atkinson Hyperlegible Next" pitchFamily="34" charset="-120"/>
                         </a:rPr>
-                        <a:t>Ze stron internetowych</a:t>
+                        <a:t>Do znalezienia w źródłach</a:t>
                       </a:r>
                       <a:endParaRPr lang="en-US" sz="1100" dirty="0">
                         <a:latin typeface="Atkinson Hyperlegible Next" charset="0"/>
@@ -4215,7 +4215,7 @@
                           <a:ea typeface="Atkinson Hyperlegible Next" pitchFamily="34" charset="-122"/>
                           <a:cs typeface="Atkinson Hyperlegible Next" pitchFamily="34" charset="-120"/>
                         </a:rPr>
-                        <a:t>Pisze je model</a:t>
+                        <a:t>Opracowywane przez model</a:t>
                       </a:r>
                       <a:endParaRPr lang="en-US" sz="1100" dirty="0">
                         <a:latin typeface="Atkinson Hyperlegible Next" charset="0"/>
@@ -4280,7 +4280,7 @@
                           <a:ea typeface="Atkinson Hyperlegible Next" pitchFamily="34" charset="-122"/>
                           <a:cs typeface="Atkinson Hyperlegible Next" pitchFamily="34" charset="-120"/>
                         </a:rPr>
-                        <a:t>Z 30 udokumentowanych ścieżek; model nie ma do nich dostępu</a:t>
+                        <a:t>Pobierane bezpośrednio z opracowanych ścieżek finansowania</a:t>
                       </a:r>
                       <a:endParaRPr lang="en-US" sz="1100" dirty="0">
                         <a:latin typeface="Atkinson Hyperlegible Next" charset="0"/>
@@ -4420,7 +4420,7 @@
                           <a:ea typeface="Atkinson Hyperlegible Next" pitchFamily="34" charset="-122"/>
                           <a:cs typeface="Atkinson Hyperlegible Next" pitchFamily="34" charset="-120"/>
                         </a:rPr>
-                        <a:t>Szereguje strony</a:t>
+                        <a:t>Porządkuje wyniki</a:t>
                       </a:r>
                       <a:endParaRPr lang="en-US" sz="1100" dirty="0">
                         <a:latin typeface="Atkinson Hyperlegible Next" charset="0"/>
@@ -4550,7 +4550,7 @@
                           <a:ea typeface="Atkinson Hyperlegible Next" pitchFamily="34" charset="-122"/>
                           <a:cs typeface="Atkinson Hyperlegible Next" pitchFamily="34" charset="-120"/>
                         </a:rPr>
-                        <a:t>Wybiera i wyjaśnia; program sprawdza każde odwołanie i cytat</a:t>
+                        <a:t>Dobiera rozwiązania i uzasadnia dopasowanie. Odwołania i cytaty są dodatkowo sprawdzane przez system</a:t>
                       </a:r>
                       <a:endParaRPr lang="en-US" sz="1100" dirty="0">
                         <a:latin typeface="Atkinson Hyperlegible Next" charset="0"/>
@@ -4619,12 +4619,12 @@
         </p:nvSpPr>
         <p:spPr>
           <a:xfrm>
-            <a:off x="640080" y="4572000"/>
-            <a:ext cx="5989320" cy="1783080"/>
+            <a:off x="640080" y="4800600"/>
+            <a:ext cx="6400800" cy="1554480"/>
           </a:xfrm>
           <a:prstGeom prst="roundRect">
             <a:avLst>
-              <a:gd name="adj" fmla="val 5128"/>
+              <a:gd name="adj" fmla="val 5882"/>
             </a:avLst>
           </a:prstGeom>
           <a:solidFill>
@@ -4646,8 +4646,8 @@
         </p:nvSpPr>
         <p:spPr>
           <a:xfrm>
-            <a:off x="868680" y="4709160"/>
-            <a:ext cx="5532120" cy="237744"/>
+            <a:off x="868680" y="4937760"/>
+            <a:ext cx="5943600" cy="237744"/>
           </a:xfrm>
           <a:prstGeom prst="rect">
             <a:avLst/>
@@ -4685,8 +4685,8 @@
         </p:nvSpPr>
         <p:spPr>
           <a:xfrm>
-            <a:off x="868680" y="5029200"/>
-            <a:ext cx="2628900" cy="1234440"/>
+            <a:off x="868680" y="5257800"/>
+            <a:ext cx="2834640" cy="1005840"/>
           </a:xfrm>
           <a:prstGeom prst="rect">
             <a:avLst/>
@@ -4730,7 +4730,7 @@
                 <a:ea typeface="Atkinson Hyperlegible Next" pitchFamily="34" charset="-122"/>
                 <a:cs typeface="Atkinson Hyperlegible Next" pitchFamily="34" charset="-120"/>
               </a:rPr>
-              <a:t>przypadków, dla których istnieje sprawdzone rozwiązanie: właściwa innowacja jest wśród trzech proponowanych</a:t>
+              <a:t>Właściwe rozwiązanie wśród trzech rekomendacji – w przypadkach z dostępnym rozwiązaniem</a:t>
             </a:r>
             <a:endParaRPr lang="en-US" sz="3000" dirty="0"/>
           </a:p>
@@ -4744,8 +4744,8 @@
         </p:nvSpPr>
         <p:spPr>
           <a:xfrm>
-            <a:off x="3771900" y="5029200"/>
-            <a:ext cx="2628900" cy="1234440"/>
+            <a:off x="3977640" y="5257800"/>
+            <a:ext cx="2834640" cy="1005840"/>
           </a:xfrm>
           <a:prstGeom prst="rect">
             <a:avLst/>
@@ -4789,7 +4789,7 @@
                 <a:ea typeface="Atkinson Hyperlegible Next" pitchFamily="34" charset="-122"/>
                 <a:cs typeface="Atkinson Hyperlegible Next" pitchFamily="34" charset="-120"/>
               </a:rPr>
-              <a:t>przypadków: narzędzie trafnie rozpoznaje, czy jest pełna droga, częściowa, czy żadna</a:t>
+              <a:t>Poprawne rozpoznanie, czy można zaproponować pełne, częściowe lub żadne dopasowanie</a:t>
             </a:r>
             <a:endParaRPr lang="en-US" sz="3000" dirty="0"/>
           </a:p>
@@ -4803,7 +4803,7 @@
         </p:nvSpPr>
         <p:spPr>
           <a:xfrm>
-            <a:off x="7599776" y="1691640"/>
+            <a:off x="7805516" y="1691640"/>
             <a:ext cx="3392943" cy="1615889"/>
           </a:xfrm>
           <a:prstGeom prst="rect">
@@ -4843,7 +4843,7 @@
         </p:blipFill>
         <p:spPr>
           <a:xfrm>
-            <a:off x="7599776" y="1691640"/>
+            <a:off x="7805516" y="1691640"/>
             <a:ext cx="3392943" cy="1615889"/>
           </a:xfrm>
           <a:prstGeom prst="rect">
@@ -4859,7 +4859,7 @@
         </p:nvSpPr>
         <p:spPr>
           <a:xfrm>
-            <a:off x="7599776" y="1691640"/>
+            <a:off x="7805516" y="1691640"/>
             <a:ext cx="3392943" cy="1615889"/>
           </a:xfrm>
           <a:prstGeom prst="rect">
@@ -4886,7 +4886,7 @@
         </p:nvSpPr>
         <p:spPr>
           <a:xfrm>
-            <a:off x="7599776" y="3380681"/>
+            <a:off x="7805516" y="3380681"/>
             <a:ext cx="3392943" cy="457200"/>
           </a:xfrm>
           <a:prstGeom prst="rect">
@@ -4925,7 +4925,7 @@
         </p:nvSpPr>
         <p:spPr>
           <a:xfrm>
-            <a:off x="7599776" y="4112201"/>
+            <a:off x="7805516" y="4112201"/>
             <a:ext cx="3392943" cy="1712527"/>
           </a:xfrm>
           <a:prstGeom prst="rect">
@@ -4965,7 +4965,7 @@
         </p:blipFill>
         <p:spPr>
           <a:xfrm>
-            <a:off x="7599776" y="4112201"/>
+            <a:off x="7805516" y="4112201"/>
             <a:ext cx="3392943" cy="1712527"/>
           </a:xfrm>
           <a:prstGeom prst="rect">
@@ -4981,7 +4981,7 @@
         </p:nvSpPr>
         <p:spPr>
           <a:xfrm>
-            <a:off x="7599776" y="4112201"/>
+            <a:off x="7805516" y="4112201"/>
             <a:ext cx="3392943" cy="1712527"/>
           </a:xfrm>
           <a:prstGeom prst="rect">
@@ -5008,7 +5008,7 @@
         </p:nvSpPr>
         <p:spPr>
           <a:xfrm>
-            <a:off x="7599776" y="5897880"/>
+            <a:off x="7805516" y="5897880"/>
             <a:ext cx="3392943" cy="457200"/>
           </a:xfrm>
           <a:prstGeom prst="rect">

--- a/docs/presentation/presentation.pptx
+++ b/docs/presentation/presentation.pptx
@@ -158,7 +158,7 @@
     </p:spTree>
     <p:extLst>
       <p:ext uri="{BB962C8B-B14F-4D97-AF65-F5344CB8AC3E}">
-        <p14:creationId xmlns:p14="http://schemas.microsoft.com/office/powerpoint/2010/main" val="2029574140"/>
+        <p14:creationId xmlns:p14="http://schemas.microsoft.com/office/powerpoint/2010/main" val="4011823064"/>
       </p:ext>
     </p:extLst>
   </p:cSld>
@@ -12381,7 +12381,7 @@
                 <a:ea typeface="Atkinson Hyperlegible Next" pitchFamily="34" charset="-122"/>
                 <a:cs typeface="Atkinson Hyperlegible Next" pitchFamily="34" charset="-120"/>
               </a:rPr>
-              <a:t>Większy tekst, trzy tryby, telefon</a:t>
+              <a:t>Większy tekst, trzy tryby, układ dostosowany do telefonu</a:t>
             </a:r>
             <a:endParaRPr lang="en-US" sz="1200" dirty="0"/>
           </a:p>

--- a/docs/presentation/presentation.pptx
+++ b/docs/presentation/presentation.pptx
@@ -158,7 +158,7 @@
     </p:spTree>
     <p:extLst>
       <p:ext uri="{BB962C8B-B14F-4D97-AF65-F5344CB8AC3E}">
-        <p14:creationId xmlns:p14="http://schemas.microsoft.com/office/powerpoint/2010/main" val="4011823064"/>
+        <p14:creationId xmlns:p14="http://schemas.microsoft.com/office/powerpoint/2010/main" val="3617297940"/>
       </p:ext>
     </p:extLst>
   </p:cSld>
@@ -913,7 +913,7 @@
           <a:p>
             <a:r>
               <a:rPr lang="en-US" dirty="0"/>
-              <a:t>Zadanie wymaga koncepcji, a nie tylko oprogramowania. To, co widzieliście, jest już zaimplementowane: droga dla osób zgłaszających potrzeby, a obok fiszka pomysłu, tester innowacji, rozmowy z ROPS i mentorami oraz tablica partnerstw. Z siedmiu modułów wyzwania pięć jest zaimplementowanych w całości, a dwa – częściowo. Zasobnik wiedzy celowo nie jest kolejnym katalogiem, bo partner wyraźnie tego nie chce: wiedza jest częścią drogi, z linkami do wszystkich materiałów, dokumentów i filmów. Każdy wpis trafia do panelu ROPS: decyzję podejmuje pracownik, a system odnotowuje ją z jego nazwiskiem; autor pomysłu widzi odpowiedź na stronie swojej fiszki. Plan rozwoju dotyczy ludzi wokół narzędzia: trzech ról, które mogą pełnić trzy osoby albo jedna – opiekun kategorii, czyli osoba kontaktowa w każdej drodze, redaktor katalogu i koordynator banku potrzeb. Usługa domknie trzy cykle: potrzeba staje się wdrożeniem; potrzeba bez rozwiązania staje się tematem naboru do inkubatora, a potem nową innowacją; sprawdzona innowacja trafia tam, gdzie jest potrzebna. Utrzymanie jest tanie: jeden serwer 4 GB dla aplikacji i polskiego modelu wyszukiwania to 24 dolary miesięcznie na AWS Lightsail; w wersji docelowej PostgreSQL z pgvector na RDS, około 30 dolarów miesięcznie (obecna wersja zapisuje wpisy w jednym pliku). Jedno zapytanie do Bielika przez Hugging Face to około pięciu tysięcy tokenów po 40 centów za milion, czyli jedna piąta centa; cała droga to cztery zapytania, łącznie poniżej jednego centa.</a:t>
+              <a:t>Zadanie wymaga koncepcji, a nie tylko oprogramowania. To, co widzieliście, jest już zaimplementowane: droga dla osób zgłaszających potrzeby, a obok fiszka pomysłu z kanwą innowacji, tester innowacji, rozmowy z ROPS i mentorami oraz tablica partnerstw. Z siedmiu modułów wyzwania sześć jest zaimplementowanych w całości, a jeden – częściowo. Zasobnik wiedzy celowo nie jest kolejnym katalogiem, bo partner wyraźnie tego nie chce: wiedza jest częścią drogi, z linkami do wszystkich materiałów, dokumentów i filmów. Każdy wpis trafia do panelu ROPS: decyzję podejmuje pracownik, a system odnotowuje ją z jego nazwiskiem; autor pomysłu widzi odpowiedź na stronie swojej fiszki. Plan rozwoju dotyczy ludzi wokół narzędzia: trzech ról, które mogą pełnić trzy osoby albo jedna – opiekun kategorii, czyli osoba kontaktowa w każdej drodze, redaktor katalogu i koordynator banku potrzeb. Usługa domknie trzy cykle: potrzeba staje się wdrożeniem; potrzeba bez rozwiązania staje się tematem naboru do inkubatora, a potem nową innowacją; sprawdzona innowacja trafia tam, gdzie jest potrzebna. Utrzymanie jest tanie: jeden serwer 4 GB dla aplikacji i polskiego modelu wyszukiwania to 24 dolary miesięcznie na AWS Lightsail; w wersji docelowej PostgreSQL z pgvector na RDS, około 30 dolarów miesięcznie (obecna wersja zapisuje wpisy w jednym pliku). Jedno zapytanie do Bielika przez Hugging Face to około pięciu tysięcy tokenów po 40 centów za milion, czyli jedna piąta centa; cała droga to cztery zapytania, łącznie poniżej jednego centa.</a:t>
             </a:r>
           </a:p>
         </p:txBody>
@@ -9939,20 +9939,47 @@
             </a:avLst>
           </a:prstGeom>
           <a:solidFill>
-            <a:srgbClr val="FFFFFF"/>
+            <a:srgbClr val="EEF4FB"/>
+          </a:solidFill>
+          <a:ln w="12700">
+            <a:solidFill>
+              <a:srgbClr val="EEF4FB"/>
+            </a:solidFill>
+            <a:prstDash val="solid"/>
+          </a:ln>
+        </p:spPr>
+      </p:sp>
+      <p:sp>
+        <p:nvSpPr>
+          <p:cNvPr id="13" name="Shape 11"/>
+          <p:cNvSpPr/>
+          <p:nvPr/>
+        </p:nvSpPr>
+        <p:spPr>
+          <a:xfrm>
+            <a:off x="3880452" y="1993392"/>
+            <a:ext cx="1281858" cy="219456"/>
+          </a:xfrm>
+          <a:prstGeom prst="roundRect">
+            <a:avLst>
+              <a:gd name="adj" fmla="val 50000"/>
+            </a:avLst>
+          </a:prstGeom>
+          <a:solidFill>
+            <a:srgbClr val="1A4B8C"/>
           </a:solidFill>
           <a:ln w="12700">
             <a:solidFill>
               <a:srgbClr val="1A4B8C"/>
             </a:solidFill>
-            <a:prstDash val="dash"/>
+            <a:prstDash val="solid"/>
           </a:ln>
         </p:spPr>
       </p:sp>
       <p:sp>
         <p:nvSpPr>
-          <p:cNvPr id="13" name="Shape 11"/>
-          <p:cNvSpPr/>
+          <p:cNvPr id="14" name="Text 12"/>
+          <p:cNvSpPr txBox="1"/>
           <p:nvPr/>
         </p:nvSpPr>
         <p:spPr>
@@ -9960,33 +9987,6 @@
             <a:off x="3880452" y="1993392"/>
             <a:ext cx="1281858" cy="219456"/>
           </a:xfrm>
-          <a:prstGeom prst="roundRect">
-            <a:avLst>
-              <a:gd name="adj" fmla="val 50000"/>
-            </a:avLst>
-          </a:prstGeom>
-          <a:solidFill>
-            <a:srgbClr val="DCE6F2"/>
-          </a:solidFill>
-          <a:ln w="12700">
-            <a:solidFill>
-              <a:srgbClr val="DCE6F2"/>
-            </a:solidFill>
-            <a:prstDash val="solid"/>
-          </a:ln>
-        </p:spPr>
-      </p:sp>
-      <p:sp>
-        <p:nvSpPr>
-          <p:cNvPr id="14" name="Text 12"/>
-          <p:cNvSpPr txBox="1"/>
-          <p:nvPr/>
-        </p:nvSpPr>
-        <p:spPr>
-          <a:xfrm>
-            <a:off x="3880452" y="1993392"/>
-            <a:ext cx="1281858" cy="219456"/>
-          </a:xfrm>
           <a:prstGeom prst="rect">
             <a:avLst/>
           </a:prstGeom>
@@ -10003,13 +10003,13 @@
             <a:r>
               <a:rPr lang="en-US" sz="900" b="1" dirty="0">
                 <a:solidFill>
-                  <a:srgbClr val="1A4B8C"/>
-                </a:solidFill>
-                <a:latin typeface="Atkinson Hyperlegible Next" pitchFamily="34" charset="0"/>
-                <a:ea typeface="Atkinson Hyperlegible Next" pitchFamily="34" charset="-122"/>
-                <a:cs typeface="Atkinson Hyperlegible Next" pitchFamily="34" charset="-120"/>
-              </a:rPr>
-              <a:t>częściowo</a:t>
+                  <a:srgbClr val="FFFFFF"/>
+                </a:solidFill>
+                <a:latin typeface="Atkinson Hyperlegible Next" pitchFamily="34" charset="0"/>
+                <a:ea typeface="Atkinson Hyperlegible Next" pitchFamily="34" charset="-122"/>
+                <a:cs typeface="Atkinson Hyperlegible Next" pitchFamily="34" charset="-120"/>
+              </a:rPr>
+              <a:t>zaimplementowane</a:t>
             </a:r>
             <a:endParaRPr lang="en-US" sz="900" dirty="0"/>
           </a:p>
@@ -10079,7 +10079,7 @@
                 <a:ea typeface="Atkinson Hyperlegible Next" pitchFamily="34" charset="-122"/>
                 <a:cs typeface="Atkinson Hyperlegible Next" pitchFamily="34" charset="-120"/>
               </a:rPr>
-              <a:t>fiszka pomysłu, podobne rozwiązania</a:t>
+              <a:t>fiszka, kanwa innowacji, podobne rozwiązania</a:t>
             </a:r>
             <a:endParaRPr lang="en-US" sz="1150" dirty="0"/>
           </a:p>

--- a/docs/presentation/presentation.pptx
+++ b/docs/presentation/presentation.pptx
@@ -158,7 +158,7 @@
     </p:spTree>
     <p:extLst>
       <p:ext uri="{BB962C8B-B14F-4D97-AF65-F5344CB8AC3E}">
-        <p14:creationId xmlns:p14="http://schemas.microsoft.com/office/powerpoint/2010/main" val="3617297940"/>
+        <p14:creationId xmlns:p14="http://schemas.microsoft.com/office/powerpoint/2010/main" val="3916397562"/>
       </p:ext>
     </p:extLst>
   </p:cSld>
@@ -304,7 +304,7 @@
           <a:p>
             <a:r>
               <a:rPr lang="en-US" dirty="0"/>
-              <a:t>HubMI.pl to nazwa, którą ROPS w Krakowie nadał cyfrowemu sercu planowanego Małopolskiego Hubu Innowacji Społecznych. Partner sam opisał zadanie tak: nie kolejny katalog, tylko narzędzie, które łączy problem z rozwiązaniem, wiedzą i ludźmi, a gdy rozwiązania jeszcze nie ma, pomaga znaleźć drogę do jego stworzenia. Zbudowaliśmy aplikację HubMI.pl: stronę dla osób zgłaszających potrzeby i panel dla ROPS. Kolejne slajdy pokazują moduł po module, jak HubMI realizuje wyzwanie. Na telefonie widać prawdziwą drogę z aplikacji.</a:t>
+              <a:t>HubMI.pl to nazwa, którą ROPS w Krakowie nadał cyfrowemu sercu planowanego Małopolskiego Hubu Innowacji Społecznych. Partner sam opisał zadanie tak: nie kolejny katalog, tylko narzędzie, które łączy problem z rozwiązaniem, wiedzą i ludźmi, a gdy rozwiązania jeszcze nie ma, pomaga znaleźć drogę do jego stworzenia. Zbudowaliśmy aplikację HubMI.pl: stronę dla osób zgłaszających potrzeby i panel dla ROPS. Kolejne slajdy pokazują moduł po module, jak HubMI realizuje wyzwanie. Na telefonie widać prawdziwą mapę działania z aplikacji.</a:t>
             </a:r>
           </a:p>
         </p:txBody>
@@ -391,7 +391,7 @@
           <a:p>
             <a:r>
               <a:rPr lang="en-US" dirty="0"/>
-              <a:t>Moduł pierwszy, obowiązkowy: matchmaking społeczny. To prawdziwa droga z aplikacji dla przypadku testowego P01: samotni seniorzy w wiejskiej gminie Laskowa. Składa się z czterech części. Rozwiązania: sprawdzone innowacje, każda z uzasadnieniem opartym na cytatach ze źródła i z informacją, czego wymaga. Wiedza: instrukcje wdrożenia i modele usług ROPS. Ludzie: eksperci, czyli autorzy innowacji i realizatorzy w pobliżu, opiekun kategorii w ROPS i wolontariusze, którzy zgłosili gotowość do pomocy. Ścieżka wdrożenia: programy, z których można to sfinansować, z kwotami, terminami i kolejnymi krokami. To nie lista wyników wyszukiwania, tylko odpowiedź na pytanie, co zrobić dalej.</a:t>
+              <a:t>Moduł pierwszy, obowiązkowy: matchmaking społeczny. To prawdziwa mapa działania z aplikacji dla przypadku testowego P01: samotni seniorzy w wiejskiej gminie Laskowa. Składa się z czterech części. Rozwiązania: sprawdzone innowacje, każda z uzasadnieniem opartym na cytatach ze źródła i z informacją, czego wymaga. Wiedza: instrukcje wdrożenia i modele usług ROPS. Ludzie: eksperci, czyli autorzy innowacji i realizatorzy w pobliżu, opiekun kategorii w ROPS i wolontariusze, którzy zgłosili gotowość do pomocy. Ścieżka wdrożenia: programy, z których można to sfinansować, z kwotami, terminami i kolejnymi krokami. To nie lista wyników wyszukiwania, tylko odpowiedź na pytanie, co zrobić dalej.</a:t>
             </a:r>
           </a:p>
         </p:txBody>
@@ -565,7 +565,7 @@
           <a:p>
             <a:r>
               <a:rPr lang="en-US" dirty="0"/>
-              <a:t>Moduł czwarty, tester innowacji. Przy każdej innowacji jest przycisk „Oceń albo zgłoś się do testów”. Można wystawić ocenę od jednego do pięciu, zaznaczyć, skąd zna się rozwiązanie, napisać opinię, zaproponować ulepszenie i zgłosić się do testów, jako użytkownik albo jako organizacja, która wdroży rozwiązanie na próbę w swojej gminie. Opinię można wysłać anonimowo. Każdy tekst przechodzi przez filtr bezpieczeństwa, a do autorów innowacji trafia za pośrednictwem ROPS, gdy zatwierdzi go pracownik. Na stronie innowacji widać średnią ocen, liczbę zgłoszeń do testów i propozycji ulepszeń, ale nigdy treści ani danych kontaktowych.</a:t>
+              <a:t>Moduł czwarty, tester innowacji. Przy każdej innowacji jest przycisk „Oceń albo zgłoś się do testów”. Można wystawić ocenę w skali od jednego do pięciu, zaznaczyć, czy korzysta się z rozwiązania, wdraża je czy zna je tylko z opisu, napisać opinię, zaproponować ulepszenie i zgłosić się do testów, jako użytkownik lub organizacja, która pilotażowo wdroży rozwiązanie w swojej gminie. Opinię można wysłać anonimowo. Każdy tekst przechodzi przez filtr bezpieczeństwa, a po zatwierdzeniu przez pracownika ROPS trafia do autorów innowacji. Na stronie innowacji widać średnią ocen, liczbę zgłoszeń do testów i propozycji ulepszeń, ale nigdy treści ani danych kontaktowych.</a:t>
             </a:r>
           </a:p>
         </p:txBody>
@@ -739,7 +739,7 @@
           <a:p>
             <a:r>
               <a:rPr lang="en-US" dirty="0"/>
-              <a:t>Moduł szósty, panel administratora. Pracownik ROPS loguje się, podając imię i nazwisko oraz kod dostępu. Pulpit pokazuje, co czeka na decyzję i co pojawiło się od ostatniej wizyty: w ten sposób administrator dowiaduje się o nowym pomyśle. Pracownik nadaje fiszce status i pisze odpowiedź, którą autor od razu widzi na stronie swojej fiszki, z datą; to właśnie ścieżka odpowiedzi, o którą pyta partner. Wiedzę można zmienić w kilka sekund: oznaczenie „Sprawdzone przez ROPS”, poprawiony opis, nowy film albo nowy materiał są widoczne od razu, także w drogach utworzonych wcześniej. Każda decyzja jest odnotowana z nazwiskiem osoby, która ją podjęła, a dane można wyeksportować do CSV.</a:t>
+              <a:t>Moduł szósty, panel administratora. Pracownik ROPS loguje się, podając imię i nazwisko oraz kod dostępu. Pulpit pokazuje, co czeka na decyzję i co pojawiło się od ostatniej wizyty: w ten sposób administrator dowiaduje się o nowym pomyśle. Pracownik nadaje fiszce status i pisze odpowiedź, którą autor od razu widzi na stronie swojej fiszki, z datą; to właśnie ścieżka odpowiedzi, o którą pyta partner. Wiedzę można zmienić w kilka sekund: oznaczenie „Sprawdzone przez ROPS”, poprawiony opis, nowy film albo nowy materiał są widoczne od razu, także we wcześniej utworzonych mapach działania. Każda decyzja jest odnotowana z nazwiskiem osoby, która ją podjęła, a dane można wyeksportować do CSV.</a:t>
             </a:r>
           </a:p>
         </p:txBody>
@@ -826,7 +826,7 @@
           <a:p>
             <a:r>
               <a:rPr lang="en-US" dirty="0"/>
-              <a:t>Wystąpienie partnera zapowiadające zadanie nosiło tytuł „Od empatii do technologii”. Dlatego każdy tekst najpierw przechodzi przez filtr bezpieczeństwa: na potrzebę społeczności narzędzie odpowiada drogą; osoba w kryzysie dostaje numery telefonów zaufania i adres lokalnego ośrodka pomocy społecznej, a nie listę innowacji; prośbę, która ma kogoś wykluczyć, odrzucamy uprzejmie, z możliwością odwołania. Potem polski model PolDense wyszukuje kandydatów, a Bielik, otwarty polski model, wybiera i wyjaśnia. Nie kierowaliśmy się nazwą: przed hackathonem porównaliśmy Bielika z czterema innymi modelami językowymi na polskich przykładach, a PolDense z pięcioma innymi modelami wyszukiwania na wszystkich 381 opisach innowacji; wyniki są w repozytorium. Model nie może wymyślić rozwiązania ani kwoty: każde odwołanie i cytat jest sprawdzane, a kwoty pochodzą z opracowanej tabeli. Wszystko, co dotyczy konkretnej osoby, czeka na decyzję pracownika ROPS w panelu, a narzędzie niczego nikomu nie wysyła.</a:t>
+              <a:t>Wystąpienie partnera zapowiadające zadanie nosiło tytuł „Od empatii do technologii”. Dlatego każdy tekst najpierw przechodzi przez filtr bezpieczeństwa: na potrzebę społeczności narzędzie odpowiada mapą działania; osoba w kryzysie dostaje numery telefonów zaufania i adres lokalnego ośrodka pomocy społecznej, a nie listę innowacji; prośbę, która ma kogoś wykluczyć, odrzucamy uprzejmie, z możliwością odwołania. Potem polski model PolDense wyszukuje kandydatów, a Bielik, otwarty polski model, wybiera i wyjaśnia. Nie kierowaliśmy się nazwą: przed hackathonem porównaliśmy Bielika z czterema innymi modelami językowymi na polskich przykładach, a PolDense z pięcioma innymi modelami wyszukiwania na wszystkich 381 opisach innowacji; wyniki są w repozytorium. Model nie może wymyślić rozwiązania ani kwoty: każde odwołanie i cytat jest sprawdzane, a kwoty pochodzą z opracowanej tabeli. Wszystko, co dotyczy konkretnej osoby, czeka na decyzję pracownika ROPS w panelu, a narzędzie niczego nikomu nie wysyła.</a:t>
             </a:r>
           </a:p>
         </p:txBody>
@@ -913,7 +913,7 @@
           <a:p>
             <a:r>
               <a:rPr lang="en-US" dirty="0"/>
-              <a:t>Zadanie wymaga koncepcji, a nie tylko oprogramowania. To, co widzieliście, jest już zaimplementowane: droga dla osób zgłaszających potrzeby, a obok fiszka pomysłu z kanwą innowacji, tester innowacji, rozmowy z ROPS i mentorami oraz tablica partnerstw. Z siedmiu modułów wyzwania sześć jest zaimplementowanych w całości, a jeden – częściowo. Zasobnik wiedzy celowo nie jest kolejnym katalogiem, bo partner wyraźnie tego nie chce: wiedza jest częścią drogi, z linkami do wszystkich materiałów, dokumentów i filmów. Każdy wpis trafia do panelu ROPS: decyzję podejmuje pracownik, a system odnotowuje ją z jego nazwiskiem; autor pomysłu widzi odpowiedź na stronie swojej fiszki. Plan rozwoju dotyczy ludzi wokół narzędzia: trzech ról, które mogą pełnić trzy osoby albo jedna – opiekun kategorii, czyli osoba kontaktowa w każdej drodze, redaktor katalogu i koordynator banku potrzeb. Usługa domknie trzy cykle: potrzeba staje się wdrożeniem; potrzeba bez rozwiązania staje się tematem naboru do inkubatora, a potem nową innowacją; sprawdzona innowacja trafia tam, gdzie jest potrzebna. Utrzymanie jest tanie: jeden serwer 4 GB dla aplikacji i polskiego modelu wyszukiwania to 24 dolary miesięcznie na AWS Lightsail; w wersji docelowej PostgreSQL z pgvector na RDS, około 30 dolarów miesięcznie (obecna wersja zapisuje wpisy w jednym pliku). Jedno zapytanie do Bielika przez Hugging Face to około pięciu tysięcy tokenów po 40 centów za milion, czyli jedna piąta centa; cała droga to cztery zapytania, łącznie poniżej jednego centa.</a:t>
+              <a:t>Zadanie wymaga koncepcji, a nie tylko oprogramowania. To, co widzieliście, jest już zaimplementowane: mapa działania dla osób zgłaszających potrzeby, a obok fiszka pomysłu z kanwą innowacji, tester innowacji, rozmowy z ROPS i mentorami oraz tablica partnerstw. Z siedmiu modułów wyzwania sześć jest zaimplementowanych w całości, a jeden – częściowo. Zasobnik wiedzy celowo nie jest kolejnym katalogiem, bo partner wyraźnie tego nie chce: wiedza jest częścią mapy działania, z linkami do wszystkich materiałów, dokumentów i filmów. Każdy wpis trafia do panelu ROPS: decyzję podejmuje pracownik, a system odnotowuje ją z jego nazwiskiem; autor pomysłu widzi odpowiedź na stronie swojej fiszki. Plan rozwoju dotyczy ludzi wokół narzędzia: proponujemy trzy role, które mogą pełnić trzy osoby albo jedna – opiekun kategorii, czyli osoba kontaktowa wskazana w każdej mapie działania, redaktor katalogu i koordynator banku potrzeb. Chcemy wspierać trzy procesy: potrzeba staje się wdrożeniem; potrzeba bez rozwiązania staje się tematem naboru do inkubatora, a potem nową innowacją; sprawdzona innowacja trafia tam, gdzie jest potrzebna. Utrzymanie jest tanie: jeden serwer 4 GB dla aplikacji i polskiego modelu wyszukiwania to 24 dolary miesięcznie na AWS Lightsail; w wersji docelowej PostgreSQL z pgvector na RDS, około 30 dolarów miesięcznie (obecna wersja zapisuje wpisy w jednym pliku). Jedno zapytanie do Bielika przez Hugging Face to około pięciu tysięcy tokenów po 40 centów za milion, czyli jedna piąta centa; cała mapa działania to cztery zapytania, łącznie poniżej jednego centa.</a:t>
             </a:r>
           </a:p>
         </p:txBody>
@@ -5269,7 +5269,7 @@
                 <a:ea typeface="Atkinson Hyperlegible Next" pitchFamily="34" charset="-122"/>
                 <a:cs typeface="Atkinson Hyperlegible Next" pitchFamily="34" charset="-120"/>
               </a:rPr>
-              <a:t>Opinie trafiają do autorów innowacji za pośrednictwem ROPS, gdy zatwierdzi je pracownik</a:t>
+              <a:t>Po zatwierdzeniu przez pracownika ROPS opinie trafiają do autorów innowacji</a:t>
             </a:r>
             <a:endParaRPr lang="en-US" sz="3200" dirty="0"/>
           </a:p>
@@ -5431,7 +5431,7 @@
                 <a:ea typeface="Atkinson Hyperlegible Next" pitchFamily="34" charset="-122"/>
                 <a:cs typeface="Atkinson Hyperlegible Next" pitchFamily="34" charset="-120"/>
               </a:rPr>
-              <a:t>Jako użytkownik albo jako organizacja, która wdroży rozwiązanie na próbę w swojej gminie</a:t>
+              <a:t>Jako użytkownik lub organizacja, która pilotażowo wdroży rozwiązanie w swojej gminie</a:t>
             </a:r>
             <a:endParaRPr lang="en-US" sz="1350" dirty="0"/>
           </a:p>
@@ -5554,7 +5554,7 @@
                 <a:ea typeface="Atkinson Hyperlegible Next" pitchFamily="34" charset="-122"/>
                 <a:cs typeface="Atkinson Hyperlegible Next" pitchFamily="34" charset="-120"/>
               </a:rPr>
-              <a:t>Od 1 do 5, z informacją, skąd oceniający zna rozwiązanie: korzysta z niego, wdraża je albo zna z opisu</a:t>
+              <a:t>W skali od 1 do 5, z informacją, czy oceniający korzysta z rozwiązania, wdraża je czy zna je tylko z opisu</a:t>
             </a:r>
             <a:endParaRPr lang="en-US" sz="1350" dirty="0"/>
           </a:p>
@@ -7306,7 +7306,7 @@
         <p:spPr>
           <a:xfrm>
             <a:off x="640080" y="1691640"/>
-            <a:ext cx="4800600" cy="256032"/>
+            <a:ext cx="5394960" cy="256032"/>
           </a:xfrm>
           <a:prstGeom prst="rect">
             <a:avLst/>
@@ -7409,7 +7409,7 @@
         <p:spPr>
           <a:xfrm>
             <a:off x="1097280" y="2057400"/>
-            <a:ext cx="4343400" cy="801014"/>
+            <a:ext cx="4937760" cy="801014"/>
           </a:xfrm>
           <a:prstGeom prst="rect">
             <a:avLst/>
@@ -7453,7 +7453,7 @@
                 <a:ea typeface="Atkinson Hyperlegible Next" pitchFamily="34" charset="-122"/>
                 <a:cs typeface="Atkinson Hyperlegible Next" pitchFamily="34" charset="-120"/>
               </a:rPr>
-              <a:t>Poprawiony opis, nowy film, nowy materiał dla grupy docelowej: zmiany widać od razu, także w drogach utworzonych wcześniej</a:t>
+              <a:t>Poprawiony opis, nowy film, nowy materiał dla grupy docelowej: zmiany widać od razu, także we wcześniej utworzonych mapach działania</a:t>
             </a:r>
             <a:endParaRPr lang="en-US" sz="1350" dirty="0"/>
           </a:p>
@@ -7532,7 +7532,7 @@
         <p:spPr>
           <a:xfrm>
             <a:off x="1097280" y="2913278"/>
-            <a:ext cx="4343400" cy="801014"/>
+            <a:ext cx="4937760" cy="801014"/>
           </a:xfrm>
           <a:prstGeom prst="rect">
             <a:avLst/>
@@ -7576,7 +7576,7 @@
                 <a:ea typeface="Atkinson Hyperlegible Next" pitchFamily="34" charset="-122"/>
                 <a:cs typeface="Atkinson Hyperlegible Next" pitchFamily="34" charset="-120"/>
               </a:rPr>
-              <a:t>Oznaczenie „Sprawdzone przez ROPS” na stronie innowacji i w drogach; każda decyzja odnotowana z nazwiskiem pracownika</a:t>
+              <a:t>Oznaczenie „Sprawdzone przez ROPS” na stronie innowacji i w mapach działania; każda decyzja odnotowana z nazwiskiem pracownika</a:t>
             </a:r>
             <a:endParaRPr lang="en-US" sz="1350" dirty="0"/>
           </a:p>
@@ -7655,7 +7655,7 @@
         <p:spPr>
           <a:xfrm>
             <a:off x="1097280" y="3769157"/>
-            <a:ext cx="4343400" cy="801014"/>
+            <a:ext cx="4937760" cy="801014"/>
           </a:xfrm>
           <a:prstGeom prst="rect">
             <a:avLst/>
@@ -7778,7 +7778,7 @@
         <p:spPr>
           <a:xfrm>
             <a:off x="1097280" y="4625035"/>
-            <a:ext cx="4343400" cy="801014"/>
+            <a:ext cx="4937760" cy="801014"/>
           </a:xfrm>
           <a:prstGeom prst="rect">
             <a:avLst/>
@@ -7901,7 +7901,7 @@
         <p:spPr>
           <a:xfrm>
             <a:off x="1097280" y="5480914"/>
-            <a:ext cx="4343400" cy="801014"/>
+            <a:ext cx="4937760" cy="801014"/>
           </a:xfrm>
           <a:prstGeom prst="rect">
             <a:avLst/>
@@ -7959,7 +7959,7 @@
         </p:nvSpPr>
         <p:spPr>
           <a:xfrm>
-            <a:off x="6573062" y="1691640"/>
+            <a:off x="6870242" y="1691640"/>
             <a:ext cx="4257652" cy="2201911"/>
           </a:xfrm>
           <a:prstGeom prst="rect">
@@ -7999,7 +7999,7 @@
         </p:blipFill>
         <p:spPr>
           <a:xfrm>
-            <a:off x="6573062" y="1691640"/>
+            <a:off x="6870242" y="1691640"/>
             <a:ext cx="4257652" cy="2201911"/>
           </a:xfrm>
           <a:prstGeom prst="rect">
@@ -8015,7 +8015,7 @@
         </p:nvSpPr>
         <p:spPr>
           <a:xfrm>
-            <a:off x="6573062" y="1691640"/>
+            <a:off x="6870242" y="1691640"/>
             <a:ext cx="4257652" cy="2201911"/>
           </a:xfrm>
           <a:prstGeom prst="rect">
@@ -8042,7 +8042,7 @@
         </p:nvSpPr>
         <p:spPr>
           <a:xfrm>
-            <a:off x="6573062" y="3966703"/>
+            <a:off x="6870242" y="3966703"/>
             <a:ext cx="4257652" cy="274320"/>
           </a:xfrm>
           <a:prstGeom prst="rect">
@@ -8081,7 +8081,7 @@
         </p:nvSpPr>
         <p:spPr>
           <a:xfrm>
-            <a:off x="6573062" y="4515343"/>
+            <a:off x="6870242" y="4515343"/>
             <a:ext cx="4257652" cy="1492265"/>
           </a:xfrm>
           <a:prstGeom prst="rect">
@@ -8121,7 +8121,7 @@
         </p:blipFill>
         <p:spPr>
           <a:xfrm>
-            <a:off x="6573062" y="4515343"/>
+            <a:off x="6870242" y="4515343"/>
             <a:ext cx="4257652" cy="1492265"/>
           </a:xfrm>
           <a:prstGeom prst="rect">
@@ -8137,7 +8137,7 @@
         </p:nvSpPr>
         <p:spPr>
           <a:xfrm>
-            <a:off x="6573062" y="4515343"/>
+            <a:off x="6870242" y="4515343"/>
             <a:ext cx="4257652" cy="1492265"/>
           </a:xfrm>
           <a:prstGeom prst="rect">
@@ -8164,7 +8164,7 @@
         </p:nvSpPr>
         <p:spPr>
           <a:xfrm>
-            <a:off x="6573062" y="6080760"/>
+            <a:off x="6870242" y="6080760"/>
             <a:ext cx="4257652" cy="274320"/>
           </a:xfrm>
           <a:prstGeom prst="rect">
@@ -8511,7 +8511,7 @@
                 <a:ea typeface="Atkinson Hyperlegible Next" pitchFamily="34" charset="-122"/>
                 <a:cs typeface="Atkinson Hyperlegible Next" pitchFamily="34" charset="-120"/>
               </a:rPr>
-              <a:t>PolDense-400M: 40 najbardziej podobnych z 381</a:t>
+              <a:t>PolDense-400M: 40 najbardziej podobnych rozwiązań z 381 innowacji</a:t>
             </a:r>
             <a:endParaRPr lang="en-US" sz="1300" dirty="0"/>
           </a:p>
@@ -8710,7 +8710,7 @@
                 <a:ea typeface="Atkinson Hyperlegible Next" pitchFamily="34" charset="-122"/>
                 <a:cs typeface="Atkinson Hyperlegible Next" pitchFamily="34" charset="-120"/>
               </a:rPr>
-              <a:t>4  Układanie drogi</a:t>
+              <a:t>4  Tworzenie mapy działania</a:t>
             </a:r>
             <a:endParaRPr lang="en-US" sz="1300" dirty="0"/>
           </a:p>
@@ -9018,7 +9018,7 @@
                 <a:ea typeface="Atkinson Hyperlegible Next" pitchFamily="34" charset="-122"/>
                 <a:cs typeface="Atkinson Hyperlegible Next" pitchFamily="34" charset="-120"/>
               </a:rPr>
-              <a:t>Co widzi osoba w kryzysie zamiast drogi</a:t>
+              <a:t>Informacja o pomocy dla osoby w kryzysie</a:t>
             </a:r>
             <a:endParaRPr lang="en-US" sz="1100" dirty="0"/>
           </a:p>
@@ -9121,7 +9121,7 @@
                 <a:ea typeface="Atkinson Hyperlegible Next" pitchFamily="34" charset="-122"/>
                 <a:cs typeface="Atkinson Hyperlegible Next" pitchFamily="34" charset="-120"/>
               </a:rPr>
-              <a:t>Osoba w kryzysie dostaje pomoc człowieka</a:t>
+              <a:t>Osoba w kryzysie otrzymuje wskazówki, gdzie szukać pomocy</a:t>
             </a:r>
             <a:endParaRPr lang="en-US" sz="1500" dirty="0"/>
           </a:p>
@@ -9141,7 +9141,7 @@
                 <a:ea typeface="Atkinson Hyperlegible Next" pitchFamily="34" charset="-122"/>
                 <a:cs typeface="Atkinson Hyperlegible Next" pitchFamily="34" charset="-120"/>
               </a:rPr>
-              <a:t>Przy oznakach kryzysu narzędzie wskazuje sprawdzone telefony zaufania i lokalny ośrodek pomocy społecznej, nigdy innowacje, i niczego nie zapisuje. Prośbę, która ma kogoś wykluczyć lub poniżyć, odrzucamy z uzasadnieniem i możliwością odwołania.</a:t>
+              <a:t>Przy oznakach kryzysu narzędzie wskazuje sprawdzone telefony zaufania i lokalny ośrodek pomocy społecznej. Nie proponuje wtedy innowacji ani nie zapisuje zgłoszenia. Prośby mające na celu wykluczenie lub poniżenie innych są odrzucane z podaniem uzasadnienia i możliwością odwołania się od tej decyzji.</a:t>
             </a:r>
             <a:endParaRPr lang="en-US" sz="1500" dirty="0"/>
           </a:p>
@@ -9244,7 +9244,7 @@
                 <a:ea typeface="Atkinson Hyperlegible Next" pitchFamily="34" charset="-122"/>
                 <a:cs typeface="Atkinson Hyperlegible Next" pitchFamily="34" charset="-120"/>
               </a:rPr>
-              <a:t>Nic zmyślonego</a:t>
+              <a:t>Odpowiedzi oparte na źródłach</a:t>
             </a:r>
             <a:endParaRPr lang="en-US" sz="1500" dirty="0"/>
           </a:p>
@@ -9510,17 +9510,6 @@
               <a:buNone/>
             </a:pPr>
             <a:r>
-              <a:rPr lang="en-US" sz="1600" b="1" dirty="0">
-                <a:solidFill>
-                  <a:srgbClr val="1A4B8C"/>
-                </a:solidFill>
-                <a:latin typeface="Atkinson Hyperlegible Next" pitchFamily="34" charset="0"/>
-                <a:ea typeface="Atkinson Hyperlegible Next" pitchFamily="34" charset="-122"/>
-                <a:cs typeface="Atkinson Hyperlegible Next" pitchFamily="34" charset="-120"/>
-              </a:rPr>
-              <a:t>Zbudowane</a:t>
-            </a:r>
-            <a:r>
               <a:rPr lang="en-US" sz="1600" dirty="0">
                 <a:solidFill>
                   <a:srgbClr val="454D57"/>
@@ -9529,29 +9518,7 @@
                 <a:ea typeface="Atkinson Hyperlegible Next" pitchFamily="34" charset="-122"/>
                 <a:cs typeface="Atkinson Hyperlegible Next" pitchFamily="34" charset="-120"/>
               </a:rPr>
-              <a:t>: droga, moduły wyzwania i panel ROPS.  </a:t>
-            </a:r>
-            <a:r>
-              <a:rPr lang="en-US" sz="1600" b="1" dirty="0">
-                <a:solidFill>
-                  <a:srgbClr val="1A4B8C"/>
-                </a:solidFill>
-                <a:latin typeface="Atkinson Hyperlegible Next" pitchFamily="34" charset="0"/>
-                <a:ea typeface="Atkinson Hyperlegible Next" pitchFamily="34" charset="-122"/>
-                <a:cs typeface="Atkinson Hyperlegible Next" pitchFamily="34" charset="-120"/>
-              </a:rPr>
-              <a:t>Plan rozwoju, do zbudowania</a:t>
-            </a:r>
-            <a:r>
-              <a:rPr lang="en-US" sz="1600" dirty="0">
-                <a:solidFill>
-                  <a:srgbClr val="454D57"/>
-                </a:solidFill>
-                <a:latin typeface="Atkinson Hyperlegible Next" pitchFamily="34" charset="0"/>
-                <a:ea typeface="Atkinson Hyperlegible Next" pitchFamily="34" charset="-122"/>
-                <a:cs typeface="Atkinson Hyperlegible Next" pitchFamily="34" charset="-120"/>
-              </a:rPr>
-              <a:t>: role i cykle usługi</a:t>
+              <a:t>Gotowe funkcje oraz propozycja dalszego rozwoju i organizacji obsługi w ROPS</a:t>
             </a:r>
             <a:endParaRPr lang="en-US" sz="3200" dirty="0"/>
           </a:p>
@@ -9697,8 +9664,8 @@
         </p:nvSpPr>
         <p:spPr>
           <a:xfrm>
-            <a:off x="749808" y="2286000"/>
-            <a:ext cx="1245282" cy="859536"/>
+            <a:off x="749808" y="2267712"/>
+            <a:ext cx="1245282" cy="877824"/>
           </a:xfrm>
           <a:prstGeom prst="rect">
             <a:avLst/>
@@ -9753,7 +9720,7 @@
                 <a:ea typeface="Atkinson Hyperlegible Next" pitchFamily="34" charset="-122"/>
                 <a:cs typeface="Atkinson Hyperlegible Next" pitchFamily="34" charset="-120"/>
               </a:rPr>
-              <a:t>droga i podobne przypadki</a:t>
+              <a:t>rozwiązania i podobne przypadki</a:t>
             </a:r>
             <a:endParaRPr lang="en-US" sz="1150" dirty="0"/>
           </a:p>
@@ -9860,8 +9827,8 @@
         </p:nvSpPr>
         <p:spPr>
           <a:xfrm>
-            <a:off x="2324274" y="2286000"/>
-            <a:ext cx="1245282" cy="859536"/>
+            <a:off x="2324274" y="2267712"/>
+            <a:ext cx="1245282" cy="877824"/>
           </a:xfrm>
           <a:prstGeom prst="rect">
             <a:avLst/>
@@ -9916,7 +9883,7 @@
                 <a:ea typeface="Atkinson Hyperlegible Next" pitchFamily="34" charset="-122"/>
                 <a:cs typeface="Atkinson Hyperlegible Next" pitchFamily="34" charset="-120"/>
               </a:rPr>
-              <a:t>pliki i filmy w każdej drodze, edycja w panelu, trendy potrzeb</a:t>
+              <a:t>pliki i filmy dla każdego rozwiązania, edycja w panelu, trendy potrzeb</a:t>
             </a:r>
             <a:endParaRPr lang="en-US" sz="1150" dirty="0"/>
           </a:p>
@@ -10023,8 +9990,8 @@
         </p:nvSpPr>
         <p:spPr>
           <a:xfrm>
-            <a:off x="3898740" y="2286000"/>
-            <a:ext cx="1245282" cy="859536"/>
+            <a:off x="3898740" y="2267712"/>
+            <a:ext cx="1245282" cy="877824"/>
           </a:xfrm>
           <a:prstGeom prst="rect">
             <a:avLst/>
@@ -10186,8 +10153,8 @@
         </p:nvSpPr>
         <p:spPr>
           <a:xfrm>
-            <a:off x="5473207" y="2286000"/>
-            <a:ext cx="1245282" cy="859536"/>
+            <a:off x="5473207" y="2267712"/>
+            <a:ext cx="1245282" cy="877824"/>
           </a:xfrm>
           <a:prstGeom prst="rect">
             <a:avLst/>
@@ -10349,8 +10316,8 @@
         </p:nvSpPr>
         <p:spPr>
           <a:xfrm>
-            <a:off x="7047673" y="2286000"/>
-            <a:ext cx="1245282" cy="859536"/>
+            <a:off x="7047673" y="2267712"/>
+            <a:ext cx="1245282" cy="877824"/>
           </a:xfrm>
           <a:prstGeom prst="rect">
             <a:avLst/>
@@ -10512,8 +10479,8 @@
         </p:nvSpPr>
         <p:spPr>
           <a:xfrm>
-            <a:off x="8622139" y="2286000"/>
-            <a:ext cx="1245282" cy="859536"/>
+            <a:off x="8622139" y="2267712"/>
+            <a:ext cx="1245282" cy="877824"/>
           </a:xfrm>
           <a:prstGeom prst="rect">
             <a:avLst/>
@@ -10675,8 +10642,8 @@
         </p:nvSpPr>
         <p:spPr>
           <a:xfrm>
-            <a:off x="10196605" y="2286000"/>
-            <a:ext cx="1245282" cy="859536"/>
+            <a:off x="10196605" y="2267712"/>
+            <a:ext cx="1245282" cy="877824"/>
           </a:xfrm>
           <a:prstGeom prst="rect">
             <a:avLst/>
@@ -10809,7 +10776,7 @@
                 <a:ea typeface="Atkinson Hyperlegible Next" pitchFamily="34" charset="-122"/>
                 <a:cs typeface="Atkinson Hyperlegible Next" pitchFamily="34" charset="-120"/>
               </a:rPr>
-              <a:t>Trzy role w Dziale Innowacji Społecznych ROPS</a:t>
+              <a:t>Proponowane role w ROPS</a:t>
             </a:r>
             <a:endParaRPr lang="en-US" sz="1400" dirty="0"/>
           </a:p>
@@ -10824,7 +10791,7 @@
         <p:spPr>
           <a:xfrm>
             <a:off x="640080" y="3995928"/>
-            <a:ext cx="4846320" cy="402336"/>
+            <a:ext cx="4846320" cy="384048"/>
           </a:xfrm>
           <a:prstGeom prst="rect">
             <a:avLst/>
@@ -10865,7 +10832,7 @@
                 <a:ea typeface="Atkinson Hyperlegible Next" pitchFamily="34" charset="-122"/>
                 <a:cs typeface="Atkinson Hyperlegible Next" pitchFamily="34" charset="-120"/>
               </a:rPr>
-              <a:t>osoba wskazana w każdej drodze; przyjmuje prośby o kontakt</a:t>
+              <a:t>osoba wskazana w każdej mapie działania; przyjmuje prośby o kontakt</a:t>
             </a:r>
             <a:endParaRPr lang="en-US" sz="1250" dirty="0"/>
           </a:p>
@@ -10879,8 +10846,8 @@
         </p:nvSpPr>
         <p:spPr>
           <a:xfrm>
-            <a:off x="640080" y="4398264"/>
-            <a:ext cx="4846320" cy="402336"/>
+            <a:off x="640080" y="4379976"/>
+            <a:ext cx="4846320" cy="384048"/>
           </a:xfrm>
           <a:prstGeom prst="rect">
             <a:avLst/>
@@ -10935,8 +10902,8 @@
         </p:nvSpPr>
         <p:spPr>
           <a:xfrm>
-            <a:off x="640080" y="4800600"/>
-            <a:ext cx="4846320" cy="402336"/>
+            <a:off x="640080" y="4764024"/>
+            <a:ext cx="4846320" cy="384048"/>
           </a:xfrm>
           <a:prstGeom prst="rect">
             <a:avLst/>
@@ -11016,7 +10983,7 @@
                 <a:ea typeface="Atkinson Hyperlegible Next" pitchFamily="34" charset="-122"/>
                 <a:cs typeface="Atkinson Hyperlegible Next" pitchFamily="34" charset="-120"/>
               </a:rPr>
-              <a:t>Trzy cykle, które domknie usługa</a:t>
+              <a:t>Trzy procesy, które chcemy wspierać</a:t>
             </a:r>
             <a:endParaRPr lang="en-US" sz="1400" dirty="0"/>
           </a:p>
@@ -11141,7 +11108,7 @@
                 <a:ea typeface="Atkinson Hyperlegible Next" pitchFamily="34" charset="-122"/>
                 <a:cs typeface="Atkinson Hyperlegible Next" pitchFamily="34" charset="-120"/>
               </a:rPr>
-              <a:t>droga</a:t>
+              <a:t>rozwiązanie</a:t>
             </a:r>
             <a:r>
               <a:rPr lang="en-US" sz="1250" b="1" dirty="0">
@@ -11199,7 +11166,7 @@
         </p:nvSpPr>
         <p:spPr>
           <a:xfrm>
-            <a:off x="5897880" y="4416552"/>
+            <a:off x="5897880" y="4398264"/>
             <a:ext cx="292608" cy="292608"/>
           </a:xfrm>
           <a:prstGeom prst="ellipse">
@@ -11224,7 +11191,7 @@
         </p:nvSpPr>
         <p:spPr>
           <a:xfrm>
-            <a:off x="5897880" y="4416552"/>
+            <a:off x="5897880" y="4398264"/>
             <a:ext cx="292608" cy="292608"/>
           </a:xfrm>
           <a:prstGeom prst="rect">
@@ -11263,7 +11230,7 @@
         </p:nvSpPr>
         <p:spPr>
           <a:xfrm>
-            <a:off x="6309360" y="4398264"/>
+            <a:off x="6309360" y="4379976"/>
             <a:ext cx="5242255" cy="329184"/>
           </a:xfrm>
           <a:prstGeom prst="rect">
@@ -11368,7 +11335,7 @@
         </p:nvSpPr>
         <p:spPr>
           <a:xfrm>
-            <a:off x="5897880" y="4818888"/>
+            <a:off x="5897880" y="4782312"/>
             <a:ext cx="292608" cy="292608"/>
           </a:xfrm>
           <a:prstGeom prst="ellipse">
@@ -11393,7 +11360,7 @@
         </p:nvSpPr>
         <p:spPr>
           <a:xfrm>
-            <a:off x="5897880" y="4818888"/>
+            <a:off x="5897880" y="4782312"/>
             <a:ext cx="292608" cy="292608"/>
           </a:xfrm>
           <a:prstGeom prst="rect">
@@ -11432,7 +11399,7 @@
         </p:nvSpPr>
         <p:spPr>
           <a:xfrm>
-            <a:off x="6309360" y="4800600"/>
+            <a:off x="6309360" y="4764024"/>
             <a:ext cx="5242255" cy="329184"/>
           </a:xfrm>
           <a:prstGeom prst="rect">
@@ -11515,12 +11482,12 @@
         </p:nvSpPr>
         <p:spPr>
           <a:xfrm>
-            <a:off x="640080" y="5294376"/>
-            <a:ext cx="4846320" cy="1106424"/>
+            <a:off x="640080" y="5221224"/>
+            <a:ext cx="4846320" cy="1179576"/>
           </a:xfrm>
           <a:prstGeom prst="roundRect">
             <a:avLst>
-              <a:gd name="adj" fmla="val 8264"/>
+              <a:gd name="adj" fmla="val 7752"/>
             </a:avLst>
           </a:prstGeom>
           <a:solidFill>
@@ -11542,8 +11509,8 @@
         </p:nvSpPr>
         <p:spPr>
           <a:xfrm>
-            <a:off x="822960" y="5294376"/>
-            <a:ext cx="4480560" cy="1106424"/>
+            <a:off x="822960" y="5221224"/>
+            <a:ext cx="4480560" cy="1179576"/>
           </a:xfrm>
           <a:prstGeom prst="rect">
             <a:avLst/>
@@ -11578,7 +11545,7 @@
                 <a:ea typeface="Atkinson Hyperlegible Next" pitchFamily="34" charset="-122"/>
                 <a:cs typeface="Atkinson Hyperlegible Next" pitchFamily="34" charset="-120"/>
               </a:rPr>
-              <a:t>każdy wpis czeka na decyzję pracownika, odnotowaną z jego nazwiskiem; autor pomysłu widzi status i odpowiedź na stronie swojej fiszki; liczba dróg, próśb o kontakt i potrzeb oraz trendy potrzeb.</a:t>
+              <a:t>każdy wpis czeka na decyzję pracownika, zapisywaną wraz z jego nazwiskiem. Autor pomysłu widzi status i odpowiedź na stronie swojej fiszki. Panel pokazuje liczbę wygenerowanych map działania, próśb o kontakt i zgłoszonych potrzeb oraz trendy w zgłoszeniach.</a:t>
             </a:r>
             <a:endParaRPr lang="en-US" sz="1200" dirty="0"/>
           </a:p>
@@ -11592,12 +11559,12 @@
         </p:nvSpPr>
         <p:spPr>
           <a:xfrm>
-            <a:off x="5897880" y="5294376"/>
-            <a:ext cx="5653735" cy="1106424"/>
+            <a:off x="5897880" y="5221224"/>
+            <a:ext cx="5653735" cy="1179576"/>
           </a:xfrm>
           <a:prstGeom prst="roundRect">
             <a:avLst>
-              <a:gd name="adj" fmla="val 8264"/>
+              <a:gd name="adj" fmla="val 7752"/>
             </a:avLst>
           </a:prstGeom>
           <a:solidFill>
@@ -11619,8 +11586,8 @@
         </p:nvSpPr>
         <p:spPr>
           <a:xfrm>
-            <a:off x="6080760" y="5385816"/>
-            <a:ext cx="5287975" cy="274320"/>
+            <a:off x="6080760" y="5294376"/>
+            <a:ext cx="5287975" cy="384048"/>
           </a:xfrm>
           <a:prstGeom prst="rect">
             <a:avLst/>
@@ -11629,14 +11596,14 @@
           <a:ln/>
         </p:spPr>
         <p:txBody>
-          <a:bodyPr wrap="square" lIns="0" tIns="0" rIns="0" bIns="0" rtlCol="0" anchor="ctr"/>
+          <a:bodyPr wrap="square" lIns="0" tIns="0" rIns="0" bIns="0" rtlCol="0" anchor="t"/>
           <a:lstStyle/>
           <a:p>
             <a:pPr marL="0" indent="0">
               <a:buNone/>
             </a:pPr>
             <a:r>
-              <a:rPr lang="en-US" sz="1300" b="1" dirty="0">
+              <a:rPr lang="en-US" sz="1200" b="1" dirty="0">
                 <a:solidFill>
                   <a:srgbClr val="1A4B8C"/>
                 </a:solidFill>
@@ -11644,9 +11611,26 @@
                 <a:ea typeface="Atkinson Hyperlegible Next" pitchFamily="34" charset="-122"/>
                 <a:cs typeface="Atkinson Hyperlegible Next" pitchFamily="34" charset="-120"/>
               </a:rPr>
-              <a:t>Około 55 USD miesięcznie plus 8 USD za 1000 dróg</a:t>
-            </a:r>
-            <a:endParaRPr lang="en-US" sz="1300" dirty="0"/>
+              <a:t>Szacunkowy koszt: 55 USD miesięcznie</a:t>
+            </a:r>
+            <a:endParaRPr lang="en-US" sz="1200" dirty="0"/>
+          </a:p>
+          <a:p>
+            <a:pPr marL="0" indent="0">
+              <a:buNone/>
+            </a:pPr>
+            <a:r>
+              <a:rPr lang="en-US" sz="1200" b="1" dirty="0">
+                <a:solidFill>
+                  <a:srgbClr val="1A4B8C"/>
+                </a:solidFill>
+                <a:latin typeface="Atkinson Hyperlegible Next" pitchFamily="34" charset="0"/>
+                <a:ea typeface="Atkinson Hyperlegible Next" pitchFamily="34" charset="-122"/>
+                <a:cs typeface="Atkinson Hyperlegible Next" pitchFamily="34" charset="-120"/>
+              </a:rPr>
+              <a:t>+ 8 USD za każde 1000 wygenerowanych map działania</a:t>
+            </a:r>
+            <a:endParaRPr lang="en-US" sz="1200" dirty="0"/>
           </a:p>
         </p:txBody>
       </p:sp>
@@ -11658,8 +11642,8 @@
         </p:nvSpPr>
         <p:spPr>
           <a:xfrm>
-            <a:off x="6080760" y="5660136"/>
-            <a:ext cx="4282135" cy="164592"/>
+            <a:off x="6080760" y="5696712"/>
+            <a:ext cx="4282135" cy="160020"/>
           </a:xfrm>
           <a:prstGeom prst="rect">
             <a:avLst/>
@@ -11708,8 +11692,8 @@
         </p:nvSpPr>
         <p:spPr>
           <a:xfrm>
-            <a:off x="10317175" y="5660136"/>
-            <a:ext cx="1051560" cy="164592"/>
+            <a:off x="10317175" y="5696712"/>
+            <a:ext cx="1051560" cy="160020"/>
           </a:xfrm>
           <a:prstGeom prst="rect">
             <a:avLst/>
@@ -11747,8 +11731,8 @@
         </p:nvSpPr>
         <p:spPr>
           <a:xfrm>
-            <a:off x="6080760" y="5824728"/>
-            <a:ext cx="4282135" cy="164592"/>
+            <a:off x="6080760" y="5856732"/>
+            <a:ext cx="4282135" cy="160020"/>
           </a:xfrm>
           <a:prstGeom prst="rect">
             <a:avLst/>
@@ -11797,8 +11781,8 @@
         </p:nvSpPr>
         <p:spPr>
           <a:xfrm>
-            <a:off x="10317175" y="5824728"/>
-            <a:ext cx="1051560" cy="164592"/>
+            <a:off x="10317175" y="5856732"/>
+            <a:ext cx="1051560" cy="160020"/>
           </a:xfrm>
           <a:prstGeom prst="rect">
             <a:avLst/>
@@ -11836,8 +11820,8 @@
         </p:nvSpPr>
         <p:spPr>
           <a:xfrm>
-            <a:off x="6080760" y="5989320"/>
-            <a:ext cx="4282135" cy="164592"/>
+            <a:off x="6080760" y="6016752"/>
+            <a:ext cx="4282135" cy="160020"/>
           </a:xfrm>
           <a:prstGeom prst="rect">
             <a:avLst/>
@@ -11886,8 +11870,8 @@
         </p:nvSpPr>
         <p:spPr>
           <a:xfrm>
-            <a:off x="10317175" y="5989320"/>
-            <a:ext cx="1051560" cy="164592"/>
+            <a:off x="10317175" y="6016752"/>
+            <a:ext cx="1051560" cy="160020"/>
           </a:xfrm>
           <a:prstGeom prst="rect">
             <a:avLst/>
@@ -11925,8 +11909,8 @@
         </p:nvSpPr>
         <p:spPr>
           <a:xfrm>
-            <a:off x="6080760" y="6153912"/>
-            <a:ext cx="4282135" cy="164592"/>
+            <a:off x="6080760" y="6176772"/>
+            <a:ext cx="4282135" cy="160020"/>
           </a:xfrm>
           <a:prstGeom prst="rect">
             <a:avLst/>
@@ -11950,7 +11934,7 @@
                 <a:ea typeface="Atkinson Hyperlegible Next" pitchFamily="34" charset="-122"/>
                 <a:cs typeface="Atkinson Hyperlegible Next" pitchFamily="34" charset="-120"/>
               </a:rPr>
-              <a:t>Droga  </a:t>
+              <a:t>Mapa działania  </a:t>
             </a:r>
             <a:r>
               <a:rPr lang="en-US" sz="1050" dirty="0">
@@ -11975,8 +11959,8 @@
         </p:nvSpPr>
         <p:spPr>
           <a:xfrm>
-            <a:off x="10317175" y="6153912"/>
-            <a:ext cx="1051560" cy="164592"/>
+            <a:off x="10317175" y="6176772"/>
+            <a:ext cx="1051560" cy="160020"/>
           </a:xfrm>
           <a:prstGeom prst="rect">
             <a:avLst/>
@@ -12131,7 +12115,7 @@
                 <a:ea typeface="Atkinson Hyperlegible Next" pitchFamily="34" charset="-122"/>
                 <a:cs typeface="Atkinson Hyperlegible Next" pitchFamily="34" charset="-120"/>
               </a:rPr>
-              <a:t>Dostępność ponad wymogi prawa; każdy fakt ma link do otwartego źródła</a:t>
+              <a:t>Dostępność wykraczająca poza wymogi prawa; informacje oparte na źródłach</a:t>
             </a:r>
             <a:endParaRPr lang="en-US" sz="3200" dirty="0"/>
           </a:p>
